--- a/RANPilotAi_Graduation_Project_BOOK/presentation.pptx
+++ b/RANPilotAi_Graduation_Project_BOOK/presentation.pptx
@@ -1553,6 +1553,13 @@
         </dgm:presLayoutVars>
       </dgm:prSet>
       <dgm:spPr/>
+      <dgm:t>
+        <a:bodyPr/>
+        <a:lstStyle/>
+        <a:p>
+          <a:endParaRPr lang="en-US"/>
+        </a:p>
+      </dgm:t>
     </dgm:pt>
     <dgm:pt modelId="{93D76702-C2A8-4552-960B-C2CCD4981C99}" type="pres">
       <dgm:prSet presAssocID="{DE0D542D-D583-46F8-AF81-5963C844620D}" presName="linNode" presStyleCnt="0"/>
@@ -1636,6 +1643,13 @@
         </dgm:presLayoutVars>
       </dgm:prSet>
       <dgm:spPr/>
+      <dgm:t>
+        <a:bodyPr/>
+        <a:lstStyle/>
+        <a:p>
+          <a:endParaRPr lang="en-US"/>
+        </a:p>
+      </dgm:t>
     </dgm:pt>
     <dgm:pt modelId="{B220DA74-EC66-489D-8246-311B923B97F4}" type="pres">
       <dgm:prSet presAssocID="{8D2AE69D-74F5-4BBB-BCDD-A101C39C3368}" presName="spV" presStyleCnt="0"/>
@@ -1676,6 +1690,13 @@
         </dgm:presLayoutVars>
       </dgm:prSet>
       <dgm:spPr/>
+      <dgm:t>
+        <a:bodyPr/>
+        <a:lstStyle/>
+        <a:p>
+          <a:endParaRPr lang="en-US"/>
+        </a:p>
+      </dgm:t>
     </dgm:pt>
     <dgm:pt modelId="{61C6EDBC-202D-45B6-90DB-576D020436A6}" type="pres">
       <dgm:prSet presAssocID="{78A00466-42E4-4EC0-9E29-CCB271DF42F4}" presName="spV" presStyleCnt="0"/>
@@ -1857,48 +1878,55 @@
         </dgm:presLayoutVars>
       </dgm:prSet>
       <dgm:spPr/>
+      <dgm:t>
+        <a:bodyPr/>
+        <a:lstStyle/>
+        <a:p>
+          <a:endParaRPr lang="en-US"/>
+        </a:p>
+      </dgm:t>
     </dgm:pt>
   </dgm:ptLst>
   <dgm:cxnLst>
-    <dgm:cxn modelId="{91C5D652-BEDF-41BC-8F3B-05BE92152759}" type="presOf" srcId="{96D22CE3-E99B-43B7-A890-8B3328F8E2E0}" destId="{824F19CC-5252-49CF-BB92-9DDE5C78A83D}" srcOrd="0" destOrd="1" presId="urn:diagrams.loki3.com/BracketList"/>
+    <dgm:cxn modelId="{51656E9E-C438-4269-8BAA-86F019163B07}" srcId="{D4570B03-06D1-496E-940D-E834C1A39D15}" destId="{DE0D542D-D583-46F8-AF81-5963C844620D}" srcOrd="0" destOrd="0" parTransId="{C8EF2553-001E-4794-9586-0CDE54007ADD}" sibTransId="{FB29F8EB-EE92-45C5-8BCF-B06C4D9BC7DC}"/>
     <dgm:cxn modelId="{E4C5A6E7-BD51-49BE-B462-C60D6912FD6F}" type="presOf" srcId="{B6EA1160-7F8A-4126-8376-C44E264E6EA1}" destId="{4D2CC661-966E-4BA4-843D-A1C1153050D7}" srcOrd="0" destOrd="0" presId="urn:diagrams.loki3.com/BracketList"/>
-    <dgm:cxn modelId="{F0A4654E-4223-438B-A830-452AC96E48E2}" type="presOf" srcId="{20D280F0-91E7-42CA-9A03-571050C0CB16}" destId="{051F707C-CB75-4D21-8C13-082BD2FF2D14}" srcOrd="0" destOrd="1" presId="urn:diagrams.loki3.com/BracketList"/>
+    <dgm:cxn modelId="{38475AF4-CAB8-417F-B300-5B7AFA14E6E2}" srcId="{D4570B03-06D1-496E-940D-E834C1A39D15}" destId="{CFC255E3-F313-4F68-A8BE-AA9A0E7B2920}" srcOrd="4" destOrd="0" parTransId="{80D5B58A-7533-437A-907C-7A96D4C934CD}" sibTransId="{AF699248-E40C-4F45-8095-1040C5E7766E}"/>
     <dgm:cxn modelId="{9CA15018-9C07-46DF-90DA-8AF065446E5E}" type="presOf" srcId="{39F54975-3C18-4047-B841-1E5ED79DA055}" destId="{D1E7592D-5481-4E23-BBA9-37FC11FDB1FC}" srcOrd="0" destOrd="0" presId="urn:diagrams.loki3.com/BracketList"/>
+    <dgm:cxn modelId="{56A8B0BB-481F-4E64-8165-87BB69F9A22B}" srcId="{D4570B03-06D1-496E-940D-E834C1A39D15}" destId="{67AAB135-0D51-4F78-B9C5-116756FDD4FD}" srcOrd="6" destOrd="0" parTransId="{0764D504-CB07-4071-9A74-C38D1F4EC718}" sibTransId="{AE1B9AE7-854E-4E8A-9B49-3CA8614B49B7}"/>
+    <dgm:cxn modelId="{29685408-45E5-4A09-A94C-6B5811184DDF}" type="presOf" srcId="{9357E48B-E7E0-4CA0-9ABC-FF0F47D16FFF}" destId="{2E54DBD1-1915-453C-B205-7D57F6596F56}" srcOrd="0" destOrd="0" presId="urn:diagrams.loki3.com/BracketList"/>
+    <dgm:cxn modelId="{AD4ED5EC-FC39-42A5-BC4B-7545101D5B7F}" type="presOf" srcId="{02D6A755-2659-4714-A019-A60BD2DBF44D}" destId="{AC2B96A3-ADBA-40C0-B958-7DDD08E7D4E8}" srcOrd="0" destOrd="0" presId="urn:diagrams.loki3.com/BracketList"/>
     <dgm:cxn modelId="{F6E88605-19FE-4705-B7C4-F462D8AB4643}" srcId="{67AAB135-0D51-4F78-B9C5-116756FDD4FD}" destId="{B8004FBE-713E-4F15-8885-85B9EA6E9A18}" srcOrd="0" destOrd="0" parTransId="{8A89D8F8-211F-464D-AF74-1F8DE05387B4}" sibTransId="{CA806B09-F251-46F6-807A-781E4FCD5974}"/>
-    <dgm:cxn modelId="{38475AF4-CAB8-417F-B300-5B7AFA14E6E2}" srcId="{D4570B03-06D1-496E-940D-E834C1A39D15}" destId="{CFC255E3-F313-4F68-A8BE-AA9A0E7B2920}" srcOrd="4" destOrd="0" parTransId="{80D5B58A-7533-437A-907C-7A96D4C934CD}" sibTransId="{AF699248-E40C-4F45-8095-1040C5E7766E}"/>
-    <dgm:cxn modelId="{E5D3C6D9-77FA-4A53-B8D1-9AFC12914D57}" srcId="{D4570B03-06D1-496E-940D-E834C1A39D15}" destId="{E5D331DA-30E0-4D9E-AF95-9BED1C00B881}" srcOrd="3" destOrd="0" parTransId="{0EEC3D0D-1968-4D98-B1E4-5BE2E7C9D046}" sibTransId="{0D12E0D9-447A-4318-A2D1-567184552CEB}"/>
-    <dgm:cxn modelId="{56A8B0BB-481F-4E64-8165-87BB69F9A22B}" srcId="{D4570B03-06D1-496E-940D-E834C1A39D15}" destId="{67AAB135-0D51-4F78-B9C5-116756FDD4FD}" srcOrd="6" destOrd="0" parTransId="{0764D504-CB07-4071-9A74-C38D1F4EC718}" sibTransId="{AE1B9AE7-854E-4E8A-9B49-3CA8614B49B7}"/>
-    <dgm:cxn modelId="{79185F44-6415-43D5-957F-294E77A373C5}" type="presOf" srcId="{F73F6B60-F387-4B00-AF21-983EFA908F3B}" destId="{824F19CC-5252-49CF-BB92-9DDE5C78A83D}" srcOrd="0" destOrd="0" presId="urn:diagrams.loki3.com/BracketList"/>
     <dgm:cxn modelId="{E9038612-49E6-4585-9419-CEFEF22E5596}" srcId="{D4570B03-06D1-496E-940D-E834C1A39D15}" destId="{02D6A755-2659-4714-A019-A60BD2DBF44D}" srcOrd="1" destOrd="0" parTransId="{A11D1553-18D4-4D46-8E28-8FA6B27EC28B}" sibTransId="{8D2AE69D-74F5-4BBB-BCDD-A101C39C3368}"/>
-    <dgm:cxn modelId="{48925DAF-9D7D-48B1-915F-91E9E63EDFE3}" type="presOf" srcId="{016B6379-197D-4014-BBB5-7272361FA5ED}" destId="{A85E5853-DBE3-4294-93EB-D0C052772C14}" srcOrd="0" destOrd="0" presId="urn:diagrams.loki3.com/BracketList"/>
-    <dgm:cxn modelId="{8FE8D121-64DD-4D0A-B1E3-B860DA31B65D}" type="presOf" srcId="{67AAB135-0D51-4F78-B9C5-116756FDD4FD}" destId="{E4B80767-5737-4482-A6AF-D1C6CDF122DC}" srcOrd="0" destOrd="0" presId="urn:diagrams.loki3.com/BracketList"/>
-    <dgm:cxn modelId="{CBDABCD5-9B7D-42F1-9295-22DC73E2FDB0}" srcId="{67AAB135-0D51-4F78-B9C5-116756FDD4FD}" destId="{20D280F0-91E7-42CA-9A03-571050C0CB16}" srcOrd="1" destOrd="0" parTransId="{731ED404-621E-4ED2-85AD-DF4BDFC2D3BD}" sibTransId="{C2E8C2C7-E4B0-46E1-AD5C-037C095ABDF0}"/>
-    <dgm:cxn modelId="{C2E89A0B-866F-45C1-9E43-09B489A3A4E8}" srcId="{D4570B03-06D1-496E-940D-E834C1A39D15}" destId="{39F54975-3C18-4047-B841-1E5ED79DA055}" srcOrd="5" destOrd="0" parTransId="{CEC1D58E-1AB3-4E72-A00C-84BAD892CD40}" sibTransId="{5DDE273F-5EAF-4DCF-9576-3CC5E69C990E}"/>
-    <dgm:cxn modelId="{A96622E3-BC84-4F67-BC21-F7E183C9238B}" srcId="{CFC255E3-F313-4F68-A8BE-AA9A0E7B2920}" destId="{EF4D839F-1954-4FEA-BC1D-6A6FE5E5C4E4}" srcOrd="1" destOrd="0" parTransId="{ABA9D00D-FA58-4C5C-A960-9BF9EC11A01B}" sibTransId="{BFF19C4C-6C38-488B-B9A1-292A32DD8C60}"/>
-    <dgm:cxn modelId="{175A0D4F-E174-43F2-8F85-B67FCA281E1A}" srcId="{CFC255E3-F313-4F68-A8BE-AA9A0E7B2920}" destId="{DFD7F550-E826-4DB8-852E-70462049B908}" srcOrd="0" destOrd="0" parTransId="{F769BD8D-0698-445D-897D-E2A2FA3FF3AC}" sibTransId="{DD95DAB0-10DD-49AD-A13D-0FF303E43A7B}"/>
-    <dgm:cxn modelId="{CED7CC02-254C-4CB5-AA30-2B25713B0DE9}" srcId="{02D6A755-2659-4714-A019-A60BD2DBF44D}" destId="{D19DA2C2-DBED-4C48-A059-92B1F02E952E}" srcOrd="1" destOrd="0" parTransId="{2411435A-2DED-45FE-BAF2-EA5E2BAB2221}" sibTransId="{8B1C7915-ACF1-48A9-8CBC-03BA5CAA0EC8}"/>
     <dgm:cxn modelId="{4BE1A33F-8709-45AC-9866-A77B712F0F4B}" srcId="{DE0D542D-D583-46F8-AF81-5963C844620D}" destId="{D12CF5CC-B0AB-4657-8BC8-05A2DA36F5F4}" srcOrd="0" destOrd="0" parTransId="{6A3B3684-783F-4816-9363-23FED4B817AB}" sibTransId="{443C1D04-5678-4F60-8A9D-9083BCA3E12E}"/>
     <dgm:cxn modelId="{8CD274B0-EC7A-409C-AB2D-56C7534B144B}" type="presOf" srcId="{E5D331DA-30E0-4D9E-AF95-9BED1C00B881}" destId="{51EE0D49-AD04-4513-87AC-4148C700764C}" srcOrd="0" destOrd="0" presId="urn:diagrams.loki3.com/BracketList"/>
     <dgm:cxn modelId="{BEBC4F50-0997-43E0-A4F6-3DCF33909B4C}" srcId="{D4570B03-06D1-496E-940D-E834C1A39D15}" destId="{B6EA1160-7F8A-4126-8376-C44E264E6EA1}" srcOrd="2" destOrd="0" parTransId="{C4A29E89-B10D-4EE9-817D-665085164D56}" sibTransId="{78A00466-42E4-4EC0-9E29-CCB271DF42F4}"/>
-    <dgm:cxn modelId="{51656E9E-C438-4269-8BAA-86F019163B07}" srcId="{D4570B03-06D1-496E-940D-E834C1A39D15}" destId="{DE0D542D-D583-46F8-AF81-5963C844620D}" srcOrd="0" destOrd="0" parTransId="{C8EF2553-001E-4794-9586-0CDE54007ADD}" sibTransId="{FB29F8EB-EE92-45C5-8BCF-B06C4D9BC7DC}"/>
-    <dgm:cxn modelId="{D60FD02C-D5E8-494B-B039-6EEC522D73AE}" type="presOf" srcId="{B8004FBE-713E-4F15-8885-85B9EA6E9A18}" destId="{051F707C-CB75-4D21-8C13-082BD2FF2D14}" srcOrd="0" destOrd="0" presId="urn:diagrams.loki3.com/BracketList"/>
+    <dgm:cxn modelId="{E148A8F3-3E98-4E38-A6A3-BF7236721D64}" type="presOf" srcId="{EF4D839F-1954-4FEA-BC1D-6A6FE5E5C4E4}" destId="{A5768B98-F77A-4129-ACD5-EDDCB6DCE048}" srcOrd="0" destOrd="1" presId="urn:diagrams.loki3.com/BracketList"/>
+    <dgm:cxn modelId="{BB10DE44-0E64-4D65-BC2C-C5E23F3B4B7E}" type="presOf" srcId="{B410AD1F-A2B3-49B3-8BE2-CA1B2963672B}" destId="{16433D64-952C-4A31-983D-1017B3C32C47}" srcOrd="0" destOrd="1" presId="urn:diagrams.loki3.com/BracketList"/>
+    <dgm:cxn modelId="{C8A7134D-29D6-4AE5-AFFB-1706BB271EEA}" type="presOf" srcId="{DE0D542D-D583-46F8-AF81-5963C844620D}" destId="{EEF1E03F-C7C5-4626-9C13-2E78DD1D4267}" srcOrd="0" destOrd="0" presId="urn:diagrams.loki3.com/BracketList"/>
+    <dgm:cxn modelId="{79185F44-6415-43D5-957F-294E77A373C5}" type="presOf" srcId="{F73F6B60-F387-4B00-AF21-983EFA908F3B}" destId="{824F19CC-5252-49CF-BB92-9DDE5C78A83D}" srcOrd="0" destOrd="0" presId="urn:diagrams.loki3.com/BracketList"/>
+    <dgm:cxn modelId="{CBDABCD5-9B7D-42F1-9295-22DC73E2FDB0}" srcId="{67AAB135-0D51-4F78-B9C5-116756FDD4FD}" destId="{20D280F0-91E7-42CA-9A03-571050C0CB16}" srcOrd="1" destOrd="0" parTransId="{731ED404-621E-4ED2-85AD-DF4BDFC2D3BD}" sibTransId="{C2E8C2C7-E4B0-46E1-AD5C-037C095ABDF0}"/>
     <dgm:cxn modelId="{AEBFEC2D-8855-4E2E-BEE0-C2AC6A2AD198}" type="presOf" srcId="{D12CF5CC-B0AB-4657-8BC8-05A2DA36F5F4}" destId="{16433D64-952C-4A31-983D-1017B3C32C47}" srcOrd="0" destOrd="0" presId="urn:diagrams.loki3.com/BracketList"/>
-    <dgm:cxn modelId="{06F5ADC8-64CC-416E-A504-58BD95BE6371}" type="presOf" srcId="{D19DA2C2-DBED-4C48-A059-92B1F02E952E}" destId="{2E54DBD1-1915-453C-B205-7D57F6596F56}" srcOrd="0" destOrd="1" presId="urn:diagrams.loki3.com/BracketList"/>
+    <dgm:cxn modelId="{F6B286A8-B838-48A2-8EA3-C6AA8D365595}" srcId="{E5D331DA-30E0-4D9E-AF95-9BED1C00B881}" destId="{F73F6B60-F387-4B00-AF21-983EFA908F3B}" srcOrd="0" destOrd="0" parTransId="{66BC6DEB-3BCA-40D4-BBDB-03469584A26B}" sibTransId="{F9A40652-90E5-4569-99B1-02A0DB0C497F}"/>
+    <dgm:cxn modelId="{175A0D4F-E174-43F2-8F85-B67FCA281E1A}" srcId="{CFC255E3-F313-4F68-A8BE-AA9A0E7B2920}" destId="{DFD7F550-E826-4DB8-852E-70462049B908}" srcOrd="0" destOrd="0" parTransId="{F769BD8D-0698-445D-897D-E2A2FA3FF3AC}" sibTransId="{DD95DAB0-10DD-49AD-A13D-0FF303E43A7B}"/>
+    <dgm:cxn modelId="{91C5D652-BEDF-41BC-8F3B-05BE92152759}" type="presOf" srcId="{96D22CE3-E99B-43B7-A890-8B3328F8E2E0}" destId="{824F19CC-5252-49CF-BB92-9DDE5C78A83D}" srcOrd="0" destOrd="1" presId="urn:diagrams.loki3.com/BracketList"/>
+    <dgm:cxn modelId="{81E2E479-FF41-415B-B38F-7F0297466D91}" type="presOf" srcId="{D4570B03-06D1-496E-940D-E834C1A39D15}" destId="{49162F80-9F02-44A6-B8BB-9C145D32E9A6}" srcOrd="0" destOrd="0" presId="urn:diagrams.loki3.com/BracketList"/>
+    <dgm:cxn modelId="{48925DAF-9D7D-48B1-915F-91E9E63EDFE3}" type="presOf" srcId="{016B6379-197D-4014-BBB5-7272361FA5ED}" destId="{A85E5853-DBE3-4294-93EB-D0C052772C14}" srcOrd="0" destOrd="0" presId="urn:diagrams.loki3.com/BracketList"/>
     <dgm:cxn modelId="{84B90654-B9B2-4F49-B93C-7AB9B1513360}" type="presOf" srcId="{CFC255E3-F313-4F68-A8BE-AA9A0E7B2920}" destId="{1988FC77-CF36-4CB7-8B74-1CB63D2CB4BE}" srcOrd="0" destOrd="0" presId="urn:diagrams.loki3.com/BracketList"/>
-    <dgm:cxn modelId="{253CA61A-3D10-40C6-A6A5-EB9F6A55F5B0}" type="presOf" srcId="{E382FAAA-4FB2-477A-98B3-A2A120BAC348}" destId="{68C4F1F0-2F56-483B-8104-BEA79A7538A1}" srcOrd="0" destOrd="0" presId="urn:diagrams.loki3.com/BracketList"/>
-    <dgm:cxn modelId="{BB10DE44-0E64-4D65-BC2C-C5E23F3B4B7E}" type="presOf" srcId="{B410AD1F-A2B3-49B3-8BE2-CA1B2963672B}" destId="{16433D64-952C-4A31-983D-1017B3C32C47}" srcOrd="0" destOrd="1" presId="urn:diagrams.loki3.com/BracketList"/>
-    <dgm:cxn modelId="{E8C2E0BE-83B9-42FF-9F2F-0017F48DCA71}" srcId="{DE0D542D-D583-46F8-AF81-5963C844620D}" destId="{B410AD1F-A2B3-49B3-8BE2-CA1B2963672B}" srcOrd="1" destOrd="0" parTransId="{703C4DDF-2819-43E6-95F5-DEA0F213ACDA}" sibTransId="{CCBF6D02-9F0B-4236-9549-FD1FC07A5984}"/>
-    <dgm:cxn modelId="{29685408-45E5-4A09-A94C-6B5811184DDF}" type="presOf" srcId="{9357E48B-E7E0-4CA0-9ABC-FF0F47D16FFF}" destId="{2E54DBD1-1915-453C-B205-7D57F6596F56}" srcOrd="0" destOrd="0" presId="urn:diagrams.loki3.com/BracketList"/>
-    <dgm:cxn modelId="{81E2E479-FF41-415B-B38F-7F0297466D91}" type="presOf" srcId="{D4570B03-06D1-496E-940D-E834C1A39D15}" destId="{49162F80-9F02-44A6-B8BB-9C145D32E9A6}" srcOrd="0" destOrd="0" presId="urn:diagrams.loki3.com/BracketList"/>
-    <dgm:cxn modelId="{3456690B-B173-48B8-86F7-97252F1597D5}" srcId="{E5D331DA-30E0-4D9E-AF95-9BED1C00B881}" destId="{96D22CE3-E99B-43B7-A890-8B3328F8E2E0}" srcOrd="1" destOrd="0" parTransId="{3DA8366F-C933-44CA-ADDF-18F73189EA6A}" sibTransId="{A42478D0-807D-4203-8347-8182C244F189}"/>
-    <dgm:cxn modelId="{F6B286A8-B838-48A2-8EA3-C6AA8D365595}" srcId="{E5D331DA-30E0-4D9E-AF95-9BED1C00B881}" destId="{F73F6B60-F387-4B00-AF21-983EFA908F3B}" srcOrd="0" destOrd="0" parTransId="{66BC6DEB-3BCA-40D4-BBDB-03469584A26B}" sibTransId="{F9A40652-90E5-4569-99B1-02A0DB0C497F}"/>
-    <dgm:cxn modelId="{86FD203E-7063-4D5F-A35C-3598D65669ED}" srcId="{02D6A755-2659-4714-A019-A60BD2DBF44D}" destId="{9357E48B-E7E0-4CA0-9ABC-FF0F47D16FFF}" srcOrd="0" destOrd="0" parTransId="{7581C13E-E6C9-4383-A784-20E62B70B3DC}" sibTransId="{F31CFC71-E692-4437-B605-955BBEFE5B3C}"/>
-    <dgm:cxn modelId="{E148A8F3-3E98-4E38-A6A3-BF7236721D64}" type="presOf" srcId="{EF4D839F-1954-4FEA-BC1D-6A6FE5E5C4E4}" destId="{A5768B98-F77A-4129-ACD5-EDDCB6DCE048}" srcOrd="0" destOrd="1" presId="urn:diagrams.loki3.com/BracketList"/>
-    <dgm:cxn modelId="{AD4ED5EC-FC39-42A5-BC4B-7545101D5B7F}" type="presOf" srcId="{02D6A755-2659-4714-A019-A60BD2DBF44D}" destId="{AC2B96A3-ADBA-40C0-B958-7DDD08E7D4E8}" srcOrd="0" destOrd="0" presId="urn:diagrams.loki3.com/BracketList"/>
-    <dgm:cxn modelId="{99E6DEB9-6BD5-4EFC-87D0-EC8AA52BEB00}" srcId="{39F54975-3C18-4047-B841-1E5ED79DA055}" destId="{E382FAAA-4FB2-477A-98B3-A2A120BAC348}" srcOrd="0" destOrd="0" parTransId="{A26A0720-9BE4-44E9-89C9-7F9980634043}" sibTransId="{92B8D365-A3DA-4EE7-BA70-DC7D10A7653D}"/>
     <dgm:cxn modelId="{A9446154-ADD1-42B0-A05A-FEA847BCBE80}" type="presOf" srcId="{DFD7F550-E826-4DB8-852E-70462049B908}" destId="{A5768B98-F77A-4129-ACD5-EDDCB6DCE048}" srcOrd="0" destOrd="0" presId="urn:diagrams.loki3.com/BracketList"/>
     <dgm:cxn modelId="{35C42657-DB4D-4E59-9BB6-9C2A11020C13}" srcId="{B6EA1160-7F8A-4126-8376-C44E264E6EA1}" destId="{016B6379-197D-4014-BBB5-7272361FA5ED}" srcOrd="0" destOrd="0" parTransId="{8D526268-2F08-4285-9EEA-ACD0B693F879}" sibTransId="{791199FC-FDB9-4DE9-A0A6-52879619A3C8}"/>
-    <dgm:cxn modelId="{C8A7134D-29D6-4AE5-AFFB-1706BB271EEA}" type="presOf" srcId="{DE0D542D-D583-46F8-AF81-5963C844620D}" destId="{EEF1E03F-C7C5-4626-9C13-2E78DD1D4267}" srcOrd="0" destOrd="0" presId="urn:diagrams.loki3.com/BracketList"/>
+    <dgm:cxn modelId="{06F5ADC8-64CC-416E-A504-58BD95BE6371}" type="presOf" srcId="{D19DA2C2-DBED-4C48-A059-92B1F02E952E}" destId="{2E54DBD1-1915-453C-B205-7D57F6596F56}" srcOrd="0" destOrd="1" presId="urn:diagrams.loki3.com/BracketList"/>
+    <dgm:cxn modelId="{3456690B-B173-48B8-86F7-97252F1597D5}" srcId="{E5D331DA-30E0-4D9E-AF95-9BED1C00B881}" destId="{96D22CE3-E99B-43B7-A890-8B3328F8E2E0}" srcOrd="1" destOrd="0" parTransId="{3DA8366F-C933-44CA-ADDF-18F73189EA6A}" sibTransId="{A42478D0-807D-4203-8347-8182C244F189}"/>
+    <dgm:cxn modelId="{8FE8D121-64DD-4D0A-B1E3-B860DA31B65D}" type="presOf" srcId="{67AAB135-0D51-4F78-B9C5-116756FDD4FD}" destId="{E4B80767-5737-4482-A6AF-D1C6CDF122DC}" srcOrd="0" destOrd="0" presId="urn:diagrams.loki3.com/BracketList"/>
+    <dgm:cxn modelId="{C2E89A0B-866F-45C1-9E43-09B489A3A4E8}" srcId="{D4570B03-06D1-496E-940D-E834C1A39D15}" destId="{39F54975-3C18-4047-B841-1E5ED79DA055}" srcOrd="5" destOrd="0" parTransId="{CEC1D58E-1AB3-4E72-A00C-84BAD892CD40}" sibTransId="{5DDE273F-5EAF-4DCF-9576-3CC5E69C990E}"/>
+    <dgm:cxn modelId="{86FD203E-7063-4D5F-A35C-3598D65669ED}" srcId="{02D6A755-2659-4714-A019-A60BD2DBF44D}" destId="{9357E48B-E7E0-4CA0-9ABC-FF0F47D16FFF}" srcOrd="0" destOrd="0" parTransId="{7581C13E-E6C9-4383-A784-20E62B70B3DC}" sibTransId="{F31CFC71-E692-4437-B605-955BBEFE5B3C}"/>
+    <dgm:cxn modelId="{CED7CC02-254C-4CB5-AA30-2B25713B0DE9}" srcId="{02D6A755-2659-4714-A019-A60BD2DBF44D}" destId="{D19DA2C2-DBED-4C48-A059-92B1F02E952E}" srcOrd="1" destOrd="0" parTransId="{2411435A-2DED-45FE-BAF2-EA5E2BAB2221}" sibTransId="{8B1C7915-ACF1-48A9-8CBC-03BA5CAA0EC8}"/>
+    <dgm:cxn modelId="{D60FD02C-D5E8-494B-B039-6EEC522D73AE}" type="presOf" srcId="{B8004FBE-713E-4F15-8885-85B9EA6E9A18}" destId="{051F707C-CB75-4D21-8C13-082BD2FF2D14}" srcOrd="0" destOrd="0" presId="urn:diagrams.loki3.com/BracketList"/>
+    <dgm:cxn modelId="{F0A4654E-4223-438B-A830-452AC96E48E2}" type="presOf" srcId="{20D280F0-91E7-42CA-9A03-571050C0CB16}" destId="{051F707C-CB75-4D21-8C13-082BD2FF2D14}" srcOrd="0" destOrd="1" presId="urn:diagrams.loki3.com/BracketList"/>
+    <dgm:cxn modelId="{E5D3C6D9-77FA-4A53-B8D1-9AFC12914D57}" srcId="{D4570B03-06D1-496E-940D-E834C1A39D15}" destId="{E5D331DA-30E0-4D9E-AF95-9BED1C00B881}" srcOrd="3" destOrd="0" parTransId="{0EEC3D0D-1968-4D98-B1E4-5BE2E7C9D046}" sibTransId="{0D12E0D9-447A-4318-A2D1-567184552CEB}"/>
+    <dgm:cxn modelId="{253CA61A-3D10-40C6-A6A5-EB9F6A55F5B0}" type="presOf" srcId="{E382FAAA-4FB2-477A-98B3-A2A120BAC348}" destId="{68C4F1F0-2F56-483B-8104-BEA79A7538A1}" srcOrd="0" destOrd="0" presId="urn:diagrams.loki3.com/BracketList"/>
+    <dgm:cxn modelId="{E8C2E0BE-83B9-42FF-9F2F-0017F48DCA71}" srcId="{DE0D542D-D583-46F8-AF81-5963C844620D}" destId="{B410AD1F-A2B3-49B3-8BE2-CA1B2963672B}" srcOrd="1" destOrd="0" parTransId="{703C4DDF-2819-43E6-95F5-DEA0F213ACDA}" sibTransId="{CCBF6D02-9F0B-4236-9549-FD1FC07A5984}"/>
+    <dgm:cxn modelId="{A96622E3-BC84-4F67-BC21-F7E183C9238B}" srcId="{CFC255E3-F313-4F68-A8BE-AA9A0E7B2920}" destId="{EF4D839F-1954-4FEA-BC1D-6A6FE5E5C4E4}" srcOrd="1" destOrd="0" parTransId="{ABA9D00D-FA58-4C5C-A960-9BF9EC11A01B}" sibTransId="{BFF19C4C-6C38-488B-B9A1-292A32DD8C60}"/>
+    <dgm:cxn modelId="{99E6DEB9-6BD5-4EFC-87D0-EC8AA52BEB00}" srcId="{39F54975-3C18-4047-B841-1E5ED79DA055}" destId="{E382FAAA-4FB2-477A-98B3-A2A120BAC348}" srcOrd="0" destOrd="0" parTransId="{A26A0720-9BE4-44E9-89C9-7F9980634043}" sibTransId="{92B8D365-A3DA-4EE7-BA70-DC7D10A7653D}"/>
     <dgm:cxn modelId="{C7CA2681-FAC3-474C-B622-629EB19F99E9}" type="presParOf" srcId="{49162F80-9F02-44A6-B8BB-9C145D32E9A6}" destId="{93D76702-C2A8-4552-960B-C2CCD4981C99}" srcOrd="0" destOrd="0" presId="urn:diagrams.loki3.com/BracketList"/>
     <dgm:cxn modelId="{38CA16D5-C4E9-4454-9705-C78453B60C5A}" type="presParOf" srcId="{93D76702-C2A8-4552-960B-C2CCD4981C99}" destId="{EEF1E03F-C7C5-4626-9C13-2E78DD1D4267}" srcOrd="0" destOrd="0" presId="urn:diagrams.loki3.com/BracketList"/>
     <dgm:cxn modelId="{E10DDCF7-A95D-4D15-B04C-07349A4D6BCA}" type="presParOf" srcId="{93D76702-C2A8-4552-960B-C2CCD4981C99}" destId="{A26B1DE6-CF11-4DDE-B44C-06D2D40056A5}" srcOrd="1" destOrd="0" presId="urn:diagrams.loki3.com/BracketList"/>
@@ -4978,7 +5006,7 @@
           <a:p>
             <a:fld id="{2BEA1986-BA3F-4B39-82E5-E5FA8BD8A6AC}" type="datetimeFigureOut">
               <a:rPr lang="en-US" smtClean="0"/>
-              <a:t>2026-08-07</a:t>
+              <a:t>2026-08-08</a:t>
             </a:fld>
             <a:endParaRPr lang="en-US"/>
           </a:p>
@@ -5504,7 +5532,7 @@
           <a:p>
             <a:fld id="{1D8BD707-D9CF-40AE-B4C6-C98DA3205C09}" type="datetimeFigureOut">
               <a:rPr lang="en-US"/>
-              <a:t>2026-08-07</a:t>
+              <a:t>2026-08-08</a:t>
             </a:fld>
             <a:endParaRPr lang="en-US"/>
           </a:p>
@@ -5728,7 +5756,7 @@
           <a:p>
             <a:fld id="{1D8BD707-D9CF-40AE-B4C6-C98DA3205C09}" type="datetimeFigureOut">
               <a:rPr lang="en-US"/>
-              <a:t>2026-08-07</a:t>
+              <a:t>2026-08-08</a:t>
             </a:fld>
             <a:endParaRPr lang="en-US"/>
           </a:p>
@@ -5989,7 +6017,7 @@
           <a:p>
             <a:fld id="{1D8BD707-D9CF-40AE-B4C6-C98DA3205C09}" type="datetimeFigureOut">
               <a:rPr lang="en-US"/>
-              <a:t>2026-08-07</a:t>
+              <a:t>2026-08-08</a:t>
             </a:fld>
             <a:endParaRPr lang="en-US"/>
           </a:p>
@@ -6184,7 +6212,7 @@
           <a:p>
             <a:fld id="{1D8BD707-D9CF-40AE-B4C6-C98DA3205C09}" type="datetimeFigureOut">
               <a:rPr lang="en-US"/>
-              <a:t>2026-08-07</a:t>
+              <a:t>2026-08-08</a:t>
             </a:fld>
             <a:endParaRPr lang="en-US"/>
           </a:p>
@@ -6350,7 +6378,7 @@
           <a:p>
             <a:fld id="{1D8BD707-D9CF-40AE-B4C6-C98DA3205C09}" type="datetimeFigureOut">
               <a:rPr lang="en-US"/>
-              <a:t>2026-08-07</a:t>
+              <a:t>2026-08-08</a:t>
             </a:fld>
             <a:endParaRPr lang="en-US"/>
           </a:p>
@@ -6672,7 +6700,7 @@
           <a:p>
             <a:fld id="{1D8BD707-D9CF-40AE-B4C6-C98DA3205C09}" type="datetimeFigureOut">
               <a:rPr lang="en-US"/>
-              <a:t>2026-08-07</a:t>
+              <a:t>2026-08-08</a:t>
             </a:fld>
             <a:endParaRPr lang="en-US"/>
           </a:p>
@@ -25606,8 +25634,8 @@
         </p:nvSpPr>
         <p:spPr>
           <a:xfrm>
-            <a:off x="129427" y="665850"/>
-            <a:ext cx="2755380" cy="2043508"/>
+            <a:off x="-523352" y="1883400"/>
+            <a:ext cx="2755380" cy="689291"/>
           </a:xfrm>
           <a:prstGeom prst="rect">
             <a:avLst/>
@@ -25624,24 +25652,9 @@
             </a:endParaRPr>
           </a:p>
           <a:p>
-            <a:r>
-              <a:rPr lang="en-US" sz="1100" dirty="0" smtClean="0">
-                <a:latin typeface="Arial Black" panose="020B0A04020102020204" pitchFamily="34" charset="0"/>
-              </a:rPr>
-              <a:t>1-Manual </a:t>
-            </a:r>
-            <a:r>
-              <a:rPr lang="en-US" sz="1100" dirty="0">
-                <a:latin typeface="Arial Black" panose="020B0A04020102020204" pitchFamily="34" charset="0"/>
-              </a:rPr>
-              <a:t>PDF search is slow and </a:t>
-            </a:r>
-            <a:r>
-              <a:rPr lang="en-US" sz="1100" dirty="0" smtClean="0">
-                <a:latin typeface="Arial Black" panose="020B0A04020102020204" pitchFamily="34" charset="0"/>
-              </a:rPr>
-              <a:t>tedious</a:t>
-            </a:r>
+            <a:endParaRPr lang="en-US" sz="1100" dirty="0">
+              <a:latin typeface="Arial Black" panose="020B0A04020102020204" pitchFamily="34" charset="0"/>
+            </a:endParaRPr>
           </a:p>
           <a:p>
             <a:endParaRPr lang="en-US" sz="1100" dirty="0">
@@ -25649,81 +25662,9 @@
             </a:endParaRPr>
           </a:p>
           <a:p>
-            <a:r>
-              <a:rPr lang="en-US" sz="1100" dirty="0" smtClean="0">
-                <a:latin typeface="Arial Black" panose="020B0A04020102020204" pitchFamily="34" charset="0"/>
-              </a:rPr>
-              <a:t>2-Keyword </a:t>
-            </a:r>
-            <a:r>
-              <a:rPr lang="en-US" sz="1100" dirty="0">
-                <a:latin typeface="Arial Black" panose="020B0A04020102020204" pitchFamily="34" charset="0"/>
-              </a:rPr>
-              <a:t>search misses </a:t>
-            </a:r>
-            <a:r>
-              <a:rPr lang="en-US" sz="1100" dirty="0">
-                <a:latin typeface="Arial Black" panose="020B0A04020102020204" pitchFamily="34" charset="0"/>
-                <a:cs typeface="Arial" panose="020B0604020202020204" pitchFamily="34" charset="0"/>
-              </a:rPr>
-              <a:t>paraphrased</a:t>
-            </a:r>
-            <a:r>
-              <a:rPr lang="en-US" sz="1100" dirty="0">
-                <a:latin typeface="Arial Black" panose="020B0A04020102020204" pitchFamily="34" charset="0"/>
-              </a:rPr>
-              <a:t> </a:t>
-            </a:r>
-            <a:r>
-              <a:rPr lang="en-US" sz="1100" dirty="0" smtClean="0">
-                <a:latin typeface="Arial Black" panose="020B0A04020102020204" pitchFamily="34" charset="0"/>
-              </a:rPr>
-              <a:t>content</a:t>
-            </a:r>
-          </a:p>
-          <a:p>
             <a:endParaRPr lang="en-US" sz="1100" dirty="0">
               <a:latin typeface="Arial Black" panose="020B0A04020102020204" pitchFamily="34" charset="0"/>
             </a:endParaRPr>
-          </a:p>
-          <a:p>
-            <a:r>
-              <a:rPr lang="en-US" sz="1100" dirty="0" smtClean="0">
-                <a:latin typeface="Arial Black" panose="020B0A04020102020204" pitchFamily="34" charset="0"/>
-              </a:rPr>
-              <a:t>3-Generic </a:t>
-            </a:r>
-            <a:r>
-              <a:rPr lang="en-US" sz="1100" dirty="0">
-                <a:latin typeface="Arial Black" panose="020B0A04020102020204" pitchFamily="34" charset="0"/>
-              </a:rPr>
-              <a:t>LLMs fabricate protocol </a:t>
-            </a:r>
-            <a:r>
-              <a:rPr lang="en-US" sz="1100" dirty="0" smtClean="0">
-                <a:latin typeface="Arial Black" panose="020B0A04020102020204" pitchFamily="34" charset="0"/>
-              </a:rPr>
-              <a:t>details</a:t>
-            </a:r>
-          </a:p>
-          <a:p>
-            <a:endParaRPr lang="en-US" sz="1100" dirty="0">
-              <a:latin typeface="Arial Black" panose="020B0A04020102020204" pitchFamily="34" charset="0"/>
-            </a:endParaRPr>
-          </a:p>
-          <a:p>
-            <a:r>
-              <a:rPr lang="en-US" sz="1100" dirty="0" smtClean="0">
-                <a:latin typeface="Arial Black" panose="020B0A04020102020204" pitchFamily="34" charset="0"/>
-              </a:rPr>
-              <a:t>4-No </a:t>
-            </a:r>
-            <a:r>
-              <a:rPr lang="en-US" sz="1100" dirty="0">
-                <a:latin typeface="Arial Black" panose="020B0A04020102020204" pitchFamily="34" charset="0"/>
-              </a:rPr>
-              <a:t>tool offers cited, spec-grounded answers</a:t>
-            </a:r>
           </a:p>
         </p:txBody>
       </p:sp>
@@ -25987,7 +25928,7 @@
         <p:spPr>
           <a:xfrm>
             <a:off x="2976026" y="645684"/>
-            <a:ext cx="2644724" cy="2382062"/>
+            <a:ext cx="2644724" cy="858568"/>
           </a:xfrm>
           <a:prstGeom prst="rect">
             <a:avLst/>
@@ -26004,24 +25945,9 @@
             </a:endParaRPr>
           </a:p>
           <a:p>
-            <a:r>
-              <a:rPr lang="en-US" sz="1100" dirty="0" smtClean="0">
-                <a:latin typeface="Arial Black" panose="020B0A04020102020204" pitchFamily="34" charset="0"/>
-              </a:rPr>
-              <a:t>Telecom </a:t>
-            </a:r>
-            <a:r>
-              <a:rPr lang="en-US" sz="1100" dirty="0" smtClean="0">
-                <a:latin typeface="Arial Black" panose="020B0A04020102020204" pitchFamily="34" charset="0"/>
-              </a:rPr>
-              <a:t>LLM </a:t>
-            </a:r>
-            <a:r>
-              <a:rPr lang="en-US" sz="1100" dirty="0" smtClean="0">
-                <a:latin typeface="Arial Black" panose="020B0A04020102020204" pitchFamily="34" charset="0"/>
-              </a:rPr>
-              <a:t>RAG</a:t>
-            </a:r>
+            <a:endParaRPr lang="en-US" sz="1100" dirty="0">
+              <a:latin typeface="Arial Black" panose="020B0A04020102020204" pitchFamily="34" charset="0"/>
+            </a:endParaRPr>
           </a:p>
           <a:p>
             <a:endParaRPr lang="en-US" sz="1100" dirty="0">
@@ -26029,93 +25955,14 @@
             </a:endParaRPr>
           </a:p>
           <a:p>
-            <a:r>
-              <a:rPr lang="en-US" sz="1100" dirty="0" smtClean="0">
-                <a:latin typeface="Arial Black" panose="020B0A04020102020204" pitchFamily="34" charset="0"/>
-              </a:rPr>
-              <a:t>1-Purpose-built </a:t>
-            </a:r>
-            <a:r>
-              <a:rPr lang="en-US" sz="1100" dirty="0">
-                <a:latin typeface="Arial Black" panose="020B0A04020102020204" pitchFamily="34" charset="0"/>
-              </a:rPr>
-              <a:t>specifically for </a:t>
-            </a:r>
-            <a:r>
-              <a:rPr lang="en-US" sz="1100" dirty="0" smtClean="0">
-                <a:latin typeface="Arial Black" panose="020B0A04020102020204" pitchFamily="34" charset="0"/>
-              </a:rPr>
-              <a:t>       telecom papers</a:t>
-            </a:r>
+            <a:endParaRPr lang="en-US" sz="1100" dirty="0">
+              <a:latin typeface="Arial Black" panose="020B0A04020102020204" pitchFamily="34" charset="0"/>
+            </a:endParaRPr>
           </a:p>
           <a:p>
             <a:endParaRPr lang="en-US" sz="1100" dirty="0">
               <a:latin typeface="Arial Black" panose="020B0A04020102020204" pitchFamily="34" charset="0"/>
             </a:endParaRPr>
-          </a:p>
-          <a:p>
-            <a:r>
-              <a:rPr lang="en-US" sz="1100" dirty="0" smtClean="0">
-                <a:latin typeface="Arial Black" panose="020B0A04020102020204" pitchFamily="34" charset="0"/>
-              </a:rPr>
-              <a:t>2-Fully </a:t>
-            </a:r>
-            <a:r>
-              <a:rPr lang="en-US" sz="1100" dirty="0">
-                <a:latin typeface="Arial Black" panose="020B0A04020102020204" pitchFamily="34" charset="0"/>
-              </a:rPr>
-              <a:t>local: embeddings, vector store, </a:t>
-            </a:r>
-            <a:r>
-              <a:rPr lang="en-US" sz="1100" dirty="0" smtClean="0">
-                <a:latin typeface="Arial Black" panose="020B0A04020102020204" pitchFamily="34" charset="0"/>
-              </a:rPr>
-              <a:t>re-ranking</a:t>
-            </a:r>
-          </a:p>
-          <a:p>
-            <a:endParaRPr lang="en-US" sz="1100" dirty="0">
-              <a:latin typeface="Arial Black" panose="020B0A04020102020204" pitchFamily="34" charset="0"/>
-            </a:endParaRPr>
-          </a:p>
-          <a:p>
-            <a:r>
-              <a:rPr lang="en-US" sz="1100" dirty="0" smtClean="0">
-                <a:latin typeface="Arial Black" panose="020B0A04020102020204" pitchFamily="34" charset="0"/>
-              </a:rPr>
-              <a:t>3-Every </a:t>
-            </a:r>
-            <a:r>
-              <a:rPr lang="en-US" sz="1100" dirty="0">
-                <a:latin typeface="Arial Black" panose="020B0A04020102020204" pitchFamily="34" charset="0"/>
-              </a:rPr>
-              <a:t>answer cites: TS number, Release, Section, </a:t>
-            </a:r>
-            <a:r>
-              <a:rPr lang="en-US" sz="1100" dirty="0" smtClean="0">
-                <a:latin typeface="Arial Black" panose="020B0A04020102020204" pitchFamily="34" charset="0"/>
-              </a:rPr>
-              <a:t>page</a:t>
-            </a:r>
-          </a:p>
-          <a:p>
-            <a:endParaRPr lang="en-US" sz="1100" dirty="0">
-              <a:latin typeface="Arial Black" panose="020B0A04020102020204" pitchFamily="34" charset="0"/>
-            </a:endParaRPr>
-          </a:p>
-          <a:p>
-            <a:r>
-              <a:rPr lang="en-US" sz="1100" dirty="0" smtClean="0">
-                <a:latin typeface="Arial Black" panose="020B0A04020102020204" pitchFamily="34" charset="0"/>
-              </a:rPr>
-              <a:t>4-Integrated </a:t>
-            </a:r>
-            <a:r>
-              <a:rPr lang="en-US" sz="1100" dirty="0">
-                <a:latin typeface="Arial Black" panose="020B0A04020102020204" pitchFamily="34" charset="0"/>
-              </a:rPr>
-              <a:t>into RANPilotAI — no tool switching</a:t>
-            </a:r>
           </a:p>
         </p:txBody>
       </p:sp>
@@ -26428,6 +26275,399 @@
               <a:rPr spc="-25" dirty="0"/>
               <a:t>47</a:t>
             </a:r>
+          </a:p>
+        </p:txBody>
+      </p:sp>
+      <p:sp>
+        <p:nvSpPr>
+          <p:cNvPr id="7" name="Rounded Rectangle 6"/>
+          <p:cNvSpPr/>
+          <p:nvPr/>
+        </p:nvSpPr>
+        <p:spPr>
+          <a:xfrm>
+            <a:off x="161394" y="820430"/>
+            <a:ext cx="2524873" cy="417213"/>
+          </a:xfrm>
+          <a:prstGeom prst="roundRect">
+            <a:avLst/>
+          </a:prstGeom>
+        </p:spPr>
+        <p:style>
+          <a:lnRef idx="2">
+            <a:schemeClr val="accent1">
+              <a:shade val="50000"/>
+            </a:schemeClr>
+          </a:lnRef>
+          <a:fillRef idx="1">
+            <a:schemeClr val="accent1"/>
+          </a:fillRef>
+          <a:effectRef idx="0">
+            <a:schemeClr val="accent1"/>
+          </a:effectRef>
+          <a:fontRef idx="minor">
+            <a:schemeClr val="lt1"/>
+          </a:fontRef>
+        </p:style>
+        <p:txBody>
+          <a:bodyPr rtlCol="0" anchor="ctr"/>
+          <a:lstStyle/>
+          <a:p>
+            <a:pPr algn="l"/>
+            <a:r>
+              <a:rPr lang="en-US" sz="1100" dirty="0" smtClean="0">
+                <a:latin typeface="Arial Black" panose="020B0A04020102020204" pitchFamily="34" charset="0"/>
+              </a:rPr>
+              <a:t>Manual PDF search is slow and tedious</a:t>
+            </a:r>
+            <a:endParaRPr lang="en-US" sz="1100" dirty="0">
+              <a:latin typeface="Arial Black" panose="020B0A04020102020204" pitchFamily="34" charset="0"/>
+            </a:endParaRPr>
+          </a:p>
+        </p:txBody>
+      </p:sp>
+      <p:sp>
+        <p:nvSpPr>
+          <p:cNvPr id="24" name="Rounded Rectangle 23"/>
+          <p:cNvSpPr/>
+          <p:nvPr/>
+        </p:nvSpPr>
+        <p:spPr>
+          <a:xfrm>
+            <a:off x="144286" y="1332240"/>
+            <a:ext cx="2524873" cy="414504"/>
+          </a:xfrm>
+          <a:prstGeom prst="roundRect">
+            <a:avLst/>
+          </a:prstGeom>
+        </p:spPr>
+        <p:style>
+          <a:lnRef idx="2">
+            <a:schemeClr val="accent1">
+              <a:shade val="50000"/>
+            </a:schemeClr>
+          </a:lnRef>
+          <a:fillRef idx="1">
+            <a:schemeClr val="accent1"/>
+          </a:fillRef>
+          <a:effectRef idx="0">
+            <a:schemeClr val="accent1"/>
+          </a:effectRef>
+          <a:fontRef idx="minor">
+            <a:schemeClr val="lt1"/>
+          </a:fontRef>
+        </p:style>
+        <p:txBody>
+          <a:bodyPr rtlCol="0" anchor="ctr"/>
+          <a:lstStyle/>
+          <a:p>
+            <a:pPr algn="l"/>
+            <a:r>
+              <a:rPr lang="en-US" sz="1100" dirty="0" smtClean="0">
+                <a:latin typeface="Arial Black" panose="020B0A04020102020204" pitchFamily="34" charset="0"/>
+              </a:rPr>
+              <a:t>Keyword search misses </a:t>
+            </a:r>
+            <a:r>
+              <a:rPr lang="en-US" sz="1100" dirty="0" smtClean="0">
+                <a:latin typeface="Arial Black" panose="020B0A04020102020204" pitchFamily="34" charset="0"/>
+                <a:cs typeface="Arial" panose="020B0604020202020204" pitchFamily="34" charset="0"/>
+              </a:rPr>
+              <a:t>paraphrased</a:t>
+            </a:r>
+            <a:r>
+              <a:rPr lang="en-US" sz="1100" dirty="0" smtClean="0">
+                <a:latin typeface="Arial Black" panose="020B0A04020102020204" pitchFamily="34" charset="0"/>
+              </a:rPr>
+              <a:t> content</a:t>
+            </a:r>
+            <a:endParaRPr lang="en-US" sz="1100" dirty="0" smtClean="0">
+              <a:latin typeface="Arial Black" panose="020B0A04020102020204" pitchFamily="34" charset="0"/>
+            </a:endParaRPr>
+          </a:p>
+        </p:txBody>
+      </p:sp>
+      <p:sp>
+        <p:nvSpPr>
+          <p:cNvPr id="25" name="Rounded Rectangle 24"/>
+          <p:cNvSpPr/>
+          <p:nvPr/>
+        </p:nvSpPr>
+        <p:spPr>
+          <a:xfrm>
+            <a:off x="146100" y="1904984"/>
+            <a:ext cx="2524873" cy="405003"/>
+          </a:xfrm>
+          <a:prstGeom prst="roundRect">
+            <a:avLst/>
+          </a:prstGeom>
+        </p:spPr>
+        <p:style>
+          <a:lnRef idx="2">
+            <a:schemeClr val="accent1">
+              <a:shade val="50000"/>
+            </a:schemeClr>
+          </a:lnRef>
+          <a:fillRef idx="1">
+            <a:schemeClr val="accent1"/>
+          </a:fillRef>
+          <a:effectRef idx="0">
+            <a:schemeClr val="accent1"/>
+          </a:effectRef>
+          <a:fontRef idx="minor">
+            <a:schemeClr val="lt1"/>
+          </a:fontRef>
+        </p:style>
+        <p:txBody>
+          <a:bodyPr rtlCol="0" anchor="ctr"/>
+          <a:lstStyle/>
+          <a:p>
+            <a:pPr algn="l"/>
+            <a:r>
+              <a:rPr lang="en-US" sz="1100" dirty="0" smtClean="0">
+                <a:latin typeface="Arial Black" panose="020B0A04020102020204" pitchFamily="34" charset="0"/>
+              </a:rPr>
+              <a:t>Generic LLMs fabricate protocol details</a:t>
+            </a:r>
+            <a:endParaRPr lang="en-US" sz="1100" dirty="0" smtClean="0">
+              <a:latin typeface="Arial Black" panose="020B0A04020102020204" pitchFamily="34" charset="0"/>
+            </a:endParaRPr>
+          </a:p>
+        </p:txBody>
+      </p:sp>
+      <p:sp>
+        <p:nvSpPr>
+          <p:cNvPr id="26" name="Rounded Rectangle 25"/>
+          <p:cNvSpPr/>
+          <p:nvPr/>
+        </p:nvSpPr>
+        <p:spPr>
+          <a:xfrm>
+            <a:off x="161394" y="2414085"/>
+            <a:ext cx="2524873" cy="597741"/>
+          </a:xfrm>
+          <a:prstGeom prst="roundRect">
+            <a:avLst/>
+          </a:prstGeom>
+        </p:spPr>
+        <p:style>
+          <a:lnRef idx="2">
+            <a:schemeClr val="accent1">
+              <a:shade val="50000"/>
+            </a:schemeClr>
+          </a:lnRef>
+          <a:fillRef idx="1">
+            <a:schemeClr val="accent1"/>
+          </a:fillRef>
+          <a:effectRef idx="0">
+            <a:schemeClr val="accent1"/>
+          </a:effectRef>
+          <a:fontRef idx="minor">
+            <a:schemeClr val="lt1"/>
+          </a:fontRef>
+        </p:style>
+        <p:txBody>
+          <a:bodyPr rtlCol="0" anchor="ctr"/>
+          <a:lstStyle/>
+          <a:p>
+            <a:pPr algn="l"/>
+            <a:r>
+              <a:rPr lang="en-US" sz="1100" dirty="0" smtClean="0">
+                <a:latin typeface="Arial Black" panose="020B0A04020102020204" pitchFamily="34" charset="0"/>
+              </a:rPr>
+              <a:t>No tool offers cited, spec-grounded answers</a:t>
+            </a:r>
+            <a:endParaRPr lang="en-US" sz="1100" dirty="0">
+              <a:latin typeface="Arial Black" panose="020B0A04020102020204" pitchFamily="34" charset="0"/>
+            </a:endParaRPr>
+          </a:p>
+        </p:txBody>
+      </p:sp>
+      <p:sp>
+        <p:nvSpPr>
+          <p:cNvPr id="27" name="Rounded Rectangle 26"/>
+          <p:cNvSpPr/>
+          <p:nvPr/>
+        </p:nvSpPr>
+        <p:spPr>
+          <a:xfrm>
+            <a:off x="3046880" y="817160"/>
+            <a:ext cx="2524873" cy="417213"/>
+          </a:xfrm>
+          <a:prstGeom prst="roundRect">
+            <a:avLst/>
+          </a:prstGeom>
+        </p:spPr>
+        <p:style>
+          <a:lnRef idx="2">
+            <a:schemeClr val="accent1">
+              <a:shade val="50000"/>
+            </a:schemeClr>
+          </a:lnRef>
+          <a:fillRef idx="1">
+            <a:schemeClr val="accent1"/>
+          </a:fillRef>
+          <a:effectRef idx="0">
+            <a:schemeClr val="accent1"/>
+          </a:effectRef>
+          <a:fontRef idx="minor">
+            <a:schemeClr val="lt1"/>
+          </a:fontRef>
+        </p:style>
+        <p:txBody>
+          <a:bodyPr rtlCol="0" anchor="ctr"/>
+          <a:lstStyle/>
+          <a:p>
+            <a:r>
+              <a:rPr lang="en-US" sz="1100" dirty="0" smtClean="0">
+                <a:latin typeface="Arial Black" panose="020B0A04020102020204" pitchFamily="34" charset="0"/>
+              </a:rPr>
+              <a:t>Telecom LLM RAG</a:t>
+            </a:r>
+            <a:endParaRPr lang="en-US" sz="1100" dirty="0" smtClean="0">
+              <a:latin typeface="Arial Black" panose="020B0A04020102020204" pitchFamily="34" charset="0"/>
+            </a:endParaRPr>
+          </a:p>
+        </p:txBody>
+      </p:sp>
+      <p:sp>
+        <p:nvSpPr>
+          <p:cNvPr id="28" name="Rounded Rectangle 27"/>
+          <p:cNvSpPr/>
+          <p:nvPr/>
+        </p:nvSpPr>
+        <p:spPr>
+          <a:xfrm>
+            <a:off x="3046879" y="1330885"/>
+            <a:ext cx="2524873" cy="417213"/>
+          </a:xfrm>
+          <a:prstGeom prst="roundRect">
+            <a:avLst/>
+          </a:prstGeom>
+        </p:spPr>
+        <p:style>
+          <a:lnRef idx="2">
+            <a:schemeClr val="accent1">
+              <a:shade val="50000"/>
+            </a:schemeClr>
+          </a:lnRef>
+          <a:fillRef idx="1">
+            <a:schemeClr val="accent1"/>
+          </a:fillRef>
+          <a:effectRef idx="0">
+            <a:schemeClr val="accent1"/>
+          </a:effectRef>
+          <a:fontRef idx="minor">
+            <a:schemeClr val="lt1"/>
+          </a:fontRef>
+        </p:style>
+        <p:txBody>
+          <a:bodyPr rtlCol="0" anchor="ctr"/>
+          <a:lstStyle/>
+          <a:p>
+            <a:r>
+              <a:rPr lang="en-US" sz="1100" dirty="0" smtClean="0">
+                <a:latin typeface="Arial Black" panose="020B0A04020102020204" pitchFamily="34" charset="0"/>
+              </a:rPr>
+              <a:t>Purpose-built specifically for telecom papers </a:t>
+            </a:r>
+            <a:endParaRPr lang="en-US" sz="1100" dirty="0" smtClean="0">
+              <a:latin typeface="Arial Black" panose="020B0A04020102020204" pitchFamily="34" charset="0"/>
+            </a:endParaRPr>
+          </a:p>
+        </p:txBody>
+      </p:sp>
+      <p:sp>
+        <p:nvSpPr>
+          <p:cNvPr id="29" name="Rounded Rectangle 28"/>
+          <p:cNvSpPr/>
+          <p:nvPr/>
+        </p:nvSpPr>
+        <p:spPr>
+          <a:xfrm>
+            <a:off x="3046879" y="1884609"/>
+            <a:ext cx="2524873" cy="417213"/>
+          </a:xfrm>
+          <a:prstGeom prst="roundRect">
+            <a:avLst/>
+          </a:prstGeom>
+        </p:spPr>
+        <p:style>
+          <a:lnRef idx="2">
+            <a:schemeClr val="accent1">
+              <a:shade val="50000"/>
+            </a:schemeClr>
+          </a:lnRef>
+          <a:fillRef idx="1">
+            <a:schemeClr val="accent1"/>
+          </a:fillRef>
+          <a:effectRef idx="0">
+            <a:schemeClr val="accent1"/>
+          </a:effectRef>
+          <a:fontRef idx="minor">
+            <a:schemeClr val="lt1"/>
+          </a:fontRef>
+        </p:style>
+        <p:txBody>
+          <a:bodyPr rtlCol="0" anchor="ctr"/>
+          <a:lstStyle/>
+          <a:p>
+            <a:r>
+              <a:rPr lang="en-US" sz="1100" dirty="0" smtClean="0">
+                <a:latin typeface="Arial Black" panose="020B0A04020102020204" pitchFamily="34" charset="0"/>
+              </a:rPr>
+              <a:t>Fully local: embeddings, vector store, re-ranking</a:t>
+            </a:r>
+            <a:endParaRPr lang="en-US" sz="1100" dirty="0" smtClean="0">
+              <a:latin typeface="Arial Black" panose="020B0A04020102020204" pitchFamily="34" charset="0"/>
+            </a:endParaRPr>
+          </a:p>
+        </p:txBody>
+      </p:sp>
+      <p:sp>
+        <p:nvSpPr>
+          <p:cNvPr id="30" name="Rounded Rectangle 29"/>
+          <p:cNvSpPr/>
+          <p:nvPr/>
+        </p:nvSpPr>
+        <p:spPr>
+          <a:xfrm>
+            <a:off x="3046879" y="2420207"/>
+            <a:ext cx="2524873" cy="591619"/>
+          </a:xfrm>
+          <a:prstGeom prst="roundRect">
+            <a:avLst/>
+          </a:prstGeom>
+        </p:spPr>
+        <p:style>
+          <a:lnRef idx="2">
+            <a:schemeClr val="accent1">
+              <a:shade val="50000"/>
+            </a:schemeClr>
+          </a:lnRef>
+          <a:fillRef idx="1">
+            <a:schemeClr val="accent1"/>
+          </a:fillRef>
+          <a:effectRef idx="0">
+            <a:schemeClr val="accent1"/>
+          </a:effectRef>
+          <a:fontRef idx="minor">
+            <a:schemeClr val="lt1"/>
+          </a:fontRef>
+        </p:style>
+        <p:txBody>
+          <a:bodyPr rtlCol="0" anchor="ctr"/>
+          <a:lstStyle/>
+          <a:p>
+            <a:r>
+              <a:rPr lang="en-US" sz="1100" dirty="0" smtClean="0">
+                <a:latin typeface="Arial Black" panose="020B0A04020102020204" pitchFamily="34" charset="0"/>
+              </a:rPr>
+              <a:t>Every answer cites: TS number, Release, Section, page</a:t>
+            </a:r>
+            <a:endParaRPr lang="en-US" sz="1100" dirty="0" smtClean="0">
+              <a:latin typeface="Arial Black" panose="020B0A04020102020204" pitchFamily="34" charset="0"/>
+            </a:endParaRPr>
           </a:p>
         </p:txBody>
       </p:sp>
@@ -27425,15 +27665,7 @@
                   <a:schemeClr val="lt1"/>
                 </a:solidFill>
               </a:rPr>
-              <a:t>. </a:t>
-            </a:r>
-            <a:r>
-              <a:rPr lang="en-US" sz="1000" dirty="0" smtClean="0">
-                <a:solidFill>
-                  <a:schemeClr val="lt1"/>
-                </a:solidFill>
-              </a:rPr>
-              <a:t>Embedding </a:t>
+              <a:t>. Embedding </a:t>
             </a:r>
           </a:p>
           <a:p>
@@ -27588,15 +27820,7 @@
                   <a:schemeClr val="lt1"/>
                 </a:solidFill>
               </a:rPr>
-              <a:t>. </a:t>
-            </a:r>
-            <a:r>
-              <a:rPr lang="en-US" sz="1000" dirty="0" smtClean="0">
-                <a:solidFill>
-                  <a:schemeClr val="lt1"/>
-                </a:solidFill>
-              </a:rPr>
-              <a:t>Retrieval</a:t>
+              <a:t>. Retrieval</a:t>
             </a:r>
             <a:endParaRPr lang="en-US" sz="1000" dirty="0"/>
           </a:p>
@@ -28273,13 +28497,13 @@
   <p:clrMapOvr>
     <a:masterClrMapping/>
   </p:clrMapOvr>
-  <mc:AlternateContent xmlns:mc="http://schemas.openxmlformats.org/markup-compatibility/2006">
-    <mc:Choice xmlns:p14="http://schemas.microsoft.com/office/powerpoint/2010/main" Requires="p14">
+  <mc:AlternateContent xmlns:mc="http://schemas.openxmlformats.org/markup-compatibility/2006" xmlns:p14="http://schemas.microsoft.com/office/powerpoint/2010/main">
+    <mc:Choice Requires="p14">
       <p:transition spd="slow" p14:dur="800">
         <p:circle/>
       </p:transition>
     </mc:Choice>
-    <mc:Fallback>
+    <mc:Fallback xmlns="">
       <p:transition spd="slow">
         <p:circle/>
       </p:transition>
@@ -29338,6 +29562,30 @@
           </a:prstGeom>
         </p:spPr>
       </p:pic>
+      <p:pic>
+        <p:nvPicPr>
+          <p:cNvPr id="11" name="Picture 10"/>
+          <p:cNvPicPr>
+            <a:picLocks noChangeAspect="1"/>
+          </p:cNvPicPr>
+          <p:nvPr/>
+        </p:nvPicPr>
+        <p:blipFill>
+          <a:blip r:embed="rId6"/>
+          <a:stretch>
+            <a:fillRect/>
+          </a:stretch>
+        </p:blipFill>
+        <p:spPr>
+          <a:xfrm>
+            <a:off x="2248627" y="2597089"/>
+            <a:ext cx="3225073" cy="185182"/>
+          </a:xfrm>
+          <a:prstGeom prst="rect">
+            <a:avLst/>
+          </a:prstGeom>
+        </p:spPr>
+      </p:pic>
     </p:spTree>
   </p:cSld>
   <p:clrMapOvr>
@@ -29410,27 +29658,7 @@
                 <a:latin typeface="Arial Black"/>
                 <a:cs typeface="Arial Black"/>
               </a:rPr>
-              <a:t> what if I </a:t>
-            </a:r>
-            <a:r>
-              <a:rPr lang="en-US" sz="1400" spc="-170" dirty="0" smtClean="0">
-                <a:solidFill>
-                  <a:srgbClr val="FFFFFF"/>
-                </a:solidFill>
-                <a:latin typeface="Arial Black"/>
-                <a:cs typeface="Arial Black"/>
-              </a:rPr>
-              <a:t>asked </a:t>
-            </a:r>
-            <a:r>
-              <a:rPr lang="en-US" sz="1400" spc="-170" dirty="0" smtClean="0">
-                <a:solidFill>
-                  <a:srgbClr val="FFFFFF"/>
-                </a:solidFill>
-                <a:latin typeface="Arial Black"/>
-                <a:cs typeface="Arial Black"/>
-              </a:rPr>
-              <a:t>Non telecom  Question?</a:t>
+              <a:t> what if I asked Non telecom  Question?</a:t>
             </a:r>
             <a:endParaRPr sz="1400" dirty="0">
               <a:latin typeface="Arial Black"/>

--- a/RANPilotAi_Graduation_Project_BOOK/presentation.pptx
+++ b/RANPilotAi_Graduation_Project_BOOK/presentation.pptx
@@ -5,7 +5,7 @@
     <p:sldMasterId id="2147483648" r:id="rId1"/>
   </p:sldMasterIdLst>
   <p:notesMasterIdLst>
-    <p:notesMasterId r:id="rId57"/>
+    <p:notesMasterId r:id="rId58"/>
   </p:notesMasterIdLst>
   <p:sldIdLst>
     <p:sldId id="256" r:id="rId2"/>
@@ -27,42 +27,43 @@
     <p:sldId id="272" r:id="rId18"/>
     <p:sldId id="273" r:id="rId19"/>
     <p:sldId id="274" r:id="rId20"/>
-    <p:sldId id="275" r:id="rId21"/>
-    <p:sldId id="276" r:id="rId22"/>
-    <p:sldId id="277" r:id="rId23"/>
-    <p:sldId id="303" r:id="rId24"/>
-    <p:sldId id="304" r:id="rId25"/>
-    <p:sldId id="305" r:id="rId26"/>
-    <p:sldId id="306" r:id="rId27"/>
-    <p:sldId id="307" r:id="rId28"/>
-    <p:sldId id="308" r:id="rId29"/>
-    <p:sldId id="309" r:id="rId30"/>
-    <p:sldId id="310" r:id="rId31"/>
-    <p:sldId id="311" r:id="rId32"/>
-    <p:sldId id="312" r:id="rId33"/>
-    <p:sldId id="313" r:id="rId34"/>
-    <p:sldId id="314" r:id="rId35"/>
-    <p:sldId id="315" r:id="rId36"/>
-    <p:sldId id="284" r:id="rId37"/>
-    <p:sldId id="285" r:id="rId38"/>
-    <p:sldId id="286" r:id="rId39"/>
-    <p:sldId id="287" r:id="rId40"/>
-    <p:sldId id="288" r:id="rId41"/>
-    <p:sldId id="289" r:id="rId42"/>
-    <p:sldId id="290" r:id="rId43"/>
-    <p:sldId id="291" r:id="rId44"/>
-    <p:sldId id="316" r:id="rId45"/>
-    <p:sldId id="292" r:id="rId46"/>
-    <p:sldId id="293" r:id="rId47"/>
-    <p:sldId id="294" r:id="rId48"/>
-    <p:sldId id="295" r:id="rId49"/>
-    <p:sldId id="296" r:id="rId50"/>
-    <p:sldId id="297" r:id="rId51"/>
-    <p:sldId id="298" r:id="rId52"/>
-    <p:sldId id="299" r:id="rId53"/>
-    <p:sldId id="300" r:id="rId54"/>
-    <p:sldId id="301" r:id="rId55"/>
-    <p:sldId id="302" r:id="rId56"/>
+    <p:sldId id="317" r:id="rId21"/>
+    <p:sldId id="275" r:id="rId22"/>
+    <p:sldId id="276" r:id="rId23"/>
+    <p:sldId id="277" r:id="rId24"/>
+    <p:sldId id="303" r:id="rId25"/>
+    <p:sldId id="304" r:id="rId26"/>
+    <p:sldId id="305" r:id="rId27"/>
+    <p:sldId id="306" r:id="rId28"/>
+    <p:sldId id="307" r:id="rId29"/>
+    <p:sldId id="308" r:id="rId30"/>
+    <p:sldId id="309" r:id="rId31"/>
+    <p:sldId id="310" r:id="rId32"/>
+    <p:sldId id="311" r:id="rId33"/>
+    <p:sldId id="312" r:id="rId34"/>
+    <p:sldId id="313" r:id="rId35"/>
+    <p:sldId id="314" r:id="rId36"/>
+    <p:sldId id="315" r:id="rId37"/>
+    <p:sldId id="284" r:id="rId38"/>
+    <p:sldId id="285" r:id="rId39"/>
+    <p:sldId id="286" r:id="rId40"/>
+    <p:sldId id="287" r:id="rId41"/>
+    <p:sldId id="288" r:id="rId42"/>
+    <p:sldId id="289" r:id="rId43"/>
+    <p:sldId id="290" r:id="rId44"/>
+    <p:sldId id="291" r:id="rId45"/>
+    <p:sldId id="316" r:id="rId46"/>
+    <p:sldId id="292" r:id="rId47"/>
+    <p:sldId id="293" r:id="rId48"/>
+    <p:sldId id="294" r:id="rId49"/>
+    <p:sldId id="295" r:id="rId50"/>
+    <p:sldId id="296" r:id="rId51"/>
+    <p:sldId id="297" r:id="rId52"/>
+    <p:sldId id="298" r:id="rId53"/>
+    <p:sldId id="299" r:id="rId54"/>
+    <p:sldId id="300" r:id="rId55"/>
+    <p:sldId id="301" r:id="rId56"/>
+    <p:sldId id="302" r:id="rId57"/>
   </p:sldIdLst>
   <p:sldSz cx="5765800" cy="3244850"/>
   <p:notesSz cx="5765800" cy="3244850"/>
@@ -1817,7 +1818,7 @@
         <a:p>
           <a:pPr algn="l"/>
           <a:r>
-            <a:rPr lang="en-US" b="0" i="0" dirty="0" smtClean="0"/>
+            <a:rPr lang="en-US" b="0" i="0" dirty="0"/>
             <a:t>Table Extraction</a:t>
           </a:r>
           <a:endParaRPr lang="en-US" dirty="0"/>
@@ -1891,7 +1892,7 @@
         <a:p>
           <a:pPr algn="l"/>
           <a:r>
-            <a:rPr lang="en-US" b="0" i="0" dirty="0" smtClean="0"/>
+            <a:rPr lang="en-US" b="0" i="0" dirty="0"/>
             <a:t>Section-Aware Splitting</a:t>
           </a:r>
           <a:endParaRPr lang="en-US" dirty="0"/>
@@ -1929,7 +1930,7 @@
         <a:p>
           <a:pPr algn="l"/>
           <a:r>
-            <a:rPr lang="en-US" b="0" i="0" dirty="0" smtClean="0"/>
+            <a:rPr lang="en-US" b="0" i="0" dirty="0"/>
             <a:t>Optimal Sizing</a:t>
           </a:r>
           <a:endParaRPr lang="en-US" dirty="0"/>
@@ -2001,7 +2002,7 @@
         <a:p>
           <a:pPr algn="l"/>
           <a:r>
-            <a:rPr lang="en-US" b="0" i="0" dirty="0" smtClean="0"/>
+            <a:rPr lang="en-US" b="0" i="0" dirty="0"/>
             <a:t>Fully Local Execution</a:t>
           </a:r>
           <a:endParaRPr lang="en-US" dirty="0"/>
@@ -2039,7 +2040,7 @@
         <a:p>
           <a:pPr algn="l"/>
           <a:r>
-            <a:rPr lang="en-US" b="0" i="0" dirty="0" smtClean="0"/>
+            <a:rPr lang="en-US" b="0" i="0" dirty="0"/>
             <a:t>Header Stripping</a:t>
           </a:r>
           <a:endParaRPr lang="en-US" dirty="0"/>
@@ -2111,7 +2112,7 @@
         <a:p>
           <a:pPr algn="l"/>
           <a:r>
-            <a:rPr lang="en-US" b="0" i="0" dirty="0" smtClean="0"/>
+            <a:rPr lang="en-US" b="0" i="0" dirty="0"/>
             <a:t>Zero Docker Setup</a:t>
           </a:r>
           <a:endParaRPr lang="en-US" dirty="0"/>
@@ -2183,7 +2184,7 @@
         <a:p>
           <a:pPr algn="l"/>
           <a:r>
-            <a:rPr lang="en-US" b="0" i="0" dirty="0" smtClean="0"/>
+            <a:rPr lang="en-US" b="0" i="0" dirty="0"/>
             <a:t>Precision Metadata Filtering</a:t>
           </a:r>
           <a:endParaRPr lang="en-US" dirty="0"/>
@@ -2221,7 +2222,7 @@
         <a:p>
           <a:pPr algn="l"/>
           <a:r>
-            <a:rPr lang="en-US" b="0" i="0" dirty="0" smtClean="0"/>
+            <a:rPr lang="en-US" b="0" i="0" dirty="0"/>
             <a:t>Over-fetching</a:t>
           </a:r>
           <a:endParaRPr lang="en-US" dirty="0"/>
@@ -2293,7 +2294,7 @@
         <a:p>
           <a:pPr algn="l"/>
           <a:r>
-            <a:rPr lang="en-US" b="0" i="0" dirty="0" smtClean="0"/>
+            <a:rPr lang="en-US" b="0" i="0" dirty="0"/>
             <a:t>Anti-Hallucination Guardrails</a:t>
           </a:r>
           <a:endParaRPr lang="en-US" dirty="0"/>
@@ -2331,7 +2332,7 @@
         <a:p>
           <a:pPr algn="l"/>
           <a:r>
-            <a:rPr lang="en-US" b="0" i="0" dirty="0" smtClean="0"/>
+            <a:rPr lang="en-US" b="0" i="0" dirty="0"/>
             <a:t>Strict Citations</a:t>
           </a:r>
           <a:endParaRPr lang="en-US" dirty="0"/>
@@ -2369,7 +2370,7 @@
         <a:p>
           <a:pPr algn="l"/>
           <a:r>
-            <a:rPr lang="en-US" b="0" i="0" dirty="0" smtClean="0"/>
+            <a:rPr lang="en-US" b="0" i="0" dirty="0"/>
             <a:t>Rich Metadata</a:t>
           </a:r>
           <a:endParaRPr lang="en-US" dirty="0"/>
@@ -2442,7 +2443,7 @@
         <a:lstStyle/>
         <a:p>
           <a:r>
-            <a:rPr lang="en-US" b="0" i="0" dirty="0" smtClean="0"/>
+            <a:rPr lang="en-US" b="0" i="0" dirty="0"/>
             <a:t>Smart Filtering</a:t>
           </a:r>
           <a:endParaRPr lang="en-US" dirty="0"/>
@@ -2480,13 +2481,6 @@
         </dgm:presLayoutVars>
       </dgm:prSet>
       <dgm:spPr/>
-      <dgm:t>
-        <a:bodyPr/>
-        <a:lstStyle/>
-        <a:p>
-          <a:endParaRPr lang="en-US"/>
-        </a:p>
-      </dgm:t>
     </dgm:pt>
     <dgm:pt modelId="{93D76702-C2A8-4552-960B-C2CCD4981C99}" type="pres">
       <dgm:prSet presAssocID="{DE0D542D-D583-46F8-AF81-5963C844620D}" presName="linNode" presStyleCnt="0"/>
@@ -2500,13 +2494,6 @@
         </dgm:presLayoutVars>
       </dgm:prSet>
       <dgm:spPr/>
-      <dgm:t>
-        <a:bodyPr/>
-        <a:lstStyle/>
-        <a:p>
-          <a:endParaRPr lang="en-US"/>
-        </a:p>
-      </dgm:t>
     </dgm:pt>
     <dgm:pt modelId="{A26B1DE6-CF11-4DDE-B44C-06D2D40056A5}" type="pres">
       <dgm:prSet presAssocID="{DE0D542D-D583-46F8-AF81-5963C844620D}" presName="bracket" presStyleLbl="parChTrans1D1" presStyleIdx="0" presStyleCnt="7" custScaleX="318408" custScaleY="105564"/>
@@ -2523,13 +2510,6 @@
         </dgm:presLayoutVars>
       </dgm:prSet>
       <dgm:spPr/>
-      <dgm:t>
-        <a:bodyPr/>
-        <a:lstStyle/>
-        <a:p>
-          <a:endParaRPr lang="en-US"/>
-        </a:p>
-      </dgm:t>
     </dgm:pt>
     <dgm:pt modelId="{0D64A2A7-0C6F-4181-A777-C89732C0E5C5}" type="pres">
       <dgm:prSet presAssocID="{FB29F8EB-EE92-45C5-8BCF-B06C4D9BC7DC}" presName="spV" presStyleCnt="0"/>
@@ -2547,13 +2527,6 @@
         </dgm:presLayoutVars>
       </dgm:prSet>
       <dgm:spPr/>
-      <dgm:t>
-        <a:bodyPr/>
-        <a:lstStyle/>
-        <a:p>
-          <a:endParaRPr lang="en-US"/>
-        </a:p>
-      </dgm:t>
     </dgm:pt>
     <dgm:pt modelId="{198F5C82-A1B5-4598-AC6F-A9C0DABD7BDF}" type="pres">
       <dgm:prSet presAssocID="{02D6A755-2659-4714-A019-A60BD2DBF44D}" presName="bracket" presStyleLbl="parChTrans1D1" presStyleIdx="1" presStyleCnt="7" custScaleX="340255"/>
@@ -2570,13 +2543,6 @@
         </dgm:presLayoutVars>
       </dgm:prSet>
       <dgm:spPr/>
-      <dgm:t>
-        <a:bodyPr/>
-        <a:lstStyle/>
-        <a:p>
-          <a:endParaRPr lang="en-US"/>
-        </a:p>
-      </dgm:t>
     </dgm:pt>
     <dgm:pt modelId="{B220DA74-EC66-489D-8246-311B923B97F4}" type="pres">
       <dgm:prSet presAssocID="{8D2AE69D-74F5-4BBB-BCDD-A101C39C3368}" presName="spV" presStyleCnt="0"/>
@@ -2594,13 +2560,6 @@
         </dgm:presLayoutVars>
       </dgm:prSet>
       <dgm:spPr/>
-      <dgm:t>
-        <a:bodyPr/>
-        <a:lstStyle/>
-        <a:p>
-          <a:endParaRPr lang="en-US"/>
-        </a:p>
-      </dgm:t>
     </dgm:pt>
     <dgm:pt modelId="{A0E10437-37D9-40A1-94FC-7CF5534408C5}" type="pres">
       <dgm:prSet presAssocID="{B6EA1160-7F8A-4126-8376-C44E264E6EA1}" presName="bracket" presStyleLbl="parChTrans1D1" presStyleIdx="2" presStyleCnt="7"/>
@@ -2617,13 +2576,6 @@
         </dgm:presLayoutVars>
       </dgm:prSet>
       <dgm:spPr/>
-      <dgm:t>
-        <a:bodyPr/>
-        <a:lstStyle/>
-        <a:p>
-          <a:endParaRPr lang="en-US"/>
-        </a:p>
-      </dgm:t>
     </dgm:pt>
     <dgm:pt modelId="{61C6EDBC-202D-45B6-90DB-576D020436A6}" type="pres">
       <dgm:prSet presAssocID="{78A00466-42E4-4EC0-9E29-CCB271DF42F4}" presName="spV" presStyleCnt="0"/>
@@ -2641,13 +2593,6 @@
         </dgm:presLayoutVars>
       </dgm:prSet>
       <dgm:spPr/>
-      <dgm:t>
-        <a:bodyPr/>
-        <a:lstStyle/>
-        <a:p>
-          <a:endParaRPr lang="en-US"/>
-        </a:p>
-      </dgm:t>
     </dgm:pt>
     <dgm:pt modelId="{FBEC08E7-8EA9-4F19-8102-67D71DDC638F}" type="pres">
       <dgm:prSet presAssocID="{E5D331DA-30E0-4D9E-AF95-9BED1C00B881}" presName="bracket" presStyleLbl="parChTrans1D1" presStyleIdx="3" presStyleCnt="7"/>
@@ -2664,13 +2609,6 @@
         </dgm:presLayoutVars>
       </dgm:prSet>
       <dgm:spPr/>
-      <dgm:t>
-        <a:bodyPr/>
-        <a:lstStyle/>
-        <a:p>
-          <a:endParaRPr lang="en-US"/>
-        </a:p>
-      </dgm:t>
     </dgm:pt>
     <dgm:pt modelId="{15CBEDD1-6E59-4A21-B65E-A24E06847EC8}" type="pres">
       <dgm:prSet presAssocID="{0D12E0D9-447A-4318-A2D1-567184552CEB}" presName="spV" presStyleCnt="0"/>
@@ -2688,13 +2626,6 @@
         </dgm:presLayoutVars>
       </dgm:prSet>
       <dgm:spPr/>
-      <dgm:t>
-        <a:bodyPr/>
-        <a:lstStyle/>
-        <a:p>
-          <a:endParaRPr lang="en-US"/>
-        </a:p>
-      </dgm:t>
     </dgm:pt>
     <dgm:pt modelId="{0F317D99-FAA7-486C-AD04-E80658653891}" type="pres">
       <dgm:prSet presAssocID="{CFC255E3-F313-4F68-A8BE-AA9A0E7B2920}" presName="bracket" presStyleLbl="parChTrans1D1" presStyleIdx="4" presStyleCnt="7"/>
@@ -2711,13 +2642,6 @@
         </dgm:presLayoutVars>
       </dgm:prSet>
       <dgm:spPr/>
-      <dgm:t>
-        <a:bodyPr/>
-        <a:lstStyle/>
-        <a:p>
-          <a:endParaRPr lang="en-US"/>
-        </a:p>
-      </dgm:t>
     </dgm:pt>
     <dgm:pt modelId="{CEB34B8F-A441-4D1F-AC27-A153B51A9AFE}" type="pres">
       <dgm:prSet presAssocID="{AF699248-E40C-4F45-8095-1040C5E7766E}" presName="spV" presStyleCnt="0"/>
@@ -2735,13 +2659,6 @@
         </dgm:presLayoutVars>
       </dgm:prSet>
       <dgm:spPr/>
-      <dgm:t>
-        <a:bodyPr/>
-        <a:lstStyle/>
-        <a:p>
-          <a:endParaRPr lang="en-US"/>
-        </a:p>
-      </dgm:t>
     </dgm:pt>
     <dgm:pt modelId="{7463CE50-C0A3-481C-A7EE-61A136CA5614}" type="pres">
       <dgm:prSet presAssocID="{39F54975-3C18-4047-B841-1E5ED79DA055}" presName="bracket" presStyleLbl="parChTrans1D1" presStyleIdx="5" presStyleCnt="7"/>
@@ -2758,13 +2675,6 @@
         </dgm:presLayoutVars>
       </dgm:prSet>
       <dgm:spPr/>
-      <dgm:t>
-        <a:bodyPr/>
-        <a:lstStyle/>
-        <a:p>
-          <a:endParaRPr lang="en-US"/>
-        </a:p>
-      </dgm:t>
     </dgm:pt>
     <dgm:pt modelId="{A1073545-5D48-4C69-8C57-292BC6B3C4B1}" type="pres">
       <dgm:prSet presAssocID="{5DDE273F-5EAF-4DCF-9576-3CC5E69C990E}" presName="spV" presStyleCnt="0"/>
@@ -2782,13 +2692,6 @@
         </dgm:presLayoutVars>
       </dgm:prSet>
       <dgm:spPr/>
-      <dgm:t>
-        <a:bodyPr/>
-        <a:lstStyle/>
-        <a:p>
-          <a:endParaRPr lang="en-US"/>
-        </a:p>
-      </dgm:t>
     </dgm:pt>
     <dgm:pt modelId="{D95A6C44-A417-4C00-9432-D1FAC161DC5F}" type="pres">
       <dgm:prSet presAssocID="{67AAB135-0D51-4F78-B9C5-116756FDD4FD}" presName="bracket" presStyleLbl="parChTrans1D1" presStyleIdx="6" presStyleCnt="7"/>
@@ -2805,55 +2708,48 @@
         </dgm:presLayoutVars>
       </dgm:prSet>
       <dgm:spPr/>
-      <dgm:t>
-        <a:bodyPr/>
-        <a:lstStyle/>
-        <a:p>
-          <a:endParaRPr lang="en-US"/>
-        </a:p>
-      </dgm:t>
     </dgm:pt>
   </dgm:ptLst>
   <dgm:cxnLst>
-    <dgm:cxn modelId="{51656E9E-C438-4269-8BAA-86F019163B07}" srcId="{D4570B03-06D1-496E-940D-E834C1A39D15}" destId="{DE0D542D-D583-46F8-AF81-5963C844620D}" srcOrd="0" destOrd="0" parTransId="{C8EF2553-001E-4794-9586-0CDE54007ADD}" sibTransId="{FB29F8EB-EE92-45C5-8BCF-B06C4D9BC7DC}"/>
-    <dgm:cxn modelId="{E4C5A6E7-BD51-49BE-B462-C60D6912FD6F}" type="presOf" srcId="{B6EA1160-7F8A-4126-8376-C44E264E6EA1}" destId="{4D2CC661-966E-4BA4-843D-A1C1153050D7}" srcOrd="0" destOrd="0" presId="urn:diagrams.loki3.com/BracketList"/>
-    <dgm:cxn modelId="{38475AF4-CAB8-417F-B300-5B7AFA14E6E2}" srcId="{D4570B03-06D1-496E-940D-E834C1A39D15}" destId="{CFC255E3-F313-4F68-A8BE-AA9A0E7B2920}" srcOrd="4" destOrd="0" parTransId="{80D5B58A-7533-437A-907C-7A96D4C934CD}" sibTransId="{AF699248-E40C-4F45-8095-1040C5E7766E}"/>
+    <dgm:cxn modelId="{CED7CC02-254C-4CB5-AA30-2B25713B0DE9}" srcId="{02D6A755-2659-4714-A019-A60BD2DBF44D}" destId="{D19DA2C2-DBED-4C48-A059-92B1F02E952E}" srcOrd="1" destOrd="0" parTransId="{2411435A-2DED-45FE-BAF2-EA5E2BAB2221}" sibTransId="{8B1C7915-ACF1-48A9-8CBC-03BA5CAA0EC8}"/>
+    <dgm:cxn modelId="{F6E88605-19FE-4705-B7C4-F462D8AB4643}" srcId="{67AAB135-0D51-4F78-B9C5-116756FDD4FD}" destId="{B8004FBE-713E-4F15-8885-85B9EA6E9A18}" srcOrd="0" destOrd="0" parTransId="{8A89D8F8-211F-464D-AF74-1F8DE05387B4}" sibTransId="{CA806B09-F251-46F6-807A-781E4FCD5974}"/>
+    <dgm:cxn modelId="{29685408-45E5-4A09-A94C-6B5811184DDF}" type="presOf" srcId="{9357E48B-E7E0-4CA0-9ABC-FF0F47D16FFF}" destId="{2E54DBD1-1915-453C-B205-7D57F6596F56}" srcOrd="0" destOrd="0" presId="urn:diagrams.loki3.com/BracketList"/>
+    <dgm:cxn modelId="{3456690B-B173-48B8-86F7-97252F1597D5}" srcId="{E5D331DA-30E0-4D9E-AF95-9BED1C00B881}" destId="{96D22CE3-E99B-43B7-A890-8B3328F8E2E0}" srcOrd="1" destOrd="0" parTransId="{3DA8366F-C933-44CA-ADDF-18F73189EA6A}" sibTransId="{A42478D0-807D-4203-8347-8182C244F189}"/>
+    <dgm:cxn modelId="{C2E89A0B-866F-45C1-9E43-09B489A3A4E8}" srcId="{D4570B03-06D1-496E-940D-E834C1A39D15}" destId="{39F54975-3C18-4047-B841-1E5ED79DA055}" srcOrd="5" destOrd="0" parTransId="{CEC1D58E-1AB3-4E72-A00C-84BAD892CD40}" sibTransId="{5DDE273F-5EAF-4DCF-9576-3CC5E69C990E}"/>
+    <dgm:cxn modelId="{E9038612-49E6-4585-9419-CEFEF22E5596}" srcId="{D4570B03-06D1-496E-940D-E834C1A39D15}" destId="{02D6A755-2659-4714-A019-A60BD2DBF44D}" srcOrd="1" destOrd="0" parTransId="{A11D1553-18D4-4D46-8E28-8FA6B27EC28B}" sibTransId="{8D2AE69D-74F5-4BBB-BCDD-A101C39C3368}"/>
     <dgm:cxn modelId="{9CA15018-9C07-46DF-90DA-8AF065446E5E}" type="presOf" srcId="{39F54975-3C18-4047-B841-1E5ED79DA055}" destId="{D1E7592D-5481-4E23-BBA9-37FC11FDB1FC}" srcOrd="0" destOrd="0" presId="urn:diagrams.loki3.com/BracketList"/>
-    <dgm:cxn modelId="{56A8B0BB-481F-4E64-8165-87BB69F9A22B}" srcId="{D4570B03-06D1-496E-940D-E834C1A39D15}" destId="{67AAB135-0D51-4F78-B9C5-116756FDD4FD}" srcOrd="6" destOrd="0" parTransId="{0764D504-CB07-4071-9A74-C38D1F4EC718}" sibTransId="{AE1B9AE7-854E-4E8A-9B49-3CA8614B49B7}"/>
-    <dgm:cxn modelId="{29685408-45E5-4A09-A94C-6B5811184DDF}" type="presOf" srcId="{9357E48B-E7E0-4CA0-9ABC-FF0F47D16FFF}" destId="{2E54DBD1-1915-453C-B205-7D57F6596F56}" srcOrd="0" destOrd="0" presId="urn:diagrams.loki3.com/BracketList"/>
-    <dgm:cxn modelId="{AD4ED5EC-FC39-42A5-BC4B-7545101D5B7F}" type="presOf" srcId="{02D6A755-2659-4714-A019-A60BD2DBF44D}" destId="{AC2B96A3-ADBA-40C0-B958-7DDD08E7D4E8}" srcOrd="0" destOrd="0" presId="urn:diagrams.loki3.com/BracketList"/>
-    <dgm:cxn modelId="{F6E88605-19FE-4705-B7C4-F462D8AB4643}" srcId="{67AAB135-0D51-4F78-B9C5-116756FDD4FD}" destId="{B8004FBE-713E-4F15-8885-85B9EA6E9A18}" srcOrd="0" destOrd="0" parTransId="{8A89D8F8-211F-464D-AF74-1F8DE05387B4}" sibTransId="{CA806B09-F251-46F6-807A-781E4FCD5974}"/>
-    <dgm:cxn modelId="{E9038612-49E6-4585-9419-CEFEF22E5596}" srcId="{D4570B03-06D1-496E-940D-E834C1A39D15}" destId="{02D6A755-2659-4714-A019-A60BD2DBF44D}" srcOrd="1" destOrd="0" parTransId="{A11D1553-18D4-4D46-8E28-8FA6B27EC28B}" sibTransId="{8D2AE69D-74F5-4BBB-BCDD-A101C39C3368}"/>
+    <dgm:cxn modelId="{253CA61A-3D10-40C6-A6A5-EB9F6A55F5B0}" type="presOf" srcId="{E382FAAA-4FB2-477A-98B3-A2A120BAC348}" destId="{68C4F1F0-2F56-483B-8104-BEA79A7538A1}" srcOrd="0" destOrd="0" presId="urn:diagrams.loki3.com/BracketList"/>
+    <dgm:cxn modelId="{8FE8D121-64DD-4D0A-B1E3-B860DA31B65D}" type="presOf" srcId="{67AAB135-0D51-4F78-B9C5-116756FDD4FD}" destId="{E4B80767-5737-4482-A6AF-D1C6CDF122DC}" srcOrd="0" destOrd="0" presId="urn:diagrams.loki3.com/BracketList"/>
+    <dgm:cxn modelId="{D60FD02C-D5E8-494B-B039-6EEC522D73AE}" type="presOf" srcId="{B8004FBE-713E-4F15-8885-85B9EA6E9A18}" destId="{051F707C-CB75-4D21-8C13-082BD2FF2D14}" srcOrd="0" destOrd="0" presId="urn:diagrams.loki3.com/BracketList"/>
+    <dgm:cxn modelId="{AEBFEC2D-8855-4E2E-BEE0-C2AC6A2AD198}" type="presOf" srcId="{D12CF5CC-B0AB-4657-8BC8-05A2DA36F5F4}" destId="{16433D64-952C-4A31-983D-1017B3C32C47}" srcOrd="0" destOrd="0" presId="urn:diagrams.loki3.com/BracketList"/>
+    <dgm:cxn modelId="{86FD203E-7063-4D5F-A35C-3598D65669ED}" srcId="{02D6A755-2659-4714-A019-A60BD2DBF44D}" destId="{9357E48B-E7E0-4CA0-9ABC-FF0F47D16FFF}" srcOrd="0" destOrd="0" parTransId="{7581C13E-E6C9-4383-A784-20E62B70B3DC}" sibTransId="{F31CFC71-E692-4437-B605-955BBEFE5B3C}"/>
     <dgm:cxn modelId="{4BE1A33F-8709-45AC-9866-A77B712F0F4B}" srcId="{DE0D542D-D583-46F8-AF81-5963C844620D}" destId="{D12CF5CC-B0AB-4657-8BC8-05A2DA36F5F4}" srcOrd="0" destOrd="0" parTransId="{6A3B3684-783F-4816-9363-23FED4B817AB}" sibTransId="{443C1D04-5678-4F60-8A9D-9083BCA3E12E}"/>
-    <dgm:cxn modelId="{8CD274B0-EC7A-409C-AB2D-56C7534B144B}" type="presOf" srcId="{E5D331DA-30E0-4D9E-AF95-9BED1C00B881}" destId="{51EE0D49-AD04-4513-87AC-4148C700764C}" srcOrd="0" destOrd="0" presId="urn:diagrams.loki3.com/BracketList"/>
-    <dgm:cxn modelId="{BEBC4F50-0997-43E0-A4F6-3DCF33909B4C}" srcId="{D4570B03-06D1-496E-940D-E834C1A39D15}" destId="{B6EA1160-7F8A-4126-8376-C44E264E6EA1}" srcOrd="2" destOrd="0" parTransId="{C4A29E89-B10D-4EE9-817D-665085164D56}" sibTransId="{78A00466-42E4-4EC0-9E29-CCB271DF42F4}"/>
-    <dgm:cxn modelId="{E148A8F3-3E98-4E38-A6A3-BF7236721D64}" type="presOf" srcId="{EF4D839F-1954-4FEA-BC1D-6A6FE5E5C4E4}" destId="{A5768B98-F77A-4129-ACD5-EDDCB6DCE048}" srcOrd="0" destOrd="1" presId="urn:diagrams.loki3.com/BracketList"/>
+    <dgm:cxn modelId="{79185F44-6415-43D5-957F-294E77A373C5}" type="presOf" srcId="{F73F6B60-F387-4B00-AF21-983EFA908F3B}" destId="{824F19CC-5252-49CF-BB92-9DDE5C78A83D}" srcOrd="0" destOrd="0" presId="urn:diagrams.loki3.com/BracketList"/>
     <dgm:cxn modelId="{BB10DE44-0E64-4D65-BC2C-C5E23F3B4B7E}" type="presOf" srcId="{B410AD1F-A2B3-49B3-8BE2-CA1B2963672B}" destId="{16433D64-952C-4A31-983D-1017B3C32C47}" srcOrd="0" destOrd="1" presId="urn:diagrams.loki3.com/BracketList"/>
     <dgm:cxn modelId="{C8A7134D-29D6-4AE5-AFFB-1706BB271EEA}" type="presOf" srcId="{DE0D542D-D583-46F8-AF81-5963C844620D}" destId="{EEF1E03F-C7C5-4626-9C13-2E78DD1D4267}" srcOrd="0" destOrd="0" presId="urn:diagrams.loki3.com/BracketList"/>
-    <dgm:cxn modelId="{79185F44-6415-43D5-957F-294E77A373C5}" type="presOf" srcId="{F73F6B60-F387-4B00-AF21-983EFA908F3B}" destId="{824F19CC-5252-49CF-BB92-9DDE5C78A83D}" srcOrd="0" destOrd="0" presId="urn:diagrams.loki3.com/BracketList"/>
-    <dgm:cxn modelId="{CBDABCD5-9B7D-42F1-9295-22DC73E2FDB0}" srcId="{67AAB135-0D51-4F78-B9C5-116756FDD4FD}" destId="{20D280F0-91E7-42CA-9A03-571050C0CB16}" srcOrd="1" destOrd="0" parTransId="{731ED404-621E-4ED2-85AD-DF4BDFC2D3BD}" sibTransId="{C2E8C2C7-E4B0-46E1-AD5C-037C095ABDF0}"/>
-    <dgm:cxn modelId="{AEBFEC2D-8855-4E2E-BEE0-C2AC6A2AD198}" type="presOf" srcId="{D12CF5CC-B0AB-4657-8BC8-05A2DA36F5F4}" destId="{16433D64-952C-4A31-983D-1017B3C32C47}" srcOrd="0" destOrd="0" presId="urn:diagrams.loki3.com/BracketList"/>
-    <dgm:cxn modelId="{F6B286A8-B838-48A2-8EA3-C6AA8D365595}" srcId="{E5D331DA-30E0-4D9E-AF95-9BED1C00B881}" destId="{F73F6B60-F387-4B00-AF21-983EFA908F3B}" srcOrd="0" destOrd="0" parTransId="{66BC6DEB-3BCA-40D4-BBDB-03469584A26B}" sibTransId="{F9A40652-90E5-4569-99B1-02A0DB0C497F}"/>
+    <dgm:cxn modelId="{F0A4654E-4223-438B-A830-452AC96E48E2}" type="presOf" srcId="{20D280F0-91E7-42CA-9A03-571050C0CB16}" destId="{051F707C-CB75-4D21-8C13-082BD2FF2D14}" srcOrd="0" destOrd="1" presId="urn:diagrams.loki3.com/BracketList"/>
     <dgm:cxn modelId="{175A0D4F-E174-43F2-8F85-B67FCA281E1A}" srcId="{CFC255E3-F313-4F68-A8BE-AA9A0E7B2920}" destId="{DFD7F550-E826-4DB8-852E-70462049B908}" srcOrd="0" destOrd="0" parTransId="{F769BD8D-0698-445D-897D-E2A2FA3FF3AC}" sibTransId="{DD95DAB0-10DD-49AD-A13D-0FF303E43A7B}"/>
+    <dgm:cxn modelId="{BEBC4F50-0997-43E0-A4F6-3DCF33909B4C}" srcId="{D4570B03-06D1-496E-940D-E834C1A39D15}" destId="{B6EA1160-7F8A-4126-8376-C44E264E6EA1}" srcOrd="2" destOrd="0" parTransId="{C4A29E89-B10D-4EE9-817D-665085164D56}" sibTransId="{78A00466-42E4-4EC0-9E29-CCB271DF42F4}"/>
     <dgm:cxn modelId="{91C5D652-BEDF-41BC-8F3B-05BE92152759}" type="presOf" srcId="{96D22CE3-E99B-43B7-A890-8B3328F8E2E0}" destId="{824F19CC-5252-49CF-BB92-9DDE5C78A83D}" srcOrd="0" destOrd="1" presId="urn:diagrams.loki3.com/BracketList"/>
-    <dgm:cxn modelId="{81E2E479-FF41-415B-B38F-7F0297466D91}" type="presOf" srcId="{D4570B03-06D1-496E-940D-E834C1A39D15}" destId="{49162F80-9F02-44A6-B8BB-9C145D32E9A6}" srcOrd="0" destOrd="0" presId="urn:diagrams.loki3.com/BracketList"/>
-    <dgm:cxn modelId="{48925DAF-9D7D-48B1-915F-91E9E63EDFE3}" type="presOf" srcId="{016B6379-197D-4014-BBB5-7272361FA5ED}" destId="{A85E5853-DBE3-4294-93EB-D0C052772C14}" srcOrd="0" destOrd="0" presId="urn:diagrams.loki3.com/BracketList"/>
     <dgm:cxn modelId="{84B90654-B9B2-4F49-B93C-7AB9B1513360}" type="presOf" srcId="{CFC255E3-F313-4F68-A8BE-AA9A0E7B2920}" destId="{1988FC77-CF36-4CB7-8B74-1CB63D2CB4BE}" srcOrd="0" destOrd="0" presId="urn:diagrams.loki3.com/BracketList"/>
     <dgm:cxn modelId="{A9446154-ADD1-42B0-A05A-FEA847BCBE80}" type="presOf" srcId="{DFD7F550-E826-4DB8-852E-70462049B908}" destId="{A5768B98-F77A-4129-ACD5-EDDCB6DCE048}" srcOrd="0" destOrd="0" presId="urn:diagrams.loki3.com/BracketList"/>
     <dgm:cxn modelId="{35C42657-DB4D-4E59-9BB6-9C2A11020C13}" srcId="{B6EA1160-7F8A-4126-8376-C44E264E6EA1}" destId="{016B6379-197D-4014-BBB5-7272361FA5ED}" srcOrd="0" destOrd="0" parTransId="{8D526268-2F08-4285-9EEA-ACD0B693F879}" sibTransId="{791199FC-FDB9-4DE9-A0A6-52879619A3C8}"/>
+    <dgm:cxn modelId="{81E2E479-FF41-415B-B38F-7F0297466D91}" type="presOf" srcId="{D4570B03-06D1-496E-940D-E834C1A39D15}" destId="{49162F80-9F02-44A6-B8BB-9C145D32E9A6}" srcOrd="0" destOrd="0" presId="urn:diagrams.loki3.com/BracketList"/>
+    <dgm:cxn modelId="{51656E9E-C438-4269-8BAA-86F019163B07}" srcId="{D4570B03-06D1-496E-940D-E834C1A39D15}" destId="{DE0D542D-D583-46F8-AF81-5963C844620D}" srcOrd="0" destOrd="0" parTransId="{C8EF2553-001E-4794-9586-0CDE54007ADD}" sibTransId="{FB29F8EB-EE92-45C5-8BCF-B06C4D9BC7DC}"/>
+    <dgm:cxn modelId="{F6B286A8-B838-48A2-8EA3-C6AA8D365595}" srcId="{E5D331DA-30E0-4D9E-AF95-9BED1C00B881}" destId="{F73F6B60-F387-4B00-AF21-983EFA908F3B}" srcOrd="0" destOrd="0" parTransId="{66BC6DEB-3BCA-40D4-BBDB-03469584A26B}" sibTransId="{F9A40652-90E5-4569-99B1-02A0DB0C497F}"/>
+    <dgm:cxn modelId="{48925DAF-9D7D-48B1-915F-91E9E63EDFE3}" type="presOf" srcId="{016B6379-197D-4014-BBB5-7272361FA5ED}" destId="{A85E5853-DBE3-4294-93EB-D0C052772C14}" srcOrd="0" destOrd="0" presId="urn:diagrams.loki3.com/BracketList"/>
+    <dgm:cxn modelId="{8CD274B0-EC7A-409C-AB2D-56C7534B144B}" type="presOf" srcId="{E5D331DA-30E0-4D9E-AF95-9BED1C00B881}" destId="{51EE0D49-AD04-4513-87AC-4148C700764C}" srcOrd="0" destOrd="0" presId="urn:diagrams.loki3.com/BracketList"/>
+    <dgm:cxn modelId="{99E6DEB9-6BD5-4EFC-87D0-EC8AA52BEB00}" srcId="{39F54975-3C18-4047-B841-1E5ED79DA055}" destId="{E382FAAA-4FB2-477A-98B3-A2A120BAC348}" srcOrd="0" destOrd="0" parTransId="{A26A0720-9BE4-44E9-89C9-7F9980634043}" sibTransId="{92B8D365-A3DA-4EE7-BA70-DC7D10A7653D}"/>
+    <dgm:cxn modelId="{56A8B0BB-481F-4E64-8165-87BB69F9A22B}" srcId="{D4570B03-06D1-496E-940D-E834C1A39D15}" destId="{67AAB135-0D51-4F78-B9C5-116756FDD4FD}" srcOrd="6" destOrd="0" parTransId="{0764D504-CB07-4071-9A74-C38D1F4EC718}" sibTransId="{AE1B9AE7-854E-4E8A-9B49-3CA8614B49B7}"/>
+    <dgm:cxn modelId="{E8C2E0BE-83B9-42FF-9F2F-0017F48DCA71}" srcId="{DE0D542D-D583-46F8-AF81-5963C844620D}" destId="{B410AD1F-A2B3-49B3-8BE2-CA1B2963672B}" srcOrd="1" destOrd="0" parTransId="{703C4DDF-2819-43E6-95F5-DEA0F213ACDA}" sibTransId="{CCBF6D02-9F0B-4236-9549-FD1FC07A5984}"/>
     <dgm:cxn modelId="{06F5ADC8-64CC-416E-A504-58BD95BE6371}" type="presOf" srcId="{D19DA2C2-DBED-4C48-A059-92B1F02E952E}" destId="{2E54DBD1-1915-453C-B205-7D57F6596F56}" srcOrd="0" destOrd="1" presId="urn:diagrams.loki3.com/BracketList"/>
-    <dgm:cxn modelId="{3456690B-B173-48B8-86F7-97252F1597D5}" srcId="{E5D331DA-30E0-4D9E-AF95-9BED1C00B881}" destId="{96D22CE3-E99B-43B7-A890-8B3328F8E2E0}" srcOrd="1" destOrd="0" parTransId="{3DA8366F-C933-44CA-ADDF-18F73189EA6A}" sibTransId="{A42478D0-807D-4203-8347-8182C244F189}"/>
-    <dgm:cxn modelId="{8FE8D121-64DD-4D0A-B1E3-B860DA31B65D}" type="presOf" srcId="{67AAB135-0D51-4F78-B9C5-116756FDD4FD}" destId="{E4B80767-5737-4482-A6AF-D1C6CDF122DC}" srcOrd="0" destOrd="0" presId="urn:diagrams.loki3.com/BracketList"/>
-    <dgm:cxn modelId="{C2E89A0B-866F-45C1-9E43-09B489A3A4E8}" srcId="{D4570B03-06D1-496E-940D-E834C1A39D15}" destId="{39F54975-3C18-4047-B841-1E5ED79DA055}" srcOrd="5" destOrd="0" parTransId="{CEC1D58E-1AB3-4E72-A00C-84BAD892CD40}" sibTransId="{5DDE273F-5EAF-4DCF-9576-3CC5E69C990E}"/>
-    <dgm:cxn modelId="{86FD203E-7063-4D5F-A35C-3598D65669ED}" srcId="{02D6A755-2659-4714-A019-A60BD2DBF44D}" destId="{9357E48B-E7E0-4CA0-9ABC-FF0F47D16FFF}" srcOrd="0" destOrd="0" parTransId="{7581C13E-E6C9-4383-A784-20E62B70B3DC}" sibTransId="{F31CFC71-E692-4437-B605-955BBEFE5B3C}"/>
-    <dgm:cxn modelId="{CED7CC02-254C-4CB5-AA30-2B25713B0DE9}" srcId="{02D6A755-2659-4714-A019-A60BD2DBF44D}" destId="{D19DA2C2-DBED-4C48-A059-92B1F02E952E}" srcOrd="1" destOrd="0" parTransId="{2411435A-2DED-45FE-BAF2-EA5E2BAB2221}" sibTransId="{8B1C7915-ACF1-48A9-8CBC-03BA5CAA0EC8}"/>
-    <dgm:cxn modelId="{D60FD02C-D5E8-494B-B039-6EEC522D73AE}" type="presOf" srcId="{B8004FBE-713E-4F15-8885-85B9EA6E9A18}" destId="{051F707C-CB75-4D21-8C13-082BD2FF2D14}" srcOrd="0" destOrd="0" presId="urn:diagrams.loki3.com/BracketList"/>
-    <dgm:cxn modelId="{F0A4654E-4223-438B-A830-452AC96E48E2}" type="presOf" srcId="{20D280F0-91E7-42CA-9A03-571050C0CB16}" destId="{051F707C-CB75-4D21-8C13-082BD2FF2D14}" srcOrd="0" destOrd="1" presId="urn:diagrams.loki3.com/BracketList"/>
+    <dgm:cxn modelId="{CBDABCD5-9B7D-42F1-9295-22DC73E2FDB0}" srcId="{67AAB135-0D51-4F78-B9C5-116756FDD4FD}" destId="{20D280F0-91E7-42CA-9A03-571050C0CB16}" srcOrd="1" destOrd="0" parTransId="{731ED404-621E-4ED2-85AD-DF4BDFC2D3BD}" sibTransId="{C2E8C2C7-E4B0-46E1-AD5C-037C095ABDF0}"/>
     <dgm:cxn modelId="{E5D3C6D9-77FA-4A53-B8D1-9AFC12914D57}" srcId="{D4570B03-06D1-496E-940D-E834C1A39D15}" destId="{E5D331DA-30E0-4D9E-AF95-9BED1C00B881}" srcOrd="3" destOrd="0" parTransId="{0EEC3D0D-1968-4D98-B1E4-5BE2E7C9D046}" sibTransId="{0D12E0D9-447A-4318-A2D1-567184552CEB}"/>
-    <dgm:cxn modelId="{253CA61A-3D10-40C6-A6A5-EB9F6A55F5B0}" type="presOf" srcId="{E382FAAA-4FB2-477A-98B3-A2A120BAC348}" destId="{68C4F1F0-2F56-483B-8104-BEA79A7538A1}" srcOrd="0" destOrd="0" presId="urn:diagrams.loki3.com/BracketList"/>
-    <dgm:cxn modelId="{E8C2E0BE-83B9-42FF-9F2F-0017F48DCA71}" srcId="{DE0D542D-D583-46F8-AF81-5963C844620D}" destId="{B410AD1F-A2B3-49B3-8BE2-CA1B2963672B}" srcOrd="1" destOrd="0" parTransId="{703C4DDF-2819-43E6-95F5-DEA0F213ACDA}" sibTransId="{CCBF6D02-9F0B-4236-9549-FD1FC07A5984}"/>
     <dgm:cxn modelId="{A96622E3-BC84-4F67-BC21-F7E183C9238B}" srcId="{CFC255E3-F313-4F68-A8BE-AA9A0E7B2920}" destId="{EF4D839F-1954-4FEA-BC1D-6A6FE5E5C4E4}" srcOrd="1" destOrd="0" parTransId="{ABA9D00D-FA58-4C5C-A960-9BF9EC11A01B}" sibTransId="{BFF19C4C-6C38-488B-B9A1-292A32DD8C60}"/>
-    <dgm:cxn modelId="{99E6DEB9-6BD5-4EFC-87D0-EC8AA52BEB00}" srcId="{39F54975-3C18-4047-B841-1E5ED79DA055}" destId="{E382FAAA-4FB2-477A-98B3-A2A120BAC348}" srcOrd="0" destOrd="0" parTransId="{A26A0720-9BE4-44E9-89C9-7F9980634043}" sibTransId="{92B8D365-A3DA-4EE7-BA70-DC7D10A7653D}"/>
+    <dgm:cxn modelId="{E4C5A6E7-BD51-49BE-B462-C60D6912FD6F}" type="presOf" srcId="{B6EA1160-7F8A-4126-8376-C44E264E6EA1}" destId="{4D2CC661-966E-4BA4-843D-A1C1153050D7}" srcOrd="0" destOrd="0" presId="urn:diagrams.loki3.com/BracketList"/>
+    <dgm:cxn modelId="{AD4ED5EC-FC39-42A5-BC4B-7545101D5B7F}" type="presOf" srcId="{02D6A755-2659-4714-A019-A60BD2DBF44D}" destId="{AC2B96A3-ADBA-40C0-B958-7DDD08E7D4E8}" srcOrd="0" destOrd="0" presId="urn:diagrams.loki3.com/BracketList"/>
+    <dgm:cxn modelId="{E148A8F3-3E98-4E38-A6A3-BF7236721D64}" type="presOf" srcId="{EF4D839F-1954-4FEA-BC1D-6A6FE5E5C4E4}" destId="{A5768B98-F77A-4129-ACD5-EDDCB6DCE048}" srcOrd="0" destOrd="1" presId="urn:diagrams.loki3.com/BracketList"/>
+    <dgm:cxn modelId="{38475AF4-CAB8-417F-B300-5B7AFA14E6E2}" srcId="{D4570B03-06D1-496E-940D-E834C1A39D15}" destId="{CFC255E3-F313-4F68-A8BE-AA9A0E7B2920}" srcOrd="4" destOrd="0" parTransId="{80D5B58A-7533-437A-907C-7A96D4C934CD}" sibTransId="{AF699248-E40C-4F45-8095-1040C5E7766E}"/>
     <dgm:cxn modelId="{C7CA2681-FAC3-474C-B622-629EB19F99E9}" type="presParOf" srcId="{49162F80-9F02-44A6-B8BB-9C145D32E9A6}" destId="{93D76702-C2A8-4552-960B-C2CCD4981C99}" srcOrd="0" destOrd="0" presId="urn:diagrams.loki3.com/BracketList"/>
     <dgm:cxn modelId="{38CA16D5-C4E9-4454-9705-C78453B60C5A}" type="presParOf" srcId="{93D76702-C2A8-4552-960B-C2CCD4981C99}" destId="{EEF1E03F-C7C5-4626-9C13-2E78DD1D4267}" srcOrd="0" destOrd="0" presId="urn:diagrams.loki3.com/BracketList"/>
     <dgm:cxn modelId="{E10DDCF7-A95D-4D15-B04C-07349A4D6BCA}" type="presParOf" srcId="{93D76702-C2A8-4552-960B-C2CCD4981C99}" destId="{A26B1DE6-CF11-4DDE-B44C-06D2D40056A5}" srcOrd="1" destOrd="0" presId="urn:diagrams.loki3.com/BracketList"/>
@@ -2928,7 +2824,7 @@
         <a:lstStyle/>
         <a:p>
           <a:r>
-            <a:rPr lang="en-US" b="1" dirty="0" smtClean="0"/>
+            <a:rPr lang="en-US" b="1" dirty="0"/>
             <a:t>Reduce Manual Specification Search</a:t>
           </a:r>
           <a:endParaRPr lang="en-US" dirty="0"/>
@@ -2965,7 +2861,7 @@
         <a:lstStyle/>
         <a:p>
           <a:r>
-            <a:rPr lang="en-US" b="1" dirty="0" smtClean="0"/>
+            <a:rPr lang="en-US" b="1" dirty="0"/>
             <a:t>Accelerate Engineering Decision-Making</a:t>
           </a:r>
           <a:endParaRPr lang="en-US" dirty="0"/>
@@ -3002,7 +2898,7 @@
         <a:lstStyle/>
         <a:p>
           <a:r>
-            <a:rPr lang="en-US" b="1" dirty="0" smtClean="0"/>
+            <a:rPr lang="en-US" b="1" dirty="0"/>
             <a:t>Reduce Risk of AI Hallucination</a:t>
           </a:r>
           <a:endParaRPr lang="en-US" dirty="0"/>
@@ -3039,7 +2935,7 @@
         <a:lstStyle/>
         <a:p>
           <a:r>
-            <a:rPr lang="en-US" b="1" dirty="0" smtClean="0"/>
+            <a:rPr lang="en-US" b="1" dirty="0"/>
             <a:t>Ensure Accurate &amp; Traceable Answers</a:t>
           </a:r>
           <a:endParaRPr lang="en-US" dirty="0"/>
@@ -3076,7 +2972,7 @@
         <a:lstStyle/>
         <a:p>
           <a:r>
-            <a:rPr lang="en-US" b="1" dirty="0" smtClean="0"/>
+            <a:rPr lang="en-US" b="1" dirty="0"/>
             <a:t>Fully local LLM Assistant</a:t>
           </a:r>
           <a:endParaRPr lang="en-US" dirty="0"/>
@@ -3146,13 +3042,6 @@
         </dgm:presLayoutVars>
       </dgm:prSet>
       <dgm:spPr/>
-      <dgm:t>
-        <a:bodyPr/>
-        <a:lstStyle/>
-        <a:p>
-          <a:endParaRPr lang="en-US"/>
-        </a:p>
-      </dgm:t>
     </dgm:pt>
     <dgm:pt modelId="{6C4B9D21-0CE3-402E-AA54-E70AE14F414C}" type="pres">
       <dgm:prSet presAssocID="{16F1512C-36DE-4EB2-83E2-C9C317C33CB2}" presName="accent_1" presStyleCnt="0"/>
@@ -3217,13 +3106,6 @@
         </dgm:presLayoutVars>
       </dgm:prSet>
       <dgm:spPr/>
-      <dgm:t>
-        <a:bodyPr/>
-        <a:lstStyle/>
-        <a:p>
-          <a:endParaRPr lang="en-US"/>
-        </a:p>
-      </dgm:t>
     </dgm:pt>
     <dgm:pt modelId="{CF3A6F99-3A64-4F47-85E9-4FABB835A844}" type="pres">
       <dgm:prSet presAssocID="{42415DEF-5B9C-4827-BBE3-7DB741280272}" presName="accent_5" presStyleCnt="0"/>
@@ -3235,18 +3117,18 @@
     </dgm:pt>
   </dgm:ptLst>
   <dgm:cxnLst>
+    <dgm:cxn modelId="{8F1C0709-BBF5-4764-9B45-B04E34D8A1ED}" srcId="{94F4DF53-25FF-454C-9942-5E1B04D1201F}" destId="{EC814C30-DCF8-4487-901B-69A9BDBEA86D}" srcOrd="2" destOrd="0" parTransId="{E2975B38-326B-4945-A28C-73A6DEFD7BFB}" sibTransId="{74DC6479-E69C-460E-9BAF-E5A327730A12}"/>
+    <dgm:cxn modelId="{F15BF91C-F4B1-4D4A-BFB0-F46F0EF460B0}" type="presOf" srcId="{94F4DF53-25FF-454C-9942-5E1B04D1201F}" destId="{A1DE103F-597B-47A3-8FF7-8F744A92C1F6}" srcOrd="0" destOrd="0" presId="urn:microsoft.com/office/officeart/2008/layout/VerticalCurvedList"/>
+    <dgm:cxn modelId="{F0CC312E-B906-403A-A93D-9BC4AF3D92E4}" type="presOf" srcId="{B3C686C6-0011-47D2-BEAA-C3D2F7991C03}" destId="{661A612B-48A1-4CB4-B023-5F3822CDC865}" srcOrd="0" destOrd="0" presId="urn:microsoft.com/office/officeart/2008/layout/VerticalCurvedList"/>
+    <dgm:cxn modelId="{0EF3CF35-4B7E-46DF-AF16-12B05FD86CE7}" srcId="{94F4DF53-25FF-454C-9942-5E1B04D1201F}" destId="{16F1512C-36DE-4EB2-83E2-C9C317C33CB2}" srcOrd="0" destOrd="0" parTransId="{67B97BF2-5446-4E1D-9C07-04EC3ABCCECF}" sibTransId="{AAFFD448-153D-448D-8596-EF57C947B64A}"/>
+    <dgm:cxn modelId="{894C789A-F517-4F56-9424-0AD519D7E722}" type="presOf" srcId="{42415DEF-5B9C-4827-BBE3-7DB741280272}" destId="{9882DC6A-7DF9-4FCB-977D-75C284B6928A}" srcOrd="0" destOrd="0" presId="urn:microsoft.com/office/officeart/2008/layout/VerticalCurvedList"/>
     <dgm:cxn modelId="{2CE41FAA-C126-4C12-ACAE-DDAF7213589C}" srcId="{94F4DF53-25FF-454C-9942-5E1B04D1201F}" destId="{B3C686C6-0011-47D2-BEAA-C3D2F7991C03}" srcOrd="1" destOrd="0" parTransId="{63E9AB13-BBF0-4C8D-BE75-C16893ABF49E}" sibTransId="{55499C66-5AE0-4025-929C-3D0AA25A74B4}"/>
-    <dgm:cxn modelId="{F0CC312E-B906-403A-A93D-9BC4AF3D92E4}" type="presOf" srcId="{B3C686C6-0011-47D2-BEAA-C3D2F7991C03}" destId="{661A612B-48A1-4CB4-B023-5F3822CDC865}" srcOrd="0" destOrd="0" presId="urn:microsoft.com/office/officeart/2008/layout/VerticalCurvedList"/>
-    <dgm:cxn modelId="{894C789A-F517-4F56-9424-0AD519D7E722}" type="presOf" srcId="{42415DEF-5B9C-4827-BBE3-7DB741280272}" destId="{9882DC6A-7DF9-4FCB-977D-75C284B6928A}" srcOrd="0" destOrd="0" presId="urn:microsoft.com/office/officeart/2008/layout/VerticalCurvedList"/>
-    <dgm:cxn modelId="{F15BF91C-F4B1-4D4A-BFB0-F46F0EF460B0}" type="presOf" srcId="{94F4DF53-25FF-454C-9942-5E1B04D1201F}" destId="{A1DE103F-597B-47A3-8FF7-8F744A92C1F6}" srcOrd="0" destOrd="0" presId="urn:microsoft.com/office/officeart/2008/layout/VerticalCurvedList"/>
     <dgm:cxn modelId="{A70355B5-ED0A-483A-9544-0BE959253F96}" srcId="{94F4DF53-25FF-454C-9942-5E1B04D1201F}" destId="{902C23CE-B9DA-4135-A67A-890F22B54EE9}" srcOrd="3" destOrd="0" parTransId="{A34B2880-3286-46F9-A037-090254B58252}" sibTransId="{B919B6FD-51D9-47CE-B947-AA347F400D95}"/>
-    <dgm:cxn modelId="{4F137EF5-8600-421F-A9E7-A4198CBA092C}" type="presOf" srcId="{AAFFD448-153D-448D-8596-EF57C947B64A}" destId="{B56D14D6-3CD0-4865-B385-11B962D7A7A5}" srcOrd="0" destOrd="0" presId="urn:microsoft.com/office/officeart/2008/layout/VerticalCurvedList"/>
-    <dgm:cxn modelId="{0EF3CF35-4B7E-46DF-AF16-12B05FD86CE7}" srcId="{94F4DF53-25FF-454C-9942-5E1B04D1201F}" destId="{16F1512C-36DE-4EB2-83E2-C9C317C33CB2}" srcOrd="0" destOrd="0" parTransId="{67B97BF2-5446-4E1D-9C07-04EC3ABCCECF}" sibTransId="{AAFFD448-153D-448D-8596-EF57C947B64A}"/>
-    <dgm:cxn modelId="{5BC36AEB-CB38-4C0B-BF87-6EB04A3D1A0B}" srcId="{94F4DF53-25FF-454C-9942-5E1B04D1201F}" destId="{42415DEF-5B9C-4827-BBE3-7DB741280272}" srcOrd="4" destOrd="0" parTransId="{7A8B2A1E-08A6-40D0-8E02-774B94B9A310}" sibTransId="{71ADB649-F768-4C9B-946A-CBD289261D6C}"/>
-    <dgm:cxn modelId="{F4DCC8F9-682F-4DD1-A9CA-0440A7DF3EAD}" type="presOf" srcId="{16F1512C-36DE-4EB2-83E2-C9C317C33CB2}" destId="{23102864-F17C-4A78-BB5E-52FA32DEB2F6}" srcOrd="0" destOrd="0" presId="urn:microsoft.com/office/officeart/2008/layout/VerticalCurvedList"/>
-    <dgm:cxn modelId="{8F1C0709-BBF5-4764-9B45-B04E34D8A1ED}" srcId="{94F4DF53-25FF-454C-9942-5E1B04D1201F}" destId="{EC814C30-DCF8-4487-901B-69A9BDBEA86D}" srcOrd="2" destOrd="0" parTransId="{E2975B38-326B-4945-A28C-73A6DEFD7BFB}" sibTransId="{74DC6479-E69C-460E-9BAF-E5A327730A12}"/>
     <dgm:cxn modelId="{2D45FEBE-2BB4-44F7-A2A0-50E790D46F9F}" type="presOf" srcId="{902C23CE-B9DA-4135-A67A-890F22B54EE9}" destId="{B8BA84E8-6AD1-43E8-89AF-B86421E1D901}" srcOrd="0" destOrd="0" presId="urn:microsoft.com/office/officeart/2008/layout/VerticalCurvedList"/>
     <dgm:cxn modelId="{775B4AE3-EE29-4693-95F0-75CD78BB5E0E}" type="presOf" srcId="{EC814C30-DCF8-4487-901B-69A9BDBEA86D}" destId="{2E6FB2E9-F038-42B2-B098-4A484B72D349}" srcOrd="0" destOrd="0" presId="urn:microsoft.com/office/officeart/2008/layout/VerticalCurvedList"/>
+    <dgm:cxn modelId="{5BC36AEB-CB38-4C0B-BF87-6EB04A3D1A0B}" srcId="{94F4DF53-25FF-454C-9942-5E1B04D1201F}" destId="{42415DEF-5B9C-4827-BBE3-7DB741280272}" srcOrd="4" destOrd="0" parTransId="{7A8B2A1E-08A6-40D0-8E02-774B94B9A310}" sibTransId="{71ADB649-F768-4C9B-946A-CBD289261D6C}"/>
+    <dgm:cxn modelId="{4F137EF5-8600-421F-A9E7-A4198CBA092C}" type="presOf" srcId="{AAFFD448-153D-448D-8596-EF57C947B64A}" destId="{B56D14D6-3CD0-4865-B385-11B962D7A7A5}" srcOrd="0" destOrd="0" presId="urn:microsoft.com/office/officeart/2008/layout/VerticalCurvedList"/>
+    <dgm:cxn modelId="{F4DCC8F9-682F-4DD1-A9CA-0440A7DF3EAD}" type="presOf" srcId="{16F1512C-36DE-4EB2-83E2-C9C317C33CB2}" destId="{23102864-F17C-4A78-BB5E-52FA32DEB2F6}" srcOrd="0" destOrd="0" presId="urn:microsoft.com/office/officeart/2008/layout/VerticalCurvedList"/>
     <dgm:cxn modelId="{6607B9DC-D292-4A78-AE97-5F2786E91423}" type="presParOf" srcId="{A1DE103F-597B-47A3-8FF7-8F744A92C1F6}" destId="{58E6185E-5142-4F18-8924-380B672D9E43}" srcOrd="0" destOrd="0" presId="urn:microsoft.com/office/officeart/2008/layout/VerticalCurvedList"/>
     <dgm:cxn modelId="{CC6E9527-5666-4990-B49E-BDB0F333A72C}" type="presParOf" srcId="{58E6185E-5142-4F18-8924-380B672D9E43}" destId="{A4A6B6CE-0F99-498B-BACD-62BE11CC06D1}" srcOrd="0" destOrd="0" presId="urn:microsoft.com/office/officeart/2008/layout/VerticalCurvedList"/>
     <dgm:cxn modelId="{F5482DE1-C93C-439C-B472-1921EE626899}" type="presParOf" srcId="{A4A6B6CE-0F99-498B-BACD-62BE11CC06D1}" destId="{88D9CFA6-0DAF-4850-89E6-975D69B2B682}" srcOrd="0" destOrd="0" presId="urn:microsoft.com/office/officeart/2008/layout/VerticalCurvedList"/>
@@ -3324,7 +3206,7 @@
         </a:bodyPr>
         <a:lstStyle/>
         <a:p>
-          <a:pPr lvl="0" algn="l" defTabSz="311150">
+          <a:pPr marL="0" lvl="0" indent="0" algn="l" defTabSz="311150">
             <a:lnSpc>
               <a:spcPct val="90000"/>
             </a:lnSpc>
@@ -3334,6 +3216,7 @@
             <a:spcAft>
               <a:spcPct val="35000"/>
             </a:spcAft>
+            <a:buNone/>
           </a:pPr>
           <a:endParaRPr lang="en-US" sz="700" kern="1200" dirty="0"/>
         </a:p>
@@ -3489,10 +3372,10 @@
             <a:spcAft>
               <a:spcPct val="15000"/>
             </a:spcAft>
-            <a:buChar char="••"/>
+            <a:buChar char="•"/>
           </a:pPr>
           <a:r>
-            <a:rPr lang="en-US" sz="1000" b="0" i="0" kern="1200" dirty="0" smtClean="0"/>
+            <a:rPr lang="en-US" sz="1000" b="0" i="0" kern="1200" dirty="0"/>
             <a:t>Table Extraction</a:t>
           </a:r>
           <a:endParaRPr lang="en-US" sz="1000" kern="1200" dirty="0"/>
@@ -3508,10 +3391,10 @@
             <a:spcAft>
               <a:spcPct val="15000"/>
             </a:spcAft>
-            <a:buChar char="••"/>
+            <a:buChar char="•"/>
           </a:pPr>
           <a:r>
-            <a:rPr lang="en-US" sz="1000" b="0" i="0" kern="1200" dirty="0" smtClean="0"/>
+            <a:rPr lang="en-US" sz="1000" b="0" i="0" kern="1200" dirty="0"/>
             <a:t>Header Stripping</a:t>
           </a:r>
           <a:endParaRPr lang="en-US" sz="1000" kern="1200" dirty="0"/>
@@ -3559,7 +3442,7 @@
         </a:bodyPr>
         <a:lstStyle/>
         <a:p>
-          <a:pPr lvl="0" algn="l" defTabSz="466725">
+          <a:pPr marL="0" lvl="0" indent="0" algn="l" defTabSz="466725">
             <a:lnSpc>
               <a:spcPct val="90000"/>
             </a:lnSpc>
@@ -3569,6 +3452,7 @@
             <a:spcAft>
               <a:spcPct val="35000"/>
             </a:spcAft>
+            <a:buNone/>
           </a:pPr>
           <a:endParaRPr lang="en-US" sz="1050" b="0" i="0" kern="1200" dirty="0">
             <a:latin typeface="Arial Black" panose="020B0A04020102020204" pitchFamily="34" charset="0"/>
@@ -3726,10 +3610,10 @@
             <a:spcAft>
               <a:spcPct val="15000"/>
             </a:spcAft>
-            <a:buChar char="••"/>
+            <a:buChar char="•"/>
           </a:pPr>
           <a:r>
-            <a:rPr lang="en-US" sz="1000" b="0" i="0" kern="1200" dirty="0" smtClean="0"/>
+            <a:rPr lang="en-US" sz="1000" b="0" i="0" kern="1200" dirty="0"/>
             <a:t>Section-Aware Splitting</a:t>
           </a:r>
           <a:endParaRPr lang="en-US" sz="1000" kern="1200" dirty="0"/>
@@ -3745,10 +3629,10 @@
             <a:spcAft>
               <a:spcPct val="15000"/>
             </a:spcAft>
-            <a:buChar char="••"/>
+            <a:buChar char="•"/>
           </a:pPr>
           <a:r>
-            <a:rPr lang="en-US" sz="1000" b="0" i="0" kern="1200" dirty="0" smtClean="0"/>
+            <a:rPr lang="en-US" sz="1000" b="0" i="0" kern="1200" dirty="0"/>
             <a:t>Optimal Sizing</a:t>
           </a:r>
           <a:endParaRPr lang="en-US" sz="1000" kern="1200" dirty="0"/>
@@ -3796,7 +3680,7 @@
         </a:bodyPr>
         <a:lstStyle/>
         <a:p>
-          <a:pPr lvl="0" algn="l" defTabSz="266700">
+          <a:pPr marL="0" lvl="0" indent="0" algn="l" defTabSz="266700">
             <a:lnSpc>
               <a:spcPct val="90000"/>
             </a:lnSpc>
@@ -3806,6 +3690,7 @@
             <a:spcAft>
               <a:spcPct val="35000"/>
             </a:spcAft>
+            <a:buNone/>
           </a:pPr>
           <a:endParaRPr lang="en-US" sz="600" kern="1200" dirty="0"/>
         </a:p>
@@ -3961,10 +3846,10 @@
             <a:spcAft>
               <a:spcPct val="15000"/>
             </a:spcAft>
-            <a:buChar char="••"/>
+            <a:buChar char="•"/>
           </a:pPr>
           <a:r>
-            <a:rPr lang="en-US" sz="1000" b="0" i="0" kern="1200" dirty="0" smtClean="0"/>
+            <a:rPr lang="en-US" sz="1000" b="0" i="0" kern="1200" dirty="0"/>
             <a:t>Fully Local Execution</a:t>
           </a:r>
           <a:endParaRPr lang="en-US" sz="1000" kern="1200" dirty="0"/>
@@ -4012,7 +3897,7 @@
         </a:bodyPr>
         <a:lstStyle/>
         <a:p>
-          <a:pPr lvl="0" algn="l" defTabSz="222250">
+          <a:pPr marL="0" lvl="0" indent="0" algn="l" defTabSz="222250">
             <a:lnSpc>
               <a:spcPct val="90000"/>
             </a:lnSpc>
@@ -4022,6 +3907,7 @@
             <a:spcAft>
               <a:spcPct val="35000"/>
             </a:spcAft>
+            <a:buNone/>
           </a:pPr>
           <a:endParaRPr lang="en-US" sz="500" kern="1200" dirty="0"/>
         </a:p>
@@ -4177,10 +4063,10 @@
             <a:spcAft>
               <a:spcPct val="15000"/>
             </a:spcAft>
-            <a:buChar char="••"/>
+            <a:buChar char="•"/>
           </a:pPr>
           <a:r>
-            <a:rPr lang="en-US" sz="1000" b="0" i="0" kern="1200" dirty="0" smtClean="0"/>
+            <a:rPr lang="en-US" sz="1000" b="0" i="0" kern="1200" dirty="0"/>
             <a:t>Zero Docker Setup</a:t>
           </a:r>
           <a:endParaRPr lang="en-US" sz="1000" kern="1200" dirty="0"/>
@@ -4196,10 +4082,10 @@
             <a:spcAft>
               <a:spcPct val="15000"/>
             </a:spcAft>
-            <a:buChar char="••"/>
+            <a:buChar char="•"/>
           </a:pPr>
           <a:r>
-            <a:rPr lang="en-US" sz="1000" b="0" i="0" kern="1200" dirty="0" smtClean="0"/>
+            <a:rPr lang="en-US" sz="1000" b="0" i="0" kern="1200" dirty="0"/>
             <a:t>Rich Metadata</a:t>
           </a:r>
           <a:endParaRPr lang="en-US" sz="1000" kern="1200" dirty="0"/>
@@ -4247,7 +4133,7 @@
         </a:bodyPr>
         <a:lstStyle/>
         <a:p>
-          <a:pPr lvl="0" algn="l" defTabSz="222250">
+          <a:pPr marL="0" lvl="0" indent="0" algn="l" defTabSz="222250">
             <a:lnSpc>
               <a:spcPct val="90000"/>
             </a:lnSpc>
@@ -4257,6 +4143,7 @@
             <a:spcAft>
               <a:spcPct val="35000"/>
             </a:spcAft>
+            <a:buNone/>
           </a:pPr>
           <a:endParaRPr lang="en-US" sz="500" kern="1200" dirty="0"/>
         </a:p>
@@ -4412,10 +4299,10 @@
             <a:spcAft>
               <a:spcPct val="15000"/>
             </a:spcAft>
-            <a:buChar char="••"/>
+            <a:buChar char="•"/>
           </a:pPr>
           <a:r>
-            <a:rPr lang="en-US" sz="1000" b="0" i="0" kern="1200" dirty="0" smtClean="0"/>
+            <a:rPr lang="en-US" sz="1000" b="0" i="0" kern="1200" dirty="0"/>
             <a:t>Precision Metadata Filtering</a:t>
           </a:r>
           <a:endParaRPr lang="en-US" sz="1000" kern="1200" dirty="0"/>
@@ -4431,10 +4318,10 @@
             <a:spcAft>
               <a:spcPct val="15000"/>
             </a:spcAft>
-            <a:buChar char="••"/>
+            <a:buChar char="•"/>
           </a:pPr>
           <a:r>
-            <a:rPr lang="en-US" sz="1000" b="0" i="0" kern="1200" dirty="0" smtClean="0"/>
+            <a:rPr lang="en-US" sz="1000" b="0" i="0" kern="1200" dirty="0"/>
             <a:t>Over-fetching</a:t>
           </a:r>
           <a:endParaRPr lang="en-US" sz="1000" kern="1200" dirty="0"/>
@@ -4482,7 +4369,7 @@
         </a:bodyPr>
         <a:lstStyle/>
         <a:p>
-          <a:pPr lvl="0" algn="l" defTabSz="488950">
+          <a:pPr marL="0" lvl="0" indent="0" algn="l" defTabSz="488950">
             <a:lnSpc>
               <a:spcPct val="90000"/>
             </a:lnSpc>
@@ -4492,6 +4379,7 @@
             <a:spcAft>
               <a:spcPct val="35000"/>
             </a:spcAft>
+            <a:buNone/>
           </a:pPr>
           <a:endParaRPr lang="en-US" sz="1100" kern="1200" dirty="0">
             <a:latin typeface="Arial Black" panose="020B0A04020102020204" pitchFamily="34" charset="0"/>
@@ -4649,10 +4537,10 @@
             <a:spcAft>
               <a:spcPct val="15000"/>
             </a:spcAft>
-            <a:buChar char="••"/>
+            <a:buChar char="•"/>
           </a:pPr>
           <a:r>
-            <a:rPr lang="en-US" sz="1000" b="0" i="0" kern="1200" dirty="0" smtClean="0"/>
+            <a:rPr lang="en-US" sz="1000" b="0" i="0" kern="1200" dirty="0"/>
             <a:t>Smart Filtering</a:t>
           </a:r>
           <a:endParaRPr lang="en-US" sz="1000" kern="1200" dirty="0"/>
@@ -4700,7 +4588,7 @@
         </a:bodyPr>
         <a:lstStyle/>
         <a:p>
-          <a:pPr lvl="0" algn="l" defTabSz="222250">
+          <a:pPr marL="0" lvl="0" indent="0" algn="l" defTabSz="222250">
             <a:lnSpc>
               <a:spcPct val="90000"/>
             </a:lnSpc>
@@ -4710,6 +4598,7 @@
             <a:spcAft>
               <a:spcPct val="35000"/>
             </a:spcAft>
+            <a:buNone/>
           </a:pPr>
           <a:endParaRPr lang="en-US" sz="500" kern="1200" dirty="0"/>
         </a:p>
@@ -4865,10 +4754,10 @@
             <a:spcAft>
               <a:spcPct val="15000"/>
             </a:spcAft>
-            <a:buChar char="••"/>
+            <a:buChar char="•"/>
           </a:pPr>
           <a:r>
-            <a:rPr lang="en-US" sz="1000" b="0" i="0" kern="1200" dirty="0" smtClean="0"/>
+            <a:rPr lang="en-US" sz="1000" b="0" i="0" kern="1200" dirty="0"/>
             <a:t>Anti-Hallucination Guardrails</a:t>
           </a:r>
           <a:endParaRPr lang="en-US" sz="1000" kern="1200" dirty="0"/>
@@ -4884,10 +4773,10 @@
             <a:spcAft>
               <a:spcPct val="15000"/>
             </a:spcAft>
-            <a:buChar char="••"/>
+            <a:buChar char="•"/>
           </a:pPr>
           <a:r>
-            <a:rPr lang="en-US" sz="1000" b="0" i="0" kern="1200" dirty="0" smtClean="0"/>
+            <a:rPr lang="en-US" sz="1000" b="0" i="0" kern="1200" dirty="0"/>
             <a:t>Strict Citations</a:t>
           </a:r>
           <a:endParaRPr lang="en-US" sz="1000" kern="1200" dirty="0"/>
@@ -5044,7 +4933,7 @@
         </a:bodyPr>
         <a:lstStyle/>
         <a:p>
-          <a:pPr lvl="0" algn="l" defTabSz="711200">
+          <a:pPr marL="0" lvl="0" indent="0" algn="l" defTabSz="711200">
             <a:lnSpc>
               <a:spcPct val="90000"/>
             </a:lnSpc>
@@ -5054,9 +4943,10 @@
             <a:spcAft>
               <a:spcPct val="35000"/>
             </a:spcAft>
+            <a:buNone/>
           </a:pPr>
           <a:r>
-            <a:rPr lang="en-US" sz="1600" b="1" kern="1200" dirty="0" smtClean="0"/>
+            <a:rPr lang="en-US" sz="1600" b="1" kern="1200" dirty="0"/>
             <a:t>Reduce Manual Specification Search</a:t>
           </a:r>
           <a:endParaRPr lang="en-US" sz="1600" kern="1200" dirty="0"/>
@@ -5210,7 +5100,7 @@
         </a:bodyPr>
         <a:lstStyle/>
         <a:p>
-          <a:pPr lvl="0" algn="l" defTabSz="711200">
+          <a:pPr marL="0" lvl="0" indent="0" algn="l" defTabSz="711200">
             <a:lnSpc>
               <a:spcPct val="90000"/>
             </a:lnSpc>
@@ -5220,9 +5110,10 @@
             <a:spcAft>
               <a:spcPct val="35000"/>
             </a:spcAft>
+            <a:buNone/>
           </a:pPr>
           <a:r>
-            <a:rPr lang="en-US" sz="1600" b="1" kern="1200" dirty="0" smtClean="0"/>
+            <a:rPr lang="en-US" sz="1600" b="1" kern="1200" dirty="0"/>
             <a:t>Accelerate Engineering Decision-Making</a:t>
           </a:r>
           <a:endParaRPr lang="en-US" sz="1600" kern="1200" dirty="0"/>
@@ -5376,7 +5267,7 @@
         </a:bodyPr>
         <a:lstStyle/>
         <a:p>
-          <a:pPr lvl="0" algn="l" defTabSz="711200">
+          <a:pPr marL="0" lvl="0" indent="0" algn="l" defTabSz="711200">
             <a:lnSpc>
               <a:spcPct val="90000"/>
             </a:lnSpc>
@@ -5386,9 +5277,10 @@
             <a:spcAft>
               <a:spcPct val="35000"/>
             </a:spcAft>
+            <a:buNone/>
           </a:pPr>
           <a:r>
-            <a:rPr lang="en-US" sz="1600" b="1" kern="1200" dirty="0" smtClean="0"/>
+            <a:rPr lang="en-US" sz="1600" b="1" kern="1200" dirty="0"/>
             <a:t>Reduce Risk of AI Hallucination</a:t>
           </a:r>
           <a:endParaRPr lang="en-US" sz="1600" kern="1200" dirty="0"/>
@@ -5542,7 +5434,7 @@
         </a:bodyPr>
         <a:lstStyle/>
         <a:p>
-          <a:pPr lvl="0" algn="l" defTabSz="711200">
+          <a:pPr marL="0" lvl="0" indent="0" algn="l" defTabSz="711200">
             <a:lnSpc>
               <a:spcPct val="90000"/>
             </a:lnSpc>
@@ -5552,9 +5444,10 @@
             <a:spcAft>
               <a:spcPct val="35000"/>
             </a:spcAft>
+            <a:buNone/>
           </a:pPr>
           <a:r>
-            <a:rPr lang="en-US" sz="1600" b="1" kern="1200" dirty="0" smtClean="0"/>
+            <a:rPr lang="en-US" sz="1600" b="1" kern="1200" dirty="0"/>
             <a:t>Ensure Accurate &amp; Traceable Answers</a:t>
           </a:r>
           <a:endParaRPr lang="en-US" sz="1600" kern="1200" dirty="0"/>
@@ -5708,7 +5601,7 @@
         </a:bodyPr>
         <a:lstStyle/>
         <a:p>
-          <a:pPr lvl="0" algn="l" defTabSz="711200">
+          <a:pPr marL="0" lvl="0" indent="0" algn="l" defTabSz="711200">
             <a:lnSpc>
               <a:spcPct val="90000"/>
             </a:lnSpc>
@@ -5718,9 +5611,10 @@
             <a:spcAft>
               <a:spcPct val="35000"/>
             </a:spcAft>
+            <a:buNone/>
           </a:pPr>
           <a:r>
-            <a:rPr lang="en-US" sz="1600" b="1" kern="1200" dirty="0" smtClean="0"/>
+            <a:rPr lang="en-US" sz="1600" b="1" kern="1200" dirty="0"/>
             <a:t>Fully local LLM Assistant</a:t>
           </a:r>
           <a:endParaRPr lang="en-US" sz="1600" kern="1200" dirty="0"/>
@@ -9504,7 +9398,7 @@
           <a:p>
             <a:fld id="{2BEA1986-BA3F-4B39-82E5-E5FA8BD8A6AC}" type="datetimeFigureOut">
               <a:rPr lang="en-US" smtClean="0"/>
-              <a:t>2026-08-09</a:t>
+              <a:t>8/10/2026</a:t>
             </a:fld>
             <a:endParaRPr lang="en-US"/>
           </a:p>
@@ -9568,38 +9462,37 @@
           <a:p>
             <a:pPr lvl="0"/>
             <a:r>
-              <a:rPr lang="en-US" smtClean="0"/>
+              <a:rPr lang="en-US"/>
               <a:t>Edit Master text styles</a:t>
             </a:r>
           </a:p>
           <a:p>
             <a:pPr lvl="1"/>
             <a:r>
-              <a:rPr lang="en-US" smtClean="0"/>
+              <a:rPr lang="en-US"/>
               <a:t>Second level</a:t>
             </a:r>
           </a:p>
           <a:p>
             <a:pPr lvl="2"/>
             <a:r>
-              <a:rPr lang="en-US" smtClean="0"/>
+              <a:rPr lang="en-US"/>
               <a:t>Third level</a:t>
             </a:r>
           </a:p>
           <a:p>
             <a:pPr lvl="3"/>
             <a:r>
-              <a:rPr lang="en-US" smtClean="0"/>
+              <a:rPr lang="en-US"/>
               <a:t>Fourth level</a:t>
             </a:r>
           </a:p>
           <a:p>
             <a:pPr lvl="4"/>
             <a:r>
-              <a:rPr lang="en-US" smtClean="0"/>
+              <a:rPr lang="en-US"/>
               <a:t>Fifth level</a:t>
             </a:r>
-            <a:endParaRPr lang="en-US"/>
           </a:p>
         </p:txBody>
       </p:sp>
@@ -9837,7 +9730,7 @@
           <a:p>
             <a:fld id="{0172E42C-98F0-4AD8-A5A8-C02C8E23F55D}" type="slidenum">
               <a:rPr lang="en-US" smtClean="0"/>
-              <a:t>37</a:t>
+              <a:t>38</a:t>
             </a:fld>
             <a:endParaRPr lang="en-US"/>
           </a:p>
@@ -10030,7 +9923,7 @@
           <a:p>
             <a:fld id="{1D8BD707-D9CF-40AE-B4C6-C98DA3205C09}" type="datetimeFigureOut">
               <a:rPr lang="en-US"/>
-              <a:t>2026-08-09</a:t>
+              <a:t>8/10/2026</a:t>
             </a:fld>
             <a:endParaRPr lang="en-US"/>
           </a:p>
@@ -10254,7 +10147,7 @@
           <a:p>
             <a:fld id="{1D8BD707-D9CF-40AE-B4C6-C98DA3205C09}" type="datetimeFigureOut">
               <a:rPr lang="en-US"/>
-              <a:t>2026-08-09</a:t>
+              <a:t>8/10/2026</a:t>
             </a:fld>
             <a:endParaRPr lang="en-US"/>
           </a:p>
@@ -10515,7 +10408,7 @@
           <a:p>
             <a:fld id="{1D8BD707-D9CF-40AE-B4C6-C98DA3205C09}" type="datetimeFigureOut">
               <a:rPr lang="en-US"/>
-              <a:t>2026-08-09</a:t>
+              <a:t>8/10/2026</a:t>
             </a:fld>
             <a:endParaRPr lang="en-US"/>
           </a:p>
@@ -10710,7 +10603,7 @@
           <a:p>
             <a:fld id="{1D8BD707-D9CF-40AE-B4C6-C98DA3205C09}" type="datetimeFigureOut">
               <a:rPr lang="en-US"/>
-              <a:t>2026-08-09</a:t>
+              <a:t>8/10/2026</a:t>
             </a:fld>
             <a:endParaRPr lang="en-US"/>
           </a:p>
@@ -10876,7 +10769,7 @@
           <a:p>
             <a:fld id="{1D8BD707-D9CF-40AE-B4C6-C98DA3205C09}" type="datetimeFigureOut">
               <a:rPr lang="en-US"/>
-              <a:t>2026-08-09</a:t>
+              <a:t>8/10/2026</a:t>
             </a:fld>
             <a:endParaRPr lang="en-US"/>
           </a:p>
@@ -11198,7 +11091,7 @@
           <a:p>
             <a:fld id="{1D8BD707-D9CF-40AE-B4C6-C98DA3205C09}" type="datetimeFigureOut">
               <a:rPr lang="en-US"/>
-              <a:t>2026-08-09</a:t>
+              <a:t>8/10/2026</a:t>
             </a:fld>
             <a:endParaRPr lang="en-US"/>
           </a:p>
@@ -12791,13 +12684,6 @@
   <p:transition>
     <p:cut/>
   </p:transition>
-  <p:timing>
-    <p:tnLst>
-      <p:par>
-        <p:cTn id="1" dur="indefinite" restart="never" nodeType="tmRoot"/>
-      </p:par>
-    </p:tnLst>
-  </p:timing>
 </p:sld>
 </file>
 
@@ -13390,13 +13276,6 @@
   <p:transition>
     <p:cut/>
   </p:transition>
-  <p:timing>
-    <p:tnLst>
-      <p:par>
-        <p:cTn id="1" dur="indefinite" restart="never" nodeType="tmRoot"/>
-      </p:par>
-    </p:tnLst>
-  </p:timing>
 </p:sld>
 </file>
 
@@ -14049,13 +13928,6 @@
   <p:transition>
     <p:cut/>
   </p:transition>
-  <p:timing>
-    <p:tnLst>
-      <p:par>
-        <p:cTn id="1" dur="indefinite" restart="never" nodeType="tmRoot"/>
-      </p:par>
-    </p:tnLst>
-  </p:timing>
 </p:sld>
 </file>
 
@@ -14777,13 +14649,6 @@
   <p:transition>
     <p:cut/>
   </p:transition>
-  <p:timing>
-    <p:tnLst>
-      <p:par>
-        <p:cTn id="1" dur="indefinite" restart="never" nodeType="tmRoot"/>
-      </p:par>
-    </p:tnLst>
-  </p:timing>
 </p:sld>
 </file>
 
@@ -15509,13 +15374,6 @@
   <p:transition>
     <p:cut/>
   </p:transition>
-  <p:timing>
-    <p:tnLst>
-      <p:par>
-        <p:cTn id="1" dur="indefinite" restart="never" nodeType="tmRoot"/>
-      </p:par>
-    </p:tnLst>
-  </p:timing>
 </p:sld>
 </file>
 
@@ -16653,172 +16511,6 @@
           </a:p>
         </p:txBody>
       </p:sp>
-      <p:sp>
-        <p:nvSpPr>
-          <p:cNvPr id="3" name="object 3"/>
-          <p:cNvSpPr txBox="1"/>
-          <p:nvPr/>
-        </p:nvSpPr>
-        <p:spPr>
-          <a:xfrm>
-            <a:off x="2030209" y="1519171"/>
-            <a:ext cx="1699895" cy="207645"/>
-          </a:xfrm>
-          <a:prstGeom prst="rect">
-            <a:avLst/>
-          </a:prstGeom>
-        </p:spPr>
-        <p:txBody>
-          <a:bodyPr vert="horz" wrap="square" lIns="0" tIns="12065" rIns="0" bIns="0" rtlCol="0">
-            <a:spAutoFit/>
-          </a:bodyPr>
-          <a:lstStyle/>
-          <a:p>
-            <a:pPr marL="12700">
-              <a:lnSpc>
-                <a:spcPct val="100000"/>
-              </a:lnSpc>
-              <a:spcBef>
-                <a:spcPts val="95"/>
-              </a:spcBef>
-            </a:pPr>
-            <a:r>
-              <a:rPr sz="1200" i="1" dirty="0">
-                <a:solidFill>
-                  <a:srgbClr val="ACACB5"/>
-                </a:solidFill>
-                <a:latin typeface="Calibri"/>
-                <a:cs typeface="Calibri"/>
-              </a:rPr>
-              <a:t>[</a:t>
-            </a:r>
-            <a:r>
-              <a:rPr sz="1200" i="1" spc="75" dirty="0">
-                <a:solidFill>
-                  <a:srgbClr val="ACACB5"/>
-                </a:solidFill>
-                <a:latin typeface="Calibri"/>
-                <a:cs typeface="Calibri"/>
-              </a:rPr>
-              <a:t> </a:t>
-            </a:r>
-            <a:r>
-              <a:rPr sz="1200" i="1" dirty="0">
-                <a:solidFill>
-                  <a:srgbClr val="ACACB5"/>
-                </a:solidFill>
-                <a:latin typeface="Calibri"/>
-                <a:cs typeface="Calibri"/>
-              </a:rPr>
-              <a:t>Fill</a:t>
-            </a:r>
-            <a:r>
-              <a:rPr sz="1200" i="1" spc="85" dirty="0">
-                <a:solidFill>
-                  <a:srgbClr val="ACACB5"/>
-                </a:solidFill>
-                <a:latin typeface="Calibri"/>
-                <a:cs typeface="Calibri"/>
-              </a:rPr>
-              <a:t> </a:t>
-            </a:r>
-            <a:r>
-              <a:rPr sz="1200" i="1" dirty="0">
-                <a:solidFill>
-                  <a:srgbClr val="ACACB5"/>
-                </a:solidFill>
-                <a:latin typeface="Calibri"/>
-                <a:cs typeface="Calibri"/>
-              </a:rPr>
-              <a:t>in</a:t>
-            </a:r>
-            <a:r>
-              <a:rPr sz="1200" i="1" spc="80" dirty="0">
-                <a:solidFill>
-                  <a:srgbClr val="ACACB5"/>
-                </a:solidFill>
-                <a:latin typeface="Calibri"/>
-                <a:cs typeface="Calibri"/>
-              </a:rPr>
-              <a:t> </a:t>
-            </a:r>
-            <a:r>
-              <a:rPr sz="1200" i="1" dirty="0">
-                <a:solidFill>
-                  <a:srgbClr val="ACACB5"/>
-                </a:solidFill>
-                <a:latin typeface="Calibri"/>
-                <a:cs typeface="Calibri"/>
-              </a:rPr>
-              <a:t>your</a:t>
-            </a:r>
-            <a:r>
-              <a:rPr sz="1200" i="1" spc="75" dirty="0">
-                <a:solidFill>
-                  <a:srgbClr val="ACACB5"/>
-                </a:solidFill>
-                <a:latin typeface="Calibri"/>
-                <a:cs typeface="Calibri"/>
-              </a:rPr>
-              <a:t> </a:t>
-            </a:r>
-            <a:r>
-              <a:rPr sz="1200" i="1" dirty="0">
-                <a:solidFill>
-                  <a:srgbClr val="ACACB5"/>
-                </a:solidFill>
-                <a:latin typeface="Calibri"/>
-                <a:cs typeface="Calibri"/>
-              </a:rPr>
-              <a:t>content</a:t>
-            </a:r>
-            <a:r>
-              <a:rPr sz="1200" i="1" spc="80" dirty="0">
-                <a:solidFill>
-                  <a:srgbClr val="ACACB5"/>
-                </a:solidFill>
-                <a:latin typeface="Calibri"/>
-                <a:cs typeface="Calibri"/>
-              </a:rPr>
-              <a:t> </a:t>
-            </a:r>
-            <a:r>
-              <a:rPr sz="1200" i="1" spc="-10" dirty="0">
-                <a:solidFill>
-                  <a:srgbClr val="ACACB5"/>
-                </a:solidFill>
-                <a:latin typeface="Calibri"/>
-                <a:cs typeface="Calibri"/>
-              </a:rPr>
-              <a:t>here</a:t>
-            </a:r>
-            <a:r>
-              <a:rPr sz="1200" i="1" spc="80" dirty="0">
-                <a:solidFill>
-                  <a:srgbClr val="ACACB5"/>
-                </a:solidFill>
-                <a:latin typeface="Calibri"/>
-                <a:cs typeface="Calibri"/>
-              </a:rPr>
-              <a:t> </a:t>
-            </a:r>
-            <a:r>
-              <a:rPr sz="1200" i="1" spc="-50" dirty="0">
-                <a:solidFill>
-                  <a:srgbClr val="ACACB5"/>
-                </a:solidFill>
-                <a:latin typeface="Calibri"/>
-                <a:cs typeface="Calibri"/>
-              </a:rPr>
-              <a:t>]</a:t>
-            </a:r>
-            <a:endParaRPr sz="1200">
-              <a:latin typeface="Calibri"/>
-              <a:cs typeface="Calibri"/>
-            </a:endParaRPr>
-          </a:p>
-        </p:txBody>
-      </p:sp>
       <p:grpSp>
         <p:nvGrpSpPr>
           <p:cNvPr id="4" name="object 4"/>
@@ -17131,6 +16823,85 @@
           </a:p>
         </p:txBody>
       </p:sp>
+      <p:sp>
+        <p:nvSpPr>
+          <p:cNvPr id="15" name="TextBox 14">
+            <a:extLst>
+              <a:ext uri="{FF2B5EF4-FFF2-40B4-BE49-F238E27FC236}">
+                <a16:creationId xmlns:a16="http://schemas.microsoft.com/office/drawing/2014/main" id="{E829AA27-868C-E1CC-0B29-F674CF5022F3}"/>
+              </a:ext>
+            </a:extLst>
+          </p:cNvPr>
+          <p:cNvSpPr txBox="1"/>
+          <p:nvPr/>
+        </p:nvSpPr>
+        <p:spPr>
+          <a:xfrm>
+            <a:off x="215900" y="403225"/>
+            <a:ext cx="3879361" cy="646331"/>
+          </a:xfrm>
+          <a:prstGeom prst="rect">
+            <a:avLst/>
+          </a:prstGeom>
+          <a:noFill/>
+        </p:spPr>
+        <p:txBody>
+          <a:bodyPr wrap="square">
+            <a:spAutoFit/>
+          </a:bodyPr>
+          <a:lstStyle/>
+          <a:p>
+            <a:r>
+              <a:rPr lang="en-US" dirty="0"/>
+              <a:t>Predict Network Problems Before They Become Outages</a:t>
+            </a:r>
+          </a:p>
+        </p:txBody>
+      </p:sp>
+      <p:sp>
+        <p:nvSpPr>
+          <p:cNvPr id="17" name="TextBox 16">
+            <a:extLst>
+              <a:ext uri="{FF2B5EF4-FFF2-40B4-BE49-F238E27FC236}">
+                <a16:creationId xmlns:a16="http://schemas.microsoft.com/office/drawing/2014/main" id="{8725B314-B832-A7D5-F1F6-BDEB76783902}"/>
+              </a:ext>
+            </a:extLst>
+          </p:cNvPr>
+          <p:cNvSpPr txBox="1"/>
+          <p:nvPr/>
+        </p:nvSpPr>
+        <p:spPr>
+          <a:xfrm>
+            <a:off x="-1745" y="1317625"/>
+            <a:ext cx="5767545" cy="954107"/>
+          </a:xfrm>
+          <a:prstGeom prst="rect">
+            <a:avLst/>
+          </a:prstGeom>
+          <a:noFill/>
+        </p:spPr>
+        <p:txBody>
+          <a:bodyPr wrap="square">
+            <a:spAutoFit/>
+          </a:bodyPr>
+          <a:lstStyle/>
+          <a:p>
+            <a:r>
+              <a:rPr lang="en-US" sz="1400" dirty="0"/>
+              <a:t>• Reactive maintenance = incident → ticket → emergency truck roll </a:t>
+            </a:r>
+          </a:p>
+          <a:p>
+            <a:endParaRPr lang="en-US" sz="1400" dirty="0"/>
+          </a:p>
+          <a:p>
+            <a:r>
+              <a:rPr lang="en-US" sz="1400" dirty="0"/>
+              <a:t>• We forecast 12 LTE KPIs per cell, 7 days ahead, from a standard 30-day CSV export</a:t>
+            </a:r>
+          </a:p>
+        </p:txBody>
+      </p:sp>
     </p:spTree>
   </p:cSld>
   <p:clrMapOvr>
@@ -17139,13 +16910,6 @@
   <p:transition>
     <p:cut/>
   </p:transition>
-  <p:timing>
-    <p:tnLst>
-      <p:par>
-        <p:cTn id="1" dur="indefinite" restart="never" nodeType="tmRoot"/>
-      </p:par>
-    </p:tnLst>
-  </p:timing>
 </p:sld>
 </file>
 
@@ -17330,8 +17094,8 @@
         </p:nvSpPr>
         <p:spPr>
           <a:xfrm>
-            <a:off x="2030209" y="1519171"/>
-            <a:ext cx="1699895" cy="207645"/>
+            <a:off x="255765" y="1009732"/>
+            <a:ext cx="5254270" cy="1368965"/>
           </a:xfrm>
           <a:prstGeom prst="rect">
             <a:avLst/>
@@ -17352,136 +17116,78 @@
               </a:spcBef>
             </a:pPr>
             <a:r>
-              <a:rPr sz="1200" i="1" dirty="0">
-                <a:solidFill>
-                  <a:srgbClr val="ACACB5"/>
-                </a:solidFill>
-                <a:latin typeface="Calibri"/>
-                <a:cs typeface="Calibri"/>
-              </a:rPr>
-              <a:t>[</a:t>
-            </a:r>
-            <a:r>
-              <a:rPr sz="1200" i="1" spc="75" dirty="0">
-                <a:solidFill>
-                  <a:srgbClr val="ACACB5"/>
-                </a:solidFill>
-                <a:latin typeface="Calibri"/>
-                <a:cs typeface="Calibri"/>
-              </a:rPr>
-              <a:t> </a:t>
-            </a:r>
-            <a:r>
-              <a:rPr sz="1200" i="1" dirty="0">
-                <a:solidFill>
-                  <a:srgbClr val="ACACB5"/>
-                </a:solidFill>
-                <a:latin typeface="Calibri"/>
-                <a:cs typeface="Calibri"/>
-              </a:rPr>
-              <a:t>Fill</a:t>
-            </a:r>
-            <a:r>
-              <a:rPr sz="1200" i="1" spc="85" dirty="0">
-                <a:solidFill>
-                  <a:srgbClr val="ACACB5"/>
-                </a:solidFill>
-                <a:latin typeface="Calibri"/>
-                <a:cs typeface="Calibri"/>
-              </a:rPr>
-              <a:t> </a:t>
-            </a:r>
-            <a:r>
-              <a:rPr sz="1200" i="1" dirty="0">
-                <a:solidFill>
-                  <a:srgbClr val="ACACB5"/>
-                </a:solidFill>
-                <a:latin typeface="Calibri"/>
-                <a:cs typeface="Calibri"/>
-              </a:rPr>
-              <a:t>in</a:t>
-            </a:r>
-            <a:r>
-              <a:rPr sz="1200" i="1" spc="80" dirty="0">
-                <a:solidFill>
-                  <a:srgbClr val="ACACB5"/>
-                </a:solidFill>
-                <a:latin typeface="Calibri"/>
-                <a:cs typeface="Calibri"/>
-              </a:rPr>
-              <a:t> </a:t>
-            </a:r>
-            <a:r>
-              <a:rPr sz="1200" i="1" dirty="0">
-                <a:solidFill>
-                  <a:srgbClr val="ACACB5"/>
-                </a:solidFill>
-                <a:latin typeface="Calibri"/>
-                <a:cs typeface="Calibri"/>
-              </a:rPr>
-              <a:t>your</a:t>
-            </a:r>
-            <a:r>
-              <a:rPr sz="1200" i="1" spc="75" dirty="0">
-                <a:solidFill>
-                  <a:srgbClr val="ACACB5"/>
-                </a:solidFill>
-                <a:latin typeface="Calibri"/>
-                <a:cs typeface="Calibri"/>
-              </a:rPr>
-              <a:t> </a:t>
-            </a:r>
-            <a:r>
-              <a:rPr sz="1200" i="1" dirty="0">
-                <a:solidFill>
-                  <a:srgbClr val="ACACB5"/>
-                </a:solidFill>
-                <a:latin typeface="Calibri"/>
-                <a:cs typeface="Calibri"/>
-              </a:rPr>
-              <a:t>content</a:t>
-            </a:r>
-            <a:r>
-              <a:rPr sz="1200" i="1" spc="80" dirty="0">
-                <a:solidFill>
-                  <a:srgbClr val="ACACB5"/>
-                </a:solidFill>
-                <a:latin typeface="Calibri"/>
-                <a:cs typeface="Calibri"/>
-              </a:rPr>
-              <a:t> </a:t>
-            </a:r>
-            <a:r>
-              <a:rPr sz="1200" i="1" spc="-10" dirty="0">
-                <a:solidFill>
-                  <a:srgbClr val="ACACB5"/>
-                </a:solidFill>
-                <a:latin typeface="Calibri"/>
-                <a:cs typeface="Calibri"/>
-              </a:rPr>
-              <a:t>here</a:t>
-            </a:r>
-            <a:r>
-              <a:rPr sz="1200" i="1" spc="80" dirty="0">
-                <a:solidFill>
-                  <a:srgbClr val="ACACB5"/>
-                </a:solidFill>
-                <a:latin typeface="Calibri"/>
-                <a:cs typeface="Calibri"/>
-              </a:rPr>
-              <a:t> </a:t>
-            </a:r>
-            <a:r>
-              <a:rPr sz="1200" i="1" spc="-50" dirty="0">
-                <a:solidFill>
-                  <a:srgbClr val="ACACB5"/>
-                </a:solidFill>
-                <a:latin typeface="Calibri"/>
-                <a:cs typeface="Calibri"/>
-              </a:rPr>
-              <a:t>]</a:t>
-            </a:r>
-            <a:endParaRPr sz="1200">
+              <a:rPr lang="en-US" sz="1200" dirty="0"/>
+              <a:t>• Naive baseline — sanity check: is this cell even predictable? </a:t>
+            </a:r>
+          </a:p>
+          <a:p>
+            <a:pPr marL="12700">
+              <a:lnSpc>
+                <a:spcPct val="100000"/>
+              </a:lnSpc>
+              <a:spcBef>
+                <a:spcPts val="95"/>
+              </a:spcBef>
+            </a:pPr>
+            <a:endParaRPr lang="en-US" sz="1200" dirty="0"/>
+          </a:p>
+          <a:p>
+            <a:pPr marL="12700">
+              <a:lnSpc>
+                <a:spcPct val="100000"/>
+              </a:lnSpc>
+              <a:spcBef>
+                <a:spcPts val="95"/>
+              </a:spcBef>
+            </a:pPr>
+            <a:r>
+              <a:rPr lang="en-US" sz="1200" dirty="0"/>
+              <a:t>• Holt-Winters — catches weekly traffic rhythms (strong on seasonal KPIs) </a:t>
+            </a:r>
+          </a:p>
+          <a:p>
+            <a:pPr marL="12700">
+              <a:lnSpc>
+                <a:spcPct val="100000"/>
+              </a:lnSpc>
+              <a:spcBef>
+                <a:spcPts val="95"/>
+              </a:spcBef>
+            </a:pPr>
+            <a:endParaRPr lang="en-US" sz="1200" dirty="0"/>
+          </a:p>
+          <a:p>
+            <a:pPr marL="12700">
+              <a:lnSpc>
+                <a:spcPct val="100000"/>
+              </a:lnSpc>
+              <a:spcBef>
+                <a:spcPts val="95"/>
+              </a:spcBef>
+            </a:pPr>
+            <a:r>
+              <a:rPr lang="en-US" sz="1200" dirty="0"/>
+              <a:t>• </a:t>
+            </a:r>
+            <a:r>
+              <a:rPr lang="en-US" sz="1200" dirty="0" err="1"/>
+              <a:t>XGBoost</a:t>
+            </a:r>
+            <a:r>
+              <a:rPr lang="en-US" sz="1200" dirty="0"/>
+              <a:t> — learns cross-KPI relationships (e.g., handover quality → throughput) </a:t>
+            </a:r>
+          </a:p>
+          <a:p>
+            <a:pPr marL="12700">
+              <a:lnSpc>
+                <a:spcPct val="100000"/>
+              </a:lnSpc>
+              <a:spcBef>
+                <a:spcPts val="95"/>
+              </a:spcBef>
+            </a:pPr>
+            <a:endParaRPr sz="1200" dirty="0">
               <a:latin typeface="Calibri"/>
               <a:cs typeface="Calibri"/>
             </a:endParaRPr>
@@ -17808,13 +17514,6 @@
   <p:transition>
     <p:cut/>
   </p:transition>
-  <p:timing>
-    <p:tnLst>
-      <p:par>
-        <p:cTn id="1" dur="indefinite" restart="never" nodeType="tmRoot"/>
-      </p:par>
-    </p:tnLst>
-  </p:timing>
 </p:sld>
 </file>
 
@@ -17969,8 +17668,8 @@
         </p:nvSpPr>
         <p:spPr>
           <a:xfrm>
-            <a:off x="2030209" y="1519171"/>
-            <a:ext cx="1699895" cy="207645"/>
+            <a:off x="169283" y="784225"/>
+            <a:ext cx="4999617" cy="1935786"/>
           </a:xfrm>
           <a:prstGeom prst="rect">
             <a:avLst/>
@@ -17991,136 +17690,85 @@
               </a:spcBef>
             </a:pPr>
             <a:r>
-              <a:rPr sz="1200" i="1" dirty="0">
-                <a:solidFill>
-                  <a:srgbClr val="ACACB5"/>
-                </a:solidFill>
-                <a:latin typeface="Calibri"/>
-                <a:cs typeface="Calibri"/>
-              </a:rPr>
-              <a:t>[</a:t>
-            </a:r>
-            <a:r>
-              <a:rPr sz="1200" i="1" spc="75" dirty="0">
-                <a:solidFill>
-                  <a:srgbClr val="ACACB5"/>
-                </a:solidFill>
-                <a:latin typeface="Calibri"/>
-                <a:cs typeface="Calibri"/>
-              </a:rPr>
-              <a:t> </a:t>
-            </a:r>
-            <a:r>
-              <a:rPr sz="1200" i="1" dirty="0">
-                <a:solidFill>
-                  <a:srgbClr val="ACACB5"/>
-                </a:solidFill>
-                <a:latin typeface="Calibri"/>
-                <a:cs typeface="Calibri"/>
-              </a:rPr>
-              <a:t>Fill</a:t>
-            </a:r>
-            <a:r>
-              <a:rPr sz="1200" i="1" spc="85" dirty="0">
-                <a:solidFill>
-                  <a:srgbClr val="ACACB5"/>
-                </a:solidFill>
-                <a:latin typeface="Calibri"/>
-                <a:cs typeface="Calibri"/>
-              </a:rPr>
-              <a:t> </a:t>
-            </a:r>
-            <a:r>
-              <a:rPr sz="1200" i="1" dirty="0">
-                <a:solidFill>
-                  <a:srgbClr val="ACACB5"/>
-                </a:solidFill>
-                <a:latin typeface="Calibri"/>
-                <a:cs typeface="Calibri"/>
-              </a:rPr>
-              <a:t>in</a:t>
-            </a:r>
-            <a:r>
-              <a:rPr sz="1200" i="1" spc="80" dirty="0">
-                <a:solidFill>
-                  <a:srgbClr val="ACACB5"/>
-                </a:solidFill>
-                <a:latin typeface="Calibri"/>
-                <a:cs typeface="Calibri"/>
-              </a:rPr>
-              <a:t> </a:t>
-            </a:r>
-            <a:r>
-              <a:rPr sz="1200" i="1" dirty="0">
-                <a:solidFill>
-                  <a:srgbClr val="ACACB5"/>
-                </a:solidFill>
-                <a:latin typeface="Calibri"/>
-                <a:cs typeface="Calibri"/>
-              </a:rPr>
-              <a:t>your</a:t>
-            </a:r>
-            <a:r>
-              <a:rPr sz="1200" i="1" spc="75" dirty="0">
-                <a:solidFill>
-                  <a:srgbClr val="ACACB5"/>
-                </a:solidFill>
-                <a:latin typeface="Calibri"/>
-                <a:cs typeface="Calibri"/>
-              </a:rPr>
-              <a:t> </a:t>
-            </a:r>
-            <a:r>
-              <a:rPr sz="1200" i="1" dirty="0">
-                <a:solidFill>
-                  <a:srgbClr val="ACACB5"/>
-                </a:solidFill>
-                <a:latin typeface="Calibri"/>
-                <a:cs typeface="Calibri"/>
-              </a:rPr>
-              <a:t>content</a:t>
-            </a:r>
-            <a:r>
-              <a:rPr sz="1200" i="1" spc="80" dirty="0">
-                <a:solidFill>
-                  <a:srgbClr val="ACACB5"/>
-                </a:solidFill>
-                <a:latin typeface="Calibri"/>
-                <a:cs typeface="Calibri"/>
-              </a:rPr>
-              <a:t> </a:t>
-            </a:r>
-            <a:r>
-              <a:rPr sz="1200" i="1" spc="-10" dirty="0">
-                <a:solidFill>
-                  <a:srgbClr val="ACACB5"/>
-                </a:solidFill>
-                <a:latin typeface="Calibri"/>
-                <a:cs typeface="Calibri"/>
-              </a:rPr>
-              <a:t>here</a:t>
-            </a:r>
-            <a:r>
-              <a:rPr sz="1200" i="1" spc="80" dirty="0">
-                <a:solidFill>
-                  <a:srgbClr val="ACACB5"/>
-                </a:solidFill>
-                <a:latin typeface="Calibri"/>
-                <a:cs typeface="Calibri"/>
-              </a:rPr>
-              <a:t> </a:t>
-            </a:r>
-            <a:r>
-              <a:rPr sz="1200" i="1" spc="-50" dirty="0">
-                <a:solidFill>
-                  <a:srgbClr val="ACACB5"/>
-                </a:solidFill>
-                <a:latin typeface="Calibri"/>
-                <a:cs typeface="Calibri"/>
-              </a:rPr>
-              <a:t>]</a:t>
-            </a:r>
-            <a:endParaRPr sz="1200">
+              <a:rPr lang="en-US" sz="1200" dirty="0"/>
+              <a:t>• Every cell is scored by weekly seasonality strength — engineers see which forecasts to trust first </a:t>
+            </a:r>
+          </a:p>
+          <a:p>
+            <a:pPr marL="12700">
+              <a:lnSpc>
+                <a:spcPct val="100000"/>
+              </a:lnSpc>
+              <a:spcBef>
+                <a:spcPts val="95"/>
+              </a:spcBef>
+            </a:pPr>
+            <a:endParaRPr lang="en-US" sz="1200" dirty="0"/>
+          </a:p>
+          <a:p>
+            <a:pPr marL="12700">
+              <a:lnSpc>
+                <a:spcPct val="100000"/>
+              </a:lnSpc>
+              <a:spcBef>
+                <a:spcPts val="95"/>
+              </a:spcBef>
+            </a:pPr>
+            <a:r>
+              <a:rPr lang="en-US" sz="1200" dirty="0"/>
+              <a:t>• All features are leakage-safe: built strictly from past observations only </a:t>
+            </a:r>
+          </a:p>
+          <a:p>
+            <a:pPr marL="12700">
+              <a:lnSpc>
+                <a:spcPct val="100000"/>
+              </a:lnSpc>
+              <a:spcBef>
+                <a:spcPts val="95"/>
+              </a:spcBef>
+            </a:pPr>
+            <a:endParaRPr lang="en-US" sz="1200" dirty="0"/>
+          </a:p>
+          <a:p>
+            <a:pPr marL="12700">
+              <a:lnSpc>
+                <a:spcPct val="100000"/>
+              </a:lnSpc>
+              <a:spcBef>
+                <a:spcPts val="95"/>
+              </a:spcBef>
+            </a:pPr>
+            <a:r>
+              <a:rPr lang="en-US" sz="1200" dirty="0"/>
+              <a:t>• Cross-KPI lags let throughput learn from handover success, PRB utilization, and drop rate — relationships a human might miss </a:t>
+            </a:r>
+          </a:p>
+          <a:p>
+            <a:pPr marL="12700">
+              <a:lnSpc>
+                <a:spcPct val="100000"/>
+              </a:lnSpc>
+              <a:spcBef>
+                <a:spcPts val="95"/>
+              </a:spcBef>
+            </a:pPr>
+            <a:endParaRPr lang="en-US" sz="1200" dirty="0"/>
+          </a:p>
+          <a:p>
+            <a:pPr marL="12700">
+              <a:lnSpc>
+                <a:spcPct val="100000"/>
+              </a:lnSpc>
+              <a:spcBef>
+                <a:spcPts val="95"/>
+              </a:spcBef>
+            </a:pPr>
+            <a:r>
+              <a:rPr lang="en-US" sz="1200" dirty="0"/>
+              <a:t>• 40+ features auto-generated per KPI; zero manual feature engineering required</a:t>
+            </a:r>
+            <a:endParaRPr sz="1200" dirty="0">
               <a:latin typeface="Calibri"/>
               <a:cs typeface="Calibri"/>
             </a:endParaRPr>
@@ -18447,13 +18095,6 @@
   <p:transition>
     <p:cut/>
   </p:transition>
-  <p:timing>
-    <p:tnLst>
-      <p:par>
-        <p:cTn id="1" dur="indefinite" restart="never" nodeType="tmRoot"/>
-      </p:par>
-    </p:tnLst>
-  </p:timing>
 </p:sld>
 </file>
 
@@ -18531,136 +18172,6 @@
               <a:rPr spc="-120" dirty="0"/>
               <a:t>Interface</a:t>
             </a:r>
-          </a:p>
-        </p:txBody>
-      </p:sp>
-      <p:sp>
-        <p:nvSpPr>
-          <p:cNvPr id="3" name="object 3"/>
-          <p:cNvSpPr txBox="1"/>
-          <p:nvPr/>
-        </p:nvSpPr>
-        <p:spPr>
-          <a:xfrm>
-            <a:off x="2101024" y="1473960"/>
-            <a:ext cx="1558290" cy="438784"/>
-          </a:xfrm>
-          <a:prstGeom prst="rect">
-            <a:avLst/>
-          </a:prstGeom>
-        </p:spPr>
-        <p:txBody>
-          <a:bodyPr vert="horz" wrap="square" lIns="0" tIns="11430" rIns="0" bIns="0" rtlCol="0">
-            <a:spAutoFit/>
-          </a:bodyPr>
-          <a:lstStyle/>
-          <a:p>
-            <a:pPr marL="44450">
-              <a:lnSpc>
-                <a:spcPct val="100000"/>
-              </a:lnSpc>
-              <a:spcBef>
-                <a:spcPts val="90"/>
-              </a:spcBef>
-            </a:pPr>
-            <a:r>
-              <a:rPr sz="1100" i="1" dirty="0">
-                <a:solidFill>
-                  <a:srgbClr val="13132C"/>
-                </a:solidFill>
-                <a:latin typeface="Calibri"/>
-                <a:cs typeface="Calibri"/>
-              </a:rPr>
-              <a:t>Screenshot</a:t>
-            </a:r>
-            <a:r>
-              <a:rPr sz="1100" i="1" spc="120" dirty="0">
-                <a:solidFill>
-                  <a:srgbClr val="13132C"/>
-                </a:solidFill>
-                <a:latin typeface="Calibri"/>
-                <a:cs typeface="Calibri"/>
-              </a:rPr>
-              <a:t> </a:t>
-            </a:r>
-            <a:r>
-              <a:rPr sz="1100" i="1" dirty="0">
-                <a:solidFill>
-                  <a:srgbClr val="13132C"/>
-                </a:solidFill>
-                <a:latin typeface="Calibri"/>
-                <a:cs typeface="Calibri"/>
-              </a:rPr>
-              <a:t>not</a:t>
-            </a:r>
-            <a:r>
-              <a:rPr sz="1100" i="1" spc="120" dirty="0">
-                <a:solidFill>
-                  <a:srgbClr val="13132C"/>
-                </a:solidFill>
-                <a:latin typeface="Calibri"/>
-                <a:cs typeface="Calibri"/>
-              </a:rPr>
-              <a:t> </a:t>
-            </a:r>
-            <a:r>
-              <a:rPr sz="1100" i="1" dirty="0">
-                <a:solidFill>
-                  <a:srgbClr val="13132C"/>
-                </a:solidFill>
-                <a:latin typeface="Calibri"/>
-                <a:cs typeface="Calibri"/>
-              </a:rPr>
-              <a:t>yet</a:t>
-            </a:r>
-            <a:r>
-              <a:rPr sz="1100" i="1" spc="120" dirty="0">
-                <a:solidFill>
-                  <a:srgbClr val="13132C"/>
-                </a:solidFill>
-                <a:latin typeface="Calibri"/>
-                <a:cs typeface="Calibri"/>
-              </a:rPr>
-              <a:t> </a:t>
-            </a:r>
-            <a:r>
-              <a:rPr sz="1100" i="1" spc="-10" dirty="0">
-                <a:solidFill>
-                  <a:srgbClr val="13132C"/>
-                </a:solidFill>
-                <a:latin typeface="Calibri"/>
-                <a:cs typeface="Calibri"/>
-              </a:rPr>
-              <a:t>added</a:t>
-            </a:r>
-            <a:endParaRPr sz="1100">
-              <a:latin typeface="Calibri"/>
-              <a:cs typeface="Calibri"/>
-            </a:endParaRPr>
-          </a:p>
-          <a:p>
-            <a:pPr marL="12700">
-              <a:lnSpc>
-                <a:spcPct val="100000"/>
-              </a:lnSpc>
-              <a:spcBef>
-                <a:spcPts val="1220"/>
-              </a:spcBef>
-            </a:pPr>
-            <a:r>
-              <a:rPr sz="600" spc="-10" dirty="0">
-                <a:solidFill>
-                  <a:srgbClr val="13132C"/>
-                </a:solidFill>
-                <a:latin typeface="Palatino Linotype"/>
-                <a:cs typeface="Palatino Linotype"/>
-              </a:rPr>
-              <a:t>screenshots/ibrahim/forecasting_ui.png</a:t>
-            </a:r>
-            <a:endParaRPr sz="600">
-              <a:latin typeface="Palatino Linotype"/>
-              <a:cs typeface="Palatino Linotype"/>
-            </a:endParaRPr>
           </a:p>
         </p:txBody>
       </p:sp>
@@ -19159,6 +18670,66 @@
           </a:p>
         </p:txBody>
       </p:sp>
+      <p:pic>
+        <p:nvPicPr>
+          <p:cNvPr id="19" name="Picture 18">
+            <a:extLst>
+              <a:ext uri="{FF2B5EF4-FFF2-40B4-BE49-F238E27FC236}">
+                <a16:creationId xmlns:a16="http://schemas.microsoft.com/office/drawing/2014/main" id="{EE4E8A35-ABDC-C0B7-11ED-D11A99EAF9A6}"/>
+              </a:ext>
+            </a:extLst>
+          </p:cNvPr>
+          <p:cNvPicPr>
+            <a:picLocks noChangeAspect="1"/>
+          </p:cNvPicPr>
+          <p:nvPr/>
+        </p:nvPicPr>
+        <p:blipFill>
+          <a:blip r:embed="rId3"/>
+          <a:stretch>
+            <a:fillRect/>
+          </a:stretch>
+        </p:blipFill>
+        <p:spPr>
+          <a:xfrm>
+            <a:off x="-6786" y="301812"/>
+            <a:ext cx="1069652" cy="2943038"/>
+          </a:xfrm>
+          <a:prstGeom prst="rect">
+            <a:avLst/>
+          </a:prstGeom>
+        </p:spPr>
+      </p:pic>
+      <p:pic>
+        <p:nvPicPr>
+          <p:cNvPr id="21" name="Picture 20">
+            <a:extLst>
+              <a:ext uri="{FF2B5EF4-FFF2-40B4-BE49-F238E27FC236}">
+                <a16:creationId xmlns:a16="http://schemas.microsoft.com/office/drawing/2014/main" id="{DA2EB379-88DE-E0D3-437C-4996493CCD46}"/>
+              </a:ext>
+            </a:extLst>
+          </p:cNvPr>
+          <p:cNvPicPr>
+            <a:picLocks noChangeAspect="1"/>
+          </p:cNvPicPr>
+          <p:nvPr/>
+        </p:nvPicPr>
+        <p:blipFill>
+          <a:blip r:embed="rId4"/>
+          <a:stretch>
+            <a:fillRect/>
+          </a:stretch>
+        </p:blipFill>
+        <p:spPr>
+          <a:xfrm>
+            <a:off x="1042884" y="327025"/>
+            <a:ext cx="4866442" cy="2917825"/>
+          </a:xfrm>
+          <a:prstGeom prst="rect">
+            <a:avLst/>
+          </a:prstGeom>
+        </p:spPr>
+      </p:pic>
     </p:spTree>
   </p:cSld>
   <p:clrMapOvr>
@@ -19880,6 +19451,36 @@
           </a:p>
         </p:txBody>
       </p:sp>
+      <p:pic>
+        <p:nvPicPr>
+          <p:cNvPr id="17" name="Picture 16">
+            <a:extLst>
+              <a:ext uri="{FF2B5EF4-FFF2-40B4-BE49-F238E27FC236}">
+                <a16:creationId xmlns:a16="http://schemas.microsoft.com/office/drawing/2014/main" id="{B39F4223-A9A9-AA0B-8E57-1FC230E946CE}"/>
+              </a:ext>
+            </a:extLst>
+          </p:cNvPr>
+          <p:cNvPicPr>
+            <a:picLocks noChangeAspect="1"/>
+          </p:cNvPicPr>
+          <p:nvPr/>
+        </p:nvPicPr>
+        <p:blipFill>
+          <a:blip r:embed="rId3"/>
+          <a:stretch>
+            <a:fillRect/>
+          </a:stretch>
+        </p:blipFill>
+        <p:spPr>
+          <a:xfrm>
+            <a:off x="-5258" y="840209"/>
+            <a:ext cx="5765800" cy="2282176"/>
+          </a:xfrm>
+          <a:prstGeom prst="rect">
+            <a:avLst/>
+          </a:prstGeom>
+        </p:spPr>
+      </p:pic>
     </p:spTree>
   </p:cSld>
   <p:clrMapOvr>
@@ -20326,7 +19927,7 @@
               <a:t> </a:t>
             </a:r>
             <a:r>
-              <a:rPr sz="1200" spc="-10" dirty="0" smtClean="0">
+              <a:rPr sz="1200" spc="-10" dirty="0">
                 <a:solidFill>
                   <a:srgbClr val="13132C"/>
                 </a:solidFill>
@@ -20336,7 +19937,7 @@
               </a:rPr>
               <a:t>Assistant</a:t>
             </a:r>
-            <a:endParaRPr sz="1200" dirty="0" smtClean="0">
+            <a:endParaRPr sz="1200" dirty="0">
               <a:latin typeface="Tahoma"/>
               <a:cs typeface="Tahoma"/>
             </a:endParaRPr>
@@ -20350,7 +19951,7 @@
                 <a:spcPts val="240"/>
               </a:spcBef>
             </a:pPr>
-            <a:endParaRPr sz="1200" dirty="0" smtClean="0">
+            <a:endParaRPr sz="1200" dirty="0">
               <a:latin typeface="Tahoma"/>
               <a:cs typeface="Tahoma"/>
             </a:endParaRPr>
@@ -20362,7 +19963,7 @@
               </a:lnSpc>
             </a:pPr>
             <a:r>
-              <a:rPr sz="1200" spc="-70" dirty="0" smtClean="0">
+              <a:rPr sz="1200" spc="-70" dirty="0">
                 <a:solidFill>
                   <a:srgbClr val="13132C"/>
                 </a:solidFill>
@@ -20373,7 +19974,7 @@
               <a:t>Software</a:t>
             </a:r>
             <a:r>
-              <a:rPr sz="1200" spc="-5" dirty="0" smtClean="0">
+              <a:rPr sz="1200" spc="-5" dirty="0">
                 <a:solidFill>
                   <a:srgbClr val="13132C"/>
                 </a:solidFill>
@@ -21059,17 +20660,103 @@
   <p:transition>
     <p:cut/>
   </p:transition>
-  <p:timing>
-    <p:tnLst>
-      <p:par>
-        <p:cTn id="1" dur="indefinite" restart="never" nodeType="tmRoot"/>
-      </p:par>
-    </p:tnLst>
-  </p:timing>
 </p:sld>
 </file>
 
 <file path=ppt/slides/slide20.xml><?xml version="1.0" encoding="utf-8"?>
+<p:sld xmlns:a="http://schemas.openxmlformats.org/drawingml/2006/main" xmlns:r="http://schemas.openxmlformats.org/officeDocument/2006/relationships" xmlns:p="http://schemas.openxmlformats.org/presentationml/2006/main">
+  <p:cSld>
+    <p:spTree>
+      <p:nvGrpSpPr>
+        <p:cNvPr id="1" name=""/>
+        <p:cNvGrpSpPr/>
+        <p:nvPr/>
+      </p:nvGrpSpPr>
+      <p:grpSpPr>
+        <a:xfrm>
+          <a:off x="0" y="0"/>
+          <a:ext cx="0" cy="0"/>
+          <a:chOff x="0" y="0"/>
+          <a:chExt cx="0" cy="0"/>
+        </a:xfrm>
+      </p:grpSpPr>
+      <p:sp>
+        <p:nvSpPr>
+          <p:cNvPr id="2" name="Title 1">
+            <a:extLst>
+              <a:ext uri="{FF2B5EF4-FFF2-40B4-BE49-F238E27FC236}">
+                <a16:creationId xmlns:a16="http://schemas.microsoft.com/office/drawing/2014/main" id="{29FDAA08-51F1-E090-CAE1-DA76C70A2AB2}"/>
+              </a:ext>
+            </a:extLst>
+          </p:cNvPr>
+          <p:cNvSpPr>
+            <a:spLocks noGrp="1"/>
+          </p:cNvSpPr>
+          <p:nvPr>
+            <p:ph type="title"/>
+          </p:nvPr>
+        </p:nvSpPr>
+        <p:spPr>
+          <a:xfrm>
+            <a:off x="95300" y="57337"/>
+            <a:ext cx="3531870" cy="215444"/>
+          </a:xfrm>
+        </p:spPr>
+        <p:txBody>
+          <a:bodyPr/>
+          <a:lstStyle/>
+          <a:p>
+            <a:r>
+              <a:rPr lang="en-US" dirty="0"/>
+              <a:t>Cell prediction accuracy</a:t>
+            </a:r>
+          </a:p>
+        </p:txBody>
+      </p:sp>
+      <p:pic>
+        <p:nvPicPr>
+          <p:cNvPr id="5" name="Picture 4">
+            <a:extLst>
+              <a:ext uri="{FF2B5EF4-FFF2-40B4-BE49-F238E27FC236}">
+                <a16:creationId xmlns:a16="http://schemas.microsoft.com/office/drawing/2014/main" id="{2B0CF530-C280-C064-525F-75307B961CA4}"/>
+              </a:ext>
+            </a:extLst>
+          </p:cNvPr>
+          <p:cNvPicPr>
+            <a:picLocks noChangeAspect="1"/>
+          </p:cNvPicPr>
+          <p:nvPr/>
+        </p:nvPicPr>
+        <p:blipFill>
+          <a:blip r:embed="rId2"/>
+          <a:stretch>
+            <a:fillRect/>
+          </a:stretch>
+        </p:blipFill>
+        <p:spPr>
+          <a:xfrm>
+            <a:off x="0" y="742963"/>
+            <a:ext cx="5765800" cy="1758924"/>
+          </a:xfrm>
+          <a:prstGeom prst="rect">
+            <a:avLst/>
+          </a:prstGeom>
+        </p:spPr>
+      </p:pic>
+    </p:spTree>
+    <p:extLst>
+      <p:ext uri="{BB962C8B-B14F-4D97-AF65-F5344CB8AC3E}">
+        <p14:creationId xmlns:p14="http://schemas.microsoft.com/office/powerpoint/2010/main" val="351164980"/>
+      </p:ext>
+    </p:extLst>
+  </p:cSld>
+  <p:clrMapOvr>
+    <a:masterClrMapping/>
+  </p:clrMapOvr>
+</p:sld>
+</file>
+
+<file path=ppt/slides/slide21.xml><?xml version="1.0" encoding="utf-8"?>
 <p:sld xmlns:a="http://schemas.openxmlformats.org/drawingml/2006/main" xmlns:r="http://schemas.openxmlformats.org/officeDocument/2006/relationships" xmlns:p="http://schemas.openxmlformats.org/presentationml/2006/main">
   <p:cSld>
     <p:spTree>
@@ -21162,6 +20849,427 @@
           </a:p>
         </p:txBody>
       </p:sp>
+      <p:grpSp>
+        <p:nvGrpSpPr>
+          <p:cNvPr id="9" name="object 9"/>
+          <p:cNvGrpSpPr/>
+          <p:nvPr/>
+        </p:nvGrpSpPr>
+        <p:grpSpPr>
+          <a:xfrm>
+            <a:off x="0" y="3125279"/>
+            <a:ext cx="5760085" cy="114935"/>
+            <a:chOff x="0" y="3125279"/>
+            <a:chExt cx="5760085" cy="114935"/>
+          </a:xfrm>
+        </p:grpSpPr>
+        <p:sp>
+          <p:nvSpPr>
+            <p:cNvPr id="10" name="object 10"/>
+            <p:cNvSpPr/>
+            <p:nvPr/>
+          </p:nvSpPr>
+          <p:spPr>
+            <a:xfrm>
+              <a:off x="0" y="3125279"/>
+              <a:ext cx="2016125" cy="114935"/>
+            </a:xfrm>
+            <a:custGeom>
+              <a:avLst/>
+              <a:gdLst/>
+              <a:ahLst/>
+              <a:cxnLst/>
+              <a:rect l="l" t="t" r="r" b="b"/>
+              <a:pathLst>
+                <a:path w="2016125" h="114935">
+                  <a:moveTo>
+                    <a:pt x="2016036" y="0"/>
+                  </a:moveTo>
+                  <a:lnTo>
+                    <a:pt x="0" y="0"/>
+                  </a:lnTo>
+                  <a:lnTo>
+                    <a:pt x="0" y="114719"/>
+                  </a:lnTo>
+                  <a:lnTo>
+                    <a:pt x="2016036" y="114719"/>
+                  </a:lnTo>
+                  <a:lnTo>
+                    <a:pt x="2016036" y="0"/>
+                  </a:lnTo>
+                  <a:close/>
+                </a:path>
+              </a:pathLst>
+            </a:custGeom>
+            <a:solidFill>
+              <a:srgbClr val="B41313"/>
+            </a:solidFill>
+          </p:spPr>
+          <p:txBody>
+            <a:bodyPr wrap="square" lIns="0" tIns="0" rIns="0" bIns="0" rtlCol="0"/>
+            <a:lstStyle/>
+            <a:p>
+              <a:endParaRPr/>
+            </a:p>
+          </p:txBody>
+        </p:sp>
+        <p:sp>
+          <p:nvSpPr>
+            <p:cNvPr id="11" name="object 11"/>
+            <p:cNvSpPr/>
+            <p:nvPr/>
+          </p:nvSpPr>
+          <p:spPr>
+            <a:xfrm>
+              <a:off x="2016036" y="3125279"/>
+              <a:ext cx="2592070" cy="114935"/>
+            </a:xfrm>
+            <a:custGeom>
+              <a:avLst/>
+              <a:gdLst/>
+              <a:ahLst/>
+              <a:cxnLst/>
+              <a:rect l="l" t="t" r="r" b="b"/>
+              <a:pathLst>
+                <a:path w="2592070" h="114935">
+                  <a:moveTo>
+                    <a:pt x="2591981" y="0"/>
+                  </a:moveTo>
+                  <a:lnTo>
+                    <a:pt x="0" y="0"/>
+                  </a:lnTo>
+                  <a:lnTo>
+                    <a:pt x="0" y="114719"/>
+                  </a:lnTo>
+                  <a:lnTo>
+                    <a:pt x="2591981" y="114719"/>
+                  </a:lnTo>
+                  <a:lnTo>
+                    <a:pt x="2591981" y="0"/>
+                  </a:lnTo>
+                  <a:close/>
+                </a:path>
+              </a:pathLst>
+            </a:custGeom>
+            <a:solidFill>
+              <a:srgbClr val="37374C"/>
+            </a:solidFill>
+          </p:spPr>
+          <p:txBody>
+            <a:bodyPr wrap="square" lIns="0" tIns="0" rIns="0" bIns="0" rtlCol="0"/>
+            <a:lstStyle/>
+            <a:p>
+              <a:endParaRPr/>
+            </a:p>
+          </p:txBody>
+        </p:sp>
+        <p:sp>
+          <p:nvSpPr>
+            <p:cNvPr id="12" name="object 12"/>
+            <p:cNvSpPr/>
+            <p:nvPr/>
+          </p:nvSpPr>
+          <p:spPr>
+            <a:xfrm>
+              <a:off x="4608017" y="3125279"/>
+              <a:ext cx="1152525" cy="114935"/>
+            </a:xfrm>
+            <a:custGeom>
+              <a:avLst/>
+              <a:gdLst/>
+              <a:ahLst/>
+              <a:cxnLst/>
+              <a:rect l="l" t="t" r="r" b="b"/>
+              <a:pathLst>
+                <a:path w="1152525" h="114935">
+                  <a:moveTo>
+                    <a:pt x="1151978" y="0"/>
+                  </a:moveTo>
+                  <a:lnTo>
+                    <a:pt x="0" y="0"/>
+                  </a:lnTo>
+                  <a:lnTo>
+                    <a:pt x="0" y="114719"/>
+                  </a:lnTo>
+                  <a:lnTo>
+                    <a:pt x="1151978" y="114719"/>
+                  </a:lnTo>
+                  <a:lnTo>
+                    <a:pt x="1151978" y="0"/>
+                  </a:lnTo>
+                  <a:close/>
+                </a:path>
+              </a:pathLst>
+            </a:custGeom>
+            <a:solidFill>
+              <a:srgbClr val="13132C"/>
+            </a:solidFill>
+          </p:spPr>
+          <p:txBody>
+            <a:bodyPr wrap="square" lIns="0" tIns="0" rIns="0" bIns="0" rtlCol="0"/>
+            <a:lstStyle/>
+            <a:p>
+              <a:endParaRPr/>
+            </a:p>
+          </p:txBody>
+        </p:sp>
+      </p:grpSp>
+      <p:sp>
+        <p:nvSpPr>
+          <p:cNvPr id="13" name="object 13"/>
+          <p:cNvSpPr txBox="1">
+            <a:spLocks noGrp="1"/>
+          </p:cNvSpPr>
+          <p:nvPr>
+            <p:ph type="ftr" sz="quarter" idx="5"/>
+          </p:nvPr>
+        </p:nvSpPr>
+        <p:spPr>
+          <a:prstGeom prst="rect">
+            <a:avLst/>
+          </a:prstGeom>
+        </p:spPr>
+        <p:txBody>
+          <a:bodyPr vert="horz" wrap="square" lIns="0" tIns="24130" rIns="0" bIns="0" rtlCol="0">
+            <a:spAutoFit/>
+          </a:bodyPr>
+          <a:lstStyle/>
+          <a:p>
+            <a:pPr marL="12700">
+              <a:lnSpc>
+                <a:spcPct val="100000"/>
+              </a:lnSpc>
+              <a:spcBef>
+                <a:spcPts val="190"/>
+              </a:spcBef>
+            </a:pPr>
+            <a:r>
+              <a:rPr dirty="0"/>
+              <a:t>ITI </a:t>
+            </a:r>
+            <a:r>
+              <a:rPr spc="-10" dirty="0"/>
+              <a:t>Intake</a:t>
+            </a:r>
+            <a:r>
+              <a:rPr spc="5" dirty="0"/>
+              <a:t> </a:t>
+            </a:r>
+            <a:r>
+              <a:rPr spc="-25" dirty="0"/>
+              <a:t>46</a:t>
+            </a:r>
+          </a:p>
+        </p:txBody>
+      </p:sp>
+      <p:sp>
+        <p:nvSpPr>
+          <p:cNvPr id="14" name="object 14"/>
+          <p:cNvSpPr txBox="1"/>
+          <p:nvPr/>
+        </p:nvSpPr>
+        <p:spPr>
+          <a:xfrm>
+            <a:off x="3100044" y="3105948"/>
+            <a:ext cx="424180" cy="137160"/>
+          </a:xfrm>
+          <a:prstGeom prst="rect">
+            <a:avLst/>
+          </a:prstGeom>
+        </p:spPr>
+        <p:txBody>
+          <a:bodyPr vert="horz" wrap="square" lIns="0" tIns="24130" rIns="0" bIns="0" rtlCol="0">
+            <a:spAutoFit/>
+          </a:bodyPr>
+          <a:lstStyle/>
+          <a:p>
+            <a:pPr marL="12700">
+              <a:lnSpc>
+                <a:spcPct val="100000"/>
+              </a:lnSpc>
+              <a:spcBef>
+                <a:spcPts val="190"/>
+              </a:spcBef>
+            </a:pPr>
+            <a:r>
+              <a:rPr sz="600" spc="-10" dirty="0">
+                <a:solidFill>
+                  <a:srgbClr val="FFFFFF"/>
+                </a:solidFill>
+                <a:latin typeface="Tahoma"/>
+                <a:cs typeface="Tahoma"/>
+                <a:hlinkClick r:id="rId2" action="ppaction://hlinksldjump"/>
+              </a:rPr>
+              <a:t>RANPilotAI</a:t>
+            </a:r>
+            <a:endParaRPr sz="600" dirty="0">
+              <a:latin typeface="Tahoma"/>
+              <a:cs typeface="Tahoma"/>
+            </a:endParaRPr>
+          </a:p>
+        </p:txBody>
+      </p:sp>
+      <p:sp>
+        <p:nvSpPr>
+          <p:cNvPr id="15" name="object 15"/>
+          <p:cNvSpPr txBox="1">
+            <a:spLocks noGrp="1"/>
+          </p:cNvSpPr>
+          <p:nvPr>
+            <p:ph type="sldNum" sz="quarter" idx="7"/>
+          </p:nvPr>
+        </p:nvSpPr>
+        <p:spPr>
+          <a:prstGeom prst="rect">
+            <a:avLst/>
+          </a:prstGeom>
+        </p:spPr>
+        <p:txBody>
+          <a:bodyPr vert="horz" wrap="square" lIns="0" tIns="24130" rIns="0" bIns="0" rtlCol="0">
+            <a:spAutoFit/>
+          </a:bodyPr>
+          <a:lstStyle/>
+          <a:p>
+            <a:pPr marL="12700">
+              <a:lnSpc>
+                <a:spcPct val="100000"/>
+              </a:lnSpc>
+              <a:spcBef>
+                <a:spcPts val="190"/>
+              </a:spcBef>
+            </a:pPr>
+            <a:fld id="{81D60167-4931-47E6-BA6A-407CBD079E47}" type="slidenum">
+              <a:rPr dirty="0"/>
+              <a:t>21</a:t>
+            </a:fld>
+            <a:r>
+              <a:rPr spc="10" dirty="0"/>
+              <a:t> </a:t>
+            </a:r>
+            <a:r>
+              <a:rPr spc="90" dirty="0"/>
+              <a:t>/</a:t>
+            </a:r>
+            <a:r>
+              <a:rPr spc="10" dirty="0"/>
+              <a:t> </a:t>
+            </a:r>
+            <a:r>
+              <a:rPr spc="-25" dirty="0"/>
+              <a:t>47</a:t>
+            </a:r>
+          </a:p>
+        </p:txBody>
+      </p:sp>
+      <p:pic>
+        <p:nvPicPr>
+          <p:cNvPr id="17" name="Picture 16">
+            <a:extLst>
+              <a:ext uri="{FF2B5EF4-FFF2-40B4-BE49-F238E27FC236}">
+                <a16:creationId xmlns:a16="http://schemas.microsoft.com/office/drawing/2014/main" id="{4B3CD544-C091-151D-C527-EFE436CEE35B}"/>
+              </a:ext>
+            </a:extLst>
+          </p:cNvPr>
+          <p:cNvPicPr>
+            <a:picLocks noChangeAspect="1"/>
+          </p:cNvPicPr>
+          <p:nvPr/>
+        </p:nvPicPr>
+        <p:blipFill>
+          <a:blip r:embed="rId3"/>
+          <a:srcRect t="3370" r="1098" b="6250"/>
+          <a:stretch/>
+        </p:blipFill>
+        <p:spPr>
+          <a:xfrm>
+            <a:off x="-5258" y="321143"/>
+            <a:ext cx="5765800" cy="2801241"/>
+          </a:xfrm>
+          <a:prstGeom prst="rect">
+            <a:avLst/>
+          </a:prstGeom>
+        </p:spPr>
+      </p:pic>
+    </p:spTree>
+  </p:cSld>
+  <p:clrMapOvr>
+    <a:masterClrMapping/>
+  </p:clrMapOvr>
+  <p:transition>
+    <p:cut/>
+  </p:transition>
+</p:sld>
+</file>
+
+<file path=ppt/slides/slide22.xml><?xml version="1.0" encoding="utf-8"?>
+<p:sld xmlns:a="http://schemas.openxmlformats.org/drawingml/2006/main" xmlns:r="http://schemas.openxmlformats.org/officeDocument/2006/relationships" xmlns:p="http://schemas.openxmlformats.org/presentationml/2006/main">
+  <p:cSld>
+    <p:spTree>
+      <p:nvGrpSpPr>
+        <p:cNvPr id="1" name=""/>
+        <p:cNvGrpSpPr/>
+        <p:nvPr/>
+      </p:nvGrpSpPr>
+      <p:grpSpPr>
+        <a:xfrm>
+          <a:off x="0" y="0"/>
+          <a:ext cx="0" cy="0"/>
+          <a:chOff x="0" y="0"/>
+          <a:chExt cx="0" cy="0"/>
+        </a:xfrm>
+      </p:grpSpPr>
+      <p:sp>
+        <p:nvSpPr>
+          <p:cNvPr id="2" name="object 2" descr="$PPTXTitle"/>
+          <p:cNvSpPr txBox="1">
+            <a:spLocks noGrp="1"/>
+          </p:cNvSpPr>
+          <p:nvPr>
+            <p:ph type="title"/>
+          </p:nvPr>
+        </p:nvSpPr>
+        <p:spPr>
+          <a:prstGeom prst="rect">
+            <a:avLst/>
+          </a:prstGeom>
+        </p:spPr>
+        <p:txBody>
+          <a:bodyPr vert="horz" wrap="square" lIns="0" tIns="17145" rIns="0" bIns="0" rtlCol="0">
+            <a:spAutoFit/>
+          </a:bodyPr>
+          <a:lstStyle/>
+          <a:p>
+            <a:pPr marL="12700">
+              <a:lnSpc>
+                <a:spcPct val="100000"/>
+              </a:lnSpc>
+              <a:spcBef>
+                <a:spcPts val="135"/>
+              </a:spcBef>
+            </a:pPr>
+            <a:r>
+              <a:rPr spc="-114" dirty="0"/>
+              <a:t>XGBoost</a:t>
+            </a:r>
+            <a:r>
+              <a:rPr spc="45" dirty="0"/>
+              <a:t> </a:t>
+            </a:r>
+            <a:r>
+              <a:rPr spc="-145" dirty="0"/>
+              <a:t>Feature</a:t>
+            </a:r>
+            <a:r>
+              <a:rPr spc="45" dirty="0"/>
+              <a:t> </a:t>
+            </a:r>
+            <a:r>
+              <a:rPr spc="-130" dirty="0"/>
+              <a:t>Importance</a:t>
+            </a:r>
+          </a:p>
+        </p:txBody>
+      </p:sp>
       <p:sp>
         <p:nvSpPr>
           <p:cNvPr id="3" name="object 3"/>
@@ -21170,8 +21278,8 @@
         </p:nvSpPr>
         <p:spPr>
           <a:xfrm>
-            <a:off x="2101024" y="1473960"/>
-            <a:ext cx="1558290" cy="438784"/>
+            <a:off x="2020366" y="1473960"/>
+            <a:ext cx="1719580" cy="438784"/>
           </a:xfrm>
           <a:prstGeom prst="rect">
             <a:avLst/>
@@ -21183,7 +21291,7 @@
           </a:bodyPr>
           <a:lstStyle/>
           <a:p>
-            <a:pPr marL="44450">
+            <a:pPr algn="ctr">
               <a:lnSpc>
                 <a:spcPct val="100000"/>
               </a:lnSpc>
@@ -21261,13 +21369,13 @@
               </a:rPr>
               <a:t>added</a:t>
             </a:r>
-            <a:endParaRPr sz="1100">
+            <a:endParaRPr sz="1100" dirty="0">
               <a:latin typeface="Calibri"/>
               <a:cs typeface="Calibri"/>
             </a:endParaRPr>
           </a:p>
           <a:p>
-            <a:pPr marL="12700">
+            <a:pPr algn="ctr">
               <a:lnSpc>
                 <a:spcPct val="100000"/>
               </a:lnSpc>
@@ -21283,9 +21391,9 @@
                 <a:latin typeface="Palatino Linotype"/>
                 <a:cs typeface="Palatino Linotype"/>
               </a:rPr>
-              <a:t>screenshots/ibrahim/forecast_chart.png</a:t>
-            </a:r>
-            <a:endParaRPr sz="600">
+              <a:t>screenshots/ibrahim/feature_importance.png</a:t>
+            </a:r>
+            <a:endParaRPr sz="600" dirty="0">
               <a:latin typeface="Palatino Linotype"/>
               <a:cs typeface="Palatino Linotype"/>
             </a:endParaRPr>
@@ -21766,7 +21874,7 @@
             </a:pPr>
             <a:fld id="{81D60167-4931-47E6-BA6A-407CBD079E47}" type="slidenum">
               <a:rPr dirty="0"/>
-              <a:t>20</a:t>
+              <a:t>22</a:t>
             </a:fld>
             <a:r>
               <a:rPr spc="10" dirty="0"/>
@@ -21787,6 +21895,36 @@
           </a:p>
         </p:txBody>
       </p:sp>
+      <p:pic>
+        <p:nvPicPr>
+          <p:cNvPr id="17" name="Picture 16">
+            <a:extLst>
+              <a:ext uri="{FF2B5EF4-FFF2-40B4-BE49-F238E27FC236}">
+                <a16:creationId xmlns:a16="http://schemas.microsoft.com/office/drawing/2014/main" id="{2BD4813E-8763-FFF6-6F67-6845C44265E0}"/>
+              </a:ext>
+            </a:extLst>
+          </p:cNvPr>
+          <p:cNvPicPr>
+            <a:picLocks noChangeAspect="1"/>
+          </p:cNvPicPr>
+          <p:nvPr/>
+        </p:nvPicPr>
+        <p:blipFill>
+          <a:blip r:embed="rId3"/>
+          <a:stretch>
+            <a:fillRect/>
+          </a:stretch>
+        </p:blipFill>
+        <p:spPr>
+          <a:xfrm>
+            <a:off x="0" y="417822"/>
+            <a:ext cx="5765800" cy="2514317"/>
+          </a:xfrm>
+          <a:prstGeom prst="rect">
+            <a:avLst/>
+          </a:prstGeom>
+        </p:spPr>
+      </p:pic>
     </p:spTree>
   </p:cSld>
   <p:clrMapOvr>
@@ -21795,729 +21933,10 @@
   <p:transition>
     <p:cut/>
   </p:transition>
-  <p:timing>
-    <p:tnLst>
-      <p:par>
-        <p:cTn id="1" dur="indefinite" restart="never" nodeType="tmRoot"/>
-      </p:par>
-    </p:tnLst>
-  </p:timing>
 </p:sld>
 </file>
 
-<file path=ppt/slides/slide21.xml><?xml version="1.0" encoding="utf-8"?>
-<p:sld xmlns:a="http://schemas.openxmlformats.org/drawingml/2006/main" xmlns:r="http://schemas.openxmlformats.org/officeDocument/2006/relationships" xmlns:p="http://schemas.openxmlformats.org/presentationml/2006/main">
-  <p:cSld>
-    <p:spTree>
-      <p:nvGrpSpPr>
-        <p:cNvPr id="1" name=""/>
-        <p:cNvGrpSpPr/>
-        <p:nvPr/>
-      </p:nvGrpSpPr>
-      <p:grpSpPr>
-        <a:xfrm>
-          <a:off x="0" y="0"/>
-          <a:ext cx="0" cy="0"/>
-          <a:chOff x="0" y="0"/>
-          <a:chExt cx="0" cy="0"/>
-        </a:xfrm>
-      </p:grpSpPr>
-      <p:sp>
-        <p:nvSpPr>
-          <p:cNvPr id="2" name="object 2" descr="$PPTXTitle"/>
-          <p:cNvSpPr txBox="1">
-            <a:spLocks noGrp="1"/>
-          </p:cNvSpPr>
-          <p:nvPr>
-            <p:ph type="title"/>
-          </p:nvPr>
-        </p:nvSpPr>
-        <p:spPr>
-          <a:prstGeom prst="rect">
-            <a:avLst/>
-          </a:prstGeom>
-        </p:spPr>
-        <p:txBody>
-          <a:bodyPr vert="horz" wrap="square" lIns="0" tIns="17145" rIns="0" bIns="0" rtlCol="0">
-            <a:spAutoFit/>
-          </a:bodyPr>
-          <a:lstStyle/>
-          <a:p>
-            <a:pPr marL="12700">
-              <a:lnSpc>
-                <a:spcPct val="100000"/>
-              </a:lnSpc>
-              <a:spcBef>
-                <a:spcPts val="135"/>
-              </a:spcBef>
-            </a:pPr>
-            <a:r>
-              <a:rPr spc="-114" dirty="0"/>
-              <a:t>XGBoost</a:t>
-            </a:r>
-            <a:r>
-              <a:rPr spc="45" dirty="0"/>
-              <a:t> </a:t>
-            </a:r>
-            <a:r>
-              <a:rPr spc="-145" dirty="0"/>
-              <a:t>Feature</a:t>
-            </a:r>
-            <a:r>
-              <a:rPr spc="45" dirty="0"/>
-              <a:t> </a:t>
-            </a:r>
-            <a:r>
-              <a:rPr spc="-130" dirty="0"/>
-              <a:t>Importance</a:t>
-            </a:r>
-          </a:p>
-        </p:txBody>
-      </p:sp>
-      <p:sp>
-        <p:nvSpPr>
-          <p:cNvPr id="3" name="object 3"/>
-          <p:cNvSpPr txBox="1"/>
-          <p:nvPr/>
-        </p:nvSpPr>
-        <p:spPr>
-          <a:xfrm>
-            <a:off x="2020366" y="1473960"/>
-            <a:ext cx="1719580" cy="438784"/>
-          </a:xfrm>
-          <a:prstGeom prst="rect">
-            <a:avLst/>
-          </a:prstGeom>
-        </p:spPr>
-        <p:txBody>
-          <a:bodyPr vert="horz" wrap="square" lIns="0" tIns="11430" rIns="0" bIns="0" rtlCol="0">
-            <a:spAutoFit/>
-          </a:bodyPr>
-          <a:lstStyle/>
-          <a:p>
-            <a:pPr algn="ctr">
-              <a:lnSpc>
-                <a:spcPct val="100000"/>
-              </a:lnSpc>
-              <a:spcBef>
-                <a:spcPts val="90"/>
-              </a:spcBef>
-            </a:pPr>
-            <a:r>
-              <a:rPr sz="1100" i="1" dirty="0">
-                <a:solidFill>
-                  <a:srgbClr val="13132C"/>
-                </a:solidFill>
-                <a:latin typeface="Calibri"/>
-                <a:cs typeface="Calibri"/>
-              </a:rPr>
-              <a:t>Screenshot</a:t>
-            </a:r>
-            <a:r>
-              <a:rPr sz="1100" i="1" spc="120" dirty="0">
-                <a:solidFill>
-                  <a:srgbClr val="13132C"/>
-                </a:solidFill>
-                <a:latin typeface="Calibri"/>
-                <a:cs typeface="Calibri"/>
-              </a:rPr>
-              <a:t> </a:t>
-            </a:r>
-            <a:r>
-              <a:rPr sz="1100" i="1" dirty="0">
-                <a:solidFill>
-                  <a:srgbClr val="13132C"/>
-                </a:solidFill>
-                <a:latin typeface="Calibri"/>
-                <a:cs typeface="Calibri"/>
-              </a:rPr>
-              <a:t>not</a:t>
-            </a:r>
-            <a:r>
-              <a:rPr sz="1100" i="1" spc="120" dirty="0">
-                <a:solidFill>
-                  <a:srgbClr val="13132C"/>
-                </a:solidFill>
-                <a:latin typeface="Calibri"/>
-                <a:cs typeface="Calibri"/>
-              </a:rPr>
-              <a:t> </a:t>
-            </a:r>
-            <a:r>
-              <a:rPr sz="1100" i="1" dirty="0">
-                <a:solidFill>
-                  <a:srgbClr val="13132C"/>
-                </a:solidFill>
-                <a:latin typeface="Calibri"/>
-                <a:cs typeface="Calibri"/>
-              </a:rPr>
-              <a:t>yet</a:t>
-            </a:r>
-            <a:r>
-              <a:rPr sz="1100" i="1" spc="120" dirty="0">
-                <a:solidFill>
-                  <a:srgbClr val="13132C"/>
-                </a:solidFill>
-                <a:latin typeface="Calibri"/>
-                <a:cs typeface="Calibri"/>
-              </a:rPr>
-              <a:t> </a:t>
-            </a:r>
-            <a:r>
-              <a:rPr sz="1100" i="1" spc="-10" dirty="0">
-                <a:solidFill>
-                  <a:srgbClr val="13132C"/>
-                </a:solidFill>
-                <a:latin typeface="Calibri"/>
-                <a:cs typeface="Calibri"/>
-              </a:rPr>
-              <a:t>added</a:t>
-            </a:r>
-            <a:endParaRPr sz="1100">
-              <a:latin typeface="Calibri"/>
-              <a:cs typeface="Calibri"/>
-            </a:endParaRPr>
-          </a:p>
-          <a:p>
-            <a:pPr algn="ctr">
-              <a:lnSpc>
-                <a:spcPct val="100000"/>
-              </a:lnSpc>
-              <a:spcBef>
-                <a:spcPts val="1220"/>
-              </a:spcBef>
-            </a:pPr>
-            <a:r>
-              <a:rPr sz="600" spc="-10" dirty="0">
-                <a:solidFill>
-                  <a:srgbClr val="13132C"/>
-                </a:solidFill>
-                <a:latin typeface="Palatino Linotype"/>
-                <a:cs typeface="Palatino Linotype"/>
-              </a:rPr>
-              <a:t>screenshots/ibrahim/feature_importance.png</a:t>
-            </a:r>
-            <a:endParaRPr sz="600">
-              <a:latin typeface="Palatino Linotype"/>
-              <a:cs typeface="Palatino Linotype"/>
-            </a:endParaRPr>
-          </a:p>
-        </p:txBody>
-      </p:sp>
-      <p:grpSp>
-        <p:nvGrpSpPr>
-          <p:cNvPr id="4" name="object 4"/>
-          <p:cNvGrpSpPr/>
-          <p:nvPr/>
-        </p:nvGrpSpPr>
-        <p:grpSpPr>
-          <a:xfrm>
-            <a:off x="378764" y="473087"/>
-            <a:ext cx="5002530" cy="2484755"/>
-            <a:chOff x="378764" y="473087"/>
-            <a:chExt cx="5002530" cy="2484755"/>
-          </a:xfrm>
-        </p:grpSpPr>
-        <p:sp>
-          <p:nvSpPr>
-            <p:cNvPr id="5" name="object 5"/>
-            <p:cNvSpPr/>
-            <p:nvPr/>
-          </p:nvSpPr>
-          <p:spPr>
-            <a:xfrm>
-              <a:off x="378764" y="475614"/>
-              <a:ext cx="5002530" cy="0"/>
-            </a:xfrm>
-            <a:custGeom>
-              <a:avLst/>
-              <a:gdLst/>
-              <a:ahLst/>
-              <a:cxnLst/>
-              <a:rect l="l" t="t" r="r" b="b"/>
-              <a:pathLst>
-                <a:path w="5002530">
-                  <a:moveTo>
-                    <a:pt x="0" y="0"/>
-                  </a:moveTo>
-                  <a:lnTo>
-                    <a:pt x="5002466" y="0"/>
-                  </a:lnTo>
-                </a:path>
-              </a:pathLst>
-            </a:custGeom>
-            <a:ln w="5054">
-              <a:solidFill>
-                <a:srgbClr val="000000"/>
-              </a:solidFill>
-            </a:ln>
-          </p:spPr>
-          <p:txBody>
-            <a:bodyPr wrap="square" lIns="0" tIns="0" rIns="0" bIns="0" rtlCol="0"/>
-            <a:lstStyle/>
-            <a:p>
-              <a:endParaRPr/>
-            </a:p>
-          </p:txBody>
-        </p:sp>
-        <p:sp>
-          <p:nvSpPr>
-            <p:cNvPr id="6" name="object 6"/>
-            <p:cNvSpPr/>
-            <p:nvPr/>
-          </p:nvSpPr>
-          <p:spPr>
-            <a:xfrm>
-              <a:off x="381292" y="475614"/>
-              <a:ext cx="0" cy="2479675"/>
-            </a:xfrm>
-            <a:custGeom>
-              <a:avLst/>
-              <a:gdLst/>
-              <a:ahLst/>
-              <a:cxnLst/>
-              <a:rect l="l" t="t" r="r" b="b"/>
-              <a:pathLst>
-                <a:path h="2479675">
-                  <a:moveTo>
-                    <a:pt x="0" y="2479217"/>
-                  </a:moveTo>
-                  <a:lnTo>
-                    <a:pt x="0" y="0"/>
-                  </a:lnTo>
-                </a:path>
-              </a:pathLst>
-            </a:custGeom>
-            <a:ln w="5054">
-              <a:solidFill>
-                <a:srgbClr val="000000"/>
-              </a:solidFill>
-            </a:ln>
-          </p:spPr>
-          <p:txBody>
-            <a:bodyPr wrap="square" lIns="0" tIns="0" rIns="0" bIns="0" rtlCol="0"/>
-            <a:lstStyle/>
-            <a:p>
-              <a:endParaRPr/>
-            </a:p>
-          </p:txBody>
-        </p:sp>
-        <p:sp>
-          <p:nvSpPr>
-            <p:cNvPr id="7" name="object 7"/>
-            <p:cNvSpPr/>
-            <p:nvPr/>
-          </p:nvSpPr>
-          <p:spPr>
-            <a:xfrm>
-              <a:off x="5378704" y="475614"/>
-              <a:ext cx="0" cy="2479675"/>
-            </a:xfrm>
-            <a:custGeom>
-              <a:avLst/>
-              <a:gdLst/>
-              <a:ahLst/>
-              <a:cxnLst/>
-              <a:rect l="l" t="t" r="r" b="b"/>
-              <a:pathLst>
-                <a:path h="2479675">
-                  <a:moveTo>
-                    <a:pt x="0" y="2479217"/>
-                  </a:moveTo>
-                  <a:lnTo>
-                    <a:pt x="0" y="0"/>
-                  </a:lnTo>
-                </a:path>
-              </a:pathLst>
-            </a:custGeom>
-            <a:ln w="5054">
-              <a:solidFill>
-                <a:srgbClr val="000000"/>
-              </a:solidFill>
-            </a:ln>
-          </p:spPr>
-          <p:txBody>
-            <a:bodyPr wrap="square" lIns="0" tIns="0" rIns="0" bIns="0" rtlCol="0"/>
-            <a:lstStyle/>
-            <a:p>
-              <a:endParaRPr/>
-            </a:p>
-          </p:txBody>
-        </p:sp>
-        <p:sp>
-          <p:nvSpPr>
-            <p:cNvPr id="8" name="object 8"/>
-            <p:cNvSpPr/>
-            <p:nvPr/>
-          </p:nvSpPr>
-          <p:spPr>
-            <a:xfrm>
-              <a:off x="378764" y="2954832"/>
-              <a:ext cx="5002530" cy="0"/>
-            </a:xfrm>
-            <a:custGeom>
-              <a:avLst/>
-              <a:gdLst/>
-              <a:ahLst/>
-              <a:cxnLst/>
-              <a:rect l="l" t="t" r="r" b="b"/>
-              <a:pathLst>
-                <a:path w="5002530">
-                  <a:moveTo>
-                    <a:pt x="0" y="0"/>
-                  </a:moveTo>
-                  <a:lnTo>
-                    <a:pt x="5002466" y="0"/>
-                  </a:lnTo>
-                </a:path>
-              </a:pathLst>
-            </a:custGeom>
-            <a:ln w="5054">
-              <a:solidFill>
-                <a:srgbClr val="000000"/>
-              </a:solidFill>
-            </a:ln>
-          </p:spPr>
-          <p:txBody>
-            <a:bodyPr wrap="square" lIns="0" tIns="0" rIns="0" bIns="0" rtlCol="0"/>
-            <a:lstStyle/>
-            <a:p>
-              <a:endParaRPr/>
-            </a:p>
-          </p:txBody>
-        </p:sp>
-      </p:grpSp>
-      <p:grpSp>
-        <p:nvGrpSpPr>
-          <p:cNvPr id="9" name="object 9"/>
-          <p:cNvGrpSpPr/>
-          <p:nvPr/>
-        </p:nvGrpSpPr>
-        <p:grpSpPr>
-          <a:xfrm>
-            <a:off x="0" y="3125279"/>
-            <a:ext cx="5760085" cy="114935"/>
-            <a:chOff x="0" y="3125279"/>
-            <a:chExt cx="5760085" cy="114935"/>
-          </a:xfrm>
-        </p:grpSpPr>
-        <p:sp>
-          <p:nvSpPr>
-            <p:cNvPr id="10" name="object 10"/>
-            <p:cNvSpPr/>
-            <p:nvPr/>
-          </p:nvSpPr>
-          <p:spPr>
-            <a:xfrm>
-              <a:off x="0" y="3125279"/>
-              <a:ext cx="2016125" cy="114935"/>
-            </a:xfrm>
-            <a:custGeom>
-              <a:avLst/>
-              <a:gdLst/>
-              <a:ahLst/>
-              <a:cxnLst/>
-              <a:rect l="l" t="t" r="r" b="b"/>
-              <a:pathLst>
-                <a:path w="2016125" h="114935">
-                  <a:moveTo>
-                    <a:pt x="2016036" y="0"/>
-                  </a:moveTo>
-                  <a:lnTo>
-                    <a:pt x="0" y="0"/>
-                  </a:lnTo>
-                  <a:lnTo>
-                    <a:pt x="0" y="114719"/>
-                  </a:lnTo>
-                  <a:lnTo>
-                    <a:pt x="2016036" y="114719"/>
-                  </a:lnTo>
-                  <a:lnTo>
-                    <a:pt x="2016036" y="0"/>
-                  </a:lnTo>
-                  <a:close/>
-                </a:path>
-              </a:pathLst>
-            </a:custGeom>
-            <a:solidFill>
-              <a:srgbClr val="B41313"/>
-            </a:solidFill>
-          </p:spPr>
-          <p:txBody>
-            <a:bodyPr wrap="square" lIns="0" tIns="0" rIns="0" bIns="0" rtlCol="0"/>
-            <a:lstStyle/>
-            <a:p>
-              <a:endParaRPr/>
-            </a:p>
-          </p:txBody>
-        </p:sp>
-        <p:sp>
-          <p:nvSpPr>
-            <p:cNvPr id="11" name="object 11"/>
-            <p:cNvSpPr/>
-            <p:nvPr/>
-          </p:nvSpPr>
-          <p:spPr>
-            <a:xfrm>
-              <a:off x="2016036" y="3125279"/>
-              <a:ext cx="2592070" cy="114935"/>
-            </a:xfrm>
-            <a:custGeom>
-              <a:avLst/>
-              <a:gdLst/>
-              <a:ahLst/>
-              <a:cxnLst/>
-              <a:rect l="l" t="t" r="r" b="b"/>
-              <a:pathLst>
-                <a:path w="2592070" h="114935">
-                  <a:moveTo>
-                    <a:pt x="2591981" y="0"/>
-                  </a:moveTo>
-                  <a:lnTo>
-                    <a:pt x="0" y="0"/>
-                  </a:lnTo>
-                  <a:lnTo>
-                    <a:pt x="0" y="114719"/>
-                  </a:lnTo>
-                  <a:lnTo>
-                    <a:pt x="2591981" y="114719"/>
-                  </a:lnTo>
-                  <a:lnTo>
-                    <a:pt x="2591981" y="0"/>
-                  </a:lnTo>
-                  <a:close/>
-                </a:path>
-              </a:pathLst>
-            </a:custGeom>
-            <a:solidFill>
-              <a:srgbClr val="37374C"/>
-            </a:solidFill>
-          </p:spPr>
-          <p:txBody>
-            <a:bodyPr wrap="square" lIns="0" tIns="0" rIns="0" bIns="0" rtlCol="0"/>
-            <a:lstStyle/>
-            <a:p>
-              <a:endParaRPr/>
-            </a:p>
-          </p:txBody>
-        </p:sp>
-        <p:sp>
-          <p:nvSpPr>
-            <p:cNvPr id="12" name="object 12"/>
-            <p:cNvSpPr/>
-            <p:nvPr/>
-          </p:nvSpPr>
-          <p:spPr>
-            <a:xfrm>
-              <a:off x="4608017" y="3125279"/>
-              <a:ext cx="1152525" cy="114935"/>
-            </a:xfrm>
-            <a:custGeom>
-              <a:avLst/>
-              <a:gdLst/>
-              <a:ahLst/>
-              <a:cxnLst/>
-              <a:rect l="l" t="t" r="r" b="b"/>
-              <a:pathLst>
-                <a:path w="1152525" h="114935">
-                  <a:moveTo>
-                    <a:pt x="1151978" y="0"/>
-                  </a:moveTo>
-                  <a:lnTo>
-                    <a:pt x="0" y="0"/>
-                  </a:lnTo>
-                  <a:lnTo>
-                    <a:pt x="0" y="114719"/>
-                  </a:lnTo>
-                  <a:lnTo>
-                    <a:pt x="1151978" y="114719"/>
-                  </a:lnTo>
-                  <a:lnTo>
-                    <a:pt x="1151978" y="0"/>
-                  </a:lnTo>
-                  <a:close/>
-                </a:path>
-              </a:pathLst>
-            </a:custGeom>
-            <a:solidFill>
-              <a:srgbClr val="13132C"/>
-            </a:solidFill>
-          </p:spPr>
-          <p:txBody>
-            <a:bodyPr wrap="square" lIns="0" tIns="0" rIns="0" bIns="0" rtlCol="0"/>
-            <a:lstStyle/>
-            <a:p>
-              <a:endParaRPr/>
-            </a:p>
-          </p:txBody>
-        </p:sp>
-      </p:grpSp>
-      <p:sp>
-        <p:nvSpPr>
-          <p:cNvPr id="13" name="object 13"/>
-          <p:cNvSpPr txBox="1">
-            <a:spLocks noGrp="1"/>
-          </p:cNvSpPr>
-          <p:nvPr>
-            <p:ph type="ftr" sz="quarter" idx="5"/>
-          </p:nvPr>
-        </p:nvSpPr>
-        <p:spPr>
-          <a:prstGeom prst="rect">
-            <a:avLst/>
-          </a:prstGeom>
-        </p:spPr>
-        <p:txBody>
-          <a:bodyPr vert="horz" wrap="square" lIns="0" tIns="24130" rIns="0" bIns="0" rtlCol="0">
-            <a:spAutoFit/>
-          </a:bodyPr>
-          <a:lstStyle/>
-          <a:p>
-            <a:pPr marL="12700">
-              <a:lnSpc>
-                <a:spcPct val="100000"/>
-              </a:lnSpc>
-              <a:spcBef>
-                <a:spcPts val="190"/>
-              </a:spcBef>
-            </a:pPr>
-            <a:r>
-              <a:rPr dirty="0"/>
-              <a:t>ITI </a:t>
-            </a:r>
-            <a:r>
-              <a:rPr spc="-10" dirty="0"/>
-              <a:t>Intake</a:t>
-            </a:r>
-            <a:r>
-              <a:rPr spc="5" dirty="0"/>
-              <a:t> </a:t>
-            </a:r>
-            <a:r>
-              <a:rPr spc="-25" dirty="0"/>
-              <a:t>46</a:t>
-            </a:r>
-          </a:p>
-        </p:txBody>
-      </p:sp>
-      <p:sp>
-        <p:nvSpPr>
-          <p:cNvPr id="14" name="object 14"/>
-          <p:cNvSpPr txBox="1"/>
-          <p:nvPr/>
-        </p:nvSpPr>
-        <p:spPr>
-          <a:xfrm>
-            <a:off x="3100044" y="3105948"/>
-            <a:ext cx="424180" cy="137160"/>
-          </a:xfrm>
-          <a:prstGeom prst="rect">
-            <a:avLst/>
-          </a:prstGeom>
-        </p:spPr>
-        <p:txBody>
-          <a:bodyPr vert="horz" wrap="square" lIns="0" tIns="24130" rIns="0" bIns="0" rtlCol="0">
-            <a:spAutoFit/>
-          </a:bodyPr>
-          <a:lstStyle/>
-          <a:p>
-            <a:pPr marL="12700">
-              <a:lnSpc>
-                <a:spcPct val="100000"/>
-              </a:lnSpc>
-              <a:spcBef>
-                <a:spcPts val="190"/>
-              </a:spcBef>
-            </a:pPr>
-            <a:r>
-              <a:rPr sz="600" spc="-10" dirty="0">
-                <a:solidFill>
-                  <a:srgbClr val="FFFFFF"/>
-                </a:solidFill>
-                <a:latin typeface="Tahoma"/>
-                <a:cs typeface="Tahoma"/>
-                <a:hlinkClick r:id="rId2" action="ppaction://hlinksldjump"/>
-              </a:rPr>
-              <a:t>RANPilotAI</a:t>
-            </a:r>
-            <a:endParaRPr sz="600" dirty="0">
-              <a:latin typeface="Tahoma"/>
-              <a:cs typeface="Tahoma"/>
-            </a:endParaRPr>
-          </a:p>
-        </p:txBody>
-      </p:sp>
-      <p:sp>
-        <p:nvSpPr>
-          <p:cNvPr id="15" name="object 15"/>
-          <p:cNvSpPr txBox="1">
-            <a:spLocks noGrp="1"/>
-          </p:cNvSpPr>
-          <p:nvPr>
-            <p:ph type="sldNum" sz="quarter" idx="7"/>
-          </p:nvPr>
-        </p:nvSpPr>
-        <p:spPr>
-          <a:prstGeom prst="rect">
-            <a:avLst/>
-          </a:prstGeom>
-        </p:spPr>
-        <p:txBody>
-          <a:bodyPr vert="horz" wrap="square" lIns="0" tIns="24130" rIns="0" bIns="0" rtlCol="0">
-            <a:spAutoFit/>
-          </a:bodyPr>
-          <a:lstStyle/>
-          <a:p>
-            <a:pPr marL="12700">
-              <a:lnSpc>
-                <a:spcPct val="100000"/>
-              </a:lnSpc>
-              <a:spcBef>
-                <a:spcPts val="190"/>
-              </a:spcBef>
-            </a:pPr>
-            <a:fld id="{81D60167-4931-47E6-BA6A-407CBD079E47}" type="slidenum">
-              <a:rPr dirty="0"/>
-              <a:t>21</a:t>
-            </a:fld>
-            <a:r>
-              <a:rPr spc="10" dirty="0"/>
-              <a:t> </a:t>
-            </a:r>
-            <a:r>
-              <a:rPr spc="90" dirty="0"/>
-              <a:t>/</a:t>
-            </a:r>
-            <a:r>
-              <a:rPr spc="10" dirty="0"/>
-              <a:t> </a:t>
-            </a:r>
-            <a:r>
-              <a:rPr spc="-25" dirty="0"/>
-              <a:t>47</a:t>
-            </a:r>
-          </a:p>
-        </p:txBody>
-      </p:sp>
-    </p:spTree>
-  </p:cSld>
-  <p:clrMapOvr>
-    <a:masterClrMapping/>
-  </p:clrMapOvr>
-  <p:transition>
-    <p:cut/>
-  </p:transition>
-  <p:timing>
-    <p:tnLst>
-      <p:par>
-        <p:cTn id="1" dur="indefinite" restart="never" nodeType="tmRoot"/>
-      </p:par>
-    </p:tnLst>
-  </p:timing>
-</p:sld>
-</file>
-
-<file path=ppt/slides/slide22.xml><?xml version="1.0" encoding="utf-8"?>
+<file path=ppt/slides/slide23.xml><?xml version="1.0" encoding="utf-8"?>
 <p:sld xmlns:a="http://schemas.openxmlformats.org/drawingml/2006/main" xmlns:r="http://schemas.openxmlformats.org/officeDocument/2006/relationships" xmlns:p="http://schemas.openxmlformats.org/presentationml/2006/main" showMasterSp="0">
   <p:cSld>
     <p:spTree>
@@ -22941,7 +22360,7 @@
               </a:spcBef>
             </a:pPr>
             <a:r>
-              <a:rPr lang="en-US" sz="1400" spc="-10" dirty="0" smtClean="0">
+              <a:rPr lang="en-US" sz="1400" spc="-10" dirty="0">
                 <a:solidFill>
                   <a:schemeClr val="tx1"/>
                 </a:solidFill>
@@ -22951,7 +22370,7 @@
               <a:t>Optimization</a:t>
             </a:r>
             <a:r>
-              <a:rPr lang="en-US" sz="1400" spc="-50" dirty="0" smtClean="0">
+              <a:rPr lang="en-US" sz="1400" spc="-50" dirty="0">
                 <a:solidFill>
                   <a:schemeClr val="tx1"/>
                 </a:solidFill>
@@ -22961,7 +22380,7 @@
               <a:t> </a:t>
             </a:r>
             <a:r>
-              <a:rPr lang="en-US" sz="1400" dirty="0" smtClean="0">
+              <a:rPr lang="en-US" sz="1400" dirty="0">
                 <a:solidFill>
                   <a:schemeClr val="tx1"/>
                 </a:solidFill>
@@ -22971,7 +22390,7 @@
               <a:t>Action</a:t>
             </a:r>
             <a:r>
-              <a:rPr lang="en-US" sz="1400" spc="-45" dirty="0" smtClean="0">
+              <a:rPr lang="en-US" sz="1400" spc="-45" dirty="0">
                 <a:solidFill>
                   <a:schemeClr val="tx1"/>
                 </a:solidFill>
@@ -22981,7 +22400,7 @@
               <a:t> </a:t>
             </a:r>
             <a:r>
-              <a:rPr lang="en-US" sz="1400" spc="-10" dirty="0" smtClean="0">
+              <a:rPr lang="en-US" sz="1400" spc="-10" dirty="0">
                 <a:solidFill>
                   <a:schemeClr val="tx1"/>
                 </a:solidFill>
@@ -22990,7 +22409,7 @@
               </a:rPr>
               <a:t>Analyzer</a:t>
             </a:r>
-            <a:endParaRPr lang="en-US" sz="1400" dirty="0" smtClean="0">
+            <a:endParaRPr lang="en-US" sz="1400" dirty="0">
               <a:solidFill>
                 <a:schemeClr val="tx1"/>
               </a:solidFill>
@@ -23008,7 +22427,7 @@
               </a:spcBef>
             </a:pPr>
             <a:r>
-              <a:rPr lang="en-US" sz="1100" spc="-35" dirty="0" smtClean="0">
+              <a:rPr lang="en-US" sz="1100" spc="-35" dirty="0">
                 <a:solidFill>
                   <a:schemeClr val="tx1"/>
                 </a:solidFill>
@@ -23018,7 +22437,7 @@
               <a:t>Version-</a:t>
             </a:r>
             <a:r>
-              <a:rPr lang="en-US" sz="1100" spc="-30" dirty="0" smtClean="0">
+              <a:rPr lang="en-US" sz="1100" spc="-30" dirty="0">
                 <a:solidFill>
                   <a:schemeClr val="tx1"/>
                 </a:solidFill>
@@ -23028,7 +22447,7 @@
               <a:t>Controlled</a:t>
             </a:r>
             <a:r>
-              <a:rPr lang="en-US" sz="1100" spc="15" dirty="0" smtClean="0">
+              <a:rPr lang="en-US" sz="1100" spc="15" dirty="0">
                 <a:solidFill>
                   <a:schemeClr val="tx1"/>
                 </a:solidFill>
@@ -23038,7 +22457,7 @@
               <a:t> </a:t>
             </a:r>
             <a:r>
-              <a:rPr lang="en-US" sz="1100" spc="-40" dirty="0" smtClean="0">
+              <a:rPr lang="en-US" sz="1100" spc="-40" dirty="0">
                 <a:solidFill>
                   <a:schemeClr val="tx1"/>
                 </a:solidFill>
@@ -23048,7 +22467,7 @@
               <a:t>Telecom</a:t>
             </a:r>
             <a:r>
-              <a:rPr lang="en-US" sz="1100" spc="15" dirty="0" smtClean="0">
+              <a:rPr lang="en-US" sz="1100" spc="15" dirty="0">
                 <a:solidFill>
                   <a:schemeClr val="tx1"/>
                 </a:solidFill>
@@ -23058,7 +22477,7 @@
               <a:t> </a:t>
             </a:r>
             <a:r>
-              <a:rPr lang="en-US" sz="1100" dirty="0" smtClean="0">
+              <a:rPr lang="en-US" sz="1100" dirty="0">
                 <a:solidFill>
                   <a:schemeClr val="tx1"/>
                 </a:solidFill>
@@ -23068,7 +22487,7 @@
               <a:t>KPI</a:t>
             </a:r>
             <a:r>
-              <a:rPr lang="en-US" sz="1100" spc="15" dirty="0" smtClean="0">
+              <a:rPr lang="en-US" sz="1100" spc="15" dirty="0">
                 <a:solidFill>
                   <a:schemeClr val="tx1"/>
                 </a:solidFill>
@@ -23078,7 +22497,7 @@
               <a:t> </a:t>
             </a:r>
             <a:r>
-              <a:rPr lang="en-US" sz="1100" spc="-35" dirty="0" smtClean="0">
+              <a:rPr lang="en-US" sz="1100" spc="-35" dirty="0">
                 <a:solidFill>
                   <a:schemeClr val="tx1"/>
                 </a:solidFill>
@@ -23088,7 +22507,7 @@
               <a:t>Impact</a:t>
             </a:r>
             <a:r>
-              <a:rPr lang="en-US" sz="1100" spc="15" dirty="0" smtClean="0">
+              <a:rPr lang="en-US" sz="1100" spc="15" dirty="0">
                 <a:solidFill>
                   <a:schemeClr val="tx1"/>
                 </a:solidFill>
@@ -23098,7 +22517,7 @@
               <a:t> </a:t>
             </a:r>
             <a:r>
-              <a:rPr lang="en-US" sz="1100" spc="-10" dirty="0" smtClean="0">
+              <a:rPr lang="en-US" sz="1100" spc="-10" dirty="0">
                 <a:solidFill>
                   <a:schemeClr val="tx1"/>
                 </a:solidFill>
@@ -23408,7 +22827,7 @@
             </a:pPr>
             <a:fld id="{81D60167-4931-47E6-BA6A-407CBD079E47}" type="slidenum">
               <a:rPr dirty="0"/>
-              <a:t>22</a:t>
+              <a:t>23</a:t>
             </a:fld>
             <a:r>
               <a:rPr spc="10" dirty="0"/>
@@ -23437,17 +22856,10 @@
   <p:transition>
     <p:cut/>
   </p:transition>
-  <p:timing>
-    <p:tnLst>
-      <p:par>
-        <p:cTn id="1" dur="indefinite" restart="never" nodeType="tmRoot"/>
-      </p:par>
-    </p:tnLst>
-  </p:timing>
 </p:sld>
 </file>
 
-<file path=ppt/slides/slide23.xml><?xml version="1.0" encoding="utf-8"?>
+<file path=ppt/slides/slide24.xml><?xml version="1.0" encoding="utf-8"?>
 <p:sld xmlns:a="http://schemas.openxmlformats.org/drawingml/2006/main" xmlns:r="http://schemas.openxmlformats.org/officeDocument/2006/relationships" xmlns:p="http://schemas.openxmlformats.org/presentationml/2006/main">
   <p:cSld>
     <p:spTree>
@@ -24682,7 +24094,7 @@
             </a:pPr>
             <a:fld id="{81D60167-4931-47E6-BA6A-407CBD079E47}" type="slidenum">
               <a:rPr spc="-30" dirty="0"/>
-              <a:t>23</a:t>
+              <a:t>24</a:t>
             </a:fld>
             <a:r>
               <a:rPr spc="-55" dirty="0"/>
@@ -24719,7 +24131,7 @@
 </p:sld>
 </file>
 
-<file path=ppt/slides/slide24.xml><?xml version="1.0" encoding="utf-8"?>
+<file path=ppt/slides/slide25.xml><?xml version="1.0" encoding="utf-8"?>
 <p:sld xmlns:a="http://schemas.openxmlformats.org/drawingml/2006/main" xmlns:r="http://schemas.openxmlformats.org/officeDocument/2006/relationships" xmlns:p="http://schemas.openxmlformats.org/presentationml/2006/main">
   <p:cSld>
     <p:spTree>
@@ -26027,7 +25439,7 @@
             </a:pPr>
             <a:fld id="{81D60167-4931-47E6-BA6A-407CBD079E47}" type="slidenum">
               <a:rPr spc="-30" dirty="0"/>
-              <a:t>24</a:t>
+              <a:t>25</a:t>
             </a:fld>
             <a:r>
               <a:rPr spc="-55" dirty="0"/>
@@ -26064,7 +25476,7 @@
 </p:sld>
 </file>
 
-<file path=ppt/slides/slide25.xml><?xml version="1.0" encoding="utf-8"?>
+<file path=ppt/slides/slide26.xml><?xml version="1.0" encoding="utf-8"?>
 <p:sld xmlns:a="http://schemas.openxmlformats.org/drawingml/2006/main" xmlns:r="http://schemas.openxmlformats.org/officeDocument/2006/relationships" xmlns:p="http://schemas.openxmlformats.org/presentationml/2006/main">
   <p:cSld>
     <p:spTree>
@@ -29988,7 +29400,7 @@
             </a:pPr>
             <a:fld id="{81D60167-4931-47E6-BA6A-407CBD079E47}" type="slidenum">
               <a:rPr spc="-30" dirty="0"/>
-              <a:t>25</a:t>
+              <a:t>26</a:t>
             </a:fld>
             <a:r>
               <a:rPr spc="-55" dirty="0"/>
@@ -30025,7 +29437,7 @@
 </p:sld>
 </file>
 
-<file path=ppt/slides/slide26.xml><?xml version="1.0" encoding="utf-8"?>
+<file path=ppt/slides/slide27.xml><?xml version="1.0" encoding="utf-8"?>
 <p:sld xmlns:a="http://schemas.openxmlformats.org/drawingml/2006/main" xmlns:r="http://schemas.openxmlformats.org/officeDocument/2006/relationships" xmlns:p="http://schemas.openxmlformats.org/presentationml/2006/main">
   <p:cSld>
     <p:spTree>
@@ -31372,7 +30784,7 @@
             </a:pPr>
             <a:fld id="{81D60167-4931-47E6-BA6A-407CBD079E47}" type="slidenum">
               <a:rPr spc="-30" dirty="0"/>
-              <a:t>26</a:t>
+              <a:t>27</a:t>
             </a:fld>
             <a:r>
               <a:rPr spc="-55" dirty="0"/>
@@ -31409,7 +30821,7 @@
 </p:sld>
 </file>
 
-<file path=ppt/slides/slide27.xml><?xml version="1.0" encoding="utf-8"?>
+<file path=ppt/slides/slide28.xml><?xml version="1.0" encoding="utf-8"?>
 <p:sld xmlns:a="http://schemas.openxmlformats.org/drawingml/2006/main" xmlns:r="http://schemas.openxmlformats.org/officeDocument/2006/relationships" xmlns:p="http://schemas.openxmlformats.org/presentationml/2006/main">
   <p:cSld>
     <p:spTree>
@@ -33206,7 +32618,7 @@
             </a:pPr>
             <a:fld id="{81D60167-4931-47E6-BA6A-407CBD079E47}" type="slidenum">
               <a:rPr spc="-30" dirty="0"/>
-              <a:t>27</a:t>
+              <a:t>28</a:t>
             </a:fld>
             <a:r>
               <a:rPr spc="-55" dirty="0"/>
@@ -33243,7 +32655,7 @@
 </p:sld>
 </file>
 
-<file path=ppt/slides/slide28.xml><?xml version="1.0" encoding="utf-8"?>
+<file path=ppt/slides/slide29.xml><?xml version="1.0" encoding="utf-8"?>
 <p:sld xmlns:a="http://schemas.openxmlformats.org/drawingml/2006/main" xmlns:r="http://schemas.openxmlformats.org/officeDocument/2006/relationships" xmlns:p="http://schemas.openxmlformats.org/presentationml/2006/main">
   <p:cSld>
     <p:spTree>
@@ -34223,7 +33635,7 @@
             </a:pPr>
             <a:fld id="{81D60167-4931-47E6-BA6A-407CBD079E47}" type="slidenum">
               <a:rPr spc="-30" dirty="0"/>
-              <a:t>28</a:t>
+              <a:t>29</a:t>
             </a:fld>
             <a:r>
               <a:rPr spc="-55" dirty="0"/>
@@ -34248,599 +33660,6 @@
     <p:extLst>
       <p:ext uri="{BB962C8B-B14F-4D97-AF65-F5344CB8AC3E}">
         <p14:creationId xmlns:p14="http://schemas.microsoft.com/office/powerpoint/2010/main" val="3631024732"/>
-      </p:ext>
-    </p:extLst>
-  </p:cSld>
-  <p:clrMapOvr>
-    <a:masterClrMapping/>
-  </p:clrMapOvr>
-  <p:transition>
-    <p:cut/>
-  </p:transition>
-</p:sld>
-</file>
-
-<file path=ppt/slides/slide29.xml><?xml version="1.0" encoding="utf-8"?>
-<p:sld xmlns:a="http://schemas.openxmlformats.org/drawingml/2006/main" xmlns:r="http://schemas.openxmlformats.org/officeDocument/2006/relationships" xmlns:p="http://schemas.openxmlformats.org/presentationml/2006/main">
-  <p:cSld>
-    <p:spTree>
-      <p:nvGrpSpPr>
-        <p:cNvPr id="1" name=""/>
-        <p:cNvGrpSpPr/>
-        <p:nvPr/>
-      </p:nvGrpSpPr>
-      <p:grpSpPr>
-        <a:xfrm>
-          <a:off x="0" y="0"/>
-          <a:ext cx="0" cy="0"/>
-          <a:chOff x="0" y="0"/>
-          <a:chExt cx="0" cy="0"/>
-        </a:xfrm>
-      </p:grpSpPr>
-      <p:sp>
-        <p:nvSpPr>
-          <p:cNvPr id="2" name="object 2"/>
-          <p:cNvSpPr/>
-          <p:nvPr/>
-        </p:nvSpPr>
-        <p:spPr>
-          <a:xfrm>
-            <a:off x="0" y="-12"/>
-            <a:ext cx="5760085" cy="350520"/>
-          </a:xfrm>
-          <a:custGeom>
-            <a:avLst/>
-            <a:gdLst/>
-            <a:ahLst/>
-            <a:cxnLst/>
-            <a:rect l="l" t="t" r="r" b="b"/>
-            <a:pathLst>
-              <a:path w="5760085" h="350520">
-                <a:moveTo>
-                  <a:pt x="5759996" y="0"/>
-                </a:moveTo>
-                <a:lnTo>
-                  <a:pt x="0" y="0"/>
-                </a:lnTo>
-                <a:lnTo>
-                  <a:pt x="0" y="350126"/>
-                </a:lnTo>
-                <a:lnTo>
-                  <a:pt x="5759996" y="350126"/>
-                </a:lnTo>
-                <a:lnTo>
-                  <a:pt x="5759996" y="0"/>
-                </a:lnTo>
-                <a:close/>
-              </a:path>
-            </a:pathLst>
-          </a:custGeom>
-          <a:solidFill>
-            <a:srgbClr val="F2F2F2"/>
-          </a:solidFill>
-        </p:spPr>
-        <p:txBody>
-          <a:bodyPr wrap="square" lIns="0" tIns="0" rIns="0" bIns="0" rtlCol="0"/>
-          <a:lstStyle/>
-          <a:p>
-            <a:endParaRPr/>
-          </a:p>
-        </p:txBody>
-      </p:sp>
-      <p:sp>
-        <p:nvSpPr>
-          <p:cNvPr id="3" name="object 3"/>
-          <p:cNvSpPr txBox="1"/>
-          <p:nvPr/>
-        </p:nvSpPr>
-        <p:spPr>
-          <a:xfrm>
-            <a:off x="95300" y="59877"/>
-            <a:ext cx="4006850" cy="244475"/>
-          </a:xfrm>
-          <a:prstGeom prst="rect">
-            <a:avLst/>
-          </a:prstGeom>
-        </p:spPr>
-        <p:txBody>
-          <a:bodyPr vert="horz" wrap="square" lIns="0" tIns="17145" rIns="0" bIns="0" rtlCol="0">
-            <a:spAutoFit/>
-          </a:bodyPr>
-          <a:lstStyle/>
-          <a:p>
-            <a:pPr marL="12700">
-              <a:lnSpc>
-                <a:spcPct val="100000"/>
-              </a:lnSpc>
-              <a:spcBef>
-                <a:spcPts val="135"/>
-              </a:spcBef>
-            </a:pPr>
-            <a:r>
-              <a:rPr sz="1400" dirty="0">
-                <a:solidFill>
-                  <a:srgbClr val="CC0000"/>
-                </a:solidFill>
-                <a:latin typeface="Tahoma"/>
-                <a:cs typeface="Tahoma"/>
-              </a:rPr>
-              <a:t>Action</a:t>
-            </a:r>
-            <a:r>
-              <a:rPr sz="1400" spc="-45" dirty="0">
-                <a:solidFill>
-                  <a:srgbClr val="CC0000"/>
-                </a:solidFill>
-                <a:latin typeface="Tahoma"/>
-                <a:cs typeface="Tahoma"/>
-              </a:rPr>
-              <a:t> </a:t>
-            </a:r>
-            <a:r>
-              <a:rPr sz="1400" dirty="0">
-                <a:solidFill>
-                  <a:srgbClr val="CC0000"/>
-                </a:solidFill>
-                <a:latin typeface="Tahoma"/>
-                <a:cs typeface="Tahoma"/>
-              </a:rPr>
-              <a:t>Hunk</a:t>
-            </a:r>
-            <a:r>
-              <a:rPr sz="1400" spc="-40" dirty="0">
-                <a:solidFill>
-                  <a:srgbClr val="CC0000"/>
-                </a:solidFill>
-                <a:latin typeface="Tahoma"/>
-                <a:cs typeface="Tahoma"/>
-              </a:rPr>
-              <a:t> </a:t>
-            </a:r>
-            <a:r>
-              <a:rPr sz="1400" spc="-10" dirty="0">
-                <a:solidFill>
-                  <a:srgbClr val="CC0000"/>
-                </a:solidFill>
-                <a:latin typeface="Tahoma"/>
-                <a:cs typeface="Tahoma"/>
-              </a:rPr>
-              <a:t>Distribution</a:t>
-            </a:r>
-            <a:r>
-              <a:rPr sz="1400" spc="-45" dirty="0">
-                <a:solidFill>
-                  <a:srgbClr val="CC0000"/>
-                </a:solidFill>
-                <a:latin typeface="Tahoma"/>
-                <a:cs typeface="Tahoma"/>
-              </a:rPr>
-              <a:t> </a:t>
-            </a:r>
-            <a:r>
-              <a:rPr sz="1400" spc="125" dirty="0">
-                <a:solidFill>
-                  <a:srgbClr val="CC0000"/>
-                </a:solidFill>
-                <a:latin typeface="Tahoma"/>
-                <a:cs typeface="Tahoma"/>
-              </a:rPr>
-              <a:t>—</a:t>
-            </a:r>
-            <a:r>
-              <a:rPr sz="1400" spc="-40" dirty="0">
-                <a:solidFill>
-                  <a:srgbClr val="CC0000"/>
-                </a:solidFill>
-                <a:latin typeface="Tahoma"/>
-                <a:cs typeface="Tahoma"/>
-              </a:rPr>
-              <a:t> </a:t>
-            </a:r>
-            <a:r>
-              <a:rPr sz="1400" spc="-60" dirty="0">
-                <a:solidFill>
-                  <a:srgbClr val="CC0000"/>
-                </a:solidFill>
-                <a:latin typeface="Tahoma"/>
-                <a:cs typeface="Tahoma"/>
-              </a:rPr>
-              <a:t>hover</a:t>
-            </a:r>
-            <a:r>
-              <a:rPr sz="1400" spc="-45" dirty="0">
-                <a:solidFill>
-                  <a:srgbClr val="CC0000"/>
-                </a:solidFill>
-                <a:latin typeface="Tahoma"/>
-                <a:cs typeface="Tahoma"/>
-              </a:rPr>
-              <a:t> </a:t>
-            </a:r>
-            <a:r>
-              <a:rPr sz="1400" spc="-10" dirty="0">
-                <a:solidFill>
-                  <a:srgbClr val="CC0000"/>
-                </a:solidFill>
-                <a:latin typeface="Tahoma"/>
-                <a:cs typeface="Tahoma"/>
-              </a:rPr>
-              <a:t>for</a:t>
-            </a:r>
-            <a:r>
-              <a:rPr sz="1400" spc="-40" dirty="0">
-                <a:solidFill>
-                  <a:srgbClr val="CC0000"/>
-                </a:solidFill>
-                <a:latin typeface="Tahoma"/>
-                <a:cs typeface="Tahoma"/>
-              </a:rPr>
-              <a:t> </a:t>
-            </a:r>
-            <a:r>
-              <a:rPr sz="1400" spc="-10" dirty="0">
-                <a:solidFill>
-                  <a:srgbClr val="CC0000"/>
-                </a:solidFill>
-                <a:latin typeface="Tahoma"/>
-                <a:cs typeface="Tahoma"/>
-              </a:rPr>
-              <a:t>commit</a:t>
-            </a:r>
-            <a:r>
-              <a:rPr sz="1400" spc="-45" dirty="0">
-                <a:solidFill>
-                  <a:srgbClr val="CC0000"/>
-                </a:solidFill>
-                <a:latin typeface="Tahoma"/>
-                <a:cs typeface="Tahoma"/>
-              </a:rPr>
-              <a:t> </a:t>
-            </a:r>
-            <a:r>
-              <a:rPr sz="1400" spc="-10" dirty="0">
-                <a:solidFill>
-                  <a:srgbClr val="CC0000"/>
-                </a:solidFill>
-                <a:latin typeface="Tahoma"/>
-                <a:cs typeface="Tahoma"/>
-              </a:rPr>
-              <a:t>details</a:t>
-            </a:r>
-            <a:endParaRPr sz="1400">
-              <a:latin typeface="Tahoma"/>
-              <a:cs typeface="Tahoma"/>
-            </a:endParaRPr>
-          </a:p>
-        </p:txBody>
-      </p:sp>
-      <p:pic>
-        <p:nvPicPr>
-          <p:cNvPr id="4" name="object 4"/>
-          <p:cNvPicPr/>
-          <p:nvPr/>
-        </p:nvPicPr>
-        <p:blipFill>
-          <a:blip r:embed="rId2" cstate="print"/>
-          <a:stretch>
-            <a:fillRect/>
-          </a:stretch>
-        </p:blipFill>
-        <p:spPr>
-          <a:xfrm>
-            <a:off x="549744" y="421746"/>
-            <a:ext cx="4660270" cy="2621401"/>
-          </a:xfrm>
-          <a:prstGeom prst="rect">
-            <a:avLst/>
-          </a:prstGeom>
-        </p:spPr>
-      </p:pic>
-      <p:grpSp>
-        <p:nvGrpSpPr>
-          <p:cNvPr id="5" name="object 5"/>
-          <p:cNvGrpSpPr/>
-          <p:nvPr/>
-        </p:nvGrpSpPr>
-        <p:grpSpPr>
-          <a:xfrm>
-            <a:off x="0" y="3130346"/>
-            <a:ext cx="5760085" cy="109855"/>
-            <a:chOff x="0" y="3130346"/>
-            <a:chExt cx="5760085" cy="109855"/>
-          </a:xfrm>
-        </p:grpSpPr>
-        <p:sp>
-          <p:nvSpPr>
-            <p:cNvPr id="6" name="object 6"/>
-            <p:cNvSpPr/>
-            <p:nvPr/>
-          </p:nvSpPr>
-          <p:spPr>
-            <a:xfrm>
-              <a:off x="0" y="3130346"/>
-              <a:ext cx="1920239" cy="109855"/>
-            </a:xfrm>
-            <a:custGeom>
-              <a:avLst/>
-              <a:gdLst/>
-              <a:ahLst/>
-              <a:cxnLst/>
-              <a:rect l="l" t="t" r="r" b="b"/>
-              <a:pathLst>
-                <a:path w="1920239" h="109855">
-                  <a:moveTo>
-                    <a:pt x="1919973" y="0"/>
-                  </a:moveTo>
-                  <a:lnTo>
-                    <a:pt x="0" y="0"/>
-                  </a:lnTo>
-                  <a:lnTo>
-                    <a:pt x="0" y="109651"/>
-                  </a:lnTo>
-                  <a:lnTo>
-                    <a:pt x="1919973" y="109651"/>
-                  </a:lnTo>
-                  <a:lnTo>
-                    <a:pt x="1919973" y="0"/>
-                  </a:lnTo>
-                  <a:close/>
-                </a:path>
-              </a:pathLst>
-            </a:custGeom>
-            <a:solidFill>
-              <a:srgbClr val="A30000"/>
-            </a:solidFill>
-          </p:spPr>
-          <p:txBody>
-            <a:bodyPr wrap="square" lIns="0" tIns="0" rIns="0" bIns="0" rtlCol="0"/>
-            <a:lstStyle/>
-            <a:p>
-              <a:endParaRPr/>
-            </a:p>
-          </p:txBody>
-        </p:sp>
-        <p:sp>
-          <p:nvSpPr>
-            <p:cNvPr id="7" name="object 7"/>
-            <p:cNvSpPr/>
-            <p:nvPr/>
-          </p:nvSpPr>
-          <p:spPr>
-            <a:xfrm>
-              <a:off x="1919973" y="3130346"/>
-              <a:ext cx="1920239" cy="109855"/>
-            </a:xfrm>
-            <a:custGeom>
-              <a:avLst/>
-              <a:gdLst/>
-              <a:ahLst/>
-              <a:cxnLst/>
-              <a:rect l="l" t="t" r="r" b="b"/>
-              <a:pathLst>
-                <a:path w="1920239" h="109855">
-                  <a:moveTo>
-                    <a:pt x="1919973" y="0"/>
-                  </a:moveTo>
-                  <a:lnTo>
-                    <a:pt x="0" y="0"/>
-                  </a:lnTo>
-                  <a:lnTo>
-                    <a:pt x="0" y="109651"/>
-                  </a:lnTo>
-                  <a:lnTo>
-                    <a:pt x="1919973" y="109651"/>
-                  </a:lnTo>
-                  <a:lnTo>
-                    <a:pt x="1919973" y="0"/>
-                  </a:lnTo>
-                  <a:close/>
-                </a:path>
-              </a:pathLst>
-            </a:custGeom>
-            <a:solidFill>
-              <a:srgbClr val="EBEBEB"/>
-            </a:solidFill>
-          </p:spPr>
-          <p:txBody>
-            <a:bodyPr wrap="square" lIns="0" tIns="0" rIns="0" bIns="0" rtlCol="0"/>
-            <a:lstStyle/>
-            <a:p>
-              <a:endParaRPr/>
-            </a:p>
-          </p:txBody>
-        </p:sp>
-        <p:sp>
-          <p:nvSpPr>
-            <p:cNvPr id="8" name="object 8"/>
-            <p:cNvSpPr/>
-            <p:nvPr/>
-          </p:nvSpPr>
-          <p:spPr>
-            <a:xfrm>
-              <a:off x="3839946" y="3130346"/>
-              <a:ext cx="1920239" cy="109855"/>
-            </a:xfrm>
-            <a:custGeom>
-              <a:avLst/>
-              <a:gdLst/>
-              <a:ahLst/>
-              <a:cxnLst/>
-              <a:rect l="l" t="t" r="r" b="b"/>
-              <a:pathLst>
-                <a:path w="1920239" h="109855">
-                  <a:moveTo>
-                    <a:pt x="1919973" y="0"/>
-                  </a:moveTo>
-                  <a:lnTo>
-                    <a:pt x="0" y="0"/>
-                  </a:lnTo>
-                  <a:lnTo>
-                    <a:pt x="0" y="109651"/>
-                  </a:lnTo>
-                  <a:lnTo>
-                    <a:pt x="1919973" y="109651"/>
-                  </a:lnTo>
-                  <a:lnTo>
-                    <a:pt x="1919973" y="0"/>
-                  </a:lnTo>
-                  <a:close/>
-                </a:path>
-              </a:pathLst>
-            </a:custGeom>
-            <a:solidFill>
-              <a:srgbClr val="D8D8D8"/>
-            </a:solidFill>
-          </p:spPr>
-          <p:txBody>
-            <a:bodyPr wrap="square" lIns="0" tIns="0" rIns="0" bIns="0" rtlCol="0"/>
-            <a:lstStyle/>
-            <a:p>
-              <a:endParaRPr/>
-            </a:p>
-          </p:txBody>
-        </p:sp>
-      </p:grpSp>
-      <p:sp>
-        <p:nvSpPr>
-          <p:cNvPr id="9" name="object 9"/>
-          <p:cNvSpPr txBox="1"/>
-          <p:nvPr/>
-        </p:nvSpPr>
-        <p:spPr>
-          <a:xfrm>
-            <a:off x="2367343" y="3135783"/>
-            <a:ext cx="1025525" cy="102235"/>
-          </a:xfrm>
-          <a:prstGeom prst="rect">
-            <a:avLst/>
-          </a:prstGeom>
-        </p:spPr>
-        <p:txBody>
-          <a:bodyPr vert="horz" wrap="square" lIns="0" tIns="0" rIns="0" bIns="0" rtlCol="0">
-            <a:spAutoFit/>
-          </a:bodyPr>
-          <a:lstStyle/>
-          <a:p>
-            <a:pPr marL="12700">
-              <a:lnSpc>
-                <a:spcPts val="675"/>
-              </a:lnSpc>
-            </a:pPr>
-            <a:r>
-              <a:rPr sz="600" dirty="0">
-                <a:solidFill>
-                  <a:srgbClr val="8E0000"/>
-                </a:solidFill>
-                <a:latin typeface="Arial"/>
-                <a:cs typeface="Arial"/>
-                <a:hlinkClick r:id="rId3" action="ppaction://hlinksldjump"/>
-              </a:rPr>
-              <a:t>Optimization</a:t>
-            </a:r>
-            <a:r>
-              <a:rPr sz="600" spc="100" dirty="0">
-                <a:solidFill>
-                  <a:srgbClr val="8E0000"/>
-                </a:solidFill>
-                <a:latin typeface="Arial"/>
-                <a:cs typeface="Arial"/>
-                <a:hlinkClick r:id="rId3" action="ppaction://hlinksldjump"/>
-              </a:rPr>
-              <a:t> </a:t>
-            </a:r>
-            <a:r>
-              <a:rPr sz="600" dirty="0">
-                <a:solidFill>
-                  <a:srgbClr val="8E0000"/>
-                </a:solidFill>
-                <a:latin typeface="Arial"/>
-                <a:cs typeface="Arial"/>
-                <a:hlinkClick r:id="rId3" action="ppaction://hlinksldjump"/>
-              </a:rPr>
-              <a:t>Action</a:t>
-            </a:r>
-            <a:r>
-              <a:rPr sz="600" spc="105" dirty="0">
-                <a:solidFill>
-                  <a:srgbClr val="8E0000"/>
-                </a:solidFill>
-                <a:latin typeface="Arial"/>
-                <a:cs typeface="Arial"/>
-                <a:hlinkClick r:id="rId3" action="ppaction://hlinksldjump"/>
-              </a:rPr>
-              <a:t> </a:t>
-            </a:r>
-            <a:r>
-              <a:rPr sz="600" spc="-10" dirty="0">
-                <a:solidFill>
-                  <a:srgbClr val="8E0000"/>
-                </a:solidFill>
-                <a:latin typeface="Arial"/>
-                <a:cs typeface="Arial"/>
-                <a:hlinkClick r:id="rId3" action="ppaction://hlinksldjump"/>
-              </a:rPr>
-              <a:t>Analyzer</a:t>
-            </a:r>
-            <a:endParaRPr sz="600">
-              <a:latin typeface="Arial"/>
-              <a:cs typeface="Arial"/>
-            </a:endParaRPr>
-          </a:p>
-        </p:txBody>
-      </p:sp>
-      <p:sp>
-        <p:nvSpPr>
-          <p:cNvPr id="10" name="object 10"/>
-          <p:cNvSpPr txBox="1">
-            <a:spLocks noGrp="1"/>
-          </p:cNvSpPr>
-          <p:nvPr>
-            <p:ph type="sldNum" sz="quarter" idx="7"/>
-          </p:nvPr>
-        </p:nvSpPr>
-        <p:spPr>
-          <a:prstGeom prst="rect">
-            <a:avLst/>
-          </a:prstGeom>
-        </p:spPr>
-        <p:txBody>
-          <a:bodyPr vert="horz" wrap="square" lIns="0" tIns="0" rIns="0" bIns="0" rtlCol="0">
-            <a:spAutoFit/>
-          </a:bodyPr>
-          <a:lstStyle/>
-          <a:p>
-            <a:pPr marL="12700">
-              <a:lnSpc>
-                <a:spcPts val="675"/>
-              </a:lnSpc>
-            </a:pPr>
-            <a:fld id="{81D60167-4931-47E6-BA6A-407CBD079E47}" type="slidenum">
-              <a:rPr spc="-30" dirty="0"/>
-              <a:t>29</a:t>
-            </a:fld>
-            <a:r>
-              <a:rPr spc="-55" dirty="0"/>
-              <a:t> </a:t>
-            </a:r>
-            <a:r>
-              <a:rPr spc="150" dirty="0"/>
-              <a:t>/</a:t>
-            </a:r>
-            <a:r>
-              <a:rPr spc="-55" dirty="0"/>
-              <a:t> </a:t>
-            </a:r>
-            <a:r>
-              <a:rPr spc="-35" dirty="0"/>
-              <a:t>15</a:t>
-            </a:r>
-          </a:p>
-        </p:txBody>
-      </p:sp>
-    </p:spTree>
-    <p:extLst>
-      <p:ext uri="{BB962C8B-B14F-4D97-AF65-F5344CB8AC3E}">
-        <p14:creationId xmlns:p14="http://schemas.microsoft.com/office/powerpoint/2010/main" val="1595391930"/>
       </p:ext>
     </p:extLst>
   </p:cSld>
@@ -35823,17 +34642,603 @@
   <p:transition>
     <p:cut/>
   </p:transition>
-  <p:timing>
-    <p:tnLst>
-      <p:par>
-        <p:cTn id="1" dur="indefinite" restart="never" nodeType="tmRoot"/>
-      </p:par>
-    </p:tnLst>
-  </p:timing>
 </p:sld>
 </file>
 
 <file path=ppt/slides/slide30.xml><?xml version="1.0" encoding="utf-8"?>
+<p:sld xmlns:a="http://schemas.openxmlformats.org/drawingml/2006/main" xmlns:r="http://schemas.openxmlformats.org/officeDocument/2006/relationships" xmlns:p="http://schemas.openxmlformats.org/presentationml/2006/main">
+  <p:cSld>
+    <p:spTree>
+      <p:nvGrpSpPr>
+        <p:cNvPr id="1" name=""/>
+        <p:cNvGrpSpPr/>
+        <p:nvPr/>
+      </p:nvGrpSpPr>
+      <p:grpSpPr>
+        <a:xfrm>
+          <a:off x="0" y="0"/>
+          <a:ext cx="0" cy="0"/>
+          <a:chOff x="0" y="0"/>
+          <a:chExt cx="0" cy="0"/>
+        </a:xfrm>
+      </p:grpSpPr>
+      <p:sp>
+        <p:nvSpPr>
+          <p:cNvPr id="2" name="object 2"/>
+          <p:cNvSpPr/>
+          <p:nvPr/>
+        </p:nvSpPr>
+        <p:spPr>
+          <a:xfrm>
+            <a:off x="0" y="-12"/>
+            <a:ext cx="5760085" cy="350520"/>
+          </a:xfrm>
+          <a:custGeom>
+            <a:avLst/>
+            <a:gdLst/>
+            <a:ahLst/>
+            <a:cxnLst/>
+            <a:rect l="l" t="t" r="r" b="b"/>
+            <a:pathLst>
+              <a:path w="5760085" h="350520">
+                <a:moveTo>
+                  <a:pt x="5759996" y="0"/>
+                </a:moveTo>
+                <a:lnTo>
+                  <a:pt x="0" y="0"/>
+                </a:lnTo>
+                <a:lnTo>
+                  <a:pt x="0" y="350126"/>
+                </a:lnTo>
+                <a:lnTo>
+                  <a:pt x="5759996" y="350126"/>
+                </a:lnTo>
+                <a:lnTo>
+                  <a:pt x="5759996" y="0"/>
+                </a:lnTo>
+                <a:close/>
+              </a:path>
+            </a:pathLst>
+          </a:custGeom>
+          <a:solidFill>
+            <a:srgbClr val="F2F2F2"/>
+          </a:solidFill>
+        </p:spPr>
+        <p:txBody>
+          <a:bodyPr wrap="square" lIns="0" tIns="0" rIns="0" bIns="0" rtlCol="0"/>
+          <a:lstStyle/>
+          <a:p>
+            <a:endParaRPr/>
+          </a:p>
+        </p:txBody>
+      </p:sp>
+      <p:sp>
+        <p:nvSpPr>
+          <p:cNvPr id="3" name="object 3"/>
+          <p:cNvSpPr txBox="1"/>
+          <p:nvPr/>
+        </p:nvSpPr>
+        <p:spPr>
+          <a:xfrm>
+            <a:off x="95300" y="59877"/>
+            <a:ext cx="4006850" cy="244475"/>
+          </a:xfrm>
+          <a:prstGeom prst="rect">
+            <a:avLst/>
+          </a:prstGeom>
+        </p:spPr>
+        <p:txBody>
+          <a:bodyPr vert="horz" wrap="square" lIns="0" tIns="17145" rIns="0" bIns="0" rtlCol="0">
+            <a:spAutoFit/>
+          </a:bodyPr>
+          <a:lstStyle/>
+          <a:p>
+            <a:pPr marL="12700">
+              <a:lnSpc>
+                <a:spcPct val="100000"/>
+              </a:lnSpc>
+              <a:spcBef>
+                <a:spcPts val="135"/>
+              </a:spcBef>
+            </a:pPr>
+            <a:r>
+              <a:rPr sz="1400" dirty="0">
+                <a:solidFill>
+                  <a:srgbClr val="CC0000"/>
+                </a:solidFill>
+                <a:latin typeface="Tahoma"/>
+                <a:cs typeface="Tahoma"/>
+              </a:rPr>
+              <a:t>Action</a:t>
+            </a:r>
+            <a:r>
+              <a:rPr sz="1400" spc="-45" dirty="0">
+                <a:solidFill>
+                  <a:srgbClr val="CC0000"/>
+                </a:solidFill>
+                <a:latin typeface="Tahoma"/>
+                <a:cs typeface="Tahoma"/>
+              </a:rPr>
+              <a:t> </a:t>
+            </a:r>
+            <a:r>
+              <a:rPr sz="1400" dirty="0">
+                <a:solidFill>
+                  <a:srgbClr val="CC0000"/>
+                </a:solidFill>
+                <a:latin typeface="Tahoma"/>
+                <a:cs typeface="Tahoma"/>
+              </a:rPr>
+              <a:t>Hunk</a:t>
+            </a:r>
+            <a:r>
+              <a:rPr sz="1400" spc="-40" dirty="0">
+                <a:solidFill>
+                  <a:srgbClr val="CC0000"/>
+                </a:solidFill>
+                <a:latin typeface="Tahoma"/>
+                <a:cs typeface="Tahoma"/>
+              </a:rPr>
+              <a:t> </a:t>
+            </a:r>
+            <a:r>
+              <a:rPr sz="1400" spc="-10" dirty="0">
+                <a:solidFill>
+                  <a:srgbClr val="CC0000"/>
+                </a:solidFill>
+                <a:latin typeface="Tahoma"/>
+                <a:cs typeface="Tahoma"/>
+              </a:rPr>
+              <a:t>Distribution</a:t>
+            </a:r>
+            <a:r>
+              <a:rPr sz="1400" spc="-45" dirty="0">
+                <a:solidFill>
+                  <a:srgbClr val="CC0000"/>
+                </a:solidFill>
+                <a:latin typeface="Tahoma"/>
+                <a:cs typeface="Tahoma"/>
+              </a:rPr>
+              <a:t> </a:t>
+            </a:r>
+            <a:r>
+              <a:rPr sz="1400" spc="125" dirty="0">
+                <a:solidFill>
+                  <a:srgbClr val="CC0000"/>
+                </a:solidFill>
+                <a:latin typeface="Tahoma"/>
+                <a:cs typeface="Tahoma"/>
+              </a:rPr>
+              <a:t>—</a:t>
+            </a:r>
+            <a:r>
+              <a:rPr sz="1400" spc="-40" dirty="0">
+                <a:solidFill>
+                  <a:srgbClr val="CC0000"/>
+                </a:solidFill>
+                <a:latin typeface="Tahoma"/>
+                <a:cs typeface="Tahoma"/>
+              </a:rPr>
+              <a:t> </a:t>
+            </a:r>
+            <a:r>
+              <a:rPr sz="1400" spc="-60" dirty="0">
+                <a:solidFill>
+                  <a:srgbClr val="CC0000"/>
+                </a:solidFill>
+                <a:latin typeface="Tahoma"/>
+                <a:cs typeface="Tahoma"/>
+              </a:rPr>
+              <a:t>hover</a:t>
+            </a:r>
+            <a:r>
+              <a:rPr sz="1400" spc="-45" dirty="0">
+                <a:solidFill>
+                  <a:srgbClr val="CC0000"/>
+                </a:solidFill>
+                <a:latin typeface="Tahoma"/>
+                <a:cs typeface="Tahoma"/>
+              </a:rPr>
+              <a:t> </a:t>
+            </a:r>
+            <a:r>
+              <a:rPr sz="1400" spc="-10" dirty="0">
+                <a:solidFill>
+                  <a:srgbClr val="CC0000"/>
+                </a:solidFill>
+                <a:latin typeface="Tahoma"/>
+                <a:cs typeface="Tahoma"/>
+              </a:rPr>
+              <a:t>for</a:t>
+            </a:r>
+            <a:r>
+              <a:rPr sz="1400" spc="-40" dirty="0">
+                <a:solidFill>
+                  <a:srgbClr val="CC0000"/>
+                </a:solidFill>
+                <a:latin typeface="Tahoma"/>
+                <a:cs typeface="Tahoma"/>
+              </a:rPr>
+              <a:t> </a:t>
+            </a:r>
+            <a:r>
+              <a:rPr sz="1400" spc="-10" dirty="0">
+                <a:solidFill>
+                  <a:srgbClr val="CC0000"/>
+                </a:solidFill>
+                <a:latin typeface="Tahoma"/>
+                <a:cs typeface="Tahoma"/>
+              </a:rPr>
+              <a:t>commit</a:t>
+            </a:r>
+            <a:r>
+              <a:rPr sz="1400" spc="-45" dirty="0">
+                <a:solidFill>
+                  <a:srgbClr val="CC0000"/>
+                </a:solidFill>
+                <a:latin typeface="Tahoma"/>
+                <a:cs typeface="Tahoma"/>
+              </a:rPr>
+              <a:t> </a:t>
+            </a:r>
+            <a:r>
+              <a:rPr sz="1400" spc="-10" dirty="0">
+                <a:solidFill>
+                  <a:srgbClr val="CC0000"/>
+                </a:solidFill>
+                <a:latin typeface="Tahoma"/>
+                <a:cs typeface="Tahoma"/>
+              </a:rPr>
+              <a:t>details</a:t>
+            </a:r>
+            <a:endParaRPr sz="1400">
+              <a:latin typeface="Tahoma"/>
+              <a:cs typeface="Tahoma"/>
+            </a:endParaRPr>
+          </a:p>
+        </p:txBody>
+      </p:sp>
+      <p:pic>
+        <p:nvPicPr>
+          <p:cNvPr id="4" name="object 4"/>
+          <p:cNvPicPr/>
+          <p:nvPr/>
+        </p:nvPicPr>
+        <p:blipFill>
+          <a:blip r:embed="rId2" cstate="print"/>
+          <a:stretch>
+            <a:fillRect/>
+          </a:stretch>
+        </p:blipFill>
+        <p:spPr>
+          <a:xfrm>
+            <a:off x="549744" y="421746"/>
+            <a:ext cx="4660270" cy="2621401"/>
+          </a:xfrm>
+          <a:prstGeom prst="rect">
+            <a:avLst/>
+          </a:prstGeom>
+        </p:spPr>
+      </p:pic>
+      <p:grpSp>
+        <p:nvGrpSpPr>
+          <p:cNvPr id="5" name="object 5"/>
+          <p:cNvGrpSpPr/>
+          <p:nvPr/>
+        </p:nvGrpSpPr>
+        <p:grpSpPr>
+          <a:xfrm>
+            <a:off x="0" y="3130346"/>
+            <a:ext cx="5760085" cy="109855"/>
+            <a:chOff x="0" y="3130346"/>
+            <a:chExt cx="5760085" cy="109855"/>
+          </a:xfrm>
+        </p:grpSpPr>
+        <p:sp>
+          <p:nvSpPr>
+            <p:cNvPr id="6" name="object 6"/>
+            <p:cNvSpPr/>
+            <p:nvPr/>
+          </p:nvSpPr>
+          <p:spPr>
+            <a:xfrm>
+              <a:off x="0" y="3130346"/>
+              <a:ext cx="1920239" cy="109855"/>
+            </a:xfrm>
+            <a:custGeom>
+              <a:avLst/>
+              <a:gdLst/>
+              <a:ahLst/>
+              <a:cxnLst/>
+              <a:rect l="l" t="t" r="r" b="b"/>
+              <a:pathLst>
+                <a:path w="1920239" h="109855">
+                  <a:moveTo>
+                    <a:pt x="1919973" y="0"/>
+                  </a:moveTo>
+                  <a:lnTo>
+                    <a:pt x="0" y="0"/>
+                  </a:lnTo>
+                  <a:lnTo>
+                    <a:pt x="0" y="109651"/>
+                  </a:lnTo>
+                  <a:lnTo>
+                    <a:pt x="1919973" y="109651"/>
+                  </a:lnTo>
+                  <a:lnTo>
+                    <a:pt x="1919973" y="0"/>
+                  </a:lnTo>
+                  <a:close/>
+                </a:path>
+              </a:pathLst>
+            </a:custGeom>
+            <a:solidFill>
+              <a:srgbClr val="A30000"/>
+            </a:solidFill>
+          </p:spPr>
+          <p:txBody>
+            <a:bodyPr wrap="square" lIns="0" tIns="0" rIns="0" bIns="0" rtlCol="0"/>
+            <a:lstStyle/>
+            <a:p>
+              <a:endParaRPr/>
+            </a:p>
+          </p:txBody>
+        </p:sp>
+        <p:sp>
+          <p:nvSpPr>
+            <p:cNvPr id="7" name="object 7"/>
+            <p:cNvSpPr/>
+            <p:nvPr/>
+          </p:nvSpPr>
+          <p:spPr>
+            <a:xfrm>
+              <a:off x="1919973" y="3130346"/>
+              <a:ext cx="1920239" cy="109855"/>
+            </a:xfrm>
+            <a:custGeom>
+              <a:avLst/>
+              <a:gdLst/>
+              <a:ahLst/>
+              <a:cxnLst/>
+              <a:rect l="l" t="t" r="r" b="b"/>
+              <a:pathLst>
+                <a:path w="1920239" h="109855">
+                  <a:moveTo>
+                    <a:pt x="1919973" y="0"/>
+                  </a:moveTo>
+                  <a:lnTo>
+                    <a:pt x="0" y="0"/>
+                  </a:lnTo>
+                  <a:lnTo>
+                    <a:pt x="0" y="109651"/>
+                  </a:lnTo>
+                  <a:lnTo>
+                    <a:pt x="1919973" y="109651"/>
+                  </a:lnTo>
+                  <a:lnTo>
+                    <a:pt x="1919973" y="0"/>
+                  </a:lnTo>
+                  <a:close/>
+                </a:path>
+              </a:pathLst>
+            </a:custGeom>
+            <a:solidFill>
+              <a:srgbClr val="EBEBEB"/>
+            </a:solidFill>
+          </p:spPr>
+          <p:txBody>
+            <a:bodyPr wrap="square" lIns="0" tIns="0" rIns="0" bIns="0" rtlCol="0"/>
+            <a:lstStyle/>
+            <a:p>
+              <a:endParaRPr/>
+            </a:p>
+          </p:txBody>
+        </p:sp>
+        <p:sp>
+          <p:nvSpPr>
+            <p:cNvPr id="8" name="object 8"/>
+            <p:cNvSpPr/>
+            <p:nvPr/>
+          </p:nvSpPr>
+          <p:spPr>
+            <a:xfrm>
+              <a:off x="3839946" y="3130346"/>
+              <a:ext cx="1920239" cy="109855"/>
+            </a:xfrm>
+            <a:custGeom>
+              <a:avLst/>
+              <a:gdLst/>
+              <a:ahLst/>
+              <a:cxnLst/>
+              <a:rect l="l" t="t" r="r" b="b"/>
+              <a:pathLst>
+                <a:path w="1920239" h="109855">
+                  <a:moveTo>
+                    <a:pt x="1919973" y="0"/>
+                  </a:moveTo>
+                  <a:lnTo>
+                    <a:pt x="0" y="0"/>
+                  </a:lnTo>
+                  <a:lnTo>
+                    <a:pt x="0" y="109651"/>
+                  </a:lnTo>
+                  <a:lnTo>
+                    <a:pt x="1919973" y="109651"/>
+                  </a:lnTo>
+                  <a:lnTo>
+                    <a:pt x="1919973" y="0"/>
+                  </a:lnTo>
+                  <a:close/>
+                </a:path>
+              </a:pathLst>
+            </a:custGeom>
+            <a:solidFill>
+              <a:srgbClr val="D8D8D8"/>
+            </a:solidFill>
+          </p:spPr>
+          <p:txBody>
+            <a:bodyPr wrap="square" lIns="0" tIns="0" rIns="0" bIns="0" rtlCol="0"/>
+            <a:lstStyle/>
+            <a:p>
+              <a:endParaRPr/>
+            </a:p>
+          </p:txBody>
+        </p:sp>
+      </p:grpSp>
+      <p:sp>
+        <p:nvSpPr>
+          <p:cNvPr id="9" name="object 9"/>
+          <p:cNvSpPr txBox="1"/>
+          <p:nvPr/>
+        </p:nvSpPr>
+        <p:spPr>
+          <a:xfrm>
+            <a:off x="2367343" y="3135783"/>
+            <a:ext cx="1025525" cy="102235"/>
+          </a:xfrm>
+          <a:prstGeom prst="rect">
+            <a:avLst/>
+          </a:prstGeom>
+        </p:spPr>
+        <p:txBody>
+          <a:bodyPr vert="horz" wrap="square" lIns="0" tIns="0" rIns="0" bIns="0" rtlCol="0">
+            <a:spAutoFit/>
+          </a:bodyPr>
+          <a:lstStyle/>
+          <a:p>
+            <a:pPr marL="12700">
+              <a:lnSpc>
+                <a:spcPts val="675"/>
+              </a:lnSpc>
+            </a:pPr>
+            <a:r>
+              <a:rPr sz="600" dirty="0">
+                <a:solidFill>
+                  <a:srgbClr val="8E0000"/>
+                </a:solidFill>
+                <a:latin typeface="Arial"/>
+                <a:cs typeface="Arial"/>
+                <a:hlinkClick r:id="rId3" action="ppaction://hlinksldjump"/>
+              </a:rPr>
+              <a:t>Optimization</a:t>
+            </a:r>
+            <a:r>
+              <a:rPr sz="600" spc="100" dirty="0">
+                <a:solidFill>
+                  <a:srgbClr val="8E0000"/>
+                </a:solidFill>
+                <a:latin typeface="Arial"/>
+                <a:cs typeface="Arial"/>
+                <a:hlinkClick r:id="rId3" action="ppaction://hlinksldjump"/>
+              </a:rPr>
+              <a:t> </a:t>
+            </a:r>
+            <a:r>
+              <a:rPr sz="600" dirty="0">
+                <a:solidFill>
+                  <a:srgbClr val="8E0000"/>
+                </a:solidFill>
+                <a:latin typeface="Arial"/>
+                <a:cs typeface="Arial"/>
+                <a:hlinkClick r:id="rId3" action="ppaction://hlinksldjump"/>
+              </a:rPr>
+              <a:t>Action</a:t>
+            </a:r>
+            <a:r>
+              <a:rPr sz="600" spc="105" dirty="0">
+                <a:solidFill>
+                  <a:srgbClr val="8E0000"/>
+                </a:solidFill>
+                <a:latin typeface="Arial"/>
+                <a:cs typeface="Arial"/>
+                <a:hlinkClick r:id="rId3" action="ppaction://hlinksldjump"/>
+              </a:rPr>
+              <a:t> </a:t>
+            </a:r>
+            <a:r>
+              <a:rPr sz="600" spc="-10" dirty="0">
+                <a:solidFill>
+                  <a:srgbClr val="8E0000"/>
+                </a:solidFill>
+                <a:latin typeface="Arial"/>
+                <a:cs typeface="Arial"/>
+                <a:hlinkClick r:id="rId3" action="ppaction://hlinksldjump"/>
+              </a:rPr>
+              <a:t>Analyzer</a:t>
+            </a:r>
+            <a:endParaRPr sz="600">
+              <a:latin typeface="Arial"/>
+              <a:cs typeface="Arial"/>
+            </a:endParaRPr>
+          </a:p>
+        </p:txBody>
+      </p:sp>
+      <p:sp>
+        <p:nvSpPr>
+          <p:cNvPr id="10" name="object 10"/>
+          <p:cNvSpPr txBox="1">
+            <a:spLocks noGrp="1"/>
+          </p:cNvSpPr>
+          <p:nvPr>
+            <p:ph type="sldNum" sz="quarter" idx="7"/>
+          </p:nvPr>
+        </p:nvSpPr>
+        <p:spPr>
+          <a:prstGeom prst="rect">
+            <a:avLst/>
+          </a:prstGeom>
+        </p:spPr>
+        <p:txBody>
+          <a:bodyPr vert="horz" wrap="square" lIns="0" tIns="0" rIns="0" bIns="0" rtlCol="0">
+            <a:spAutoFit/>
+          </a:bodyPr>
+          <a:lstStyle/>
+          <a:p>
+            <a:pPr marL="12700">
+              <a:lnSpc>
+                <a:spcPts val="675"/>
+              </a:lnSpc>
+            </a:pPr>
+            <a:fld id="{81D60167-4931-47E6-BA6A-407CBD079E47}" type="slidenum">
+              <a:rPr spc="-30" dirty="0"/>
+              <a:t>30</a:t>
+            </a:fld>
+            <a:r>
+              <a:rPr spc="-55" dirty="0"/>
+              <a:t> </a:t>
+            </a:r>
+            <a:r>
+              <a:rPr spc="150" dirty="0"/>
+              <a:t>/</a:t>
+            </a:r>
+            <a:r>
+              <a:rPr spc="-55" dirty="0"/>
+              <a:t> </a:t>
+            </a:r>
+            <a:r>
+              <a:rPr spc="-35" dirty="0"/>
+              <a:t>15</a:t>
+            </a:r>
+          </a:p>
+        </p:txBody>
+      </p:sp>
+    </p:spTree>
+    <p:extLst>
+      <p:ext uri="{BB962C8B-B14F-4D97-AF65-F5344CB8AC3E}">
+        <p14:creationId xmlns:p14="http://schemas.microsoft.com/office/powerpoint/2010/main" val="1595391930"/>
+      </p:ext>
+    </p:extLst>
+  </p:cSld>
+  <p:clrMapOvr>
+    <a:masterClrMapping/>
+  </p:clrMapOvr>
+  <p:transition>
+    <p:cut/>
+  </p:transition>
+</p:sld>
+</file>
+
+<file path=ppt/slides/slide31.xml><?xml version="1.0" encoding="utf-8"?>
 <p:sld xmlns:a="http://schemas.openxmlformats.org/drawingml/2006/main" xmlns:r="http://schemas.openxmlformats.org/officeDocument/2006/relationships" xmlns:p="http://schemas.openxmlformats.org/presentationml/2006/main">
   <p:cSld>
     <p:spTree>
@@ -36339,7 +35744,7 @@
             </a:pPr>
             <a:fld id="{81D60167-4931-47E6-BA6A-407CBD079E47}" type="slidenum">
               <a:rPr spc="-30" dirty="0"/>
-              <a:t>30</a:t>
+              <a:t>31</a:t>
             </a:fld>
             <a:r>
               <a:rPr spc="-55" dirty="0"/>
@@ -36376,7 +35781,7 @@
 </p:sld>
 </file>
 
-<file path=ppt/slides/slide31.xml><?xml version="1.0" encoding="utf-8"?>
+<file path=ppt/slides/slide32.xml><?xml version="1.0" encoding="utf-8"?>
 <p:sld xmlns:a="http://schemas.openxmlformats.org/drawingml/2006/main" xmlns:r="http://schemas.openxmlformats.org/officeDocument/2006/relationships" xmlns:p="http://schemas.openxmlformats.org/presentationml/2006/main">
   <p:cSld>
     <p:spTree>
@@ -36872,7 +36277,7 @@
             </a:pPr>
             <a:fld id="{81D60167-4931-47E6-BA6A-407CBD079E47}" type="slidenum">
               <a:rPr spc="-30" dirty="0"/>
-              <a:t>31</a:t>
+              <a:t>32</a:t>
             </a:fld>
             <a:r>
               <a:rPr spc="-55" dirty="0"/>
@@ -36909,7 +36314,7 @@
 </p:sld>
 </file>
 
-<file path=ppt/slides/slide32.xml><?xml version="1.0" encoding="utf-8"?>
+<file path=ppt/slides/slide33.xml><?xml version="1.0" encoding="utf-8"?>
 <p:sld xmlns:a="http://schemas.openxmlformats.org/drawingml/2006/main" xmlns:r="http://schemas.openxmlformats.org/officeDocument/2006/relationships" xmlns:p="http://schemas.openxmlformats.org/presentationml/2006/main">
   <p:cSld>
     <p:spTree>
@@ -37385,7 +36790,7 @@
             </a:pPr>
             <a:fld id="{81D60167-4931-47E6-BA6A-407CBD079E47}" type="slidenum">
               <a:rPr spc="-30" dirty="0"/>
-              <a:t>32</a:t>
+              <a:t>33</a:t>
             </a:fld>
             <a:r>
               <a:rPr spc="-55" dirty="0"/>
@@ -37422,7 +36827,7 @@
 </p:sld>
 </file>
 
-<file path=ppt/slides/slide33.xml><?xml version="1.0" encoding="utf-8"?>
+<file path=ppt/slides/slide34.xml><?xml version="1.0" encoding="utf-8"?>
 <p:sld xmlns:a="http://schemas.openxmlformats.org/drawingml/2006/main" xmlns:r="http://schemas.openxmlformats.org/officeDocument/2006/relationships" xmlns:p="http://schemas.openxmlformats.org/presentationml/2006/main">
   <p:cSld>
     <p:spTree>
@@ -37746,21 +37151,21 @@
               </a:spcBef>
             </a:pPr>
             <a:r>
-              <a:rPr sz="1200" b="1" baseline="3472" dirty="0" smtClean="0">
+              <a:rPr sz="1200" b="1" baseline="3472" dirty="0">
                 <a:latin typeface="Arial"/>
                 <a:cs typeface="Arial"/>
               </a:rPr>
               <a:t>1</a:t>
             </a:r>
             <a:r>
-              <a:rPr lang="en-US" sz="1200" b="1" baseline="3472" dirty="0" smtClean="0">
+              <a:rPr lang="en-US" sz="1200" b="1" baseline="3472" dirty="0">
                 <a:latin typeface="Arial"/>
                 <a:cs typeface="Arial"/>
               </a:rPr>
               <a:t>-</a:t>
             </a:r>
             <a:r>
-              <a:rPr sz="1200" b="1" spc="502" baseline="3472" dirty="0" smtClean="0">
+              <a:rPr sz="1200" b="1" spc="502" baseline="3472" dirty="0">
                 <a:latin typeface="Arial"/>
                 <a:cs typeface="Arial"/>
               </a:rPr>
@@ -38107,21 +37512,21 @@
               </a:spcBef>
             </a:pPr>
             <a:r>
-              <a:rPr sz="1200" b="1" baseline="3472" dirty="0" smtClean="0">
+              <a:rPr sz="1200" b="1" baseline="3472" dirty="0">
                 <a:latin typeface="Arial"/>
                 <a:cs typeface="Arial"/>
               </a:rPr>
               <a:t>2</a:t>
             </a:r>
             <a:r>
-              <a:rPr lang="en-US" sz="1200" b="1" baseline="3472" dirty="0" smtClean="0">
+              <a:rPr lang="en-US" sz="1200" b="1" baseline="3472" dirty="0">
                 <a:latin typeface="Arial"/>
                 <a:cs typeface="Arial"/>
               </a:rPr>
               <a:t>-</a:t>
             </a:r>
             <a:r>
-              <a:rPr sz="1200" b="1" spc="457" baseline="3472" dirty="0" smtClean="0">
+              <a:rPr sz="1200" b="1" spc="457" baseline="3472" dirty="0">
                 <a:latin typeface="Arial"/>
                 <a:cs typeface="Arial"/>
               </a:rPr>
@@ -38496,21 +37901,21 @@
               </a:spcBef>
             </a:pPr>
             <a:r>
-              <a:rPr sz="1200" b="1" baseline="3472" dirty="0" smtClean="0">
+              <a:rPr sz="1200" b="1" baseline="3472" dirty="0">
                 <a:latin typeface="Arial"/>
                 <a:cs typeface="Arial"/>
               </a:rPr>
               <a:t>3</a:t>
             </a:r>
             <a:r>
-              <a:rPr lang="en-US" sz="1200" b="1" baseline="3472" dirty="0" smtClean="0">
+              <a:rPr lang="en-US" sz="1200" b="1" baseline="3472" dirty="0">
                 <a:latin typeface="Arial"/>
                 <a:cs typeface="Arial"/>
               </a:rPr>
               <a:t>-</a:t>
             </a:r>
             <a:r>
-              <a:rPr sz="1200" b="1" spc="434" baseline="3472" dirty="0" smtClean="0">
+              <a:rPr sz="1200" b="1" spc="434" baseline="3472" dirty="0">
                 <a:latin typeface="Arial"/>
                 <a:cs typeface="Arial"/>
               </a:rPr>
@@ -38885,21 +38290,21 @@
               </a:spcBef>
             </a:pPr>
             <a:r>
-              <a:rPr sz="1200" b="1" baseline="3472" dirty="0" smtClean="0">
+              <a:rPr sz="1200" b="1" baseline="3472" dirty="0">
                 <a:latin typeface="Arial"/>
                 <a:cs typeface="Arial"/>
               </a:rPr>
               <a:t>4</a:t>
             </a:r>
             <a:r>
-              <a:rPr lang="en-US" sz="1200" b="1" baseline="3472" dirty="0" smtClean="0">
+              <a:rPr lang="en-US" sz="1200" b="1" baseline="3472" dirty="0">
                 <a:latin typeface="Arial"/>
                 <a:cs typeface="Arial"/>
               </a:rPr>
               <a:t>-</a:t>
             </a:r>
             <a:r>
-              <a:rPr sz="1200" b="1" spc="457" baseline="3472" dirty="0" smtClean="0">
+              <a:rPr sz="1200" b="1" spc="457" baseline="3472" dirty="0">
                 <a:latin typeface="Arial"/>
                 <a:cs typeface="Arial"/>
               </a:rPr>
@@ -39949,21 +39354,21 @@
               </a:spcBef>
             </a:pPr>
             <a:r>
-              <a:rPr sz="1200" b="1" baseline="3472" dirty="0" smtClean="0">
+              <a:rPr sz="1200" b="1" baseline="3472" dirty="0">
                 <a:latin typeface="Arial"/>
                 <a:cs typeface="Arial"/>
               </a:rPr>
               <a:t>5</a:t>
             </a:r>
             <a:r>
-              <a:rPr lang="en-US" sz="1200" b="1" baseline="3472" dirty="0" smtClean="0">
+              <a:rPr lang="en-US" sz="1200" b="1" baseline="3472" dirty="0">
                 <a:latin typeface="Arial"/>
                 <a:cs typeface="Arial"/>
               </a:rPr>
               <a:t>-</a:t>
             </a:r>
             <a:r>
-              <a:rPr sz="1200" b="1" spc="427" baseline="3472" dirty="0" smtClean="0">
+              <a:rPr sz="1200" b="1" spc="427" baseline="3472" dirty="0">
                 <a:latin typeface="Arial"/>
                 <a:cs typeface="Arial"/>
               </a:rPr>
@@ -40492,7 +39897,7 @@
             </a:pPr>
             <a:fld id="{81D60167-4931-47E6-BA6A-407CBD079E47}" type="slidenum">
               <a:rPr spc="-30" dirty="0"/>
-              <a:t>33</a:t>
+              <a:t>34</a:t>
             </a:fld>
             <a:r>
               <a:rPr spc="-55" dirty="0"/>
@@ -40529,7 +39934,7 @@
 </p:sld>
 </file>
 
-<file path=ppt/slides/slide34.xml><?xml version="1.0" encoding="utf-8"?>
+<file path=ppt/slides/slide35.xml><?xml version="1.0" encoding="utf-8"?>
 <p:sld xmlns:a="http://schemas.openxmlformats.org/drawingml/2006/main" xmlns:r="http://schemas.openxmlformats.org/officeDocument/2006/relationships" xmlns:p="http://schemas.openxmlformats.org/presentationml/2006/main">
   <p:cSld>
     <p:spTree>
@@ -41426,7 +40831,7 @@
               </a:spcBef>
             </a:pPr>
             <a:r>
-              <a:rPr lang="en-US" sz="600" spc="-50" dirty="0" smtClean="0">
+              <a:rPr lang="en-US" sz="600" spc="-50" dirty="0">
                 <a:solidFill>
                   <a:srgbClr val="FFFFFF"/>
                 </a:solidFill>
@@ -41436,7 +40841,7 @@
               <a:t>5</a:t>
             </a:r>
             <a:r>
-              <a:rPr sz="600" spc="-50" dirty="0" smtClean="0">
+              <a:rPr sz="600" spc="-50" dirty="0">
                 <a:solidFill>
                   <a:srgbClr val="FFFFFF"/>
                 </a:solidFill>
@@ -41801,7 +41206,7 @@
             </a:pPr>
             <a:fld id="{81D60167-4931-47E6-BA6A-407CBD079E47}" type="slidenum">
               <a:rPr spc="-30" dirty="0"/>
-              <a:t>34</a:t>
+              <a:t>35</a:t>
             </a:fld>
             <a:r>
               <a:rPr spc="-55" dirty="0"/>
@@ -41838,7 +41243,7 @@
 </p:sld>
 </file>
 
-<file path=ppt/slides/slide35.xml><?xml version="1.0" encoding="utf-8"?>
+<file path=ppt/slides/slide36.xml><?xml version="1.0" encoding="utf-8"?>
 <p:sld xmlns:a="http://schemas.openxmlformats.org/drawingml/2006/main" xmlns:r="http://schemas.openxmlformats.org/officeDocument/2006/relationships" xmlns:p="http://schemas.openxmlformats.org/presentationml/2006/main">
   <p:cSld>
     <p:spTree>
@@ -42739,7 +42144,7 @@
             </a:pPr>
             <a:fld id="{81D60167-4931-47E6-BA6A-407CBD079E47}" type="slidenum">
               <a:rPr spc="-30" dirty="0"/>
-              <a:t>35</a:t>
+              <a:t>36</a:t>
             </a:fld>
             <a:r>
               <a:rPr spc="-55" dirty="0"/>
@@ -42773,17 +42178,10 @@
   <p:transition>
     <p:cut/>
   </p:transition>
-  <p:timing>
-    <p:tnLst>
-      <p:par>
-        <p:cTn id="1" dur="indefinite" restart="never" nodeType="tmRoot"/>
-      </p:par>
-    </p:tnLst>
-  </p:timing>
 </p:sld>
 </file>
 
-<file path=ppt/slides/slide36.xml><?xml version="1.0" encoding="utf-8"?>
+<file path=ppt/slides/slide37.xml><?xml version="1.0" encoding="utf-8"?>
 <p:sld xmlns:a="http://schemas.openxmlformats.org/drawingml/2006/main" xmlns:r="http://schemas.openxmlformats.org/officeDocument/2006/relationships" xmlns:p="http://schemas.openxmlformats.org/presentationml/2006/main" showMasterSp="0">
   <p:cSld>
     <p:spTree>
@@ -43375,24 +42773,14 @@
               <a:t>• </a:t>
             </a:r>
             <a:r>
-              <a:rPr lang="en-US" sz="1200" spc="-40" dirty="0" smtClean="0">
+              <a:rPr lang="en-US" sz="1200" spc="-40" dirty="0">
                 <a:solidFill>
                   <a:srgbClr val="13132C"/>
                 </a:solidFill>
                 <a:latin typeface="Tahoma"/>
                 <a:cs typeface="Tahoma"/>
               </a:rPr>
-              <a:t>Real case </a:t>
-            </a:r>
-            <a:r>
-              <a:rPr lang="en-US" sz="1200" spc="-40" dirty="0" smtClean="0">
-                <a:solidFill>
-                  <a:srgbClr val="13132C"/>
-                </a:solidFill>
-                <a:latin typeface="Tahoma"/>
-                <a:cs typeface="Tahoma"/>
-              </a:rPr>
-              <a:t>scenario</a:t>
+              <a:t>Real case scenario</a:t>
             </a:r>
             <a:endParaRPr sz="1200" dirty="0">
               <a:latin typeface="Tahoma"/>
@@ -43692,7 +43080,7 @@
             </a:pPr>
             <a:fld id="{81D60167-4931-47E6-BA6A-407CBD079E47}" type="slidenum">
               <a:rPr dirty="0"/>
-              <a:t>36</a:t>
+              <a:t>37</a:t>
             </a:fld>
             <a:r>
               <a:rPr spc="10" dirty="0"/>
@@ -43721,17 +43109,10 @@
   <p:transition>
     <p:cut/>
   </p:transition>
-  <p:timing>
-    <p:tnLst>
-      <p:par>
-        <p:cTn id="1" dur="indefinite" restart="never" nodeType="tmRoot"/>
-      </p:par>
-    </p:tnLst>
-  </p:timing>
 </p:sld>
 </file>
 
-<file path=ppt/slides/slide37.xml><?xml version="1.0" encoding="utf-8"?>
+<file path=ppt/slides/slide38.xml><?xml version="1.0" encoding="utf-8"?>
 <p:sld xmlns:a="http://schemas.openxmlformats.org/drawingml/2006/main" xmlns:r="http://schemas.openxmlformats.org/officeDocument/2006/relationships" xmlns:p="http://schemas.openxmlformats.org/presentationml/2006/main">
   <p:cSld>
     <p:spTree>
@@ -44096,7 +43477,7 @@
           </a:bodyPr>
           <a:lstStyle/>
           <a:p>
-            <a:endParaRPr lang="en-US" sz="1100" dirty="0" smtClean="0">
+            <a:endParaRPr lang="en-US" sz="1100" dirty="0">
               <a:latin typeface="Arial Black" panose="020B0A04020102020204" pitchFamily="34" charset="0"/>
             </a:endParaRPr>
           </a:p>
@@ -44389,7 +43770,7 @@
           </a:bodyPr>
           <a:lstStyle/>
           <a:p>
-            <a:endParaRPr lang="en-US" sz="1100" dirty="0" smtClean="0">
+            <a:endParaRPr lang="en-US" sz="1100" dirty="0">
               <a:latin typeface="Arial Black" panose="020B0A04020102020204" pitchFamily="34" charset="0"/>
             </a:endParaRPr>
           </a:p>
@@ -44706,7 +44087,7 @@
             </a:pPr>
             <a:fld id="{81D60167-4931-47E6-BA6A-407CBD079E47}" type="slidenum">
               <a:rPr dirty="0"/>
-              <a:t>37</a:t>
+              <a:t>38</a:t>
             </a:fld>
             <a:r>
               <a:rPr spc="10" dirty="0"/>
@@ -44764,14 +44145,11 @@
           <a:p>
             <a:pPr algn="l"/>
             <a:r>
-              <a:rPr lang="en-US" sz="1100" dirty="0" smtClean="0">
+              <a:rPr lang="en-US" sz="1100" dirty="0">
                 <a:latin typeface="Arial Black" panose="020B0A04020102020204" pitchFamily="34" charset="0"/>
               </a:rPr>
               <a:t>Manual PDF search is slow and tedious</a:t>
             </a:r>
-            <a:endParaRPr lang="en-US" sz="1100" dirty="0">
-              <a:latin typeface="Arial Black" panose="020B0A04020102020204" pitchFamily="34" charset="0"/>
-            </a:endParaRPr>
           </a:p>
         </p:txBody>
       </p:sp>
@@ -44812,20 +44190,20 @@
           <a:p>
             <a:pPr algn="l"/>
             <a:r>
-              <a:rPr lang="en-US" sz="1100" dirty="0" smtClean="0">
+              <a:rPr lang="en-US" sz="1100" dirty="0">
                 <a:latin typeface="Arial Black" panose="020B0A04020102020204" pitchFamily="34" charset="0"/>
               </a:rPr>
               <a:t>Keyword search misses </a:t>
             </a:r>
             <a:r>
-              <a:rPr lang="en-US" sz="1100" dirty="0" smtClean="0">
+              <a:rPr lang="en-US" sz="1100" dirty="0">
                 <a:latin typeface="Arial Black" panose="020B0A04020102020204" pitchFamily="34" charset="0"/>
                 <a:cs typeface="Arial" panose="020B0604020202020204" pitchFamily="34" charset="0"/>
               </a:rPr>
               <a:t>paraphrased</a:t>
             </a:r>
             <a:r>
-              <a:rPr lang="en-US" sz="1100" dirty="0" smtClean="0">
+              <a:rPr lang="en-US" sz="1100" dirty="0">
                 <a:latin typeface="Arial Black" panose="020B0A04020102020204" pitchFamily="34" charset="0"/>
               </a:rPr>
               <a:t> content</a:t>
@@ -44870,7 +44248,7 @@
           <a:p>
             <a:pPr algn="l"/>
             <a:r>
-              <a:rPr lang="en-US" sz="1100" dirty="0" smtClean="0">
+              <a:rPr lang="en-US" sz="1100" dirty="0">
                 <a:latin typeface="Arial Black" panose="020B0A04020102020204" pitchFamily="34" charset="0"/>
               </a:rPr>
               <a:t>Generic LLMs fabricate protocol details</a:t>
@@ -44915,14 +44293,11 @@
           <a:p>
             <a:pPr algn="l"/>
             <a:r>
-              <a:rPr lang="en-US" sz="1100" dirty="0" smtClean="0">
+              <a:rPr lang="en-US" sz="1100" dirty="0">
                 <a:latin typeface="Arial Black" panose="020B0A04020102020204" pitchFamily="34" charset="0"/>
               </a:rPr>
               <a:t>No tool offers cited, spec-grounded answers</a:t>
             </a:r>
-            <a:endParaRPr lang="en-US" sz="1100" dirty="0">
-              <a:latin typeface="Arial Black" panose="020B0A04020102020204" pitchFamily="34" charset="0"/>
-            </a:endParaRPr>
           </a:p>
         </p:txBody>
       </p:sp>
@@ -44962,7 +44337,7 @@
           <a:lstStyle/>
           <a:p>
             <a:r>
-              <a:rPr lang="en-US" sz="1100" dirty="0" smtClean="0">
+              <a:rPr lang="en-US" sz="1100" dirty="0">
                 <a:latin typeface="Arial Black" panose="020B0A04020102020204" pitchFamily="34" charset="0"/>
               </a:rPr>
               <a:t>Telecom LLM RAG</a:t>
@@ -45006,7 +44381,7 @@
           <a:lstStyle/>
           <a:p>
             <a:r>
-              <a:rPr lang="en-US" sz="1100" dirty="0" smtClean="0">
+              <a:rPr lang="en-US" sz="1100" dirty="0">
                 <a:latin typeface="Arial Black" panose="020B0A04020102020204" pitchFamily="34" charset="0"/>
               </a:rPr>
               <a:t>Purpose-built specifically for telecom papers </a:t>
@@ -45050,7 +44425,7 @@
           <a:lstStyle/>
           <a:p>
             <a:r>
-              <a:rPr lang="en-US" sz="1100" dirty="0" smtClean="0">
+              <a:rPr lang="en-US" sz="1100" dirty="0">
                 <a:latin typeface="Arial Black" panose="020B0A04020102020204" pitchFamily="34" charset="0"/>
               </a:rPr>
               <a:t>Fully local: embeddings, vector store, re-ranking</a:t>
@@ -45094,7 +44469,7 @@
           <a:lstStyle/>
           <a:p>
             <a:r>
-              <a:rPr lang="en-US" sz="1100" dirty="0" smtClean="0">
+              <a:rPr lang="en-US" sz="1100" dirty="0">
                 <a:latin typeface="Arial Black" panose="020B0A04020102020204" pitchFamily="34" charset="0"/>
               </a:rPr>
               <a:t>Every answer cites: TS number, Release, Section, page</a:t>
@@ -45110,17 +44485,10 @@
   <p:transition spd="slow">
     <p:push dir="u"/>
   </p:transition>
-  <p:timing>
-    <p:tnLst>
-      <p:par>
-        <p:cTn id="1" dur="indefinite" restart="never" nodeType="tmRoot"/>
-      </p:par>
-    </p:tnLst>
-  </p:timing>
 </p:sld>
 </file>
 
-<file path=ppt/slides/slide38.xml><?xml version="1.0" encoding="utf-8"?>
+<file path=ppt/slides/slide39.xml><?xml version="1.0" encoding="utf-8"?>
 <p:sld xmlns:a="http://schemas.openxmlformats.org/drawingml/2006/main" xmlns:r="http://schemas.openxmlformats.org/officeDocument/2006/relationships" xmlns:p="http://schemas.openxmlformats.org/presentationml/2006/main">
   <p:cSld>
     <p:spTree>
@@ -45536,7 +44904,7 @@
             </a:pPr>
             <a:fld id="{81D60167-4931-47E6-BA6A-407CBD079E47}" type="slidenum">
               <a:rPr dirty="0"/>
-              <a:t>38</a:t>
+              <a:t>39</a:t>
             </a:fld>
             <a:r>
               <a:rPr spc="10" dirty="0"/>
@@ -45565,17 +44933,582 @@
   <p:transition spd="slow">
     <p:push dir="u"/>
   </p:transition>
-  <p:timing>
-    <p:tnLst>
-      <p:par>
-        <p:cTn id="1" dur="indefinite" restart="never" nodeType="tmRoot"/>
-      </p:par>
-    </p:tnLst>
-  </p:timing>
 </p:sld>
 </file>
 
-<file path=ppt/slides/slide39.xml><?xml version="1.0" encoding="utf-8"?>
+<file path=ppt/slides/slide4.xml><?xml version="1.0" encoding="utf-8"?>
+<p:sld xmlns:a="http://schemas.openxmlformats.org/drawingml/2006/main" xmlns:r="http://schemas.openxmlformats.org/officeDocument/2006/relationships" xmlns:p="http://schemas.openxmlformats.org/presentationml/2006/main">
+  <p:cSld>
+    <p:spTree>
+      <p:nvGrpSpPr>
+        <p:cNvPr id="1" name=""/>
+        <p:cNvGrpSpPr/>
+        <p:nvPr/>
+      </p:nvGrpSpPr>
+      <p:grpSpPr>
+        <a:xfrm>
+          <a:off x="0" y="0"/>
+          <a:ext cx="0" cy="0"/>
+          <a:chOff x="0" y="0"/>
+          <a:chExt cx="0" cy="0"/>
+        </a:xfrm>
+      </p:grpSpPr>
+      <p:sp>
+        <p:nvSpPr>
+          <p:cNvPr id="2" name="object 2"/>
+          <p:cNvSpPr txBox="1"/>
+          <p:nvPr/>
+        </p:nvSpPr>
+        <p:spPr>
+          <a:xfrm>
+            <a:off x="95300" y="57337"/>
+            <a:ext cx="1662430" cy="244475"/>
+          </a:xfrm>
+          <a:prstGeom prst="rect">
+            <a:avLst/>
+          </a:prstGeom>
+        </p:spPr>
+        <p:txBody>
+          <a:bodyPr vert="horz" wrap="square" lIns="0" tIns="17145" rIns="0" bIns="0" rtlCol="0">
+            <a:spAutoFit/>
+          </a:bodyPr>
+          <a:lstStyle/>
+          <a:p>
+            <a:pPr marL="12700">
+              <a:lnSpc>
+                <a:spcPct val="100000"/>
+              </a:lnSpc>
+              <a:spcBef>
+                <a:spcPts val="135"/>
+              </a:spcBef>
+            </a:pPr>
+            <a:r>
+              <a:rPr sz="1400" spc="-130" dirty="0">
+                <a:solidFill>
+                  <a:srgbClr val="FFFFFF"/>
+                </a:solidFill>
+                <a:latin typeface="Arial Black"/>
+                <a:cs typeface="Arial Black"/>
+              </a:rPr>
+              <a:t>Problem</a:t>
+            </a:r>
+            <a:r>
+              <a:rPr sz="1400" spc="50" dirty="0">
+                <a:solidFill>
+                  <a:srgbClr val="FFFFFF"/>
+                </a:solidFill>
+                <a:latin typeface="Arial Black"/>
+                <a:cs typeface="Arial Black"/>
+              </a:rPr>
+              <a:t> </a:t>
+            </a:r>
+            <a:r>
+              <a:rPr sz="1400" spc="-120" dirty="0">
+                <a:solidFill>
+                  <a:srgbClr val="FFFFFF"/>
+                </a:solidFill>
+                <a:latin typeface="Arial Black"/>
+                <a:cs typeface="Arial Black"/>
+              </a:rPr>
+              <a:t>Statement</a:t>
+            </a:r>
+            <a:endParaRPr sz="1400">
+              <a:latin typeface="Arial Black"/>
+              <a:cs typeface="Arial Black"/>
+            </a:endParaRPr>
+          </a:p>
+        </p:txBody>
+      </p:sp>
+      <p:sp>
+        <p:nvSpPr>
+          <p:cNvPr id="3" name="object 3"/>
+          <p:cNvSpPr txBox="1"/>
+          <p:nvPr/>
+        </p:nvSpPr>
+        <p:spPr>
+          <a:xfrm>
+            <a:off x="2030209" y="1519171"/>
+            <a:ext cx="1699895" cy="207645"/>
+          </a:xfrm>
+          <a:prstGeom prst="rect">
+            <a:avLst/>
+          </a:prstGeom>
+        </p:spPr>
+        <p:txBody>
+          <a:bodyPr vert="horz" wrap="square" lIns="0" tIns="12065" rIns="0" bIns="0" rtlCol="0">
+            <a:spAutoFit/>
+          </a:bodyPr>
+          <a:lstStyle/>
+          <a:p>
+            <a:pPr marL="12700">
+              <a:lnSpc>
+                <a:spcPct val="100000"/>
+              </a:lnSpc>
+              <a:spcBef>
+                <a:spcPts val="95"/>
+              </a:spcBef>
+            </a:pPr>
+            <a:r>
+              <a:rPr sz="1200" i="1" dirty="0">
+                <a:solidFill>
+                  <a:srgbClr val="ACACB5"/>
+                </a:solidFill>
+                <a:latin typeface="Calibri"/>
+                <a:cs typeface="Calibri"/>
+              </a:rPr>
+              <a:t>[</a:t>
+            </a:r>
+            <a:r>
+              <a:rPr sz="1200" i="1" spc="75" dirty="0">
+                <a:solidFill>
+                  <a:srgbClr val="ACACB5"/>
+                </a:solidFill>
+                <a:latin typeface="Calibri"/>
+                <a:cs typeface="Calibri"/>
+              </a:rPr>
+              <a:t> </a:t>
+            </a:r>
+            <a:r>
+              <a:rPr sz="1200" i="1" dirty="0">
+                <a:solidFill>
+                  <a:srgbClr val="ACACB5"/>
+                </a:solidFill>
+                <a:latin typeface="Calibri"/>
+                <a:cs typeface="Calibri"/>
+              </a:rPr>
+              <a:t>Fill</a:t>
+            </a:r>
+            <a:r>
+              <a:rPr sz="1200" i="1" spc="85" dirty="0">
+                <a:solidFill>
+                  <a:srgbClr val="ACACB5"/>
+                </a:solidFill>
+                <a:latin typeface="Calibri"/>
+                <a:cs typeface="Calibri"/>
+              </a:rPr>
+              <a:t> </a:t>
+            </a:r>
+            <a:r>
+              <a:rPr sz="1200" i="1" dirty="0">
+                <a:solidFill>
+                  <a:srgbClr val="ACACB5"/>
+                </a:solidFill>
+                <a:latin typeface="Calibri"/>
+                <a:cs typeface="Calibri"/>
+              </a:rPr>
+              <a:t>in</a:t>
+            </a:r>
+            <a:r>
+              <a:rPr sz="1200" i="1" spc="80" dirty="0">
+                <a:solidFill>
+                  <a:srgbClr val="ACACB5"/>
+                </a:solidFill>
+                <a:latin typeface="Calibri"/>
+                <a:cs typeface="Calibri"/>
+              </a:rPr>
+              <a:t> </a:t>
+            </a:r>
+            <a:r>
+              <a:rPr sz="1200" i="1" dirty="0">
+                <a:solidFill>
+                  <a:srgbClr val="ACACB5"/>
+                </a:solidFill>
+                <a:latin typeface="Calibri"/>
+                <a:cs typeface="Calibri"/>
+              </a:rPr>
+              <a:t>your</a:t>
+            </a:r>
+            <a:r>
+              <a:rPr sz="1200" i="1" spc="75" dirty="0">
+                <a:solidFill>
+                  <a:srgbClr val="ACACB5"/>
+                </a:solidFill>
+                <a:latin typeface="Calibri"/>
+                <a:cs typeface="Calibri"/>
+              </a:rPr>
+              <a:t> </a:t>
+            </a:r>
+            <a:r>
+              <a:rPr sz="1200" i="1" dirty="0">
+                <a:solidFill>
+                  <a:srgbClr val="ACACB5"/>
+                </a:solidFill>
+                <a:latin typeface="Calibri"/>
+                <a:cs typeface="Calibri"/>
+              </a:rPr>
+              <a:t>content</a:t>
+            </a:r>
+            <a:r>
+              <a:rPr sz="1200" i="1" spc="80" dirty="0">
+                <a:solidFill>
+                  <a:srgbClr val="ACACB5"/>
+                </a:solidFill>
+                <a:latin typeface="Calibri"/>
+                <a:cs typeface="Calibri"/>
+              </a:rPr>
+              <a:t> </a:t>
+            </a:r>
+            <a:r>
+              <a:rPr sz="1200" i="1" spc="-10" dirty="0">
+                <a:solidFill>
+                  <a:srgbClr val="ACACB5"/>
+                </a:solidFill>
+                <a:latin typeface="Calibri"/>
+                <a:cs typeface="Calibri"/>
+              </a:rPr>
+              <a:t>here</a:t>
+            </a:r>
+            <a:r>
+              <a:rPr sz="1200" i="1" spc="80" dirty="0">
+                <a:solidFill>
+                  <a:srgbClr val="ACACB5"/>
+                </a:solidFill>
+                <a:latin typeface="Calibri"/>
+                <a:cs typeface="Calibri"/>
+              </a:rPr>
+              <a:t> </a:t>
+            </a:r>
+            <a:r>
+              <a:rPr sz="1200" i="1" spc="-50" dirty="0">
+                <a:solidFill>
+                  <a:srgbClr val="ACACB5"/>
+                </a:solidFill>
+                <a:latin typeface="Calibri"/>
+                <a:cs typeface="Calibri"/>
+              </a:rPr>
+              <a:t>]</a:t>
+            </a:r>
+            <a:endParaRPr sz="1200">
+              <a:latin typeface="Calibri"/>
+              <a:cs typeface="Calibri"/>
+            </a:endParaRPr>
+          </a:p>
+        </p:txBody>
+      </p:sp>
+      <p:grpSp>
+        <p:nvGrpSpPr>
+          <p:cNvPr id="4" name="object 4"/>
+          <p:cNvGrpSpPr/>
+          <p:nvPr/>
+        </p:nvGrpSpPr>
+        <p:grpSpPr>
+          <a:xfrm>
+            <a:off x="0" y="3125279"/>
+            <a:ext cx="5760085" cy="114935"/>
+            <a:chOff x="0" y="3125279"/>
+            <a:chExt cx="5760085" cy="114935"/>
+          </a:xfrm>
+        </p:grpSpPr>
+        <p:sp>
+          <p:nvSpPr>
+            <p:cNvPr id="5" name="object 5"/>
+            <p:cNvSpPr/>
+            <p:nvPr/>
+          </p:nvSpPr>
+          <p:spPr>
+            <a:xfrm>
+              <a:off x="0" y="3125279"/>
+              <a:ext cx="2016125" cy="114935"/>
+            </a:xfrm>
+            <a:custGeom>
+              <a:avLst/>
+              <a:gdLst/>
+              <a:ahLst/>
+              <a:cxnLst/>
+              <a:rect l="l" t="t" r="r" b="b"/>
+              <a:pathLst>
+                <a:path w="2016125" h="114935">
+                  <a:moveTo>
+                    <a:pt x="2016036" y="0"/>
+                  </a:moveTo>
+                  <a:lnTo>
+                    <a:pt x="0" y="0"/>
+                  </a:lnTo>
+                  <a:lnTo>
+                    <a:pt x="0" y="114719"/>
+                  </a:lnTo>
+                  <a:lnTo>
+                    <a:pt x="2016036" y="114719"/>
+                  </a:lnTo>
+                  <a:lnTo>
+                    <a:pt x="2016036" y="0"/>
+                  </a:lnTo>
+                  <a:close/>
+                </a:path>
+              </a:pathLst>
+            </a:custGeom>
+            <a:solidFill>
+              <a:srgbClr val="B41313"/>
+            </a:solidFill>
+          </p:spPr>
+          <p:txBody>
+            <a:bodyPr wrap="square" lIns="0" tIns="0" rIns="0" bIns="0" rtlCol="0"/>
+            <a:lstStyle/>
+            <a:p>
+              <a:endParaRPr/>
+            </a:p>
+          </p:txBody>
+        </p:sp>
+        <p:sp>
+          <p:nvSpPr>
+            <p:cNvPr id="6" name="object 6"/>
+            <p:cNvSpPr/>
+            <p:nvPr/>
+          </p:nvSpPr>
+          <p:spPr>
+            <a:xfrm>
+              <a:off x="2016036" y="3125279"/>
+              <a:ext cx="2592070" cy="114935"/>
+            </a:xfrm>
+            <a:custGeom>
+              <a:avLst/>
+              <a:gdLst/>
+              <a:ahLst/>
+              <a:cxnLst/>
+              <a:rect l="l" t="t" r="r" b="b"/>
+              <a:pathLst>
+                <a:path w="2592070" h="114935">
+                  <a:moveTo>
+                    <a:pt x="2591981" y="0"/>
+                  </a:moveTo>
+                  <a:lnTo>
+                    <a:pt x="0" y="0"/>
+                  </a:lnTo>
+                  <a:lnTo>
+                    <a:pt x="0" y="114719"/>
+                  </a:lnTo>
+                  <a:lnTo>
+                    <a:pt x="2591981" y="114719"/>
+                  </a:lnTo>
+                  <a:lnTo>
+                    <a:pt x="2591981" y="0"/>
+                  </a:lnTo>
+                  <a:close/>
+                </a:path>
+              </a:pathLst>
+            </a:custGeom>
+            <a:solidFill>
+              <a:srgbClr val="37374C"/>
+            </a:solidFill>
+          </p:spPr>
+          <p:txBody>
+            <a:bodyPr wrap="square" lIns="0" tIns="0" rIns="0" bIns="0" rtlCol="0"/>
+            <a:lstStyle/>
+            <a:p>
+              <a:endParaRPr/>
+            </a:p>
+          </p:txBody>
+        </p:sp>
+        <p:sp>
+          <p:nvSpPr>
+            <p:cNvPr id="7" name="object 7"/>
+            <p:cNvSpPr/>
+            <p:nvPr/>
+          </p:nvSpPr>
+          <p:spPr>
+            <a:xfrm>
+              <a:off x="4608017" y="3125279"/>
+              <a:ext cx="1152525" cy="114935"/>
+            </a:xfrm>
+            <a:custGeom>
+              <a:avLst/>
+              <a:gdLst/>
+              <a:ahLst/>
+              <a:cxnLst/>
+              <a:rect l="l" t="t" r="r" b="b"/>
+              <a:pathLst>
+                <a:path w="1152525" h="114935">
+                  <a:moveTo>
+                    <a:pt x="1151978" y="0"/>
+                  </a:moveTo>
+                  <a:lnTo>
+                    <a:pt x="0" y="0"/>
+                  </a:lnTo>
+                  <a:lnTo>
+                    <a:pt x="0" y="114719"/>
+                  </a:lnTo>
+                  <a:lnTo>
+                    <a:pt x="1151978" y="114719"/>
+                  </a:lnTo>
+                  <a:lnTo>
+                    <a:pt x="1151978" y="0"/>
+                  </a:lnTo>
+                  <a:close/>
+                </a:path>
+              </a:pathLst>
+            </a:custGeom>
+            <a:solidFill>
+              <a:srgbClr val="13132C"/>
+            </a:solidFill>
+          </p:spPr>
+          <p:txBody>
+            <a:bodyPr wrap="square" lIns="0" tIns="0" rIns="0" bIns="0" rtlCol="0"/>
+            <a:lstStyle/>
+            <a:p>
+              <a:endParaRPr/>
+            </a:p>
+          </p:txBody>
+        </p:sp>
+      </p:grpSp>
+      <p:sp>
+        <p:nvSpPr>
+          <p:cNvPr id="8" name="object 8"/>
+          <p:cNvSpPr txBox="1">
+            <a:spLocks noGrp="1"/>
+          </p:cNvSpPr>
+          <p:nvPr>
+            <p:ph type="ftr" sz="quarter" idx="5"/>
+          </p:nvPr>
+        </p:nvSpPr>
+        <p:spPr>
+          <a:prstGeom prst="rect">
+            <a:avLst/>
+          </a:prstGeom>
+        </p:spPr>
+        <p:txBody>
+          <a:bodyPr vert="horz" wrap="square" lIns="0" tIns="24130" rIns="0" bIns="0" rtlCol="0">
+            <a:spAutoFit/>
+          </a:bodyPr>
+          <a:lstStyle/>
+          <a:p>
+            <a:pPr marL="12700">
+              <a:lnSpc>
+                <a:spcPct val="100000"/>
+              </a:lnSpc>
+              <a:spcBef>
+                <a:spcPts val="190"/>
+              </a:spcBef>
+            </a:pPr>
+            <a:r>
+              <a:rPr dirty="0"/>
+              <a:t>ITI </a:t>
+            </a:r>
+            <a:r>
+              <a:rPr spc="-10" dirty="0"/>
+              <a:t>Intake</a:t>
+            </a:r>
+            <a:r>
+              <a:rPr spc="5" dirty="0"/>
+              <a:t> </a:t>
+            </a:r>
+            <a:r>
+              <a:rPr spc="-25" dirty="0"/>
+              <a:t>46</a:t>
+            </a:r>
+          </a:p>
+        </p:txBody>
+      </p:sp>
+      <p:sp>
+        <p:nvSpPr>
+          <p:cNvPr id="9" name="object 9"/>
+          <p:cNvSpPr txBox="1"/>
+          <p:nvPr/>
+        </p:nvSpPr>
+        <p:spPr>
+          <a:xfrm>
+            <a:off x="3100044" y="3105948"/>
+            <a:ext cx="424180" cy="137160"/>
+          </a:xfrm>
+          <a:prstGeom prst="rect">
+            <a:avLst/>
+          </a:prstGeom>
+        </p:spPr>
+        <p:txBody>
+          <a:bodyPr vert="horz" wrap="square" lIns="0" tIns="24130" rIns="0" bIns="0" rtlCol="0">
+            <a:spAutoFit/>
+          </a:bodyPr>
+          <a:lstStyle/>
+          <a:p>
+            <a:pPr marL="12700">
+              <a:lnSpc>
+                <a:spcPct val="100000"/>
+              </a:lnSpc>
+              <a:spcBef>
+                <a:spcPts val="190"/>
+              </a:spcBef>
+            </a:pPr>
+            <a:r>
+              <a:rPr sz="600" spc="-10" dirty="0">
+                <a:solidFill>
+                  <a:srgbClr val="FFFFFF"/>
+                </a:solidFill>
+                <a:latin typeface="Tahoma"/>
+                <a:cs typeface="Tahoma"/>
+                <a:hlinkClick r:id="rId2" action="ppaction://hlinksldjump"/>
+              </a:rPr>
+              <a:t>RANPilotAI</a:t>
+            </a:r>
+            <a:endParaRPr sz="600" dirty="0">
+              <a:latin typeface="Tahoma"/>
+              <a:cs typeface="Tahoma"/>
+            </a:endParaRPr>
+          </a:p>
+        </p:txBody>
+      </p:sp>
+      <p:sp>
+        <p:nvSpPr>
+          <p:cNvPr id="10" name="object 10"/>
+          <p:cNvSpPr txBox="1">
+            <a:spLocks noGrp="1"/>
+          </p:cNvSpPr>
+          <p:nvPr>
+            <p:ph type="sldNum" sz="quarter" idx="7"/>
+          </p:nvPr>
+        </p:nvSpPr>
+        <p:spPr>
+          <a:prstGeom prst="rect">
+            <a:avLst/>
+          </a:prstGeom>
+        </p:spPr>
+        <p:txBody>
+          <a:bodyPr vert="horz" wrap="square" lIns="0" tIns="24130" rIns="0" bIns="0" rtlCol="0">
+            <a:spAutoFit/>
+          </a:bodyPr>
+          <a:lstStyle/>
+          <a:p>
+            <a:pPr marL="12700">
+              <a:lnSpc>
+                <a:spcPct val="100000"/>
+              </a:lnSpc>
+              <a:spcBef>
+                <a:spcPts val="190"/>
+              </a:spcBef>
+            </a:pPr>
+            <a:fld id="{81D60167-4931-47E6-BA6A-407CBD079E47}" type="slidenum">
+              <a:rPr dirty="0"/>
+              <a:t>4</a:t>
+            </a:fld>
+            <a:r>
+              <a:rPr spc="10" dirty="0"/>
+              <a:t> </a:t>
+            </a:r>
+            <a:r>
+              <a:rPr spc="90" dirty="0"/>
+              <a:t>/</a:t>
+            </a:r>
+            <a:r>
+              <a:rPr spc="10" dirty="0"/>
+              <a:t> </a:t>
+            </a:r>
+            <a:r>
+              <a:rPr spc="-25" dirty="0"/>
+              <a:t>47</a:t>
+            </a:r>
+          </a:p>
+        </p:txBody>
+      </p:sp>
+    </p:spTree>
+  </p:cSld>
+  <p:clrMapOvr>
+    <a:masterClrMapping/>
+  </p:clrMapOvr>
+  <p:transition>
+    <p:cut/>
+  </p:transition>
+</p:sld>
+</file>
+
+<file path=ppt/slides/slide40.xml><?xml version="1.0" encoding="utf-8"?>
 <p:sld xmlns:a="http://schemas.openxmlformats.org/drawingml/2006/main" xmlns:r="http://schemas.openxmlformats.org/officeDocument/2006/relationships" xmlns:p="http://schemas.openxmlformats.org/presentationml/2006/main" show="0">
   <p:cSld>
     <p:spTree>
@@ -45951,7 +45884,7 @@
             </a:pPr>
             <a:fld id="{81D60167-4931-47E6-BA6A-407CBD079E47}" type="slidenum">
               <a:rPr dirty="0"/>
-              <a:t>39</a:t>
+              <a:t>40</a:t>
             </a:fld>
             <a:r>
               <a:rPr spc="10" dirty="0"/>
@@ -46035,7 +45968,7 @@
               <a:t>2</a:t>
             </a:r>
             <a:r>
-              <a:rPr lang="en-US" sz="1000" dirty="0" smtClean="0">
+              <a:rPr lang="en-US" sz="1000" dirty="0">
                 <a:solidFill>
                   <a:schemeClr val="lt1"/>
                 </a:solidFill>
@@ -46043,10 +45976,9 @@
               <a:t>. </a:t>
             </a:r>
             <a:r>
-              <a:rPr lang="en-US" sz="1000" dirty="0" smtClean="0"/>
+              <a:rPr lang="en-US" sz="1000" dirty="0"/>
               <a:t>Chunking</a:t>
             </a:r>
-            <a:endParaRPr lang="en-US" sz="1000" dirty="0"/>
           </a:p>
         </p:txBody>
       </p:sp>
@@ -46091,7 +46023,7 @@
               <a:t>3</a:t>
             </a:r>
             <a:r>
-              <a:rPr lang="en-US" sz="1000" dirty="0" smtClean="0">
+              <a:rPr lang="en-US" sz="1000" dirty="0">
                 <a:solidFill>
                   <a:schemeClr val="lt1"/>
                 </a:solidFill>
@@ -46113,7 +46045,7 @@
               <a:t>(BGE-large)</a:t>
             </a:r>
             <a:r>
-              <a:rPr lang="en-US" sz="1000" dirty="0" smtClean="0">
+              <a:rPr lang="en-US" sz="1000" dirty="0">
                 <a:solidFill>
                   <a:schemeClr val="lt1"/>
                 </a:solidFill>
@@ -46165,7 +46097,7 @@
               <a:t>4</a:t>
             </a:r>
             <a:r>
-              <a:rPr lang="en-US" sz="1000" dirty="0" smtClean="0">
+              <a:rPr lang="en-US" sz="1000" dirty="0">
                 <a:solidFill>
                   <a:schemeClr val="lt1"/>
                 </a:solidFill>
@@ -46173,14 +46105,14 @@
               <a:t>. </a:t>
             </a:r>
             <a:r>
-              <a:rPr lang="en-US" sz="1000" dirty="0" smtClean="0"/>
+              <a:rPr lang="en-US" sz="1000" dirty="0"/>
               <a:t>Vector Storage</a:t>
             </a:r>
           </a:p>
           <a:p>
             <a:pPr algn="l"/>
             <a:r>
-              <a:rPr lang="en-US" sz="1000" dirty="0" smtClean="0">
+              <a:rPr lang="en-US" sz="1000" dirty="0">
                 <a:solidFill>
                   <a:schemeClr val="lt1"/>
                 </a:solidFill>
@@ -46188,18 +46120,7 @@
                 <a:ea typeface="+mn-ea"/>
                 <a:cs typeface="+mn-cs"/>
               </a:rPr>
-              <a:t>(</a:t>
-            </a:r>
-            <a:r>
-              <a:rPr lang="en-US" sz="1000" dirty="0">
-                <a:solidFill>
-                  <a:schemeClr val="lt1"/>
-                </a:solidFill>
-                <a:latin typeface="+mn-lt"/>
-                <a:ea typeface="+mn-ea"/>
-                <a:cs typeface="+mn-cs"/>
-              </a:rPr>
-              <a:t>Local Qdrant)</a:t>
+              <a:t>(Local Qdrant)</a:t>
             </a:r>
             <a:endParaRPr lang="en-US" sz="1000" dirty="0"/>
           </a:p>
@@ -46246,7 +46167,7 @@
               <a:t>5</a:t>
             </a:r>
             <a:r>
-              <a:rPr lang="en-US" sz="1000" dirty="0" smtClean="0">
+              <a:rPr lang="en-US" sz="1000" dirty="0">
                 <a:solidFill>
                   <a:schemeClr val="lt1"/>
                 </a:solidFill>
@@ -46294,11 +46215,11 @@
           <a:p>
             <a:pPr algn="l"/>
             <a:r>
-              <a:rPr lang="en-US" sz="1000" dirty="0" smtClean="0"/>
+              <a:rPr lang="en-US" sz="1000" dirty="0"/>
               <a:t>6. Re-ranking</a:t>
             </a:r>
             <a:r>
-              <a:rPr lang="en-US" dirty="0" smtClean="0">
+              <a:rPr lang="en-US" dirty="0">
                 <a:solidFill>
                   <a:schemeClr val="lt1"/>
                 </a:solidFill>
@@ -46349,10 +46270,9 @@
           <a:p>
             <a:pPr algn="l"/>
             <a:r>
-              <a:rPr lang="en-US" sz="1000" dirty="0" smtClean="0"/>
+              <a:rPr lang="en-US" sz="1000" dirty="0"/>
               <a:t>7. Generation (OpenRouter API</a:t>
             </a:r>
-            <a:endParaRPr lang="en-US" sz="1000" dirty="0"/>
           </a:p>
         </p:txBody>
       </p:sp>
@@ -46412,596 +46332,10 @@
   <p:transition spd="slow">
     <p:push dir="u"/>
   </p:transition>
-  <p:timing>
-    <p:tnLst>
-      <p:par>
-        <p:cTn id="1" dur="indefinite" restart="never" nodeType="tmRoot"/>
-      </p:par>
-    </p:tnLst>
-  </p:timing>
 </p:sld>
 </file>
 
-<file path=ppt/slides/slide4.xml><?xml version="1.0" encoding="utf-8"?>
-<p:sld xmlns:a="http://schemas.openxmlformats.org/drawingml/2006/main" xmlns:r="http://schemas.openxmlformats.org/officeDocument/2006/relationships" xmlns:p="http://schemas.openxmlformats.org/presentationml/2006/main">
-  <p:cSld>
-    <p:spTree>
-      <p:nvGrpSpPr>
-        <p:cNvPr id="1" name=""/>
-        <p:cNvGrpSpPr/>
-        <p:nvPr/>
-      </p:nvGrpSpPr>
-      <p:grpSpPr>
-        <a:xfrm>
-          <a:off x="0" y="0"/>
-          <a:ext cx="0" cy="0"/>
-          <a:chOff x="0" y="0"/>
-          <a:chExt cx="0" cy="0"/>
-        </a:xfrm>
-      </p:grpSpPr>
-      <p:sp>
-        <p:nvSpPr>
-          <p:cNvPr id="2" name="object 2"/>
-          <p:cNvSpPr txBox="1"/>
-          <p:nvPr/>
-        </p:nvSpPr>
-        <p:spPr>
-          <a:xfrm>
-            <a:off x="95300" y="57337"/>
-            <a:ext cx="1662430" cy="244475"/>
-          </a:xfrm>
-          <a:prstGeom prst="rect">
-            <a:avLst/>
-          </a:prstGeom>
-        </p:spPr>
-        <p:txBody>
-          <a:bodyPr vert="horz" wrap="square" lIns="0" tIns="17145" rIns="0" bIns="0" rtlCol="0">
-            <a:spAutoFit/>
-          </a:bodyPr>
-          <a:lstStyle/>
-          <a:p>
-            <a:pPr marL="12700">
-              <a:lnSpc>
-                <a:spcPct val="100000"/>
-              </a:lnSpc>
-              <a:spcBef>
-                <a:spcPts val="135"/>
-              </a:spcBef>
-            </a:pPr>
-            <a:r>
-              <a:rPr sz="1400" spc="-130" dirty="0">
-                <a:solidFill>
-                  <a:srgbClr val="FFFFFF"/>
-                </a:solidFill>
-                <a:latin typeface="Arial Black"/>
-                <a:cs typeface="Arial Black"/>
-              </a:rPr>
-              <a:t>Problem</a:t>
-            </a:r>
-            <a:r>
-              <a:rPr sz="1400" spc="50" dirty="0">
-                <a:solidFill>
-                  <a:srgbClr val="FFFFFF"/>
-                </a:solidFill>
-                <a:latin typeface="Arial Black"/>
-                <a:cs typeface="Arial Black"/>
-              </a:rPr>
-              <a:t> </a:t>
-            </a:r>
-            <a:r>
-              <a:rPr sz="1400" spc="-120" dirty="0">
-                <a:solidFill>
-                  <a:srgbClr val="FFFFFF"/>
-                </a:solidFill>
-                <a:latin typeface="Arial Black"/>
-                <a:cs typeface="Arial Black"/>
-              </a:rPr>
-              <a:t>Statement</a:t>
-            </a:r>
-            <a:endParaRPr sz="1400">
-              <a:latin typeface="Arial Black"/>
-              <a:cs typeface="Arial Black"/>
-            </a:endParaRPr>
-          </a:p>
-        </p:txBody>
-      </p:sp>
-      <p:sp>
-        <p:nvSpPr>
-          <p:cNvPr id="3" name="object 3"/>
-          <p:cNvSpPr txBox="1"/>
-          <p:nvPr/>
-        </p:nvSpPr>
-        <p:spPr>
-          <a:xfrm>
-            <a:off x="2030209" y="1519171"/>
-            <a:ext cx="1699895" cy="207645"/>
-          </a:xfrm>
-          <a:prstGeom prst="rect">
-            <a:avLst/>
-          </a:prstGeom>
-        </p:spPr>
-        <p:txBody>
-          <a:bodyPr vert="horz" wrap="square" lIns="0" tIns="12065" rIns="0" bIns="0" rtlCol="0">
-            <a:spAutoFit/>
-          </a:bodyPr>
-          <a:lstStyle/>
-          <a:p>
-            <a:pPr marL="12700">
-              <a:lnSpc>
-                <a:spcPct val="100000"/>
-              </a:lnSpc>
-              <a:spcBef>
-                <a:spcPts val="95"/>
-              </a:spcBef>
-            </a:pPr>
-            <a:r>
-              <a:rPr sz="1200" i="1" dirty="0">
-                <a:solidFill>
-                  <a:srgbClr val="ACACB5"/>
-                </a:solidFill>
-                <a:latin typeface="Calibri"/>
-                <a:cs typeface="Calibri"/>
-              </a:rPr>
-              <a:t>[</a:t>
-            </a:r>
-            <a:r>
-              <a:rPr sz="1200" i="1" spc="75" dirty="0">
-                <a:solidFill>
-                  <a:srgbClr val="ACACB5"/>
-                </a:solidFill>
-                <a:latin typeface="Calibri"/>
-                <a:cs typeface="Calibri"/>
-              </a:rPr>
-              <a:t> </a:t>
-            </a:r>
-            <a:r>
-              <a:rPr sz="1200" i="1" dirty="0">
-                <a:solidFill>
-                  <a:srgbClr val="ACACB5"/>
-                </a:solidFill>
-                <a:latin typeface="Calibri"/>
-                <a:cs typeface="Calibri"/>
-              </a:rPr>
-              <a:t>Fill</a:t>
-            </a:r>
-            <a:r>
-              <a:rPr sz="1200" i="1" spc="85" dirty="0">
-                <a:solidFill>
-                  <a:srgbClr val="ACACB5"/>
-                </a:solidFill>
-                <a:latin typeface="Calibri"/>
-                <a:cs typeface="Calibri"/>
-              </a:rPr>
-              <a:t> </a:t>
-            </a:r>
-            <a:r>
-              <a:rPr sz="1200" i="1" dirty="0">
-                <a:solidFill>
-                  <a:srgbClr val="ACACB5"/>
-                </a:solidFill>
-                <a:latin typeface="Calibri"/>
-                <a:cs typeface="Calibri"/>
-              </a:rPr>
-              <a:t>in</a:t>
-            </a:r>
-            <a:r>
-              <a:rPr sz="1200" i="1" spc="80" dirty="0">
-                <a:solidFill>
-                  <a:srgbClr val="ACACB5"/>
-                </a:solidFill>
-                <a:latin typeface="Calibri"/>
-                <a:cs typeface="Calibri"/>
-              </a:rPr>
-              <a:t> </a:t>
-            </a:r>
-            <a:r>
-              <a:rPr sz="1200" i="1" dirty="0">
-                <a:solidFill>
-                  <a:srgbClr val="ACACB5"/>
-                </a:solidFill>
-                <a:latin typeface="Calibri"/>
-                <a:cs typeface="Calibri"/>
-              </a:rPr>
-              <a:t>your</a:t>
-            </a:r>
-            <a:r>
-              <a:rPr sz="1200" i="1" spc="75" dirty="0">
-                <a:solidFill>
-                  <a:srgbClr val="ACACB5"/>
-                </a:solidFill>
-                <a:latin typeface="Calibri"/>
-                <a:cs typeface="Calibri"/>
-              </a:rPr>
-              <a:t> </a:t>
-            </a:r>
-            <a:r>
-              <a:rPr sz="1200" i="1" dirty="0">
-                <a:solidFill>
-                  <a:srgbClr val="ACACB5"/>
-                </a:solidFill>
-                <a:latin typeface="Calibri"/>
-                <a:cs typeface="Calibri"/>
-              </a:rPr>
-              <a:t>content</a:t>
-            </a:r>
-            <a:r>
-              <a:rPr sz="1200" i="1" spc="80" dirty="0">
-                <a:solidFill>
-                  <a:srgbClr val="ACACB5"/>
-                </a:solidFill>
-                <a:latin typeface="Calibri"/>
-                <a:cs typeface="Calibri"/>
-              </a:rPr>
-              <a:t> </a:t>
-            </a:r>
-            <a:r>
-              <a:rPr sz="1200" i="1" spc="-10" dirty="0">
-                <a:solidFill>
-                  <a:srgbClr val="ACACB5"/>
-                </a:solidFill>
-                <a:latin typeface="Calibri"/>
-                <a:cs typeface="Calibri"/>
-              </a:rPr>
-              <a:t>here</a:t>
-            </a:r>
-            <a:r>
-              <a:rPr sz="1200" i="1" spc="80" dirty="0">
-                <a:solidFill>
-                  <a:srgbClr val="ACACB5"/>
-                </a:solidFill>
-                <a:latin typeface="Calibri"/>
-                <a:cs typeface="Calibri"/>
-              </a:rPr>
-              <a:t> </a:t>
-            </a:r>
-            <a:r>
-              <a:rPr sz="1200" i="1" spc="-50" dirty="0">
-                <a:solidFill>
-                  <a:srgbClr val="ACACB5"/>
-                </a:solidFill>
-                <a:latin typeface="Calibri"/>
-                <a:cs typeface="Calibri"/>
-              </a:rPr>
-              <a:t>]</a:t>
-            </a:r>
-            <a:endParaRPr sz="1200">
-              <a:latin typeface="Calibri"/>
-              <a:cs typeface="Calibri"/>
-            </a:endParaRPr>
-          </a:p>
-        </p:txBody>
-      </p:sp>
-      <p:grpSp>
-        <p:nvGrpSpPr>
-          <p:cNvPr id="4" name="object 4"/>
-          <p:cNvGrpSpPr/>
-          <p:nvPr/>
-        </p:nvGrpSpPr>
-        <p:grpSpPr>
-          <a:xfrm>
-            <a:off x="0" y="3125279"/>
-            <a:ext cx="5760085" cy="114935"/>
-            <a:chOff x="0" y="3125279"/>
-            <a:chExt cx="5760085" cy="114935"/>
-          </a:xfrm>
-        </p:grpSpPr>
-        <p:sp>
-          <p:nvSpPr>
-            <p:cNvPr id="5" name="object 5"/>
-            <p:cNvSpPr/>
-            <p:nvPr/>
-          </p:nvSpPr>
-          <p:spPr>
-            <a:xfrm>
-              <a:off x="0" y="3125279"/>
-              <a:ext cx="2016125" cy="114935"/>
-            </a:xfrm>
-            <a:custGeom>
-              <a:avLst/>
-              <a:gdLst/>
-              <a:ahLst/>
-              <a:cxnLst/>
-              <a:rect l="l" t="t" r="r" b="b"/>
-              <a:pathLst>
-                <a:path w="2016125" h="114935">
-                  <a:moveTo>
-                    <a:pt x="2016036" y="0"/>
-                  </a:moveTo>
-                  <a:lnTo>
-                    <a:pt x="0" y="0"/>
-                  </a:lnTo>
-                  <a:lnTo>
-                    <a:pt x="0" y="114719"/>
-                  </a:lnTo>
-                  <a:lnTo>
-                    <a:pt x="2016036" y="114719"/>
-                  </a:lnTo>
-                  <a:lnTo>
-                    <a:pt x="2016036" y="0"/>
-                  </a:lnTo>
-                  <a:close/>
-                </a:path>
-              </a:pathLst>
-            </a:custGeom>
-            <a:solidFill>
-              <a:srgbClr val="B41313"/>
-            </a:solidFill>
-          </p:spPr>
-          <p:txBody>
-            <a:bodyPr wrap="square" lIns="0" tIns="0" rIns="0" bIns="0" rtlCol="0"/>
-            <a:lstStyle/>
-            <a:p>
-              <a:endParaRPr/>
-            </a:p>
-          </p:txBody>
-        </p:sp>
-        <p:sp>
-          <p:nvSpPr>
-            <p:cNvPr id="6" name="object 6"/>
-            <p:cNvSpPr/>
-            <p:nvPr/>
-          </p:nvSpPr>
-          <p:spPr>
-            <a:xfrm>
-              <a:off x="2016036" y="3125279"/>
-              <a:ext cx="2592070" cy="114935"/>
-            </a:xfrm>
-            <a:custGeom>
-              <a:avLst/>
-              <a:gdLst/>
-              <a:ahLst/>
-              <a:cxnLst/>
-              <a:rect l="l" t="t" r="r" b="b"/>
-              <a:pathLst>
-                <a:path w="2592070" h="114935">
-                  <a:moveTo>
-                    <a:pt x="2591981" y="0"/>
-                  </a:moveTo>
-                  <a:lnTo>
-                    <a:pt x="0" y="0"/>
-                  </a:lnTo>
-                  <a:lnTo>
-                    <a:pt x="0" y="114719"/>
-                  </a:lnTo>
-                  <a:lnTo>
-                    <a:pt x="2591981" y="114719"/>
-                  </a:lnTo>
-                  <a:lnTo>
-                    <a:pt x="2591981" y="0"/>
-                  </a:lnTo>
-                  <a:close/>
-                </a:path>
-              </a:pathLst>
-            </a:custGeom>
-            <a:solidFill>
-              <a:srgbClr val="37374C"/>
-            </a:solidFill>
-          </p:spPr>
-          <p:txBody>
-            <a:bodyPr wrap="square" lIns="0" tIns="0" rIns="0" bIns="0" rtlCol="0"/>
-            <a:lstStyle/>
-            <a:p>
-              <a:endParaRPr/>
-            </a:p>
-          </p:txBody>
-        </p:sp>
-        <p:sp>
-          <p:nvSpPr>
-            <p:cNvPr id="7" name="object 7"/>
-            <p:cNvSpPr/>
-            <p:nvPr/>
-          </p:nvSpPr>
-          <p:spPr>
-            <a:xfrm>
-              <a:off x="4608017" y="3125279"/>
-              <a:ext cx="1152525" cy="114935"/>
-            </a:xfrm>
-            <a:custGeom>
-              <a:avLst/>
-              <a:gdLst/>
-              <a:ahLst/>
-              <a:cxnLst/>
-              <a:rect l="l" t="t" r="r" b="b"/>
-              <a:pathLst>
-                <a:path w="1152525" h="114935">
-                  <a:moveTo>
-                    <a:pt x="1151978" y="0"/>
-                  </a:moveTo>
-                  <a:lnTo>
-                    <a:pt x="0" y="0"/>
-                  </a:lnTo>
-                  <a:lnTo>
-                    <a:pt x="0" y="114719"/>
-                  </a:lnTo>
-                  <a:lnTo>
-                    <a:pt x="1151978" y="114719"/>
-                  </a:lnTo>
-                  <a:lnTo>
-                    <a:pt x="1151978" y="0"/>
-                  </a:lnTo>
-                  <a:close/>
-                </a:path>
-              </a:pathLst>
-            </a:custGeom>
-            <a:solidFill>
-              <a:srgbClr val="13132C"/>
-            </a:solidFill>
-          </p:spPr>
-          <p:txBody>
-            <a:bodyPr wrap="square" lIns="0" tIns="0" rIns="0" bIns="0" rtlCol="0"/>
-            <a:lstStyle/>
-            <a:p>
-              <a:endParaRPr/>
-            </a:p>
-          </p:txBody>
-        </p:sp>
-      </p:grpSp>
-      <p:sp>
-        <p:nvSpPr>
-          <p:cNvPr id="8" name="object 8"/>
-          <p:cNvSpPr txBox="1">
-            <a:spLocks noGrp="1"/>
-          </p:cNvSpPr>
-          <p:nvPr>
-            <p:ph type="ftr" sz="quarter" idx="5"/>
-          </p:nvPr>
-        </p:nvSpPr>
-        <p:spPr>
-          <a:prstGeom prst="rect">
-            <a:avLst/>
-          </a:prstGeom>
-        </p:spPr>
-        <p:txBody>
-          <a:bodyPr vert="horz" wrap="square" lIns="0" tIns="24130" rIns="0" bIns="0" rtlCol="0">
-            <a:spAutoFit/>
-          </a:bodyPr>
-          <a:lstStyle/>
-          <a:p>
-            <a:pPr marL="12700">
-              <a:lnSpc>
-                <a:spcPct val="100000"/>
-              </a:lnSpc>
-              <a:spcBef>
-                <a:spcPts val="190"/>
-              </a:spcBef>
-            </a:pPr>
-            <a:r>
-              <a:rPr dirty="0"/>
-              <a:t>ITI </a:t>
-            </a:r>
-            <a:r>
-              <a:rPr spc="-10" dirty="0"/>
-              <a:t>Intake</a:t>
-            </a:r>
-            <a:r>
-              <a:rPr spc="5" dirty="0"/>
-              <a:t> </a:t>
-            </a:r>
-            <a:r>
-              <a:rPr spc="-25" dirty="0"/>
-              <a:t>46</a:t>
-            </a:r>
-          </a:p>
-        </p:txBody>
-      </p:sp>
-      <p:sp>
-        <p:nvSpPr>
-          <p:cNvPr id="9" name="object 9"/>
-          <p:cNvSpPr txBox="1"/>
-          <p:nvPr/>
-        </p:nvSpPr>
-        <p:spPr>
-          <a:xfrm>
-            <a:off x="3100044" y="3105948"/>
-            <a:ext cx="424180" cy="137160"/>
-          </a:xfrm>
-          <a:prstGeom prst="rect">
-            <a:avLst/>
-          </a:prstGeom>
-        </p:spPr>
-        <p:txBody>
-          <a:bodyPr vert="horz" wrap="square" lIns="0" tIns="24130" rIns="0" bIns="0" rtlCol="0">
-            <a:spAutoFit/>
-          </a:bodyPr>
-          <a:lstStyle/>
-          <a:p>
-            <a:pPr marL="12700">
-              <a:lnSpc>
-                <a:spcPct val="100000"/>
-              </a:lnSpc>
-              <a:spcBef>
-                <a:spcPts val="190"/>
-              </a:spcBef>
-            </a:pPr>
-            <a:r>
-              <a:rPr sz="600" spc="-10" dirty="0">
-                <a:solidFill>
-                  <a:srgbClr val="FFFFFF"/>
-                </a:solidFill>
-                <a:latin typeface="Tahoma"/>
-                <a:cs typeface="Tahoma"/>
-                <a:hlinkClick r:id="rId2" action="ppaction://hlinksldjump"/>
-              </a:rPr>
-              <a:t>RANPilotAI</a:t>
-            </a:r>
-            <a:endParaRPr sz="600" dirty="0">
-              <a:latin typeface="Tahoma"/>
-              <a:cs typeface="Tahoma"/>
-            </a:endParaRPr>
-          </a:p>
-        </p:txBody>
-      </p:sp>
-      <p:sp>
-        <p:nvSpPr>
-          <p:cNvPr id="10" name="object 10"/>
-          <p:cNvSpPr txBox="1">
-            <a:spLocks noGrp="1"/>
-          </p:cNvSpPr>
-          <p:nvPr>
-            <p:ph type="sldNum" sz="quarter" idx="7"/>
-          </p:nvPr>
-        </p:nvSpPr>
-        <p:spPr>
-          <a:prstGeom prst="rect">
-            <a:avLst/>
-          </a:prstGeom>
-        </p:spPr>
-        <p:txBody>
-          <a:bodyPr vert="horz" wrap="square" lIns="0" tIns="24130" rIns="0" bIns="0" rtlCol="0">
-            <a:spAutoFit/>
-          </a:bodyPr>
-          <a:lstStyle/>
-          <a:p>
-            <a:pPr marL="12700">
-              <a:lnSpc>
-                <a:spcPct val="100000"/>
-              </a:lnSpc>
-              <a:spcBef>
-                <a:spcPts val="190"/>
-              </a:spcBef>
-            </a:pPr>
-            <a:fld id="{81D60167-4931-47E6-BA6A-407CBD079E47}" type="slidenum">
-              <a:rPr dirty="0"/>
-              <a:t>4</a:t>
-            </a:fld>
-            <a:r>
-              <a:rPr spc="10" dirty="0"/>
-              <a:t> </a:t>
-            </a:r>
-            <a:r>
-              <a:rPr spc="90" dirty="0"/>
-              <a:t>/</a:t>
-            </a:r>
-            <a:r>
-              <a:rPr spc="10" dirty="0"/>
-              <a:t> </a:t>
-            </a:r>
-            <a:r>
-              <a:rPr spc="-25" dirty="0"/>
-              <a:t>47</a:t>
-            </a:r>
-          </a:p>
-        </p:txBody>
-      </p:sp>
-    </p:spTree>
-  </p:cSld>
-  <p:clrMapOvr>
-    <a:masterClrMapping/>
-  </p:clrMapOvr>
-  <p:transition>
-    <p:cut/>
-  </p:transition>
-  <p:timing>
-    <p:tnLst>
-      <p:par>
-        <p:cTn id="1" dur="indefinite" restart="never" nodeType="tmRoot"/>
-      </p:par>
-    </p:tnLst>
-  </p:timing>
-</p:sld>
-</file>
-
-<file path=ppt/slides/slide40.xml><?xml version="1.0" encoding="utf-8"?>
+<file path=ppt/slides/slide41.xml><?xml version="1.0" encoding="utf-8"?>
 <p:sld xmlns:a="http://schemas.openxmlformats.org/drawingml/2006/main" xmlns:r="http://schemas.openxmlformats.org/officeDocument/2006/relationships" xmlns:p="http://schemas.openxmlformats.org/presentationml/2006/main">
   <p:cSld>
     <p:spTree>
@@ -47457,7 +46791,7 @@
             </a:pPr>
             <a:fld id="{81D60167-4931-47E6-BA6A-407CBD079E47}" type="slidenum">
               <a:rPr dirty="0"/>
-              <a:t>40</a:t>
+              <a:t>41</a:t>
             </a:fld>
             <a:r>
               <a:rPr spc="10" dirty="0"/>
@@ -47519,17 +46853,10 @@
       </p:transition>
     </mc:Fallback>
   </mc:AlternateContent>
-  <p:timing>
-    <p:tnLst>
-      <p:par>
-        <p:cTn id="1" dur="indefinite" restart="never" nodeType="tmRoot"/>
-      </p:par>
-    </p:tnLst>
-  </p:timing>
 </p:sld>
 </file>
 
-<file path=ppt/slides/slide41.xml><?xml version="1.0" encoding="utf-8"?>
+<file path=ppt/slides/slide42.xml><?xml version="1.0" encoding="utf-8"?>
 <p:sld xmlns:a="http://schemas.openxmlformats.org/drawingml/2006/main" xmlns:r="http://schemas.openxmlformats.org/officeDocument/2006/relationships" xmlns:p="http://schemas.openxmlformats.org/presentationml/2006/main">
   <p:cSld>
     <p:spTree>
@@ -48004,7 +47331,7 @@
             </a:pPr>
             <a:fld id="{81D60167-4931-47E6-BA6A-407CBD079E47}" type="slidenum">
               <a:rPr dirty="0"/>
-              <a:t>41</a:t>
+              <a:t>42</a:t>
             </a:fld>
             <a:r>
               <a:rPr spc="10" dirty="0"/>
@@ -48033,17 +47360,10 @@
   <p:transition spd="slow">
     <p:wipe/>
   </p:transition>
-  <p:timing>
-    <p:tnLst>
-      <p:par>
-        <p:cTn id="1" dur="indefinite" restart="never" nodeType="tmRoot"/>
-      </p:par>
-    </p:tnLst>
-  </p:timing>
 </p:sld>
 </file>
 
-<file path=ppt/slides/slide42.xml><?xml version="1.0" encoding="utf-8"?>
+<file path=ppt/slides/slide43.xml><?xml version="1.0" encoding="utf-8"?>
 <p:sld xmlns:a="http://schemas.openxmlformats.org/drawingml/2006/main" xmlns:r="http://schemas.openxmlformats.org/officeDocument/2006/relationships" xmlns:p="http://schemas.openxmlformats.org/presentationml/2006/main">
   <p:cSld>
     <p:spTree>
@@ -48527,7 +47847,7 @@
             </a:pPr>
             <a:fld id="{81D60167-4931-47E6-BA6A-407CBD079E47}" type="slidenum">
               <a:rPr dirty="0"/>
-              <a:t>42</a:t>
+              <a:t>43</a:t>
             </a:fld>
             <a:r>
               <a:rPr spc="10" dirty="0"/>
@@ -48604,17 +47924,10 @@
   <p:transition spd="slow">
     <p:wipe/>
   </p:transition>
-  <p:timing>
-    <p:tnLst>
-      <p:par>
-        <p:cTn id="1" dur="indefinite" restart="never" nodeType="tmRoot"/>
-      </p:par>
-    </p:tnLst>
-  </p:timing>
 </p:sld>
 </file>
 
-<file path=ppt/slides/slide43.xml><?xml version="1.0" encoding="utf-8"?>
+<file path=ppt/slides/slide44.xml><?xml version="1.0" encoding="utf-8"?>
 <p:sld xmlns:a="http://schemas.openxmlformats.org/drawingml/2006/main" xmlns:r="http://schemas.openxmlformats.org/officeDocument/2006/relationships" xmlns:p="http://schemas.openxmlformats.org/presentationml/2006/main">
   <p:cSld>
     <p:spTree>
@@ -48661,7 +47974,7 @@
               </a:spcBef>
             </a:pPr>
             <a:r>
-              <a:rPr lang="en-US" sz="1400" spc="-170" dirty="0" smtClean="0">
+              <a:rPr lang="en-US" sz="1400" spc="-170" dirty="0">
                 <a:solidFill>
                   <a:srgbClr val="FFFFFF"/>
                 </a:solidFill>
@@ -48968,7 +48281,7 @@
             </a:pPr>
             <a:fld id="{81D60167-4931-47E6-BA6A-407CBD079E47}" type="slidenum">
               <a:rPr dirty="0"/>
-              <a:t>43</a:t>
+              <a:t>44</a:t>
             </a:fld>
             <a:r>
               <a:rPr spc="10" dirty="0"/>
@@ -49020,17 +48333,10 @@
   <p:transition spd="slow">
     <p:wipe/>
   </p:transition>
-  <p:timing>
-    <p:tnLst>
-      <p:par>
-        <p:cTn id="1" dur="indefinite" restart="never" nodeType="tmRoot"/>
-      </p:par>
-    </p:tnLst>
-  </p:timing>
 </p:sld>
 </file>
 
-<file path=ppt/slides/slide44.xml><?xml version="1.0" encoding="utf-8"?>
+<file path=ppt/slides/slide45.xml><?xml version="1.0" encoding="utf-8"?>
 <p:sld xmlns:a="http://schemas.openxmlformats.org/drawingml/2006/main" xmlns:r="http://schemas.openxmlformats.org/officeDocument/2006/relationships" xmlns:p="http://schemas.openxmlformats.org/presentationml/2006/main">
   <p:cSld>
     <p:spTree>
@@ -49077,34 +48383,14 @@
               </a:spcBef>
             </a:pPr>
             <a:r>
-              <a:rPr lang="en-US" sz="1400" spc="-165" dirty="0" smtClean="0">
+              <a:rPr lang="en-US" sz="1400" spc="-165" dirty="0">
                 <a:solidFill>
                   <a:schemeClr val="bg1"/>
                 </a:solidFill>
                 <a:latin typeface="Arial Black"/>
                 <a:cs typeface="Arial Black"/>
               </a:rPr>
-              <a:t>Summary - </a:t>
-            </a:r>
-            <a:r>
-              <a:rPr lang="en-US" sz="1400" spc="-165" dirty="0">
-                <a:solidFill>
-                  <a:schemeClr val="bg1"/>
-                </a:solidFill>
-                <a:latin typeface="Arial Black"/>
-                <a:cs typeface="Arial Black"/>
-              </a:rPr>
-              <a:t>Why </a:t>
-            </a:r>
-            <a:r>
-              <a:rPr lang="en-US" sz="1400" spc="-165" dirty="0" smtClean="0">
-                <a:solidFill>
-                  <a:schemeClr val="bg1"/>
-                </a:solidFill>
-                <a:latin typeface="Arial Black"/>
-                <a:cs typeface="Arial Black"/>
-              </a:rPr>
-              <a:t> RAG</a:t>
+              <a:t>Summary - Why  RAG</a:t>
             </a:r>
             <a:endParaRPr sz="1400" spc="-165" dirty="0">
               <a:solidFill>
@@ -49407,7 +48693,7 @@
             </a:pPr>
             <a:fld id="{81D60167-4931-47E6-BA6A-407CBD079E47}" type="slidenum">
               <a:rPr dirty="0"/>
-              <a:t>44</a:t>
+              <a:t>45</a:t>
             </a:fld>
             <a:r>
               <a:rPr spc="10" dirty="0"/>
@@ -49463,17 +48749,10 @@
   <p:transition spd="slow">
     <p:push dir="u"/>
   </p:transition>
-  <p:timing>
-    <p:tnLst>
-      <p:par>
-        <p:cTn id="1" dur="indefinite" restart="never" nodeType="tmRoot"/>
-      </p:par>
-    </p:tnLst>
-  </p:timing>
 </p:sld>
 </file>
 
-<file path=ppt/slides/slide45.xml><?xml version="1.0" encoding="utf-8"?>
+<file path=ppt/slides/slide46.xml><?xml version="1.0" encoding="utf-8"?>
 <p:sld xmlns:a="http://schemas.openxmlformats.org/drawingml/2006/main" xmlns:r="http://schemas.openxmlformats.org/officeDocument/2006/relationships" xmlns:p="http://schemas.openxmlformats.org/presentationml/2006/main" showMasterSp="0">
   <p:cSld>
     <p:spTree>
@@ -50420,7 +49699,7 @@
             </a:pPr>
             <a:fld id="{81D60167-4931-47E6-BA6A-407CBD079E47}" type="slidenum">
               <a:rPr dirty="0"/>
-              <a:t>45</a:t>
+              <a:t>46</a:t>
             </a:fld>
             <a:r>
               <a:rPr spc="10" dirty="0"/>
@@ -50449,17 +49728,10 @@
   <p:transition>
     <p:cut/>
   </p:transition>
-  <p:timing>
-    <p:tnLst>
-      <p:par>
-        <p:cTn id="1" dur="indefinite" restart="never" nodeType="tmRoot"/>
-      </p:par>
-    </p:tnLst>
-  </p:timing>
 </p:sld>
 </file>
 
-<file path=ppt/slides/slide46.xml><?xml version="1.0" encoding="utf-8"?>
+<file path=ppt/slides/slide47.xml><?xml version="1.0" encoding="utf-8"?>
 <p:sld xmlns:a="http://schemas.openxmlformats.org/drawingml/2006/main" xmlns:r="http://schemas.openxmlformats.org/officeDocument/2006/relationships" xmlns:p="http://schemas.openxmlformats.org/presentationml/2006/main">
   <p:cSld>
     <p:spTree>
@@ -51059,7 +50331,7 @@
             </a:pPr>
             <a:fld id="{81D60167-4931-47E6-BA6A-407CBD079E47}" type="slidenum">
               <a:rPr dirty="0"/>
-              <a:t>46</a:t>
+              <a:t>47</a:t>
             </a:fld>
             <a:r>
               <a:rPr spc="10" dirty="0"/>
@@ -51088,17 +50360,10 @@
   <p:transition>
     <p:cut/>
   </p:transition>
-  <p:timing>
-    <p:tnLst>
-      <p:par>
-        <p:cTn id="1" dur="indefinite" restart="never" nodeType="tmRoot"/>
-      </p:par>
-    </p:tnLst>
-  </p:timing>
 </p:sld>
 </file>
 
-<file path=ppt/slides/slide47.xml><?xml version="1.0" encoding="utf-8"?>
+<file path=ppt/slides/slide48.xml><?xml version="1.0" encoding="utf-8"?>
 <p:sld xmlns:a="http://schemas.openxmlformats.org/drawingml/2006/main" xmlns:r="http://schemas.openxmlformats.org/officeDocument/2006/relationships" xmlns:p="http://schemas.openxmlformats.org/presentationml/2006/main">
   <p:cSld>
     <p:spTree>
@@ -51678,7 +50943,7 @@
             </a:pPr>
             <a:fld id="{81D60167-4931-47E6-BA6A-407CBD079E47}" type="slidenum">
               <a:rPr dirty="0"/>
-              <a:t>47</a:t>
+              <a:t>48</a:t>
             </a:fld>
             <a:r>
               <a:rPr spc="10" dirty="0"/>
@@ -51707,17 +50972,10 @@
   <p:transition>
     <p:cut/>
   </p:transition>
-  <p:timing>
-    <p:tnLst>
-      <p:par>
-        <p:cTn id="1" dur="indefinite" restart="never" nodeType="tmRoot"/>
-      </p:par>
-    </p:tnLst>
-  </p:timing>
 </p:sld>
 </file>
 
-<file path=ppt/slides/slide48.xml><?xml version="1.0" encoding="utf-8"?>
+<file path=ppt/slides/slide49.xml><?xml version="1.0" encoding="utf-8"?>
 <p:sld xmlns:a="http://schemas.openxmlformats.org/drawingml/2006/main" xmlns:r="http://schemas.openxmlformats.org/officeDocument/2006/relationships" xmlns:p="http://schemas.openxmlformats.org/presentationml/2006/main">
   <p:cSld>
     <p:spTree>
@@ -52259,727 +51517,6 @@
       <p:sp>
         <p:nvSpPr>
           <p:cNvPr id="10" name="object 10"/>
-          <p:cNvSpPr txBox="1">
-            <a:spLocks noGrp="1"/>
-          </p:cNvSpPr>
-          <p:nvPr>
-            <p:ph type="sldNum" sz="quarter" idx="7"/>
-          </p:nvPr>
-        </p:nvSpPr>
-        <p:spPr>
-          <a:prstGeom prst="rect">
-            <a:avLst/>
-          </a:prstGeom>
-        </p:spPr>
-        <p:txBody>
-          <a:bodyPr vert="horz" wrap="square" lIns="0" tIns="24130" rIns="0" bIns="0" rtlCol="0">
-            <a:spAutoFit/>
-          </a:bodyPr>
-          <a:lstStyle/>
-          <a:p>
-            <a:pPr marL="12700">
-              <a:lnSpc>
-                <a:spcPct val="100000"/>
-              </a:lnSpc>
-              <a:spcBef>
-                <a:spcPts val="190"/>
-              </a:spcBef>
-            </a:pPr>
-            <a:fld id="{81D60167-4931-47E6-BA6A-407CBD079E47}" type="slidenum">
-              <a:rPr dirty="0"/>
-              <a:t>48</a:t>
-            </a:fld>
-            <a:r>
-              <a:rPr spc="10" dirty="0"/>
-              <a:t> </a:t>
-            </a:r>
-            <a:r>
-              <a:rPr spc="90" dirty="0"/>
-              <a:t>/</a:t>
-            </a:r>
-            <a:r>
-              <a:rPr spc="10" dirty="0"/>
-              <a:t> </a:t>
-            </a:r>
-            <a:r>
-              <a:rPr spc="-25" dirty="0"/>
-              <a:t>47</a:t>
-            </a:r>
-          </a:p>
-        </p:txBody>
-      </p:sp>
-    </p:spTree>
-  </p:cSld>
-  <p:clrMapOvr>
-    <a:masterClrMapping/>
-  </p:clrMapOvr>
-  <p:transition>
-    <p:cut/>
-  </p:transition>
-</p:sld>
-</file>
-
-<file path=ppt/slides/slide49.xml><?xml version="1.0" encoding="utf-8"?>
-<p:sld xmlns:a="http://schemas.openxmlformats.org/drawingml/2006/main" xmlns:r="http://schemas.openxmlformats.org/officeDocument/2006/relationships" xmlns:p="http://schemas.openxmlformats.org/presentationml/2006/main">
-  <p:cSld>
-    <p:spTree>
-      <p:nvGrpSpPr>
-        <p:cNvPr id="1" name=""/>
-        <p:cNvGrpSpPr/>
-        <p:nvPr/>
-      </p:nvGrpSpPr>
-      <p:grpSpPr>
-        <a:xfrm>
-          <a:off x="0" y="0"/>
-          <a:ext cx="0" cy="0"/>
-          <a:chOff x="0" y="0"/>
-          <a:chExt cx="0" cy="0"/>
-        </a:xfrm>
-      </p:grpSpPr>
-      <p:sp>
-        <p:nvSpPr>
-          <p:cNvPr id="2" name="object 2" descr="$PPTXTitle"/>
-          <p:cNvSpPr txBox="1">
-            <a:spLocks noGrp="1"/>
-          </p:cNvSpPr>
-          <p:nvPr>
-            <p:ph type="title"/>
-          </p:nvPr>
-        </p:nvSpPr>
-        <p:spPr>
-          <a:prstGeom prst="rect">
-            <a:avLst/>
-          </a:prstGeom>
-        </p:spPr>
-        <p:txBody>
-          <a:bodyPr vert="horz" wrap="square" lIns="0" tIns="17145" rIns="0" bIns="0" rtlCol="0">
-            <a:spAutoFit/>
-          </a:bodyPr>
-          <a:lstStyle/>
-          <a:p>
-            <a:pPr marL="12700">
-              <a:lnSpc>
-                <a:spcPct val="100000"/>
-              </a:lnSpc>
-              <a:spcBef>
-                <a:spcPts val="135"/>
-              </a:spcBef>
-            </a:pPr>
-            <a:r>
-              <a:rPr spc="-10" dirty="0"/>
-              <a:t>KPI</a:t>
-            </a:r>
-            <a:r>
-              <a:rPr spc="30" dirty="0"/>
-              <a:t> </a:t>
-            </a:r>
-            <a:r>
-              <a:rPr spc="-130" dirty="0"/>
-              <a:t>Degradation</a:t>
-            </a:r>
-            <a:r>
-              <a:rPr spc="35" dirty="0"/>
-              <a:t> </a:t>
-            </a:r>
-            <a:r>
-              <a:rPr spc="165" dirty="0"/>
-              <a:t>—</a:t>
-            </a:r>
-            <a:r>
-              <a:rPr spc="35" dirty="0"/>
-              <a:t> </a:t>
-            </a:r>
-            <a:r>
-              <a:rPr spc="-145" dirty="0"/>
-              <a:t>Experimental</a:t>
-            </a:r>
-            <a:r>
-              <a:rPr spc="35" dirty="0"/>
-              <a:t> </a:t>
-            </a:r>
-            <a:r>
-              <a:rPr spc="-114" dirty="0"/>
-              <a:t>Results</a:t>
-            </a:r>
-          </a:p>
-        </p:txBody>
-      </p:sp>
-      <p:sp>
-        <p:nvSpPr>
-          <p:cNvPr id="3" name="object 3"/>
-          <p:cNvSpPr txBox="1"/>
-          <p:nvPr/>
-        </p:nvSpPr>
-        <p:spPr>
-          <a:xfrm>
-            <a:off x="2040534" y="1473960"/>
-            <a:ext cx="1678939" cy="438784"/>
-          </a:xfrm>
-          <a:prstGeom prst="rect">
-            <a:avLst/>
-          </a:prstGeom>
-        </p:spPr>
-        <p:txBody>
-          <a:bodyPr vert="horz" wrap="square" lIns="0" tIns="11430" rIns="0" bIns="0" rtlCol="0">
-            <a:spAutoFit/>
-          </a:bodyPr>
-          <a:lstStyle/>
-          <a:p>
-            <a:pPr algn="ctr">
-              <a:lnSpc>
-                <a:spcPct val="100000"/>
-              </a:lnSpc>
-              <a:spcBef>
-                <a:spcPts val="90"/>
-              </a:spcBef>
-            </a:pPr>
-            <a:r>
-              <a:rPr sz="1100" i="1" dirty="0">
-                <a:solidFill>
-                  <a:srgbClr val="13132C"/>
-                </a:solidFill>
-                <a:latin typeface="Calibri"/>
-                <a:cs typeface="Calibri"/>
-              </a:rPr>
-              <a:t>Screenshot</a:t>
-            </a:r>
-            <a:r>
-              <a:rPr sz="1100" i="1" spc="120" dirty="0">
-                <a:solidFill>
-                  <a:srgbClr val="13132C"/>
-                </a:solidFill>
-                <a:latin typeface="Calibri"/>
-                <a:cs typeface="Calibri"/>
-              </a:rPr>
-              <a:t> </a:t>
-            </a:r>
-            <a:r>
-              <a:rPr sz="1100" i="1" dirty="0">
-                <a:solidFill>
-                  <a:srgbClr val="13132C"/>
-                </a:solidFill>
-                <a:latin typeface="Calibri"/>
-                <a:cs typeface="Calibri"/>
-              </a:rPr>
-              <a:t>not</a:t>
-            </a:r>
-            <a:r>
-              <a:rPr sz="1100" i="1" spc="120" dirty="0">
-                <a:solidFill>
-                  <a:srgbClr val="13132C"/>
-                </a:solidFill>
-                <a:latin typeface="Calibri"/>
-                <a:cs typeface="Calibri"/>
-              </a:rPr>
-              <a:t> </a:t>
-            </a:r>
-            <a:r>
-              <a:rPr sz="1100" i="1" dirty="0">
-                <a:solidFill>
-                  <a:srgbClr val="13132C"/>
-                </a:solidFill>
-                <a:latin typeface="Calibri"/>
-                <a:cs typeface="Calibri"/>
-              </a:rPr>
-              <a:t>yet</a:t>
-            </a:r>
-            <a:r>
-              <a:rPr sz="1100" i="1" spc="120" dirty="0">
-                <a:solidFill>
-                  <a:srgbClr val="13132C"/>
-                </a:solidFill>
-                <a:latin typeface="Calibri"/>
-                <a:cs typeface="Calibri"/>
-              </a:rPr>
-              <a:t> </a:t>
-            </a:r>
-            <a:r>
-              <a:rPr sz="1100" i="1" spc="-10" dirty="0">
-                <a:solidFill>
-                  <a:srgbClr val="13132C"/>
-                </a:solidFill>
-                <a:latin typeface="Calibri"/>
-                <a:cs typeface="Calibri"/>
-              </a:rPr>
-              <a:t>added</a:t>
-            </a:r>
-            <a:endParaRPr sz="1100">
-              <a:latin typeface="Calibri"/>
-              <a:cs typeface="Calibri"/>
-            </a:endParaRPr>
-          </a:p>
-          <a:p>
-            <a:pPr algn="ctr">
-              <a:lnSpc>
-                <a:spcPct val="100000"/>
-              </a:lnSpc>
-              <a:spcBef>
-                <a:spcPts val="1220"/>
-              </a:spcBef>
-            </a:pPr>
-            <a:r>
-              <a:rPr sz="600" spc="-10" dirty="0">
-                <a:solidFill>
-                  <a:srgbClr val="13132C"/>
-                </a:solidFill>
-                <a:latin typeface="Palatino Linotype"/>
-                <a:cs typeface="Palatino Linotype"/>
-              </a:rPr>
-              <a:t>screenshots/mohab/results_degradation.png</a:t>
-            </a:r>
-            <a:endParaRPr sz="600">
-              <a:latin typeface="Palatino Linotype"/>
-              <a:cs typeface="Palatino Linotype"/>
-            </a:endParaRPr>
-          </a:p>
-        </p:txBody>
-      </p:sp>
-      <p:grpSp>
-        <p:nvGrpSpPr>
-          <p:cNvPr id="4" name="object 4"/>
-          <p:cNvGrpSpPr/>
-          <p:nvPr/>
-        </p:nvGrpSpPr>
-        <p:grpSpPr>
-          <a:xfrm>
-            <a:off x="378764" y="473087"/>
-            <a:ext cx="5002530" cy="2484755"/>
-            <a:chOff x="378764" y="473087"/>
-            <a:chExt cx="5002530" cy="2484755"/>
-          </a:xfrm>
-        </p:grpSpPr>
-        <p:sp>
-          <p:nvSpPr>
-            <p:cNvPr id="5" name="object 5"/>
-            <p:cNvSpPr/>
-            <p:nvPr/>
-          </p:nvSpPr>
-          <p:spPr>
-            <a:xfrm>
-              <a:off x="378764" y="475614"/>
-              <a:ext cx="5002530" cy="0"/>
-            </a:xfrm>
-            <a:custGeom>
-              <a:avLst/>
-              <a:gdLst/>
-              <a:ahLst/>
-              <a:cxnLst/>
-              <a:rect l="l" t="t" r="r" b="b"/>
-              <a:pathLst>
-                <a:path w="5002530">
-                  <a:moveTo>
-                    <a:pt x="0" y="0"/>
-                  </a:moveTo>
-                  <a:lnTo>
-                    <a:pt x="5002466" y="0"/>
-                  </a:lnTo>
-                </a:path>
-              </a:pathLst>
-            </a:custGeom>
-            <a:ln w="5054">
-              <a:solidFill>
-                <a:srgbClr val="000000"/>
-              </a:solidFill>
-            </a:ln>
-          </p:spPr>
-          <p:txBody>
-            <a:bodyPr wrap="square" lIns="0" tIns="0" rIns="0" bIns="0" rtlCol="0"/>
-            <a:lstStyle/>
-            <a:p>
-              <a:endParaRPr/>
-            </a:p>
-          </p:txBody>
-        </p:sp>
-        <p:sp>
-          <p:nvSpPr>
-            <p:cNvPr id="6" name="object 6"/>
-            <p:cNvSpPr/>
-            <p:nvPr/>
-          </p:nvSpPr>
-          <p:spPr>
-            <a:xfrm>
-              <a:off x="381292" y="475614"/>
-              <a:ext cx="0" cy="2479675"/>
-            </a:xfrm>
-            <a:custGeom>
-              <a:avLst/>
-              <a:gdLst/>
-              <a:ahLst/>
-              <a:cxnLst/>
-              <a:rect l="l" t="t" r="r" b="b"/>
-              <a:pathLst>
-                <a:path h="2479675">
-                  <a:moveTo>
-                    <a:pt x="0" y="2479217"/>
-                  </a:moveTo>
-                  <a:lnTo>
-                    <a:pt x="0" y="0"/>
-                  </a:lnTo>
-                </a:path>
-              </a:pathLst>
-            </a:custGeom>
-            <a:ln w="5054">
-              <a:solidFill>
-                <a:srgbClr val="000000"/>
-              </a:solidFill>
-            </a:ln>
-          </p:spPr>
-          <p:txBody>
-            <a:bodyPr wrap="square" lIns="0" tIns="0" rIns="0" bIns="0" rtlCol="0"/>
-            <a:lstStyle/>
-            <a:p>
-              <a:endParaRPr/>
-            </a:p>
-          </p:txBody>
-        </p:sp>
-        <p:sp>
-          <p:nvSpPr>
-            <p:cNvPr id="7" name="object 7"/>
-            <p:cNvSpPr/>
-            <p:nvPr/>
-          </p:nvSpPr>
-          <p:spPr>
-            <a:xfrm>
-              <a:off x="5378704" y="475614"/>
-              <a:ext cx="0" cy="2479675"/>
-            </a:xfrm>
-            <a:custGeom>
-              <a:avLst/>
-              <a:gdLst/>
-              <a:ahLst/>
-              <a:cxnLst/>
-              <a:rect l="l" t="t" r="r" b="b"/>
-              <a:pathLst>
-                <a:path h="2479675">
-                  <a:moveTo>
-                    <a:pt x="0" y="2479217"/>
-                  </a:moveTo>
-                  <a:lnTo>
-                    <a:pt x="0" y="0"/>
-                  </a:lnTo>
-                </a:path>
-              </a:pathLst>
-            </a:custGeom>
-            <a:ln w="5054">
-              <a:solidFill>
-                <a:srgbClr val="000000"/>
-              </a:solidFill>
-            </a:ln>
-          </p:spPr>
-          <p:txBody>
-            <a:bodyPr wrap="square" lIns="0" tIns="0" rIns="0" bIns="0" rtlCol="0"/>
-            <a:lstStyle/>
-            <a:p>
-              <a:endParaRPr/>
-            </a:p>
-          </p:txBody>
-        </p:sp>
-        <p:sp>
-          <p:nvSpPr>
-            <p:cNvPr id="8" name="object 8"/>
-            <p:cNvSpPr/>
-            <p:nvPr/>
-          </p:nvSpPr>
-          <p:spPr>
-            <a:xfrm>
-              <a:off x="378764" y="2954832"/>
-              <a:ext cx="5002530" cy="0"/>
-            </a:xfrm>
-            <a:custGeom>
-              <a:avLst/>
-              <a:gdLst/>
-              <a:ahLst/>
-              <a:cxnLst/>
-              <a:rect l="l" t="t" r="r" b="b"/>
-              <a:pathLst>
-                <a:path w="5002530">
-                  <a:moveTo>
-                    <a:pt x="0" y="0"/>
-                  </a:moveTo>
-                  <a:lnTo>
-                    <a:pt x="5002466" y="0"/>
-                  </a:lnTo>
-                </a:path>
-              </a:pathLst>
-            </a:custGeom>
-            <a:ln w="5054">
-              <a:solidFill>
-                <a:srgbClr val="000000"/>
-              </a:solidFill>
-            </a:ln>
-          </p:spPr>
-          <p:txBody>
-            <a:bodyPr wrap="square" lIns="0" tIns="0" rIns="0" bIns="0" rtlCol="0"/>
-            <a:lstStyle/>
-            <a:p>
-              <a:endParaRPr/>
-            </a:p>
-          </p:txBody>
-        </p:sp>
-      </p:grpSp>
-      <p:grpSp>
-        <p:nvGrpSpPr>
-          <p:cNvPr id="9" name="object 9"/>
-          <p:cNvGrpSpPr/>
-          <p:nvPr/>
-        </p:nvGrpSpPr>
-        <p:grpSpPr>
-          <a:xfrm>
-            <a:off x="0" y="3125279"/>
-            <a:ext cx="5760085" cy="114935"/>
-            <a:chOff x="0" y="3125279"/>
-            <a:chExt cx="5760085" cy="114935"/>
-          </a:xfrm>
-        </p:grpSpPr>
-        <p:sp>
-          <p:nvSpPr>
-            <p:cNvPr id="10" name="object 10"/>
-            <p:cNvSpPr/>
-            <p:nvPr/>
-          </p:nvSpPr>
-          <p:spPr>
-            <a:xfrm>
-              <a:off x="0" y="3125279"/>
-              <a:ext cx="2016125" cy="114935"/>
-            </a:xfrm>
-            <a:custGeom>
-              <a:avLst/>
-              <a:gdLst/>
-              <a:ahLst/>
-              <a:cxnLst/>
-              <a:rect l="l" t="t" r="r" b="b"/>
-              <a:pathLst>
-                <a:path w="2016125" h="114935">
-                  <a:moveTo>
-                    <a:pt x="2016036" y="0"/>
-                  </a:moveTo>
-                  <a:lnTo>
-                    <a:pt x="0" y="0"/>
-                  </a:lnTo>
-                  <a:lnTo>
-                    <a:pt x="0" y="114719"/>
-                  </a:lnTo>
-                  <a:lnTo>
-                    <a:pt x="2016036" y="114719"/>
-                  </a:lnTo>
-                  <a:lnTo>
-                    <a:pt x="2016036" y="0"/>
-                  </a:lnTo>
-                  <a:close/>
-                </a:path>
-              </a:pathLst>
-            </a:custGeom>
-            <a:solidFill>
-              <a:srgbClr val="B41313"/>
-            </a:solidFill>
-          </p:spPr>
-          <p:txBody>
-            <a:bodyPr wrap="square" lIns="0" tIns="0" rIns="0" bIns="0" rtlCol="0"/>
-            <a:lstStyle/>
-            <a:p>
-              <a:endParaRPr/>
-            </a:p>
-          </p:txBody>
-        </p:sp>
-        <p:sp>
-          <p:nvSpPr>
-            <p:cNvPr id="11" name="object 11"/>
-            <p:cNvSpPr/>
-            <p:nvPr/>
-          </p:nvSpPr>
-          <p:spPr>
-            <a:xfrm>
-              <a:off x="2016036" y="3125279"/>
-              <a:ext cx="2592070" cy="114935"/>
-            </a:xfrm>
-            <a:custGeom>
-              <a:avLst/>
-              <a:gdLst/>
-              <a:ahLst/>
-              <a:cxnLst/>
-              <a:rect l="l" t="t" r="r" b="b"/>
-              <a:pathLst>
-                <a:path w="2592070" h="114935">
-                  <a:moveTo>
-                    <a:pt x="2591981" y="0"/>
-                  </a:moveTo>
-                  <a:lnTo>
-                    <a:pt x="0" y="0"/>
-                  </a:lnTo>
-                  <a:lnTo>
-                    <a:pt x="0" y="114719"/>
-                  </a:lnTo>
-                  <a:lnTo>
-                    <a:pt x="2591981" y="114719"/>
-                  </a:lnTo>
-                  <a:lnTo>
-                    <a:pt x="2591981" y="0"/>
-                  </a:lnTo>
-                  <a:close/>
-                </a:path>
-              </a:pathLst>
-            </a:custGeom>
-            <a:solidFill>
-              <a:srgbClr val="37374C"/>
-            </a:solidFill>
-          </p:spPr>
-          <p:txBody>
-            <a:bodyPr wrap="square" lIns="0" tIns="0" rIns="0" bIns="0" rtlCol="0"/>
-            <a:lstStyle/>
-            <a:p>
-              <a:endParaRPr/>
-            </a:p>
-          </p:txBody>
-        </p:sp>
-        <p:sp>
-          <p:nvSpPr>
-            <p:cNvPr id="12" name="object 12"/>
-            <p:cNvSpPr/>
-            <p:nvPr/>
-          </p:nvSpPr>
-          <p:spPr>
-            <a:xfrm>
-              <a:off x="4608017" y="3125279"/>
-              <a:ext cx="1152525" cy="114935"/>
-            </a:xfrm>
-            <a:custGeom>
-              <a:avLst/>
-              <a:gdLst/>
-              <a:ahLst/>
-              <a:cxnLst/>
-              <a:rect l="l" t="t" r="r" b="b"/>
-              <a:pathLst>
-                <a:path w="1152525" h="114935">
-                  <a:moveTo>
-                    <a:pt x="1151978" y="0"/>
-                  </a:moveTo>
-                  <a:lnTo>
-                    <a:pt x="0" y="0"/>
-                  </a:lnTo>
-                  <a:lnTo>
-                    <a:pt x="0" y="114719"/>
-                  </a:lnTo>
-                  <a:lnTo>
-                    <a:pt x="1151978" y="114719"/>
-                  </a:lnTo>
-                  <a:lnTo>
-                    <a:pt x="1151978" y="0"/>
-                  </a:lnTo>
-                  <a:close/>
-                </a:path>
-              </a:pathLst>
-            </a:custGeom>
-            <a:solidFill>
-              <a:srgbClr val="13132C"/>
-            </a:solidFill>
-          </p:spPr>
-          <p:txBody>
-            <a:bodyPr wrap="square" lIns="0" tIns="0" rIns="0" bIns="0" rtlCol="0"/>
-            <a:lstStyle/>
-            <a:p>
-              <a:endParaRPr/>
-            </a:p>
-          </p:txBody>
-        </p:sp>
-      </p:grpSp>
-      <p:sp>
-        <p:nvSpPr>
-          <p:cNvPr id="13" name="object 13"/>
-          <p:cNvSpPr txBox="1">
-            <a:spLocks noGrp="1"/>
-          </p:cNvSpPr>
-          <p:nvPr>
-            <p:ph type="ftr" sz="quarter" idx="5"/>
-          </p:nvPr>
-        </p:nvSpPr>
-        <p:spPr>
-          <a:prstGeom prst="rect">
-            <a:avLst/>
-          </a:prstGeom>
-        </p:spPr>
-        <p:txBody>
-          <a:bodyPr vert="horz" wrap="square" lIns="0" tIns="24130" rIns="0" bIns="0" rtlCol="0">
-            <a:spAutoFit/>
-          </a:bodyPr>
-          <a:lstStyle/>
-          <a:p>
-            <a:pPr marL="12700">
-              <a:lnSpc>
-                <a:spcPct val="100000"/>
-              </a:lnSpc>
-              <a:spcBef>
-                <a:spcPts val="190"/>
-              </a:spcBef>
-            </a:pPr>
-            <a:r>
-              <a:rPr dirty="0"/>
-              <a:t>ITI </a:t>
-            </a:r>
-            <a:r>
-              <a:rPr spc="-10" dirty="0"/>
-              <a:t>Intake</a:t>
-            </a:r>
-            <a:r>
-              <a:rPr spc="5" dirty="0"/>
-              <a:t> </a:t>
-            </a:r>
-            <a:r>
-              <a:rPr spc="-25" dirty="0"/>
-              <a:t>46</a:t>
-            </a:r>
-          </a:p>
-        </p:txBody>
-      </p:sp>
-      <p:sp>
-        <p:nvSpPr>
-          <p:cNvPr id="14" name="object 14"/>
-          <p:cNvSpPr txBox="1"/>
-          <p:nvPr/>
-        </p:nvSpPr>
-        <p:spPr>
-          <a:xfrm>
-            <a:off x="3100044" y="3105948"/>
-            <a:ext cx="424180" cy="137160"/>
-          </a:xfrm>
-          <a:prstGeom prst="rect">
-            <a:avLst/>
-          </a:prstGeom>
-        </p:spPr>
-        <p:txBody>
-          <a:bodyPr vert="horz" wrap="square" lIns="0" tIns="24130" rIns="0" bIns="0" rtlCol="0">
-            <a:spAutoFit/>
-          </a:bodyPr>
-          <a:lstStyle/>
-          <a:p>
-            <a:pPr marL="12700">
-              <a:lnSpc>
-                <a:spcPct val="100000"/>
-              </a:lnSpc>
-              <a:spcBef>
-                <a:spcPts val="190"/>
-              </a:spcBef>
-            </a:pPr>
-            <a:r>
-              <a:rPr sz="600" spc="-10" dirty="0">
-                <a:solidFill>
-                  <a:srgbClr val="FFFFFF"/>
-                </a:solidFill>
-                <a:latin typeface="Tahoma"/>
-                <a:cs typeface="Tahoma"/>
-                <a:hlinkClick r:id="rId2" action="ppaction://hlinksldjump"/>
-              </a:rPr>
-              <a:t>RANPilotAI</a:t>
-            </a:r>
-            <a:endParaRPr sz="600" dirty="0">
-              <a:latin typeface="Tahoma"/>
-              <a:cs typeface="Tahoma"/>
-            </a:endParaRPr>
-          </a:p>
-        </p:txBody>
-      </p:sp>
-      <p:sp>
-        <p:nvSpPr>
-          <p:cNvPr id="15" name="object 15"/>
           <p:cNvSpPr txBox="1">
             <a:spLocks noGrp="1"/>
           </p:cNvSpPr>
@@ -53629,13 +52166,6 @@
   <p:transition>
     <p:cut/>
   </p:transition>
-  <p:timing>
-    <p:tnLst>
-      <p:par>
-        <p:cTn id="1" dur="indefinite" restart="never" nodeType="tmRoot"/>
-      </p:par>
-    </p:tnLst>
-  </p:timing>
 </p:sld>
 </file>
 
@@ -53667,10 +52197,6 @@
           </p:nvPr>
         </p:nvSpPr>
         <p:spPr>
-          <a:xfrm>
-            <a:off x="95300" y="57337"/>
-            <a:ext cx="3060700" cy="244475"/>
-          </a:xfrm>
           <a:prstGeom prst="rect">
             <a:avLst/>
           </a:prstGeom>
@@ -53690,11 +52216,19 @@
               </a:spcBef>
             </a:pPr>
             <a:r>
-              <a:rPr spc="-165" dirty="0"/>
-              <a:t>Forecasting</a:t>
-            </a:r>
-            <a:r>
-              <a:rPr spc="85" dirty="0"/>
+              <a:rPr spc="-10" dirty="0"/>
+              <a:t>KPI</a:t>
+            </a:r>
+            <a:r>
+              <a:rPr spc="30" dirty="0"/>
+              <a:t> </a:t>
+            </a:r>
+            <a:r>
+              <a:rPr spc="-130" dirty="0"/>
+              <a:t>Degradation</a:t>
+            </a:r>
+            <a:r>
+              <a:rPr spc="35" dirty="0"/>
               <a:t> </a:t>
             </a:r>
             <a:r>
@@ -53702,7 +52236,7 @@
               <a:t>—</a:t>
             </a:r>
             <a:r>
-              <a:rPr spc="85" dirty="0"/>
+              <a:rPr spc="35" dirty="0"/>
               <a:t> </a:t>
             </a:r>
             <a:r>
@@ -53710,11 +52244,11 @@
               <a:t>Experimental</a:t>
             </a:r>
             <a:r>
-              <a:rPr spc="90" dirty="0"/>
-              <a:t> </a:t>
-            </a:r>
-            <a:r>
-              <a:rPr spc="-120" dirty="0"/>
+              <a:rPr spc="35" dirty="0"/>
+              <a:t> </a:t>
+            </a:r>
+            <a:r>
+              <a:rPr spc="-114" dirty="0"/>
               <a:t>Results</a:t>
             </a:r>
           </a:p>
@@ -53841,7 +52375,7 @@
                 <a:latin typeface="Palatino Linotype"/>
                 <a:cs typeface="Palatino Linotype"/>
               </a:rPr>
-              <a:t>screenshots/mohab/results_forecasting.png</a:t>
+              <a:t>screenshots/mohab/results_degradation.png</a:t>
             </a:r>
             <a:endParaRPr sz="600">
               <a:latin typeface="Palatino Linotype"/>
@@ -54357,6 +52891,723 @@
 </file>
 
 <file path=ppt/slides/slide51.xml><?xml version="1.0" encoding="utf-8"?>
+<p:sld xmlns:a="http://schemas.openxmlformats.org/drawingml/2006/main" xmlns:r="http://schemas.openxmlformats.org/officeDocument/2006/relationships" xmlns:p="http://schemas.openxmlformats.org/presentationml/2006/main">
+  <p:cSld>
+    <p:spTree>
+      <p:nvGrpSpPr>
+        <p:cNvPr id="1" name=""/>
+        <p:cNvGrpSpPr/>
+        <p:nvPr/>
+      </p:nvGrpSpPr>
+      <p:grpSpPr>
+        <a:xfrm>
+          <a:off x="0" y="0"/>
+          <a:ext cx="0" cy="0"/>
+          <a:chOff x="0" y="0"/>
+          <a:chExt cx="0" cy="0"/>
+        </a:xfrm>
+      </p:grpSpPr>
+      <p:sp>
+        <p:nvSpPr>
+          <p:cNvPr id="2" name="object 2" descr="$PPTXTitle"/>
+          <p:cNvSpPr txBox="1">
+            <a:spLocks noGrp="1"/>
+          </p:cNvSpPr>
+          <p:nvPr>
+            <p:ph type="title"/>
+          </p:nvPr>
+        </p:nvSpPr>
+        <p:spPr>
+          <a:xfrm>
+            <a:off x="95300" y="57337"/>
+            <a:ext cx="3060700" cy="244475"/>
+          </a:xfrm>
+          <a:prstGeom prst="rect">
+            <a:avLst/>
+          </a:prstGeom>
+        </p:spPr>
+        <p:txBody>
+          <a:bodyPr vert="horz" wrap="square" lIns="0" tIns="17145" rIns="0" bIns="0" rtlCol="0">
+            <a:spAutoFit/>
+          </a:bodyPr>
+          <a:lstStyle/>
+          <a:p>
+            <a:pPr marL="12700">
+              <a:lnSpc>
+                <a:spcPct val="100000"/>
+              </a:lnSpc>
+              <a:spcBef>
+                <a:spcPts val="135"/>
+              </a:spcBef>
+            </a:pPr>
+            <a:r>
+              <a:rPr spc="-165" dirty="0"/>
+              <a:t>Forecasting</a:t>
+            </a:r>
+            <a:r>
+              <a:rPr spc="85" dirty="0"/>
+              <a:t> </a:t>
+            </a:r>
+            <a:r>
+              <a:rPr spc="165" dirty="0"/>
+              <a:t>—</a:t>
+            </a:r>
+            <a:r>
+              <a:rPr spc="85" dirty="0"/>
+              <a:t> </a:t>
+            </a:r>
+            <a:r>
+              <a:rPr spc="-145" dirty="0"/>
+              <a:t>Experimental</a:t>
+            </a:r>
+            <a:r>
+              <a:rPr spc="90" dirty="0"/>
+              <a:t> </a:t>
+            </a:r>
+            <a:r>
+              <a:rPr spc="-120" dirty="0"/>
+              <a:t>Results</a:t>
+            </a:r>
+          </a:p>
+        </p:txBody>
+      </p:sp>
+      <p:sp>
+        <p:nvSpPr>
+          <p:cNvPr id="3" name="object 3"/>
+          <p:cNvSpPr txBox="1"/>
+          <p:nvPr/>
+        </p:nvSpPr>
+        <p:spPr>
+          <a:xfrm>
+            <a:off x="2040534" y="1473960"/>
+            <a:ext cx="1678939" cy="438784"/>
+          </a:xfrm>
+          <a:prstGeom prst="rect">
+            <a:avLst/>
+          </a:prstGeom>
+        </p:spPr>
+        <p:txBody>
+          <a:bodyPr vert="horz" wrap="square" lIns="0" tIns="11430" rIns="0" bIns="0" rtlCol="0">
+            <a:spAutoFit/>
+          </a:bodyPr>
+          <a:lstStyle/>
+          <a:p>
+            <a:pPr algn="ctr">
+              <a:lnSpc>
+                <a:spcPct val="100000"/>
+              </a:lnSpc>
+              <a:spcBef>
+                <a:spcPts val="90"/>
+              </a:spcBef>
+            </a:pPr>
+            <a:r>
+              <a:rPr sz="1100" i="1" dirty="0">
+                <a:solidFill>
+                  <a:srgbClr val="13132C"/>
+                </a:solidFill>
+                <a:latin typeface="Calibri"/>
+                <a:cs typeface="Calibri"/>
+              </a:rPr>
+              <a:t>Screenshot</a:t>
+            </a:r>
+            <a:r>
+              <a:rPr sz="1100" i="1" spc="120" dirty="0">
+                <a:solidFill>
+                  <a:srgbClr val="13132C"/>
+                </a:solidFill>
+                <a:latin typeface="Calibri"/>
+                <a:cs typeface="Calibri"/>
+              </a:rPr>
+              <a:t> </a:t>
+            </a:r>
+            <a:r>
+              <a:rPr sz="1100" i="1" dirty="0">
+                <a:solidFill>
+                  <a:srgbClr val="13132C"/>
+                </a:solidFill>
+                <a:latin typeface="Calibri"/>
+                <a:cs typeface="Calibri"/>
+              </a:rPr>
+              <a:t>not</a:t>
+            </a:r>
+            <a:r>
+              <a:rPr sz="1100" i="1" spc="120" dirty="0">
+                <a:solidFill>
+                  <a:srgbClr val="13132C"/>
+                </a:solidFill>
+                <a:latin typeface="Calibri"/>
+                <a:cs typeface="Calibri"/>
+              </a:rPr>
+              <a:t> </a:t>
+            </a:r>
+            <a:r>
+              <a:rPr sz="1100" i="1" dirty="0">
+                <a:solidFill>
+                  <a:srgbClr val="13132C"/>
+                </a:solidFill>
+                <a:latin typeface="Calibri"/>
+                <a:cs typeface="Calibri"/>
+              </a:rPr>
+              <a:t>yet</a:t>
+            </a:r>
+            <a:r>
+              <a:rPr sz="1100" i="1" spc="120" dirty="0">
+                <a:solidFill>
+                  <a:srgbClr val="13132C"/>
+                </a:solidFill>
+                <a:latin typeface="Calibri"/>
+                <a:cs typeface="Calibri"/>
+              </a:rPr>
+              <a:t> </a:t>
+            </a:r>
+            <a:r>
+              <a:rPr sz="1100" i="1" spc="-10" dirty="0">
+                <a:solidFill>
+                  <a:srgbClr val="13132C"/>
+                </a:solidFill>
+                <a:latin typeface="Calibri"/>
+                <a:cs typeface="Calibri"/>
+              </a:rPr>
+              <a:t>added</a:t>
+            </a:r>
+            <a:endParaRPr sz="1100">
+              <a:latin typeface="Calibri"/>
+              <a:cs typeface="Calibri"/>
+            </a:endParaRPr>
+          </a:p>
+          <a:p>
+            <a:pPr algn="ctr">
+              <a:lnSpc>
+                <a:spcPct val="100000"/>
+              </a:lnSpc>
+              <a:spcBef>
+                <a:spcPts val="1220"/>
+              </a:spcBef>
+            </a:pPr>
+            <a:r>
+              <a:rPr sz="600" spc="-10" dirty="0">
+                <a:solidFill>
+                  <a:srgbClr val="13132C"/>
+                </a:solidFill>
+                <a:latin typeface="Palatino Linotype"/>
+                <a:cs typeface="Palatino Linotype"/>
+              </a:rPr>
+              <a:t>screenshots/mohab/results_forecasting.png</a:t>
+            </a:r>
+            <a:endParaRPr sz="600">
+              <a:latin typeface="Palatino Linotype"/>
+              <a:cs typeface="Palatino Linotype"/>
+            </a:endParaRPr>
+          </a:p>
+        </p:txBody>
+      </p:sp>
+      <p:grpSp>
+        <p:nvGrpSpPr>
+          <p:cNvPr id="4" name="object 4"/>
+          <p:cNvGrpSpPr/>
+          <p:nvPr/>
+        </p:nvGrpSpPr>
+        <p:grpSpPr>
+          <a:xfrm>
+            <a:off x="378764" y="473087"/>
+            <a:ext cx="5002530" cy="2484755"/>
+            <a:chOff x="378764" y="473087"/>
+            <a:chExt cx="5002530" cy="2484755"/>
+          </a:xfrm>
+        </p:grpSpPr>
+        <p:sp>
+          <p:nvSpPr>
+            <p:cNvPr id="5" name="object 5"/>
+            <p:cNvSpPr/>
+            <p:nvPr/>
+          </p:nvSpPr>
+          <p:spPr>
+            <a:xfrm>
+              <a:off x="378764" y="475614"/>
+              <a:ext cx="5002530" cy="0"/>
+            </a:xfrm>
+            <a:custGeom>
+              <a:avLst/>
+              <a:gdLst/>
+              <a:ahLst/>
+              <a:cxnLst/>
+              <a:rect l="l" t="t" r="r" b="b"/>
+              <a:pathLst>
+                <a:path w="5002530">
+                  <a:moveTo>
+                    <a:pt x="0" y="0"/>
+                  </a:moveTo>
+                  <a:lnTo>
+                    <a:pt x="5002466" y="0"/>
+                  </a:lnTo>
+                </a:path>
+              </a:pathLst>
+            </a:custGeom>
+            <a:ln w="5054">
+              <a:solidFill>
+                <a:srgbClr val="000000"/>
+              </a:solidFill>
+            </a:ln>
+          </p:spPr>
+          <p:txBody>
+            <a:bodyPr wrap="square" lIns="0" tIns="0" rIns="0" bIns="0" rtlCol="0"/>
+            <a:lstStyle/>
+            <a:p>
+              <a:endParaRPr/>
+            </a:p>
+          </p:txBody>
+        </p:sp>
+        <p:sp>
+          <p:nvSpPr>
+            <p:cNvPr id="6" name="object 6"/>
+            <p:cNvSpPr/>
+            <p:nvPr/>
+          </p:nvSpPr>
+          <p:spPr>
+            <a:xfrm>
+              <a:off x="381292" y="475614"/>
+              <a:ext cx="0" cy="2479675"/>
+            </a:xfrm>
+            <a:custGeom>
+              <a:avLst/>
+              <a:gdLst/>
+              <a:ahLst/>
+              <a:cxnLst/>
+              <a:rect l="l" t="t" r="r" b="b"/>
+              <a:pathLst>
+                <a:path h="2479675">
+                  <a:moveTo>
+                    <a:pt x="0" y="2479217"/>
+                  </a:moveTo>
+                  <a:lnTo>
+                    <a:pt x="0" y="0"/>
+                  </a:lnTo>
+                </a:path>
+              </a:pathLst>
+            </a:custGeom>
+            <a:ln w="5054">
+              <a:solidFill>
+                <a:srgbClr val="000000"/>
+              </a:solidFill>
+            </a:ln>
+          </p:spPr>
+          <p:txBody>
+            <a:bodyPr wrap="square" lIns="0" tIns="0" rIns="0" bIns="0" rtlCol="0"/>
+            <a:lstStyle/>
+            <a:p>
+              <a:endParaRPr/>
+            </a:p>
+          </p:txBody>
+        </p:sp>
+        <p:sp>
+          <p:nvSpPr>
+            <p:cNvPr id="7" name="object 7"/>
+            <p:cNvSpPr/>
+            <p:nvPr/>
+          </p:nvSpPr>
+          <p:spPr>
+            <a:xfrm>
+              <a:off x="5378704" y="475614"/>
+              <a:ext cx="0" cy="2479675"/>
+            </a:xfrm>
+            <a:custGeom>
+              <a:avLst/>
+              <a:gdLst/>
+              <a:ahLst/>
+              <a:cxnLst/>
+              <a:rect l="l" t="t" r="r" b="b"/>
+              <a:pathLst>
+                <a:path h="2479675">
+                  <a:moveTo>
+                    <a:pt x="0" y="2479217"/>
+                  </a:moveTo>
+                  <a:lnTo>
+                    <a:pt x="0" y="0"/>
+                  </a:lnTo>
+                </a:path>
+              </a:pathLst>
+            </a:custGeom>
+            <a:ln w="5054">
+              <a:solidFill>
+                <a:srgbClr val="000000"/>
+              </a:solidFill>
+            </a:ln>
+          </p:spPr>
+          <p:txBody>
+            <a:bodyPr wrap="square" lIns="0" tIns="0" rIns="0" bIns="0" rtlCol="0"/>
+            <a:lstStyle/>
+            <a:p>
+              <a:endParaRPr/>
+            </a:p>
+          </p:txBody>
+        </p:sp>
+        <p:sp>
+          <p:nvSpPr>
+            <p:cNvPr id="8" name="object 8"/>
+            <p:cNvSpPr/>
+            <p:nvPr/>
+          </p:nvSpPr>
+          <p:spPr>
+            <a:xfrm>
+              <a:off x="378764" y="2954832"/>
+              <a:ext cx="5002530" cy="0"/>
+            </a:xfrm>
+            <a:custGeom>
+              <a:avLst/>
+              <a:gdLst/>
+              <a:ahLst/>
+              <a:cxnLst/>
+              <a:rect l="l" t="t" r="r" b="b"/>
+              <a:pathLst>
+                <a:path w="5002530">
+                  <a:moveTo>
+                    <a:pt x="0" y="0"/>
+                  </a:moveTo>
+                  <a:lnTo>
+                    <a:pt x="5002466" y="0"/>
+                  </a:lnTo>
+                </a:path>
+              </a:pathLst>
+            </a:custGeom>
+            <a:ln w="5054">
+              <a:solidFill>
+                <a:srgbClr val="000000"/>
+              </a:solidFill>
+            </a:ln>
+          </p:spPr>
+          <p:txBody>
+            <a:bodyPr wrap="square" lIns="0" tIns="0" rIns="0" bIns="0" rtlCol="0"/>
+            <a:lstStyle/>
+            <a:p>
+              <a:endParaRPr/>
+            </a:p>
+          </p:txBody>
+        </p:sp>
+      </p:grpSp>
+      <p:grpSp>
+        <p:nvGrpSpPr>
+          <p:cNvPr id="9" name="object 9"/>
+          <p:cNvGrpSpPr/>
+          <p:nvPr/>
+        </p:nvGrpSpPr>
+        <p:grpSpPr>
+          <a:xfrm>
+            <a:off x="0" y="3125279"/>
+            <a:ext cx="5760085" cy="114935"/>
+            <a:chOff x="0" y="3125279"/>
+            <a:chExt cx="5760085" cy="114935"/>
+          </a:xfrm>
+        </p:grpSpPr>
+        <p:sp>
+          <p:nvSpPr>
+            <p:cNvPr id="10" name="object 10"/>
+            <p:cNvSpPr/>
+            <p:nvPr/>
+          </p:nvSpPr>
+          <p:spPr>
+            <a:xfrm>
+              <a:off x="0" y="3125279"/>
+              <a:ext cx="2016125" cy="114935"/>
+            </a:xfrm>
+            <a:custGeom>
+              <a:avLst/>
+              <a:gdLst/>
+              <a:ahLst/>
+              <a:cxnLst/>
+              <a:rect l="l" t="t" r="r" b="b"/>
+              <a:pathLst>
+                <a:path w="2016125" h="114935">
+                  <a:moveTo>
+                    <a:pt x="2016036" y="0"/>
+                  </a:moveTo>
+                  <a:lnTo>
+                    <a:pt x="0" y="0"/>
+                  </a:lnTo>
+                  <a:lnTo>
+                    <a:pt x="0" y="114719"/>
+                  </a:lnTo>
+                  <a:lnTo>
+                    <a:pt x="2016036" y="114719"/>
+                  </a:lnTo>
+                  <a:lnTo>
+                    <a:pt x="2016036" y="0"/>
+                  </a:lnTo>
+                  <a:close/>
+                </a:path>
+              </a:pathLst>
+            </a:custGeom>
+            <a:solidFill>
+              <a:srgbClr val="B41313"/>
+            </a:solidFill>
+          </p:spPr>
+          <p:txBody>
+            <a:bodyPr wrap="square" lIns="0" tIns="0" rIns="0" bIns="0" rtlCol="0"/>
+            <a:lstStyle/>
+            <a:p>
+              <a:endParaRPr/>
+            </a:p>
+          </p:txBody>
+        </p:sp>
+        <p:sp>
+          <p:nvSpPr>
+            <p:cNvPr id="11" name="object 11"/>
+            <p:cNvSpPr/>
+            <p:nvPr/>
+          </p:nvSpPr>
+          <p:spPr>
+            <a:xfrm>
+              <a:off x="2016036" y="3125279"/>
+              <a:ext cx="2592070" cy="114935"/>
+            </a:xfrm>
+            <a:custGeom>
+              <a:avLst/>
+              <a:gdLst/>
+              <a:ahLst/>
+              <a:cxnLst/>
+              <a:rect l="l" t="t" r="r" b="b"/>
+              <a:pathLst>
+                <a:path w="2592070" h="114935">
+                  <a:moveTo>
+                    <a:pt x="2591981" y="0"/>
+                  </a:moveTo>
+                  <a:lnTo>
+                    <a:pt x="0" y="0"/>
+                  </a:lnTo>
+                  <a:lnTo>
+                    <a:pt x="0" y="114719"/>
+                  </a:lnTo>
+                  <a:lnTo>
+                    <a:pt x="2591981" y="114719"/>
+                  </a:lnTo>
+                  <a:lnTo>
+                    <a:pt x="2591981" y="0"/>
+                  </a:lnTo>
+                  <a:close/>
+                </a:path>
+              </a:pathLst>
+            </a:custGeom>
+            <a:solidFill>
+              <a:srgbClr val="37374C"/>
+            </a:solidFill>
+          </p:spPr>
+          <p:txBody>
+            <a:bodyPr wrap="square" lIns="0" tIns="0" rIns="0" bIns="0" rtlCol="0"/>
+            <a:lstStyle/>
+            <a:p>
+              <a:endParaRPr/>
+            </a:p>
+          </p:txBody>
+        </p:sp>
+        <p:sp>
+          <p:nvSpPr>
+            <p:cNvPr id="12" name="object 12"/>
+            <p:cNvSpPr/>
+            <p:nvPr/>
+          </p:nvSpPr>
+          <p:spPr>
+            <a:xfrm>
+              <a:off x="4608017" y="3125279"/>
+              <a:ext cx="1152525" cy="114935"/>
+            </a:xfrm>
+            <a:custGeom>
+              <a:avLst/>
+              <a:gdLst/>
+              <a:ahLst/>
+              <a:cxnLst/>
+              <a:rect l="l" t="t" r="r" b="b"/>
+              <a:pathLst>
+                <a:path w="1152525" h="114935">
+                  <a:moveTo>
+                    <a:pt x="1151978" y="0"/>
+                  </a:moveTo>
+                  <a:lnTo>
+                    <a:pt x="0" y="0"/>
+                  </a:lnTo>
+                  <a:lnTo>
+                    <a:pt x="0" y="114719"/>
+                  </a:lnTo>
+                  <a:lnTo>
+                    <a:pt x="1151978" y="114719"/>
+                  </a:lnTo>
+                  <a:lnTo>
+                    <a:pt x="1151978" y="0"/>
+                  </a:lnTo>
+                  <a:close/>
+                </a:path>
+              </a:pathLst>
+            </a:custGeom>
+            <a:solidFill>
+              <a:srgbClr val="13132C"/>
+            </a:solidFill>
+          </p:spPr>
+          <p:txBody>
+            <a:bodyPr wrap="square" lIns="0" tIns="0" rIns="0" bIns="0" rtlCol="0"/>
+            <a:lstStyle/>
+            <a:p>
+              <a:endParaRPr/>
+            </a:p>
+          </p:txBody>
+        </p:sp>
+      </p:grpSp>
+      <p:sp>
+        <p:nvSpPr>
+          <p:cNvPr id="13" name="object 13"/>
+          <p:cNvSpPr txBox="1">
+            <a:spLocks noGrp="1"/>
+          </p:cNvSpPr>
+          <p:nvPr>
+            <p:ph type="ftr" sz="quarter" idx="5"/>
+          </p:nvPr>
+        </p:nvSpPr>
+        <p:spPr>
+          <a:prstGeom prst="rect">
+            <a:avLst/>
+          </a:prstGeom>
+        </p:spPr>
+        <p:txBody>
+          <a:bodyPr vert="horz" wrap="square" lIns="0" tIns="24130" rIns="0" bIns="0" rtlCol="0">
+            <a:spAutoFit/>
+          </a:bodyPr>
+          <a:lstStyle/>
+          <a:p>
+            <a:pPr marL="12700">
+              <a:lnSpc>
+                <a:spcPct val="100000"/>
+              </a:lnSpc>
+              <a:spcBef>
+                <a:spcPts val="190"/>
+              </a:spcBef>
+            </a:pPr>
+            <a:r>
+              <a:rPr dirty="0"/>
+              <a:t>ITI </a:t>
+            </a:r>
+            <a:r>
+              <a:rPr spc="-10" dirty="0"/>
+              <a:t>Intake</a:t>
+            </a:r>
+            <a:r>
+              <a:rPr spc="5" dirty="0"/>
+              <a:t> </a:t>
+            </a:r>
+            <a:r>
+              <a:rPr spc="-25" dirty="0"/>
+              <a:t>46</a:t>
+            </a:r>
+          </a:p>
+        </p:txBody>
+      </p:sp>
+      <p:sp>
+        <p:nvSpPr>
+          <p:cNvPr id="14" name="object 14"/>
+          <p:cNvSpPr txBox="1"/>
+          <p:nvPr/>
+        </p:nvSpPr>
+        <p:spPr>
+          <a:xfrm>
+            <a:off x="3100044" y="3105948"/>
+            <a:ext cx="424180" cy="137160"/>
+          </a:xfrm>
+          <a:prstGeom prst="rect">
+            <a:avLst/>
+          </a:prstGeom>
+        </p:spPr>
+        <p:txBody>
+          <a:bodyPr vert="horz" wrap="square" lIns="0" tIns="24130" rIns="0" bIns="0" rtlCol="0">
+            <a:spAutoFit/>
+          </a:bodyPr>
+          <a:lstStyle/>
+          <a:p>
+            <a:pPr marL="12700">
+              <a:lnSpc>
+                <a:spcPct val="100000"/>
+              </a:lnSpc>
+              <a:spcBef>
+                <a:spcPts val="190"/>
+              </a:spcBef>
+            </a:pPr>
+            <a:r>
+              <a:rPr sz="600" spc="-10" dirty="0">
+                <a:solidFill>
+                  <a:srgbClr val="FFFFFF"/>
+                </a:solidFill>
+                <a:latin typeface="Tahoma"/>
+                <a:cs typeface="Tahoma"/>
+                <a:hlinkClick r:id="rId2" action="ppaction://hlinksldjump"/>
+              </a:rPr>
+              <a:t>RANPilotAI</a:t>
+            </a:r>
+            <a:endParaRPr sz="600" dirty="0">
+              <a:latin typeface="Tahoma"/>
+              <a:cs typeface="Tahoma"/>
+            </a:endParaRPr>
+          </a:p>
+        </p:txBody>
+      </p:sp>
+      <p:sp>
+        <p:nvSpPr>
+          <p:cNvPr id="15" name="object 15"/>
+          <p:cNvSpPr txBox="1">
+            <a:spLocks noGrp="1"/>
+          </p:cNvSpPr>
+          <p:nvPr>
+            <p:ph type="sldNum" sz="quarter" idx="7"/>
+          </p:nvPr>
+        </p:nvSpPr>
+        <p:spPr>
+          <a:prstGeom prst="rect">
+            <a:avLst/>
+          </a:prstGeom>
+        </p:spPr>
+        <p:txBody>
+          <a:bodyPr vert="horz" wrap="square" lIns="0" tIns="24130" rIns="0" bIns="0" rtlCol="0">
+            <a:spAutoFit/>
+          </a:bodyPr>
+          <a:lstStyle/>
+          <a:p>
+            <a:pPr marL="12700">
+              <a:lnSpc>
+                <a:spcPct val="100000"/>
+              </a:lnSpc>
+              <a:spcBef>
+                <a:spcPts val="190"/>
+              </a:spcBef>
+            </a:pPr>
+            <a:fld id="{81D60167-4931-47E6-BA6A-407CBD079E47}" type="slidenum">
+              <a:rPr dirty="0"/>
+              <a:t>51</a:t>
+            </a:fld>
+            <a:r>
+              <a:rPr spc="10" dirty="0"/>
+              <a:t> </a:t>
+            </a:r>
+            <a:r>
+              <a:rPr spc="90" dirty="0"/>
+              <a:t>/</a:t>
+            </a:r>
+            <a:r>
+              <a:rPr spc="10" dirty="0"/>
+              <a:t> </a:t>
+            </a:r>
+            <a:r>
+              <a:rPr spc="-25" dirty="0"/>
+              <a:t>47</a:t>
+            </a:r>
+          </a:p>
+        </p:txBody>
+      </p:sp>
+    </p:spTree>
+  </p:cSld>
+  <p:clrMapOvr>
+    <a:masterClrMapping/>
+  </p:clrMapOvr>
+  <p:transition>
+    <p:cut/>
+  </p:transition>
+</p:sld>
+</file>
+
+<file path=ppt/slides/slide52.xml><?xml version="1.0" encoding="utf-8"?>
 <p:sld xmlns:a="http://schemas.openxmlformats.org/drawingml/2006/main" xmlns:r="http://schemas.openxmlformats.org/officeDocument/2006/relationships" xmlns:p="http://schemas.openxmlformats.org/presentationml/2006/main">
   <p:cSld>
     <p:spTree>
@@ -55254,7 +54505,7 @@
             </a:pPr>
             <a:fld id="{81D60167-4931-47E6-BA6A-407CBD079E47}" type="slidenum">
               <a:rPr dirty="0"/>
-              <a:t>51</a:t>
+              <a:t>52</a:t>
             </a:fld>
             <a:r>
               <a:rPr spc="10" dirty="0"/>
@@ -55286,7 +54537,7 @@
 </p:sld>
 </file>
 
-<file path=ppt/slides/slide52.xml><?xml version="1.0" encoding="utf-8"?>
+<file path=ppt/slides/slide53.xml><?xml version="1.0" encoding="utf-8"?>
 <p:sld xmlns:a="http://schemas.openxmlformats.org/drawingml/2006/main" xmlns:r="http://schemas.openxmlformats.org/officeDocument/2006/relationships" xmlns:p="http://schemas.openxmlformats.org/presentationml/2006/main">
   <p:cSld>
     <p:spTree>
@@ -55975,7 +55226,7 @@
             </a:pPr>
             <a:fld id="{81D60167-4931-47E6-BA6A-407CBD079E47}" type="slidenum">
               <a:rPr dirty="0"/>
-              <a:t>52</a:t>
+              <a:t>53</a:t>
             </a:fld>
             <a:r>
               <a:rPr spc="10" dirty="0"/>
@@ -56007,7 +55258,7 @@
 </p:sld>
 </file>
 
-<file path=ppt/slides/slide53.xml><?xml version="1.0" encoding="utf-8"?>
+<file path=ppt/slides/slide54.xml><?xml version="1.0" encoding="utf-8"?>
 <p:sld xmlns:a="http://schemas.openxmlformats.org/drawingml/2006/main" xmlns:r="http://schemas.openxmlformats.org/officeDocument/2006/relationships" xmlns:p="http://schemas.openxmlformats.org/presentationml/2006/main">
   <p:cSld>
     <p:spTree>
@@ -56527,7 +55778,7 @@
             </a:pPr>
             <a:fld id="{81D60167-4931-47E6-BA6A-407CBD079E47}" type="slidenum">
               <a:rPr dirty="0"/>
-              <a:t>53</a:t>
+              <a:t>54</a:t>
             </a:fld>
             <a:r>
               <a:rPr spc="10" dirty="0"/>
@@ -56559,7 +55810,7 @@
 </p:sld>
 </file>
 
-<file path=ppt/slides/slide54.xml><?xml version="1.0" encoding="utf-8"?>
+<file path=ppt/slides/slide55.xml><?xml version="1.0" encoding="utf-8"?>
 <p:sld xmlns:a="http://schemas.openxmlformats.org/drawingml/2006/main" xmlns:r="http://schemas.openxmlformats.org/officeDocument/2006/relationships" xmlns:p="http://schemas.openxmlformats.org/presentationml/2006/main">
   <p:cSld>
     <p:spTree>
@@ -57099,7 +56350,7 @@
             </a:pPr>
             <a:fld id="{81D60167-4931-47E6-BA6A-407CBD079E47}" type="slidenum">
               <a:rPr dirty="0"/>
-              <a:t>54</a:t>
+              <a:t>55</a:t>
             </a:fld>
             <a:r>
               <a:rPr spc="10" dirty="0"/>
@@ -57131,7 +56382,7 @@
 </p:sld>
 </file>
 
-<file path=ppt/slides/slide55.xml><?xml version="1.0" encoding="utf-8"?>
+<file path=ppt/slides/slide56.xml><?xml version="1.0" encoding="utf-8"?>
 <p:sld xmlns:a="http://schemas.openxmlformats.org/drawingml/2006/main" xmlns:r="http://schemas.openxmlformats.org/officeDocument/2006/relationships" xmlns:p="http://schemas.openxmlformats.org/presentationml/2006/main" showMasterSp="0">
   <p:cSld>
     <p:spTree>
@@ -58139,13 +57390,6 @@
   <p:transition>
     <p:cut/>
   </p:transition>
-  <p:timing>
-    <p:tnLst>
-      <p:par>
-        <p:cTn id="1" dur="indefinite" restart="never" nodeType="tmRoot"/>
-      </p:par>
-    </p:tnLst>
-  </p:timing>
 </p:sld>
 </file>
 
@@ -58851,13 +58095,6 @@
   <p:transition>
     <p:cut/>
   </p:transition>
-  <p:timing>
-    <p:tnLst>
-      <p:par>
-        <p:cTn id="1" dur="indefinite" restart="never" nodeType="tmRoot"/>
-      </p:par>
-    </p:tnLst>
-  </p:timing>
 </p:sld>
 </file>
 

--- a/RANPilotAi_Graduation_Project_BOOK/presentation.pptx
+++ b/RANPilotAi_Graduation_Project_BOOK/presentation.pptx
@@ -5,7 +5,7 @@
     <p:sldMasterId id="2147483648" r:id="rId1"/>
   </p:sldMasterIdLst>
   <p:notesMasterIdLst>
-    <p:notesMasterId r:id="rId58"/>
+    <p:notesMasterId r:id="rId59"/>
   </p:notesMasterIdLst>
   <p:sldIdLst>
     <p:sldId id="256" r:id="rId2"/>
@@ -30,40 +30,41 @@
     <p:sldId id="317" r:id="rId21"/>
     <p:sldId id="275" r:id="rId22"/>
     <p:sldId id="276" r:id="rId23"/>
-    <p:sldId id="277" r:id="rId24"/>
-    <p:sldId id="303" r:id="rId25"/>
-    <p:sldId id="304" r:id="rId26"/>
-    <p:sldId id="305" r:id="rId27"/>
-    <p:sldId id="306" r:id="rId28"/>
-    <p:sldId id="307" r:id="rId29"/>
-    <p:sldId id="308" r:id="rId30"/>
-    <p:sldId id="309" r:id="rId31"/>
-    <p:sldId id="310" r:id="rId32"/>
-    <p:sldId id="311" r:id="rId33"/>
-    <p:sldId id="312" r:id="rId34"/>
-    <p:sldId id="313" r:id="rId35"/>
-    <p:sldId id="314" r:id="rId36"/>
-    <p:sldId id="315" r:id="rId37"/>
-    <p:sldId id="284" r:id="rId38"/>
-    <p:sldId id="285" r:id="rId39"/>
-    <p:sldId id="286" r:id="rId40"/>
-    <p:sldId id="287" r:id="rId41"/>
-    <p:sldId id="288" r:id="rId42"/>
-    <p:sldId id="289" r:id="rId43"/>
-    <p:sldId id="290" r:id="rId44"/>
-    <p:sldId id="291" r:id="rId45"/>
-    <p:sldId id="316" r:id="rId46"/>
-    <p:sldId id="292" r:id="rId47"/>
-    <p:sldId id="293" r:id="rId48"/>
-    <p:sldId id="294" r:id="rId49"/>
-    <p:sldId id="295" r:id="rId50"/>
-    <p:sldId id="296" r:id="rId51"/>
-    <p:sldId id="297" r:id="rId52"/>
-    <p:sldId id="298" r:id="rId53"/>
-    <p:sldId id="299" r:id="rId54"/>
-    <p:sldId id="300" r:id="rId55"/>
-    <p:sldId id="301" r:id="rId56"/>
-    <p:sldId id="302" r:id="rId57"/>
+    <p:sldId id="318" r:id="rId24"/>
+    <p:sldId id="277" r:id="rId25"/>
+    <p:sldId id="303" r:id="rId26"/>
+    <p:sldId id="304" r:id="rId27"/>
+    <p:sldId id="305" r:id="rId28"/>
+    <p:sldId id="306" r:id="rId29"/>
+    <p:sldId id="307" r:id="rId30"/>
+    <p:sldId id="308" r:id="rId31"/>
+    <p:sldId id="309" r:id="rId32"/>
+    <p:sldId id="310" r:id="rId33"/>
+    <p:sldId id="311" r:id="rId34"/>
+    <p:sldId id="312" r:id="rId35"/>
+    <p:sldId id="313" r:id="rId36"/>
+    <p:sldId id="314" r:id="rId37"/>
+    <p:sldId id="315" r:id="rId38"/>
+    <p:sldId id="284" r:id="rId39"/>
+    <p:sldId id="285" r:id="rId40"/>
+    <p:sldId id="286" r:id="rId41"/>
+    <p:sldId id="287" r:id="rId42"/>
+    <p:sldId id="288" r:id="rId43"/>
+    <p:sldId id="289" r:id="rId44"/>
+    <p:sldId id="290" r:id="rId45"/>
+    <p:sldId id="291" r:id="rId46"/>
+    <p:sldId id="316" r:id="rId47"/>
+    <p:sldId id="292" r:id="rId48"/>
+    <p:sldId id="293" r:id="rId49"/>
+    <p:sldId id="294" r:id="rId50"/>
+    <p:sldId id="295" r:id="rId51"/>
+    <p:sldId id="296" r:id="rId52"/>
+    <p:sldId id="297" r:id="rId53"/>
+    <p:sldId id="298" r:id="rId54"/>
+    <p:sldId id="299" r:id="rId55"/>
+    <p:sldId id="300" r:id="rId56"/>
+    <p:sldId id="301" r:id="rId57"/>
+    <p:sldId id="302" r:id="rId58"/>
   </p:sldIdLst>
   <p:sldSz cx="5765800" cy="3244850"/>
   <p:notesSz cx="5765800" cy="3244850"/>
@@ -9730,7 +9731,7 @@
           <a:p>
             <a:fld id="{0172E42C-98F0-4AD8-A5A8-C02C8E23F55D}" type="slidenum">
               <a:rPr lang="en-US" smtClean="0"/>
-              <a:t>38</a:t>
+              <a:t>39</a:t>
             </a:fld>
             <a:endParaRPr lang="en-US"/>
           </a:p>
@@ -21937,6 +21938,86 @@
 </file>
 
 <file path=ppt/slides/slide23.xml><?xml version="1.0" encoding="utf-8"?>
+<p:sld xmlns:a="http://schemas.openxmlformats.org/drawingml/2006/main" xmlns:r="http://schemas.openxmlformats.org/officeDocument/2006/relationships" xmlns:p="http://schemas.openxmlformats.org/presentationml/2006/main">
+  <p:cSld>
+    <p:spTree>
+      <p:nvGrpSpPr>
+        <p:cNvPr id="1" name=""/>
+        <p:cNvGrpSpPr/>
+        <p:nvPr/>
+      </p:nvGrpSpPr>
+      <p:grpSpPr>
+        <a:xfrm>
+          <a:off x="0" y="0"/>
+          <a:ext cx="0" cy="0"/>
+          <a:chOff x="0" y="0"/>
+          <a:chExt cx="0" cy="0"/>
+        </a:xfrm>
+      </p:grpSpPr>
+      <p:sp>
+        <p:nvSpPr>
+          <p:cNvPr id="2" name="Title 1">
+            <a:extLst>
+              <a:ext uri="{FF2B5EF4-FFF2-40B4-BE49-F238E27FC236}">
+                <a16:creationId xmlns:a16="http://schemas.microsoft.com/office/drawing/2014/main" id="{374F5348-A4A0-EC9E-B9AB-5B6BD9F9EEB7}"/>
+              </a:ext>
+            </a:extLst>
+          </p:cNvPr>
+          <p:cNvSpPr>
+            <a:spLocks noGrp="1"/>
+          </p:cNvSpPr>
+          <p:nvPr>
+            <p:ph type="title"/>
+          </p:nvPr>
+        </p:nvSpPr>
+        <p:spPr/>
+        <p:txBody>
+          <a:bodyPr/>
+          <a:lstStyle/>
+          <a:p>
+            <a:endParaRPr lang="en-US"/>
+          </a:p>
+        </p:txBody>
+      </p:sp>
+      <p:sp>
+        <p:nvSpPr>
+          <p:cNvPr id="3" name="Text Placeholder 2">
+            <a:extLst>
+              <a:ext uri="{FF2B5EF4-FFF2-40B4-BE49-F238E27FC236}">
+                <a16:creationId xmlns:a16="http://schemas.microsoft.com/office/drawing/2014/main" id="{CCA2FE5D-A5DA-A72B-2199-198B233CBEEB}"/>
+              </a:ext>
+            </a:extLst>
+          </p:cNvPr>
+          <p:cNvSpPr>
+            <a:spLocks noGrp="1"/>
+          </p:cNvSpPr>
+          <p:nvPr>
+            <p:ph type="body" idx="1"/>
+          </p:nvPr>
+        </p:nvSpPr>
+        <p:spPr/>
+        <p:txBody>
+          <a:bodyPr/>
+          <a:lstStyle/>
+          <a:p>
+            <a:endParaRPr lang="en-US"/>
+          </a:p>
+        </p:txBody>
+      </p:sp>
+    </p:spTree>
+    <p:extLst>
+      <p:ext uri="{BB962C8B-B14F-4D97-AF65-F5344CB8AC3E}">
+        <p14:creationId xmlns:p14="http://schemas.microsoft.com/office/powerpoint/2010/main" val="2185080436"/>
+      </p:ext>
+    </p:extLst>
+  </p:cSld>
+  <p:clrMapOvr>
+    <a:masterClrMapping/>
+  </p:clrMapOvr>
+</p:sld>
+</file>
+
+<file path=ppt/slides/slide24.xml><?xml version="1.0" encoding="utf-8"?>
 <p:sld xmlns:a="http://schemas.openxmlformats.org/drawingml/2006/main" xmlns:r="http://schemas.openxmlformats.org/officeDocument/2006/relationships" xmlns:p="http://schemas.openxmlformats.org/presentationml/2006/main" showMasterSp="0">
   <p:cSld>
     <p:spTree>
@@ -22827,7 +22908,7 @@
             </a:pPr>
             <a:fld id="{81D60167-4931-47E6-BA6A-407CBD079E47}" type="slidenum">
               <a:rPr dirty="0"/>
-              <a:t>23</a:t>
+              <a:t>24</a:t>
             </a:fld>
             <a:r>
               <a:rPr spc="10" dirty="0"/>
@@ -22859,7 +22940,7 @@
 </p:sld>
 </file>
 
-<file path=ppt/slides/slide24.xml><?xml version="1.0" encoding="utf-8"?>
+<file path=ppt/slides/slide25.xml><?xml version="1.0" encoding="utf-8"?>
 <p:sld xmlns:a="http://schemas.openxmlformats.org/drawingml/2006/main" xmlns:r="http://schemas.openxmlformats.org/officeDocument/2006/relationships" xmlns:p="http://schemas.openxmlformats.org/presentationml/2006/main">
   <p:cSld>
     <p:spTree>
@@ -24094,7 +24175,7 @@
             </a:pPr>
             <a:fld id="{81D60167-4931-47E6-BA6A-407CBD079E47}" type="slidenum">
               <a:rPr spc="-30" dirty="0"/>
-              <a:t>24</a:t>
+              <a:t>25</a:t>
             </a:fld>
             <a:r>
               <a:rPr spc="-55" dirty="0"/>
@@ -24131,7 +24212,7 @@
 </p:sld>
 </file>
 
-<file path=ppt/slides/slide25.xml><?xml version="1.0" encoding="utf-8"?>
+<file path=ppt/slides/slide26.xml><?xml version="1.0" encoding="utf-8"?>
 <p:sld xmlns:a="http://schemas.openxmlformats.org/drawingml/2006/main" xmlns:r="http://schemas.openxmlformats.org/officeDocument/2006/relationships" xmlns:p="http://schemas.openxmlformats.org/presentationml/2006/main">
   <p:cSld>
     <p:spTree>
@@ -25439,7 +25520,7 @@
             </a:pPr>
             <a:fld id="{81D60167-4931-47E6-BA6A-407CBD079E47}" type="slidenum">
               <a:rPr spc="-30" dirty="0"/>
-              <a:t>25</a:t>
+              <a:t>26</a:t>
             </a:fld>
             <a:r>
               <a:rPr spc="-55" dirty="0"/>
@@ -25476,7 +25557,7 @@
 </p:sld>
 </file>
 
-<file path=ppt/slides/slide26.xml><?xml version="1.0" encoding="utf-8"?>
+<file path=ppt/slides/slide27.xml><?xml version="1.0" encoding="utf-8"?>
 <p:sld xmlns:a="http://schemas.openxmlformats.org/drawingml/2006/main" xmlns:r="http://schemas.openxmlformats.org/officeDocument/2006/relationships" xmlns:p="http://schemas.openxmlformats.org/presentationml/2006/main">
   <p:cSld>
     <p:spTree>
@@ -29400,7 +29481,7 @@
             </a:pPr>
             <a:fld id="{81D60167-4931-47E6-BA6A-407CBD079E47}" type="slidenum">
               <a:rPr spc="-30" dirty="0"/>
-              <a:t>26</a:t>
+              <a:t>27</a:t>
             </a:fld>
             <a:r>
               <a:rPr spc="-55" dirty="0"/>
@@ -29437,7 +29518,7 @@
 </p:sld>
 </file>
 
-<file path=ppt/slides/slide27.xml><?xml version="1.0" encoding="utf-8"?>
+<file path=ppt/slides/slide28.xml><?xml version="1.0" encoding="utf-8"?>
 <p:sld xmlns:a="http://schemas.openxmlformats.org/drawingml/2006/main" xmlns:r="http://schemas.openxmlformats.org/officeDocument/2006/relationships" xmlns:p="http://schemas.openxmlformats.org/presentationml/2006/main">
   <p:cSld>
     <p:spTree>
@@ -30784,7 +30865,7 @@
             </a:pPr>
             <a:fld id="{81D60167-4931-47E6-BA6A-407CBD079E47}" type="slidenum">
               <a:rPr spc="-30" dirty="0"/>
-              <a:t>27</a:t>
+              <a:t>28</a:t>
             </a:fld>
             <a:r>
               <a:rPr spc="-55" dirty="0"/>
@@ -30821,7 +30902,7 @@
 </p:sld>
 </file>
 
-<file path=ppt/slides/slide28.xml><?xml version="1.0" encoding="utf-8"?>
+<file path=ppt/slides/slide29.xml><?xml version="1.0" encoding="utf-8"?>
 <p:sld xmlns:a="http://schemas.openxmlformats.org/drawingml/2006/main" xmlns:r="http://schemas.openxmlformats.org/officeDocument/2006/relationships" xmlns:p="http://schemas.openxmlformats.org/presentationml/2006/main">
   <p:cSld>
     <p:spTree>
@@ -32618,7 +32699,7 @@
             </a:pPr>
             <a:fld id="{81D60167-4931-47E6-BA6A-407CBD079E47}" type="slidenum">
               <a:rPr spc="-30" dirty="0"/>
-              <a:t>28</a:t>
+              <a:t>29</a:t>
             </a:fld>
             <a:r>
               <a:rPr spc="-55" dirty="0"/>
@@ -32655,7 +32736,980 @@
 </p:sld>
 </file>
 
-<file path=ppt/slides/slide29.xml><?xml version="1.0" encoding="utf-8"?>
+<file path=ppt/slides/slide3.xml><?xml version="1.0" encoding="utf-8"?>
+<p:sld xmlns:a="http://schemas.openxmlformats.org/drawingml/2006/main" xmlns:r="http://schemas.openxmlformats.org/officeDocument/2006/relationships" xmlns:p="http://schemas.openxmlformats.org/presentationml/2006/main" showMasterSp="0">
+  <p:cSld>
+    <p:spTree>
+      <p:nvGrpSpPr>
+        <p:cNvPr id="1" name=""/>
+        <p:cNvGrpSpPr/>
+        <p:nvPr/>
+      </p:nvGrpSpPr>
+      <p:grpSpPr>
+        <a:xfrm>
+          <a:off x="0" y="0"/>
+          <a:ext cx="0" cy="0"/>
+          <a:chOff x="0" y="0"/>
+          <a:chExt cx="0" cy="0"/>
+        </a:xfrm>
+      </p:grpSpPr>
+      <p:grpSp>
+        <p:nvGrpSpPr>
+          <p:cNvPr id="2" name="object 2"/>
+          <p:cNvGrpSpPr/>
+          <p:nvPr/>
+        </p:nvGrpSpPr>
+        <p:grpSpPr>
+          <a:xfrm>
+            <a:off x="97827" y="874331"/>
+            <a:ext cx="4523105" cy="494030"/>
+            <a:chOff x="97827" y="874331"/>
+            <a:chExt cx="4523105" cy="494030"/>
+          </a:xfrm>
+        </p:grpSpPr>
+        <p:sp>
+          <p:nvSpPr>
+            <p:cNvPr id="3" name="object 3"/>
+            <p:cNvSpPr/>
+            <p:nvPr/>
+          </p:nvSpPr>
+          <p:spPr>
+            <a:xfrm>
+              <a:off x="97827" y="874331"/>
+              <a:ext cx="4472305" cy="82550"/>
+            </a:xfrm>
+            <a:custGeom>
+              <a:avLst/>
+              <a:gdLst/>
+              <a:ahLst/>
+              <a:cxnLst/>
+              <a:rect l="l" t="t" r="r" b="b"/>
+              <a:pathLst>
+                <a:path w="4472305" h="82550">
+                  <a:moveTo>
+                    <a:pt x="4421063" y="0"/>
+                  </a:moveTo>
+                  <a:lnTo>
+                    <a:pt x="50800" y="0"/>
+                  </a:lnTo>
+                  <a:lnTo>
+                    <a:pt x="31075" y="4008"/>
+                  </a:lnTo>
+                  <a:lnTo>
+                    <a:pt x="14922" y="14922"/>
+                  </a:lnTo>
+                  <a:lnTo>
+                    <a:pt x="4008" y="31075"/>
+                  </a:lnTo>
+                  <a:lnTo>
+                    <a:pt x="0" y="50800"/>
+                  </a:lnTo>
+                  <a:lnTo>
+                    <a:pt x="0" y="82384"/>
+                  </a:lnTo>
+                  <a:lnTo>
+                    <a:pt x="4471864" y="82384"/>
+                  </a:lnTo>
+                  <a:lnTo>
+                    <a:pt x="4471864" y="50800"/>
+                  </a:lnTo>
+                  <a:lnTo>
+                    <a:pt x="4467855" y="31075"/>
+                  </a:lnTo>
+                  <a:lnTo>
+                    <a:pt x="4456941" y="14922"/>
+                  </a:lnTo>
+                  <a:lnTo>
+                    <a:pt x="4440788" y="4008"/>
+                  </a:lnTo>
+                  <a:lnTo>
+                    <a:pt x="4421063" y="0"/>
+                  </a:lnTo>
+                  <a:close/>
+                </a:path>
+              </a:pathLst>
+            </a:custGeom>
+            <a:solidFill>
+              <a:srgbClr val="B41313"/>
+            </a:solidFill>
+          </p:spPr>
+          <p:txBody>
+            <a:bodyPr wrap="square" lIns="0" tIns="0" rIns="0" bIns="0" rtlCol="0"/>
+            <a:lstStyle/>
+            <a:p>
+              <a:endParaRPr/>
+            </a:p>
+          </p:txBody>
+        </p:sp>
+        <p:sp>
+          <p:nvSpPr>
+            <p:cNvPr id="4" name="object 4"/>
+            <p:cNvSpPr/>
+            <p:nvPr/>
+          </p:nvSpPr>
+          <p:spPr>
+            <a:xfrm>
+              <a:off x="148628" y="937580"/>
+              <a:ext cx="4472305" cy="431165"/>
+            </a:xfrm>
+            <a:custGeom>
+              <a:avLst/>
+              <a:gdLst/>
+              <a:ahLst/>
+              <a:cxnLst/>
+              <a:rect l="l" t="t" r="r" b="b"/>
+              <a:pathLst>
+                <a:path w="4472305" h="431165">
+                  <a:moveTo>
+                    <a:pt x="4471864" y="0"/>
+                  </a:moveTo>
+                  <a:lnTo>
+                    <a:pt x="0" y="0"/>
+                  </a:lnTo>
+                  <a:lnTo>
+                    <a:pt x="0" y="430667"/>
+                  </a:lnTo>
+                  <a:lnTo>
+                    <a:pt x="4471864" y="430667"/>
+                  </a:lnTo>
+                  <a:lnTo>
+                    <a:pt x="4471864" y="0"/>
+                  </a:lnTo>
+                  <a:close/>
+                </a:path>
+              </a:pathLst>
+            </a:custGeom>
+            <a:solidFill>
+              <a:srgbClr val="000000"/>
+            </a:solidFill>
+          </p:spPr>
+          <p:txBody>
+            <a:bodyPr wrap="square" lIns="0" tIns="0" rIns="0" bIns="0" rtlCol="0"/>
+            <a:lstStyle/>
+            <a:p>
+              <a:endParaRPr/>
+            </a:p>
+          </p:txBody>
+        </p:sp>
+        <p:sp>
+          <p:nvSpPr>
+            <p:cNvPr id="5" name="object 5"/>
+            <p:cNvSpPr/>
+            <p:nvPr/>
+          </p:nvSpPr>
+          <p:spPr>
+            <a:xfrm>
+              <a:off x="97827" y="918743"/>
+              <a:ext cx="4472305" cy="398780"/>
+            </a:xfrm>
+            <a:custGeom>
+              <a:avLst/>
+              <a:gdLst/>
+              <a:ahLst/>
+              <a:cxnLst/>
+              <a:rect l="l" t="t" r="r" b="b"/>
+              <a:pathLst>
+                <a:path w="4472305" h="398780">
+                  <a:moveTo>
+                    <a:pt x="4471864" y="0"/>
+                  </a:moveTo>
+                  <a:lnTo>
+                    <a:pt x="0" y="0"/>
+                  </a:lnTo>
+                  <a:lnTo>
+                    <a:pt x="0" y="347903"/>
+                  </a:lnTo>
+                  <a:lnTo>
+                    <a:pt x="4008" y="367627"/>
+                  </a:lnTo>
+                  <a:lnTo>
+                    <a:pt x="14922" y="383780"/>
+                  </a:lnTo>
+                  <a:lnTo>
+                    <a:pt x="31075" y="394695"/>
+                  </a:lnTo>
+                  <a:lnTo>
+                    <a:pt x="50800" y="398703"/>
+                  </a:lnTo>
+                  <a:lnTo>
+                    <a:pt x="4421063" y="398703"/>
+                  </a:lnTo>
+                  <a:lnTo>
+                    <a:pt x="4440788" y="394695"/>
+                  </a:lnTo>
+                  <a:lnTo>
+                    <a:pt x="4456941" y="383780"/>
+                  </a:lnTo>
+                  <a:lnTo>
+                    <a:pt x="4467855" y="367627"/>
+                  </a:lnTo>
+                  <a:lnTo>
+                    <a:pt x="4471864" y="347903"/>
+                  </a:lnTo>
+                  <a:lnTo>
+                    <a:pt x="4471864" y="0"/>
+                  </a:lnTo>
+                  <a:close/>
+                </a:path>
+              </a:pathLst>
+            </a:custGeom>
+            <a:solidFill>
+              <a:srgbClr val="B41313"/>
+            </a:solidFill>
+          </p:spPr>
+          <p:txBody>
+            <a:bodyPr wrap="square" lIns="0" tIns="0" rIns="0" bIns="0" rtlCol="0"/>
+            <a:lstStyle/>
+            <a:p>
+              <a:endParaRPr/>
+            </a:p>
+          </p:txBody>
+        </p:sp>
+      </p:grpSp>
+      <p:sp>
+        <p:nvSpPr>
+          <p:cNvPr id="6" name="object 6" descr="$PPTXTitle"/>
+          <p:cNvSpPr txBox="1">
+            <a:spLocks noGrp="1"/>
+          </p:cNvSpPr>
+          <p:nvPr>
+            <p:ph type="title"/>
+          </p:nvPr>
+        </p:nvSpPr>
+        <p:spPr>
+          <a:xfrm>
+            <a:off x="148628" y="937580"/>
+            <a:ext cx="4472305" cy="431165"/>
+          </a:xfrm>
+          <a:prstGeom prst="rect">
+            <a:avLst/>
+          </a:prstGeom>
+        </p:spPr>
+        <p:txBody>
+          <a:bodyPr vert="horz" wrap="square" lIns="0" tIns="56515" rIns="0" bIns="0" rtlCol="0">
+            <a:spAutoFit/>
+          </a:bodyPr>
+          <a:lstStyle/>
+          <a:p>
+            <a:pPr marR="93980" algn="ctr">
+              <a:lnSpc>
+                <a:spcPct val="100000"/>
+              </a:lnSpc>
+              <a:spcBef>
+                <a:spcPts val="445"/>
+              </a:spcBef>
+            </a:pPr>
+            <a:r>
+              <a:rPr spc="-190" dirty="0"/>
+              <a:t>Tasneem</a:t>
+            </a:r>
+            <a:r>
+              <a:rPr spc="105" dirty="0"/>
+              <a:t> </a:t>
+            </a:r>
+            <a:r>
+              <a:rPr spc="-20" dirty="0"/>
+              <a:t>Amein</a:t>
+            </a:r>
+          </a:p>
+        </p:txBody>
+      </p:sp>
+      <p:sp>
+        <p:nvSpPr>
+          <p:cNvPr id="7" name="object 7"/>
+          <p:cNvSpPr/>
+          <p:nvPr/>
+        </p:nvSpPr>
+        <p:spPr>
+          <a:xfrm>
+            <a:off x="97815" y="1499501"/>
+            <a:ext cx="4472305" cy="584835"/>
+          </a:xfrm>
+          <a:custGeom>
+            <a:avLst/>
+            <a:gdLst/>
+            <a:ahLst/>
+            <a:cxnLst/>
+            <a:rect l="l" t="t" r="r" b="b"/>
+            <a:pathLst>
+              <a:path w="4472305" h="584835">
+                <a:moveTo>
+                  <a:pt x="4471873" y="44424"/>
+                </a:moveTo>
+                <a:lnTo>
+                  <a:pt x="4470565" y="44424"/>
+                </a:lnTo>
+                <a:lnTo>
+                  <a:pt x="4467860" y="31076"/>
+                </a:lnTo>
+                <a:lnTo>
+                  <a:pt x="4456950" y="14922"/>
+                </a:lnTo>
+                <a:lnTo>
+                  <a:pt x="4440796" y="4013"/>
+                </a:lnTo>
+                <a:lnTo>
+                  <a:pt x="4421073" y="0"/>
+                </a:lnTo>
+                <a:lnTo>
+                  <a:pt x="50812" y="0"/>
+                </a:lnTo>
+                <a:lnTo>
+                  <a:pt x="31076" y="4013"/>
+                </a:lnTo>
+                <a:lnTo>
+                  <a:pt x="14922" y="14922"/>
+                </a:lnTo>
+                <a:lnTo>
+                  <a:pt x="4013" y="31076"/>
+                </a:lnTo>
+                <a:lnTo>
+                  <a:pt x="1295" y="44424"/>
+                </a:lnTo>
+                <a:lnTo>
+                  <a:pt x="0" y="44424"/>
+                </a:lnTo>
+                <a:lnTo>
+                  <a:pt x="0" y="50800"/>
+                </a:lnTo>
+                <a:lnTo>
+                  <a:pt x="0" y="82384"/>
+                </a:lnTo>
+                <a:lnTo>
+                  <a:pt x="0" y="533603"/>
+                </a:lnTo>
+                <a:lnTo>
+                  <a:pt x="4013" y="553339"/>
+                </a:lnTo>
+                <a:lnTo>
+                  <a:pt x="14922" y="569493"/>
+                </a:lnTo>
+                <a:lnTo>
+                  <a:pt x="31076" y="580402"/>
+                </a:lnTo>
+                <a:lnTo>
+                  <a:pt x="50812" y="584415"/>
+                </a:lnTo>
+                <a:lnTo>
+                  <a:pt x="4421073" y="584415"/>
+                </a:lnTo>
+                <a:lnTo>
+                  <a:pt x="4440796" y="580402"/>
+                </a:lnTo>
+                <a:lnTo>
+                  <a:pt x="4456950" y="569493"/>
+                </a:lnTo>
+                <a:lnTo>
+                  <a:pt x="4467860" y="553339"/>
+                </a:lnTo>
+                <a:lnTo>
+                  <a:pt x="4471873" y="533603"/>
+                </a:lnTo>
+                <a:lnTo>
+                  <a:pt x="4471873" y="82384"/>
+                </a:lnTo>
+                <a:lnTo>
+                  <a:pt x="4471873" y="50800"/>
+                </a:lnTo>
+                <a:lnTo>
+                  <a:pt x="4471873" y="44424"/>
+                </a:lnTo>
+                <a:close/>
+              </a:path>
+            </a:pathLst>
+          </a:custGeom>
+          <a:solidFill>
+            <a:srgbClr val="E5E5EB"/>
+          </a:solidFill>
+        </p:spPr>
+        <p:txBody>
+          <a:bodyPr wrap="square" lIns="0" tIns="0" rIns="0" bIns="0" rtlCol="0"/>
+          <a:lstStyle/>
+          <a:p>
+            <a:endParaRPr/>
+          </a:p>
+        </p:txBody>
+      </p:sp>
+      <p:sp>
+        <p:nvSpPr>
+          <p:cNvPr id="8" name="object 8"/>
+          <p:cNvSpPr txBox="1"/>
+          <p:nvPr/>
+        </p:nvSpPr>
+        <p:spPr>
+          <a:xfrm>
+            <a:off x="234467" y="1586049"/>
+            <a:ext cx="4199890" cy="391160"/>
+          </a:xfrm>
+          <a:prstGeom prst="rect">
+            <a:avLst/>
+          </a:prstGeom>
+        </p:spPr>
+        <p:txBody>
+          <a:bodyPr vert="horz" wrap="square" lIns="0" tIns="12065" rIns="0" bIns="0" rtlCol="0">
+            <a:spAutoFit/>
+          </a:bodyPr>
+          <a:lstStyle/>
+          <a:p>
+            <a:pPr marL="1287780" marR="5080" indent="-1275715">
+              <a:lnSpc>
+                <a:spcPct val="100000"/>
+              </a:lnSpc>
+              <a:spcBef>
+                <a:spcPts val="95"/>
+              </a:spcBef>
+            </a:pPr>
+            <a:r>
+              <a:rPr sz="1200" spc="-35" dirty="0">
+                <a:solidFill>
+                  <a:srgbClr val="13132C"/>
+                </a:solidFill>
+                <a:latin typeface="Tahoma"/>
+                <a:cs typeface="Tahoma"/>
+              </a:rPr>
+              <a:t>Problem</a:t>
+            </a:r>
+            <a:r>
+              <a:rPr sz="1200" spc="-25" dirty="0">
+                <a:solidFill>
+                  <a:srgbClr val="13132C"/>
+                </a:solidFill>
+                <a:latin typeface="Tahoma"/>
+                <a:cs typeface="Tahoma"/>
+              </a:rPr>
+              <a:t> </a:t>
+            </a:r>
+            <a:r>
+              <a:rPr sz="1200" spc="-50" dirty="0">
+                <a:solidFill>
+                  <a:srgbClr val="13132C"/>
+                </a:solidFill>
+                <a:latin typeface="Tahoma"/>
+                <a:cs typeface="Tahoma"/>
+              </a:rPr>
+              <a:t>Statement</a:t>
+            </a:r>
+            <a:r>
+              <a:rPr sz="1200" spc="-20" dirty="0">
+                <a:solidFill>
+                  <a:srgbClr val="13132C"/>
+                </a:solidFill>
+                <a:latin typeface="Tahoma"/>
+                <a:cs typeface="Tahoma"/>
+              </a:rPr>
+              <a:t> </a:t>
+            </a:r>
+            <a:r>
+              <a:rPr sz="1200" spc="355" dirty="0">
+                <a:solidFill>
+                  <a:srgbClr val="13132C"/>
+                </a:solidFill>
+                <a:latin typeface="Tahoma"/>
+                <a:cs typeface="Tahoma"/>
+              </a:rPr>
+              <a:t>•</a:t>
+            </a:r>
+            <a:r>
+              <a:rPr sz="1200" spc="-25" dirty="0">
+                <a:solidFill>
+                  <a:srgbClr val="13132C"/>
+                </a:solidFill>
+                <a:latin typeface="Tahoma"/>
+                <a:cs typeface="Tahoma"/>
+              </a:rPr>
+              <a:t> </a:t>
+            </a:r>
+            <a:r>
+              <a:rPr sz="1200" spc="-45" dirty="0">
+                <a:solidFill>
+                  <a:srgbClr val="13132C"/>
+                </a:solidFill>
+                <a:latin typeface="Tahoma"/>
+                <a:cs typeface="Tahoma"/>
+              </a:rPr>
+              <a:t>Proposed</a:t>
+            </a:r>
+            <a:r>
+              <a:rPr sz="1200" spc="-20" dirty="0">
+                <a:solidFill>
+                  <a:srgbClr val="13132C"/>
+                </a:solidFill>
+                <a:latin typeface="Tahoma"/>
+                <a:cs typeface="Tahoma"/>
+              </a:rPr>
+              <a:t> </a:t>
+            </a:r>
+            <a:r>
+              <a:rPr sz="1200" spc="-30" dirty="0">
+                <a:solidFill>
+                  <a:srgbClr val="13132C"/>
+                </a:solidFill>
+                <a:latin typeface="Tahoma"/>
+                <a:cs typeface="Tahoma"/>
+              </a:rPr>
+              <a:t>Solution</a:t>
+            </a:r>
+            <a:r>
+              <a:rPr sz="1200" spc="-20" dirty="0">
+                <a:solidFill>
+                  <a:srgbClr val="13132C"/>
+                </a:solidFill>
+                <a:latin typeface="Tahoma"/>
+                <a:cs typeface="Tahoma"/>
+              </a:rPr>
+              <a:t> </a:t>
+            </a:r>
+            <a:r>
+              <a:rPr sz="1200" spc="355" dirty="0">
+                <a:solidFill>
+                  <a:srgbClr val="13132C"/>
+                </a:solidFill>
+                <a:latin typeface="Tahoma"/>
+                <a:cs typeface="Tahoma"/>
+              </a:rPr>
+              <a:t>•</a:t>
+            </a:r>
+            <a:r>
+              <a:rPr sz="1200" spc="-20" dirty="0">
+                <a:solidFill>
+                  <a:srgbClr val="13132C"/>
+                </a:solidFill>
+                <a:latin typeface="Tahoma"/>
+                <a:cs typeface="Tahoma"/>
+              </a:rPr>
+              <a:t> </a:t>
+            </a:r>
+            <a:r>
+              <a:rPr sz="1200" spc="-35" dirty="0">
+                <a:solidFill>
+                  <a:srgbClr val="13132C"/>
+                </a:solidFill>
+                <a:latin typeface="Tahoma"/>
+                <a:cs typeface="Tahoma"/>
+              </a:rPr>
+              <a:t>Overall</a:t>
+            </a:r>
+            <a:r>
+              <a:rPr sz="1200" spc="-20" dirty="0">
+                <a:solidFill>
+                  <a:srgbClr val="13132C"/>
+                </a:solidFill>
+                <a:latin typeface="Tahoma"/>
+                <a:cs typeface="Tahoma"/>
+              </a:rPr>
+              <a:t> </a:t>
+            </a:r>
+            <a:r>
+              <a:rPr sz="1200" spc="-35" dirty="0">
+                <a:solidFill>
+                  <a:srgbClr val="13132C"/>
+                </a:solidFill>
+                <a:latin typeface="Tahoma"/>
+                <a:cs typeface="Tahoma"/>
+              </a:rPr>
+              <a:t>Architecture</a:t>
+            </a:r>
+            <a:r>
+              <a:rPr sz="1200" spc="-20" dirty="0">
+                <a:solidFill>
+                  <a:srgbClr val="13132C"/>
+                </a:solidFill>
+                <a:latin typeface="Tahoma"/>
+                <a:cs typeface="Tahoma"/>
+              </a:rPr>
+              <a:t> </a:t>
+            </a:r>
+            <a:r>
+              <a:rPr sz="1200" spc="305" dirty="0">
+                <a:solidFill>
+                  <a:srgbClr val="13132C"/>
+                </a:solidFill>
+                <a:latin typeface="Tahoma"/>
+                <a:cs typeface="Tahoma"/>
+              </a:rPr>
+              <a:t>• </a:t>
+            </a:r>
+            <a:r>
+              <a:rPr sz="1200" dirty="0">
+                <a:solidFill>
+                  <a:srgbClr val="13132C"/>
+                </a:solidFill>
+                <a:latin typeface="Tahoma"/>
+                <a:cs typeface="Tahoma"/>
+              </a:rPr>
+              <a:t>KPI</a:t>
+            </a:r>
+            <a:r>
+              <a:rPr sz="1200" spc="30" dirty="0">
+                <a:solidFill>
+                  <a:srgbClr val="13132C"/>
+                </a:solidFill>
+                <a:latin typeface="Tahoma"/>
+                <a:cs typeface="Tahoma"/>
+              </a:rPr>
+              <a:t> </a:t>
+            </a:r>
+            <a:r>
+              <a:rPr sz="1200" spc="-45" dirty="0">
+                <a:solidFill>
+                  <a:srgbClr val="13132C"/>
+                </a:solidFill>
+                <a:latin typeface="Tahoma"/>
+                <a:cs typeface="Tahoma"/>
+              </a:rPr>
+              <a:t>Degradation</a:t>
+            </a:r>
+            <a:r>
+              <a:rPr sz="1200" spc="30" dirty="0">
+                <a:solidFill>
+                  <a:srgbClr val="13132C"/>
+                </a:solidFill>
+                <a:latin typeface="Tahoma"/>
+                <a:cs typeface="Tahoma"/>
+              </a:rPr>
+              <a:t> </a:t>
+            </a:r>
+            <a:r>
+              <a:rPr sz="1200" spc="-10" dirty="0">
+                <a:solidFill>
+                  <a:srgbClr val="13132C"/>
+                </a:solidFill>
+                <a:latin typeface="Tahoma"/>
+                <a:cs typeface="Tahoma"/>
+              </a:rPr>
+              <a:t>Analyzer</a:t>
+            </a:r>
+            <a:endParaRPr sz="1200">
+              <a:latin typeface="Tahoma"/>
+              <a:cs typeface="Tahoma"/>
+            </a:endParaRPr>
+          </a:p>
+        </p:txBody>
+      </p:sp>
+      <p:grpSp>
+        <p:nvGrpSpPr>
+          <p:cNvPr id="9" name="object 9"/>
+          <p:cNvGrpSpPr/>
+          <p:nvPr/>
+        </p:nvGrpSpPr>
+        <p:grpSpPr>
+          <a:xfrm>
+            <a:off x="0" y="3125279"/>
+            <a:ext cx="5760085" cy="114935"/>
+            <a:chOff x="0" y="3125279"/>
+            <a:chExt cx="5760085" cy="114935"/>
+          </a:xfrm>
+        </p:grpSpPr>
+        <p:sp>
+          <p:nvSpPr>
+            <p:cNvPr id="10" name="object 10"/>
+            <p:cNvSpPr/>
+            <p:nvPr/>
+          </p:nvSpPr>
+          <p:spPr>
+            <a:xfrm>
+              <a:off x="0" y="3125279"/>
+              <a:ext cx="2016125" cy="114935"/>
+            </a:xfrm>
+            <a:custGeom>
+              <a:avLst/>
+              <a:gdLst/>
+              <a:ahLst/>
+              <a:cxnLst/>
+              <a:rect l="l" t="t" r="r" b="b"/>
+              <a:pathLst>
+                <a:path w="2016125" h="114935">
+                  <a:moveTo>
+                    <a:pt x="2016036" y="0"/>
+                  </a:moveTo>
+                  <a:lnTo>
+                    <a:pt x="0" y="0"/>
+                  </a:lnTo>
+                  <a:lnTo>
+                    <a:pt x="0" y="114719"/>
+                  </a:lnTo>
+                  <a:lnTo>
+                    <a:pt x="2016036" y="114719"/>
+                  </a:lnTo>
+                  <a:lnTo>
+                    <a:pt x="2016036" y="0"/>
+                  </a:lnTo>
+                  <a:close/>
+                </a:path>
+              </a:pathLst>
+            </a:custGeom>
+            <a:solidFill>
+              <a:srgbClr val="B41313"/>
+            </a:solidFill>
+          </p:spPr>
+          <p:txBody>
+            <a:bodyPr wrap="square" lIns="0" tIns="0" rIns="0" bIns="0" rtlCol="0"/>
+            <a:lstStyle/>
+            <a:p>
+              <a:endParaRPr/>
+            </a:p>
+          </p:txBody>
+        </p:sp>
+        <p:sp>
+          <p:nvSpPr>
+            <p:cNvPr id="11" name="object 11"/>
+            <p:cNvSpPr/>
+            <p:nvPr/>
+          </p:nvSpPr>
+          <p:spPr>
+            <a:xfrm>
+              <a:off x="2016036" y="3125279"/>
+              <a:ext cx="2592070" cy="114935"/>
+            </a:xfrm>
+            <a:custGeom>
+              <a:avLst/>
+              <a:gdLst/>
+              <a:ahLst/>
+              <a:cxnLst/>
+              <a:rect l="l" t="t" r="r" b="b"/>
+              <a:pathLst>
+                <a:path w="2592070" h="114935">
+                  <a:moveTo>
+                    <a:pt x="2591981" y="0"/>
+                  </a:moveTo>
+                  <a:lnTo>
+                    <a:pt x="0" y="0"/>
+                  </a:lnTo>
+                  <a:lnTo>
+                    <a:pt x="0" y="114719"/>
+                  </a:lnTo>
+                  <a:lnTo>
+                    <a:pt x="2591981" y="114719"/>
+                  </a:lnTo>
+                  <a:lnTo>
+                    <a:pt x="2591981" y="0"/>
+                  </a:lnTo>
+                  <a:close/>
+                </a:path>
+              </a:pathLst>
+            </a:custGeom>
+            <a:solidFill>
+              <a:srgbClr val="37374C"/>
+            </a:solidFill>
+          </p:spPr>
+          <p:txBody>
+            <a:bodyPr wrap="square" lIns="0" tIns="0" rIns="0" bIns="0" rtlCol="0"/>
+            <a:lstStyle/>
+            <a:p>
+              <a:endParaRPr/>
+            </a:p>
+          </p:txBody>
+        </p:sp>
+        <p:sp>
+          <p:nvSpPr>
+            <p:cNvPr id="12" name="object 12"/>
+            <p:cNvSpPr/>
+            <p:nvPr/>
+          </p:nvSpPr>
+          <p:spPr>
+            <a:xfrm>
+              <a:off x="4608017" y="3125279"/>
+              <a:ext cx="1152525" cy="114935"/>
+            </a:xfrm>
+            <a:custGeom>
+              <a:avLst/>
+              <a:gdLst/>
+              <a:ahLst/>
+              <a:cxnLst/>
+              <a:rect l="l" t="t" r="r" b="b"/>
+              <a:pathLst>
+                <a:path w="1152525" h="114935">
+                  <a:moveTo>
+                    <a:pt x="1151978" y="0"/>
+                  </a:moveTo>
+                  <a:lnTo>
+                    <a:pt x="0" y="0"/>
+                  </a:lnTo>
+                  <a:lnTo>
+                    <a:pt x="0" y="114719"/>
+                  </a:lnTo>
+                  <a:lnTo>
+                    <a:pt x="1151978" y="114719"/>
+                  </a:lnTo>
+                  <a:lnTo>
+                    <a:pt x="1151978" y="0"/>
+                  </a:lnTo>
+                  <a:close/>
+                </a:path>
+              </a:pathLst>
+            </a:custGeom>
+            <a:solidFill>
+              <a:srgbClr val="13132C"/>
+            </a:solidFill>
+          </p:spPr>
+          <p:txBody>
+            <a:bodyPr wrap="square" lIns="0" tIns="0" rIns="0" bIns="0" rtlCol="0"/>
+            <a:lstStyle/>
+            <a:p>
+              <a:endParaRPr/>
+            </a:p>
+          </p:txBody>
+        </p:sp>
+      </p:grpSp>
+      <p:sp>
+        <p:nvSpPr>
+          <p:cNvPr id="13" name="object 13"/>
+          <p:cNvSpPr txBox="1">
+            <a:spLocks noGrp="1"/>
+          </p:cNvSpPr>
+          <p:nvPr>
+            <p:ph type="ftr" sz="quarter" idx="5"/>
+          </p:nvPr>
+        </p:nvSpPr>
+        <p:spPr>
+          <a:prstGeom prst="rect">
+            <a:avLst/>
+          </a:prstGeom>
+        </p:spPr>
+        <p:txBody>
+          <a:bodyPr vert="horz" wrap="square" lIns="0" tIns="24130" rIns="0" bIns="0" rtlCol="0">
+            <a:spAutoFit/>
+          </a:bodyPr>
+          <a:lstStyle/>
+          <a:p>
+            <a:pPr marL="12700">
+              <a:lnSpc>
+                <a:spcPct val="100000"/>
+              </a:lnSpc>
+              <a:spcBef>
+                <a:spcPts val="190"/>
+              </a:spcBef>
+            </a:pPr>
+            <a:r>
+              <a:rPr dirty="0"/>
+              <a:t>ITI </a:t>
+            </a:r>
+            <a:r>
+              <a:rPr spc="-10" dirty="0"/>
+              <a:t>Intake</a:t>
+            </a:r>
+            <a:r>
+              <a:rPr spc="5" dirty="0"/>
+              <a:t> </a:t>
+            </a:r>
+            <a:r>
+              <a:rPr spc="-25" dirty="0"/>
+              <a:t>46</a:t>
+            </a:r>
+          </a:p>
+        </p:txBody>
+      </p:sp>
+      <p:sp>
+        <p:nvSpPr>
+          <p:cNvPr id="14" name="object 14"/>
+          <p:cNvSpPr txBox="1"/>
+          <p:nvPr/>
+        </p:nvSpPr>
+        <p:spPr>
+          <a:xfrm>
+            <a:off x="3100044" y="3105948"/>
+            <a:ext cx="424180" cy="137160"/>
+          </a:xfrm>
+          <a:prstGeom prst="rect">
+            <a:avLst/>
+          </a:prstGeom>
+        </p:spPr>
+        <p:txBody>
+          <a:bodyPr vert="horz" wrap="square" lIns="0" tIns="24130" rIns="0" bIns="0" rtlCol="0">
+            <a:spAutoFit/>
+          </a:bodyPr>
+          <a:lstStyle/>
+          <a:p>
+            <a:pPr marL="12700">
+              <a:lnSpc>
+                <a:spcPct val="100000"/>
+              </a:lnSpc>
+              <a:spcBef>
+                <a:spcPts val="190"/>
+              </a:spcBef>
+            </a:pPr>
+            <a:r>
+              <a:rPr sz="600" spc="-10" dirty="0">
+                <a:solidFill>
+                  <a:srgbClr val="FFFFFF"/>
+                </a:solidFill>
+                <a:latin typeface="Tahoma"/>
+                <a:cs typeface="Tahoma"/>
+                <a:hlinkClick r:id="rId2" action="ppaction://hlinksldjump"/>
+              </a:rPr>
+              <a:t>RANPilotAI</a:t>
+            </a:r>
+            <a:endParaRPr sz="600" dirty="0">
+              <a:latin typeface="Tahoma"/>
+              <a:cs typeface="Tahoma"/>
+            </a:endParaRPr>
+          </a:p>
+        </p:txBody>
+      </p:sp>
+      <p:sp>
+        <p:nvSpPr>
+          <p:cNvPr id="15" name="object 15"/>
+          <p:cNvSpPr txBox="1">
+            <a:spLocks noGrp="1"/>
+          </p:cNvSpPr>
+          <p:nvPr>
+            <p:ph type="sldNum" sz="quarter" idx="7"/>
+          </p:nvPr>
+        </p:nvSpPr>
+        <p:spPr>
+          <a:prstGeom prst="rect">
+            <a:avLst/>
+          </a:prstGeom>
+        </p:spPr>
+        <p:txBody>
+          <a:bodyPr vert="horz" wrap="square" lIns="0" tIns="24130" rIns="0" bIns="0" rtlCol="0">
+            <a:spAutoFit/>
+          </a:bodyPr>
+          <a:lstStyle/>
+          <a:p>
+            <a:pPr marL="12700">
+              <a:lnSpc>
+                <a:spcPct val="100000"/>
+              </a:lnSpc>
+              <a:spcBef>
+                <a:spcPts val="190"/>
+              </a:spcBef>
+            </a:pPr>
+            <a:fld id="{81D60167-4931-47E6-BA6A-407CBD079E47}" type="slidenum">
+              <a:rPr dirty="0"/>
+              <a:t>3</a:t>
+            </a:fld>
+            <a:r>
+              <a:rPr spc="10" dirty="0"/>
+              <a:t> </a:t>
+            </a:r>
+            <a:r>
+              <a:rPr spc="90" dirty="0"/>
+              <a:t>/</a:t>
+            </a:r>
+            <a:r>
+              <a:rPr spc="10" dirty="0"/>
+              <a:t> </a:t>
+            </a:r>
+            <a:r>
+              <a:rPr spc="-25" dirty="0"/>
+              <a:t>47</a:t>
+            </a:r>
+          </a:p>
+        </p:txBody>
+      </p:sp>
+    </p:spTree>
+  </p:cSld>
+  <p:clrMapOvr>
+    <a:masterClrMapping/>
+  </p:clrMapOvr>
+  <p:transition>
+    <p:cut/>
+  </p:transition>
+</p:sld>
+</file>
+
+<file path=ppt/slides/slide30.xml><?xml version="1.0" encoding="utf-8"?>
 <p:sld xmlns:a="http://schemas.openxmlformats.org/drawingml/2006/main" xmlns:r="http://schemas.openxmlformats.org/officeDocument/2006/relationships" xmlns:p="http://schemas.openxmlformats.org/presentationml/2006/main">
   <p:cSld>
     <p:spTree>
@@ -33635,7 +34689,7 @@
             </a:pPr>
             <a:fld id="{81D60167-4931-47E6-BA6A-407CBD079E47}" type="slidenum">
               <a:rPr spc="-30" dirty="0"/>
-              <a:t>29</a:t>
+              <a:t>30</a:t>
             </a:fld>
             <a:r>
               <a:rPr spc="-55" dirty="0"/>
@@ -33672,980 +34726,7 @@
 </p:sld>
 </file>
 
-<file path=ppt/slides/slide3.xml><?xml version="1.0" encoding="utf-8"?>
-<p:sld xmlns:a="http://schemas.openxmlformats.org/drawingml/2006/main" xmlns:r="http://schemas.openxmlformats.org/officeDocument/2006/relationships" xmlns:p="http://schemas.openxmlformats.org/presentationml/2006/main" showMasterSp="0">
-  <p:cSld>
-    <p:spTree>
-      <p:nvGrpSpPr>
-        <p:cNvPr id="1" name=""/>
-        <p:cNvGrpSpPr/>
-        <p:nvPr/>
-      </p:nvGrpSpPr>
-      <p:grpSpPr>
-        <a:xfrm>
-          <a:off x="0" y="0"/>
-          <a:ext cx="0" cy="0"/>
-          <a:chOff x="0" y="0"/>
-          <a:chExt cx="0" cy="0"/>
-        </a:xfrm>
-      </p:grpSpPr>
-      <p:grpSp>
-        <p:nvGrpSpPr>
-          <p:cNvPr id="2" name="object 2"/>
-          <p:cNvGrpSpPr/>
-          <p:nvPr/>
-        </p:nvGrpSpPr>
-        <p:grpSpPr>
-          <a:xfrm>
-            <a:off x="97827" y="874331"/>
-            <a:ext cx="4523105" cy="494030"/>
-            <a:chOff x="97827" y="874331"/>
-            <a:chExt cx="4523105" cy="494030"/>
-          </a:xfrm>
-        </p:grpSpPr>
-        <p:sp>
-          <p:nvSpPr>
-            <p:cNvPr id="3" name="object 3"/>
-            <p:cNvSpPr/>
-            <p:nvPr/>
-          </p:nvSpPr>
-          <p:spPr>
-            <a:xfrm>
-              <a:off x="97827" y="874331"/>
-              <a:ext cx="4472305" cy="82550"/>
-            </a:xfrm>
-            <a:custGeom>
-              <a:avLst/>
-              <a:gdLst/>
-              <a:ahLst/>
-              <a:cxnLst/>
-              <a:rect l="l" t="t" r="r" b="b"/>
-              <a:pathLst>
-                <a:path w="4472305" h="82550">
-                  <a:moveTo>
-                    <a:pt x="4421063" y="0"/>
-                  </a:moveTo>
-                  <a:lnTo>
-                    <a:pt x="50800" y="0"/>
-                  </a:lnTo>
-                  <a:lnTo>
-                    <a:pt x="31075" y="4008"/>
-                  </a:lnTo>
-                  <a:lnTo>
-                    <a:pt x="14922" y="14922"/>
-                  </a:lnTo>
-                  <a:lnTo>
-                    <a:pt x="4008" y="31075"/>
-                  </a:lnTo>
-                  <a:lnTo>
-                    <a:pt x="0" y="50800"/>
-                  </a:lnTo>
-                  <a:lnTo>
-                    <a:pt x="0" y="82384"/>
-                  </a:lnTo>
-                  <a:lnTo>
-                    <a:pt x="4471864" y="82384"/>
-                  </a:lnTo>
-                  <a:lnTo>
-                    <a:pt x="4471864" y="50800"/>
-                  </a:lnTo>
-                  <a:lnTo>
-                    <a:pt x="4467855" y="31075"/>
-                  </a:lnTo>
-                  <a:lnTo>
-                    <a:pt x="4456941" y="14922"/>
-                  </a:lnTo>
-                  <a:lnTo>
-                    <a:pt x="4440788" y="4008"/>
-                  </a:lnTo>
-                  <a:lnTo>
-                    <a:pt x="4421063" y="0"/>
-                  </a:lnTo>
-                  <a:close/>
-                </a:path>
-              </a:pathLst>
-            </a:custGeom>
-            <a:solidFill>
-              <a:srgbClr val="B41313"/>
-            </a:solidFill>
-          </p:spPr>
-          <p:txBody>
-            <a:bodyPr wrap="square" lIns="0" tIns="0" rIns="0" bIns="0" rtlCol="0"/>
-            <a:lstStyle/>
-            <a:p>
-              <a:endParaRPr/>
-            </a:p>
-          </p:txBody>
-        </p:sp>
-        <p:sp>
-          <p:nvSpPr>
-            <p:cNvPr id="4" name="object 4"/>
-            <p:cNvSpPr/>
-            <p:nvPr/>
-          </p:nvSpPr>
-          <p:spPr>
-            <a:xfrm>
-              <a:off x="148628" y="937580"/>
-              <a:ext cx="4472305" cy="431165"/>
-            </a:xfrm>
-            <a:custGeom>
-              <a:avLst/>
-              <a:gdLst/>
-              <a:ahLst/>
-              <a:cxnLst/>
-              <a:rect l="l" t="t" r="r" b="b"/>
-              <a:pathLst>
-                <a:path w="4472305" h="431165">
-                  <a:moveTo>
-                    <a:pt x="4471864" y="0"/>
-                  </a:moveTo>
-                  <a:lnTo>
-                    <a:pt x="0" y="0"/>
-                  </a:lnTo>
-                  <a:lnTo>
-                    <a:pt x="0" y="430667"/>
-                  </a:lnTo>
-                  <a:lnTo>
-                    <a:pt x="4471864" y="430667"/>
-                  </a:lnTo>
-                  <a:lnTo>
-                    <a:pt x="4471864" y="0"/>
-                  </a:lnTo>
-                  <a:close/>
-                </a:path>
-              </a:pathLst>
-            </a:custGeom>
-            <a:solidFill>
-              <a:srgbClr val="000000"/>
-            </a:solidFill>
-          </p:spPr>
-          <p:txBody>
-            <a:bodyPr wrap="square" lIns="0" tIns="0" rIns="0" bIns="0" rtlCol="0"/>
-            <a:lstStyle/>
-            <a:p>
-              <a:endParaRPr/>
-            </a:p>
-          </p:txBody>
-        </p:sp>
-        <p:sp>
-          <p:nvSpPr>
-            <p:cNvPr id="5" name="object 5"/>
-            <p:cNvSpPr/>
-            <p:nvPr/>
-          </p:nvSpPr>
-          <p:spPr>
-            <a:xfrm>
-              <a:off x="97827" y="918743"/>
-              <a:ext cx="4472305" cy="398780"/>
-            </a:xfrm>
-            <a:custGeom>
-              <a:avLst/>
-              <a:gdLst/>
-              <a:ahLst/>
-              <a:cxnLst/>
-              <a:rect l="l" t="t" r="r" b="b"/>
-              <a:pathLst>
-                <a:path w="4472305" h="398780">
-                  <a:moveTo>
-                    <a:pt x="4471864" y="0"/>
-                  </a:moveTo>
-                  <a:lnTo>
-                    <a:pt x="0" y="0"/>
-                  </a:lnTo>
-                  <a:lnTo>
-                    <a:pt x="0" y="347903"/>
-                  </a:lnTo>
-                  <a:lnTo>
-                    <a:pt x="4008" y="367627"/>
-                  </a:lnTo>
-                  <a:lnTo>
-                    <a:pt x="14922" y="383780"/>
-                  </a:lnTo>
-                  <a:lnTo>
-                    <a:pt x="31075" y="394695"/>
-                  </a:lnTo>
-                  <a:lnTo>
-                    <a:pt x="50800" y="398703"/>
-                  </a:lnTo>
-                  <a:lnTo>
-                    <a:pt x="4421063" y="398703"/>
-                  </a:lnTo>
-                  <a:lnTo>
-                    <a:pt x="4440788" y="394695"/>
-                  </a:lnTo>
-                  <a:lnTo>
-                    <a:pt x="4456941" y="383780"/>
-                  </a:lnTo>
-                  <a:lnTo>
-                    <a:pt x="4467855" y="367627"/>
-                  </a:lnTo>
-                  <a:lnTo>
-                    <a:pt x="4471864" y="347903"/>
-                  </a:lnTo>
-                  <a:lnTo>
-                    <a:pt x="4471864" y="0"/>
-                  </a:lnTo>
-                  <a:close/>
-                </a:path>
-              </a:pathLst>
-            </a:custGeom>
-            <a:solidFill>
-              <a:srgbClr val="B41313"/>
-            </a:solidFill>
-          </p:spPr>
-          <p:txBody>
-            <a:bodyPr wrap="square" lIns="0" tIns="0" rIns="0" bIns="0" rtlCol="0"/>
-            <a:lstStyle/>
-            <a:p>
-              <a:endParaRPr/>
-            </a:p>
-          </p:txBody>
-        </p:sp>
-      </p:grpSp>
-      <p:sp>
-        <p:nvSpPr>
-          <p:cNvPr id="6" name="object 6" descr="$PPTXTitle"/>
-          <p:cNvSpPr txBox="1">
-            <a:spLocks noGrp="1"/>
-          </p:cNvSpPr>
-          <p:nvPr>
-            <p:ph type="title"/>
-          </p:nvPr>
-        </p:nvSpPr>
-        <p:spPr>
-          <a:xfrm>
-            <a:off x="148628" y="937580"/>
-            <a:ext cx="4472305" cy="431165"/>
-          </a:xfrm>
-          <a:prstGeom prst="rect">
-            <a:avLst/>
-          </a:prstGeom>
-        </p:spPr>
-        <p:txBody>
-          <a:bodyPr vert="horz" wrap="square" lIns="0" tIns="56515" rIns="0" bIns="0" rtlCol="0">
-            <a:spAutoFit/>
-          </a:bodyPr>
-          <a:lstStyle/>
-          <a:p>
-            <a:pPr marR="93980" algn="ctr">
-              <a:lnSpc>
-                <a:spcPct val="100000"/>
-              </a:lnSpc>
-              <a:spcBef>
-                <a:spcPts val="445"/>
-              </a:spcBef>
-            </a:pPr>
-            <a:r>
-              <a:rPr spc="-190" dirty="0"/>
-              <a:t>Tasneem</a:t>
-            </a:r>
-            <a:r>
-              <a:rPr spc="105" dirty="0"/>
-              <a:t> </a:t>
-            </a:r>
-            <a:r>
-              <a:rPr spc="-20" dirty="0"/>
-              <a:t>Amein</a:t>
-            </a:r>
-          </a:p>
-        </p:txBody>
-      </p:sp>
-      <p:sp>
-        <p:nvSpPr>
-          <p:cNvPr id="7" name="object 7"/>
-          <p:cNvSpPr/>
-          <p:nvPr/>
-        </p:nvSpPr>
-        <p:spPr>
-          <a:xfrm>
-            <a:off x="97815" y="1499501"/>
-            <a:ext cx="4472305" cy="584835"/>
-          </a:xfrm>
-          <a:custGeom>
-            <a:avLst/>
-            <a:gdLst/>
-            <a:ahLst/>
-            <a:cxnLst/>
-            <a:rect l="l" t="t" r="r" b="b"/>
-            <a:pathLst>
-              <a:path w="4472305" h="584835">
-                <a:moveTo>
-                  <a:pt x="4471873" y="44424"/>
-                </a:moveTo>
-                <a:lnTo>
-                  <a:pt x="4470565" y="44424"/>
-                </a:lnTo>
-                <a:lnTo>
-                  <a:pt x="4467860" y="31076"/>
-                </a:lnTo>
-                <a:lnTo>
-                  <a:pt x="4456950" y="14922"/>
-                </a:lnTo>
-                <a:lnTo>
-                  <a:pt x="4440796" y="4013"/>
-                </a:lnTo>
-                <a:lnTo>
-                  <a:pt x="4421073" y="0"/>
-                </a:lnTo>
-                <a:lnTo>
-                  <a:pt x="50812" y="0"/>
-                </a:lnTo>
-                <a:lnTo>
-                  <a:pt x="31076" y="4013"/>
-                </a:lnTo>
-                <a:lnTo>
-                  <a:pt x="14922" y="14922"/>
-                </a:lnTo>
-                <a:lnTo>
-                  <a:pt x="4013" y="31076"/>
-                </a:lnTo>
-                <a:lnTo>
-                  <a:pt x="1295" y="44424"/>
-                </a:lnTo>
-                <a:lnTo>
-                  <a:pt x="0" y="44424"/>
-                </a:lnTo>
-                <a:lnTo>
-                  <a:pt x="0" y="50800"/>
-                </a:lnTo>
-                <a:lnTo>
-                  <a:pt x="0" y="82384"/>
-                </a:lnTo>
-                <a:lnTo>
-                  <a:pt x="0" y="533603"/>
-                </a:lnTo>
-                <a:lnTo>
-                  <a:pt x="4013" y="553339"/>
-                </a:lnTo>
-                <a:lnTo>
-                  <a:pt x="14922" y="569493"/>
-                </a:lnTo>
-                <a:lnTo>
-                  <a:pt x="31076" y="580402"/>
-                </a:lnTo>
-                <a:lnTo>
-                  <a:pt x="50812" y="584415"/>
-                </a:lnTo>
-                <a:lnTo>
-                  <a:pt x="4421073" y="584415"/>
-                </a:lnTo>
-                <a:lnTo>
-                  <a:pt x="4440796" y="580402"/>
-                </a:lnTo>
-                <a:lnTo>
-                  <a:pt x="4456950" y="569493"/>
-                </a:lnTo>
-                <a:lnTo>
-                  <a:pt x="4467860" y="553339"/>
-                </a:lnTo>
-                <a:lnTo>
-                  <a:pt x="4471873" y="533603"/>
-                </a:lnTo>
-                <a:lnTo>
-                  <a:pt x="4471873" y="82384"/>
-                </a:lnTo>
-                <a:lnTo>
-                  <a:pt x="4471873" y="50800"/>
-                </a:lnTo>
-                <a:lnTo>
-                  <a:pt x="4471873" y="44424"/>
-                </a:lnTo>
-                <a:close/>
-              </a:path>
-            </a:pathLst>
-          </a:custGeom>
-          <a:solidFill>
-            <a:srgbClr val="E5E5EB"/>
-          </a:solidFill>
-        </p:spPr>
-        <p:txBody>
-          <a:bodyPr wrap="square" lIns="0" tIns="0" rIns="0" bIns="0" rtlCol="0"/>
-          <a:lstStyle/>
-          <a:p>
-            <a:endParaRPr/>
-          </a:p>
-        </p:txBody>
-      </p:sp>
-      <p:sp>
-        <p:nvSpPr>
-          <p:cNvPr id="8" name="object 8"/>
-          <p:cNvSpPr txBox="1"/>
-          <p:nvPr/>
-        </p:nvSpPr>
-        <p:spPr>
-          <a:xfrm>
-            <a:off x="234467" y="1586049"/>
-            <a:ext cx="4199890" cy="391160"/>
-          </a:xfrm>
-          <a:prstGeom prst="rect">
-            <a:avLst/>
-          </a:prstGeom>
-        </p:spPr>
-        <p:txBody>
-          <a:bodyPr vert="horz" wrap="square" lIns="0" tIns="12065" rIns="0" bIns="0" rtlCol="0">
-            <a:spAutoFit/>
-          </a:bodyPr>
-          <a:lstStyle/>
-          <a:p>
-            <a:pPr marL="1287780" marR="5080" indent="-1275715">
-              <a:lnSpc>
-                <a:spcPct val="100000"/>
-              </a:lnSpc>
-              <a:spcBef>
-                <a:spcPts val="95"/>
-              </a:spcBef>
-            </a:pPr>
-            <a:r>
-              <a:rPr sz="1200" spc="-35" dirty="0">
-                <a:solidFill>
-                  <a:srgbClr val="13132C"/>
-                </a:solidFill>
-                <a:latin typeface="Tahoma"/>
-                <a:cs typeface="Tahoma"/>
-              </a:rPr>
-              <a:t>Problem</a:t>
-            </a:r>
-            <a:r>
-              <a:rPr sz="1200" spc="-25" dirty="0">
-                <a:solidFill>
-                  <a:srgbClr val="13132C"/>
-                </a:solidFill>
-                <a:latin typeface="Tahoma"/>
-                <a:cs typeface="Tahoma"/>
-              </a:rPr>
-              <a:t> </a:t>
-            </a:r>
-            <a:r>
-              <a:rPr sz="1200" spc="-50" dirty="0">
-                <a:solidFill>
-                  <a:srgbClr val="13132C"/>
-                </a:solidFill>
-                <a:latin typeface="Tahoma"/>
-                <a:cs typeface="Tahoma"/>
-              </a:rPr>
-              <a:t>Statement</a:t>
-            </a:r>
-            <a:r>
-              <a:rPr sz="1200" spc="-20" dirty="0">
-                <a:solidFill>
-                  <a:srgbClr val="13132C"/>
-                </a:solidFill>
-                <a:latin typeface="Tahoma"/>
-                <a:cs typeface="Tahoma"/>
-              </a:rPr>
-              <a:t> </a:t>
-            </a:r>
-            <a:r>
-              <a:rPr sz="1200" spc="355" dirty="0">
-                <a:solidFill>
-                  <a:srgbClr val="13132C"/>
-                </a:solidFill>
-                <a:latin typeface="Tahoma"/>
-                <a:cs typeface="Tahoma"/>
-              </a:rPr>
-              <a:t>•</a:t>
-            </a:r>
-            <a:r>
-              <a:rPr sz="1200" spc="-25" dirty="0">
-                <a:solidFill>
-                  <a:srgbClr val="13132C"/>
-                </a:solidFill>
-                <a:latin typeface="Tahoma"/>
-                <a:cs typeface="Tahoma"/>
-              </a:rPr>
-              <a:t> </a:t>
-            </a:r>
-            <a:r>
-              <a:rPr sz="1200" spc="-45" dirty="0">
-                <a:solidFill>
-                  <a:srgbClr val="13132C"/>
-                </a:solidFill>
-                <a:latin typeface="Tahoma"/>
-                <a:cs typeface="Tahoma"/>
-              </a:rPr>
-              <a:t>Proposed</a:t>
-            </a:r>
-            <a:r>
-              <a:rPr sz="1200" spc="-20" dirty="0">
-                <a:solidFill>
-                  <a:srgbClr val="13132C"/>
-                </a:solidFill>
-                <a:latin typeface="Tahoma"/>
-                <a:cs typeface="Tahoma"/>
-              </a:rPr>
-              <a:t> </a:t>
-            </a:r>
-            <a:r>
-              <a:rPr sz="1200" spc="-30" dirty="0">
-                <a:solidFill>
-                  <a:srgbClr val="13132C"/>
-                </a:solidFill>
-                <a:latin typeface="Tahoma"/>
-                <a:cs typeface="Tahoma"/>
-              </a:rPr>
-              <a:t>Solution</a:t>
-            </a:r>
-            <a:r>
-              <a:rPr sz="1200" spc="-20" dirty="0">
-                <a:solidFill>
-                  <a:srgbClr val="13132C"/>
-                </a:solidFill>
-                <a:latin typeface="Tahoma"/>
-                <a:cs typeface="Tahoma"/>
-              </a:rPr>
-              <a:t> </a:t>
-            </a:r>
-            <a:r>
-              <a:rPr sz="1200" spc="355" dirty="0">
-                <a:solidFill>
-                  <a:srgbClr val="13132C"/>
-                </a:solidFill>
-                <a:latin typeface="Tahoma"/>
-                <a:cs typeface="Tahoma"/>
-              </a:rPr>
-              <a:t>•</a:t>
-            </a:r>
-            <a:r>
-              <a:rPr sz="1200" spc="-20" dirty="0">
-                <a:solidFill>
-                  <a:srgbClr val="13132C"/>
-                </a:solidFill>
-                <a:latin typeface="Tahoma"/>
-                <a:cs typeface="Tahoma"/>
-              </a:rPr>
-              <a:t> </a:t>
-            </a:r>
-            <a:r>
-              <a:rPr sz="1200" spc="-35" dirty="0">
-                <a:solidFill>
-                  <a:srgbClr val="13132C"/>
-                </a:solidFill>
-                <a:latin typeface="Tahoma"/>
-                <a:cs typeface="Tahoma"/>
-              </a:rPr>
-              <a:t>Overall</a:t>
-            </a:r>
-            <a:r>
-              <a:rPr sz="1200" spc="-20" dirty="0">
-                <a:solidFill>
-                  <a:srgbClr val="13132C"/>
-                </a:solidFill>
-                <a:latin typeface="Tahoma"/>
-                <a:cs typeface="Tahoma"/>
-              </a:rPr>
-              <a:t> </a:t>
-            </a:r>
-            <a:r>
-              <a:rPr sz="1200" spc="-35" dirty="0">
-                <a:solidFill>
-                  <a:srgbClr val="13132C"/>
-                </a:solidFill>
-                <a:latin typeface="Tahoma"/>
-                <a:cs typeface="Tahoma"/>
-              </a:rPr>
-              <a:t>Architecture</a:t>
-            </a:r>
-            <a:r>
-              <a:rPr sz="1200" spc="-20" dirty="0">
-                <a:solidFill>
-                  <a:srgbClr val="13132C"/>
-                </a:solidFill>
-                <a:latin typeface="Tahoma"/>
-                <a:cs typeface="Tahoma"/>
-              </a:rPr>
-              <a:t> </a:t>
-            </a:r>
-            <a:r>
-              <a:rPr sz="1200" spc="305" dirty="0">
-                <a:solidFill>
-                  <a:srgbClr val="13132C"/>
-                </a:solidFill>
-                <a:latin typeface="Tahoma"/>
-                <a:cs typeface="Tahoma"/>
-              </a:rPr>
-              <a:t>• </a:t>
-            </a:r>
-            <a:r>
-              <a:rPr sz="1200" dirty="0">
-                <a:solidFill>
-                  <a:srgbClr val="13132C"/>
-                </a:solidFill>
-                <a:latin typeface="Tahoma"/>
-                <a:cs typeface="Tahoma"/>
-              </a:rPr>
-              <a:t>KPI</a:t>
-            </a:r>
-            <a:r>
-              <a:rPr sz="1200" spc="30" dirty="0">
-                <a:solidFill>
-                  <a:srgbClr val="13132C"/>
-                </a:solidFill>
-                <a:latin typeface="Tahoma"/>
-                <a:cs typeface="Tahoma"/>
-              </a:rPr>
-              <a:t> </a:t>
-            </a:r>
-            <a:r>
-              <a:rPr sz="1200" spc="-45" dirty="0">
-                <a:solidFill>
-                  <a:srgbClr val="13132C"/>
-                </a:solidFill>
-                <a:latin typeface="Tahoma"/>
-                <a:cs typeface="Tahoma"/>
-              </a:rPr>
-              <a:t>Degradation</a:t>
-            </a:r>
-            <a:r>
-              <a:rPr sz="1200" spc="30" dirty="0">
-                <a:solidFill>
-                  <a:srgbClr val="13132C"/>
-                </a:solidFill>
-                <a:latin typeface="Tahoma"/>
-                <a:cs typeface="Tahoma"/>
-              </a:rPr>
-              <a:t> </a:t>
-            </a:r>
-            <a:r>
-              <a:rPr sz="1200" spc="-10" dirty="0">
-                <a:solidFill>
-                  <a:srgbClr val="13132C"/>
-                </a:solidFill>
-                <a:latin typeface="Tahoma"/>
-                <a:cs typeface="Tahoma"/>
-              </a:rPr>
-              <a:t>Analyzer</a:t>
-            </a:r>
-            <a:endParaRPr sz="1200">
-              <a:latin typeface="Tahoma"/>
-              <a:cs typeface="Tahoma"/>
-            </a:endParaRPr>
-          </a:p>
-        </p:txBody>
-      </p:sp>
-      <p:grpSp>
-        <p:nvGrpSpPr>
-          <p:cNvPr id="9" name="object 9"/>
-          <p:cNvGrpSpPr/>
-          <p:nvPr/>
-        </p:nvGrpSpPr>
-        <p:grpSpPr>
-          <a:xfrm>
-            <a:off x="0" y="3125279"/>
-            <a:ext cx="5760085" cy="114935"/>
-            <a:chOff x="0" y="3125279"/>
-            <a:chExt cx="5760085" cy="114935"/>
-          </a:xfrm>
-        </p:grpSpPr>
-        <p:sp>
-          <p:nvSpPr>
-            <p:cNvPr id="10" name="object 10"/>
-            <p:cNvSpPr/>
-            <p:nvPr/>
-          </p:nvSpPr>
-          <p:spPr>
-            <a:xfrm>
-              <a:off x="0" y="3125279"/>
-              <a:ext cx="2016125" cy="114935"/>
-            </a:xfrm>
-            <a:custGeom>
-              <a:avLst/>
-              <a:gdLst/>
-              <a:ahLst/>
-              <a:cxnLst/>
-              <a:rect l="l" t="t" r="r" b="b"/>
-              <a:pathLst>
-                <a:path w="2016125" h="114935">
-                  <a:moveTo>
-                    <a:pt x="2016036" y="0"/>
-                  </a:moveTo>
-                  <a:lnTo>
-                    <a:pt x="0" y="0"/>
-                  </a:lnTo>
-                  <a:lnTo>
-                    <a:pt x="0" y="114719"/>
-                  </a:lnTo>
-                  <a:lnTo>
-                    <a:pt x="2016036" y="114719"/>
-                  </a:lnTo>
-                  <a:lnTo>
-                    <a:pt x="2016036" y="0"/>
-                  </a:lnTo>
-                  <a:close/>
-                </a:path>
-              </a:pathLst>
-            </a:custGeom>
-            <a:solidFill>
-              <a:srgbClr val="B41313"/>
-            </a:solidFill>
-          </p:spPr>
-          <p:txBody>
-            <a:bodyPr wrap="square" lIns="0" tIns="0" rIns="0" bIns="0" rtlCol="0"/>
-            <a:lstStyle/>
-            <a:p>
-              <a:endParaRPr/>
-            </a:p>
-          </p:txBody>
-        </p:sp>
-        <p:sp>
-          <p:nvSpPr>
-            <p:cNvPr id="11" name="object 11"/>
-            <p:cNvSpPr/>
-            <p:nvPr/>
-          </p:nvSpPr>
-          <p:spPr>
-            <a:xfrm>
-              <a:off x="2016036" y="3125279"/>
-              <a:ext cx="2592070" cy="114935"/>
-            </a:xfrm>
-            <a:custGeom>
-              <a:avLst/>
-              <a:gdLst/>
-              <a:ahLst/>
-              <a:cxnLst/>
-              <a:rect l="l" t="t" r="r" b="b"/>
-              <a:pathLst>
-                <a:path w="2592070" h="114935">
-                  <a:moveTo>
-                    <a:pt x="2591981" y="0"/>
-                  </a:moveTo>
-                  <a:lnTo>
-                    <a:pt x="0" y="0"/>
-                  </a:lnTo>
-                  <a:lnTo>
-                    <a:pt x="0" y="114719"/>
-                  </a:lnTo>
-                  <a:lnTo>
-                    <a:pt x="2591981" y="114719"/>
-                  </a:lnTo>
-                  <a:lnTo>
-                    <a:pt x="2591981" y="0"/>
-                  </a:lnTo>
-                  <a:close/>
-                </a:path>
-              </a:pathLst>
-            </a:custGeom>
-            <a:solidFill>
-              <a:srgbClr val="37374C"/>
-            </a:solidFill>
-          </p:spPr>
-          <p:txBody>
-            <a:bodyPr wrap="square" lIns="0" tIns="0" rIns="0" bIns="0" rtlCol="0"/>
-            <a:lstStyle/>
-            <a:p>
-              <a:endParaRPr/>
-            </a:p>
-          </p:txBody>
-        </p:sp>
-        <p:sp>
-          <p:nvSpPr>
-            <p:cNvPr id="12" name="object 12"/>
-            <p:cNvSpPr/>
-            <p:nvPr/>
-          </p:nvSpPr>
-          <p:spPr>
-            <a:xfrm>
-              <a:off x="4608017" y="3125279"/>
-              <a:ext cx="1152525" cy="114935"/>
-            </a:xfrm>
-            <a:custGeom>
-              <a:avLst/>
-              <a:gdLst/>
-              <a:ahLst/>
-              <a:cxnLst/>
-              <a:rect l="l" t="t" r="r" b="b"/>
-              <a:pathLst>
-                <a:path w="1152525" h="114935">
-                  <a:moveTo>
-                    <a:pt x="1151978" y="0"/>
-                  </a:moveTo>
-                  <a:lnTo>
-                    <a:pt x="0" y="0"/>
-                  </a:lnTo>
-                  <a:lnTo>
-                    <a:pt x="0" y="114719"/>
-                  </a:lnTo>
-                  <a:lnTo>
-                    <a:pt x="1151978" y="114719"/>
-                  </a:lnTo>
-                  <a:lnTo>
-                    <a:pt x="1151978" y="0"/>
-                  </a:lnTo>
-                  <a:close/>
-                </a:path>
-              </a:pathLst>
-            </a:custGeom>
-            <a:solidFill>
-              <a:srgbClr val="13132C"/>
-            </a:solidFill>
-          </p:spPr>
-          <p:txBody>
-            <a:bodyPr wrap="square" lIns="0" tIns="0" rIns="0" bIns="0" rtlCol="0"/>
-            <a:lstStyle/>
-            <a:p>
-              <a:endParaRPr/>
-            </a:p>
-          </p:txBody>
-        </p:sp>
-      </p:grpSp>
-      <p:sp>
-        <p:nvSpPr>
-          <p:cNvPr id="13" name="object 13"/>
-          <p:cNvSpPr txBox="1">
-            <a:spLocks noGrp="1"/>
-          </p:cNvSpPr>
-          <p:nvPr>
-            <p:ph type="ftr" sz="quarter" idx="5"/>
-          </p:nvPr>
-        </p:nvSpPr>
-        <p:spPr>
-          <a:prstGeom prst="rect">
-            <a:avLst/>
-          </a:prstGeom>
-        </p:spPr>
-        <p:txBody>
-          <a:bodyPr vert="horz" wrap="square" lIns="0" tIns="24130" rIns="0" bIns="0" rtlCol="0">
-            <a:spAutoFit/>
-          </a:bodyPr>
-          <a:lstStyle/>
-          <a:p>
-            <a:pPr marL="12700">
-              <a:lnSpc>
-                <a:spcPct val="100000"/>
-              </a:lnSpc>
-              <a:spcBef>
-                <a:spcPts val="190"/>
-              </a:spcBef>
-            </a:pPr>
-            <a:r>
-              <a:rPr dirty="0"/>
-              <a:t>ITI </a:t>
-            </a:r>
-            <a:r>
-              <a:rPr spc="-10" dirty="0"/>
-              <a:t>Intake</a:t>
-            </a:r>
-            <a:r>
-              <a:rPr spc="5" dirty="0"/>
-              <a:t> </a:t>
-            </a:r>
-            <a:r>
-              <a:rPr spc="-25" dirty="0"/>
-              <a:t>46</a:t>
-            </a:r>
-          </a:p>
-        </p:txBody>
-      </p:sp>
-      <p:sp>
-        <p:nvSpPr>
-          <p:cNvPr id="14" name="object 14"/>
-          <p:cNvSpPr txBox="1"/>
-          <p:nvPr/>
-        </p:nvSpPr>
-        <p:spPr>
-          <a:xfrm>
-            <a:off x="3100044" y="3105948"/>
-            <a:ext cx="424180" cy="137160"/>
-          </a:xfrm>
-          <a:prstGeom prst="rect">
-            <a:avLst/>
-          </a:prstGeom>
-        </p:spPr>
-        <p:txBody>
-          <a:bodyPr vert="horz" wrap="square" lIns="0" tIns="24130" rIns="0" bIns="0" rtlCol="0">
-            <a:spAutoFit/>
-          </a:bodyPr>
-          <a:lstStyle/>
-          <a:p>
-            <a:pPr marL="12700">
-              <a:lnSpc>
-                <a:spcPct val="100000"/>
-              </a:lnSpc>
-              <a:spcBef>
-                <a:spcPts val="190"/>
-              </a:spcBef>
-            </a:pPr>
-            <a:r>
-              <a:rPr sz="600" spc="-10" dirty="0">
-                <a:solidFill>
-                  <a:srgbClr val="FFFFFF"/>
-                </a:solidFill>
-                <a:latin typeface="Tahoma"/>
-                <a:cs typeface="Tahoma"/>
-                <a:hlinkClick r:id="rId2" action="ppaction://hlinksldjump"/>
-              </a:rPr>
-              <a:t>RANPilotAI</a:t>
-            </a:r>
-            <a:endParaRPr sz="600" dirty="0">
-              <a:latin typeface="Tahoma"/>
-              <a:cs typeface="Tahoma"/>
-            </a:endParaRPr>
-          </a:p>
-        </p:txBody>
-      </p:sp>
-      <p:sp>
-        <p:nvSpPr>
-          <p:cNvPr id="15" name="object 15"/>
-          <p:cNvSpPr txBox="1">
-            <a:spLocks noGrp="1"/>
-          </p:cNvSpPr>
-          <p:nvPr>
-            <p:ph type="sldNum" sz="quarter" idx="7"/>
-          </p:nvPr>
-        </p:nvSpPr>
-        <p:spPr>
-          <a:prstGeom prst="rect">
-            <a:avLst/>
-          </a:prstGeom>
-        </p:spPr>
-        <p:txBody>
-          <a:bodyPr vert="horz" wrap="square" lIns="0" tIns="24130" rIns="0" bIns="0" rtlCol="0">
-            <a:spAutoFit/>
-          </a:bodyPr>
-          <a:lstStyle/>
-          <a:p>
-            <a:pPr marL="12700">
-              <a:lnSpc>
-                <a:spcPct val="100000"/>
-              </a:lnSpc>
-              <a:spcBef>
-                <a:spcPts val="190"/>
-              </a:spcBef>
-            </a:pPr>
-            <a:fld id="{81D60167-4931-47E6-BA6A-407CBD079E47}" type="slidenum">
-              <a:rPr dirty="0"/>
-              <a:t>3</a:t>
-            </a:fld>
-            <a:r>
-              <a:rPr spc="10" dirty="0"/>
-              <a:t> </a:t>
-            </a:r>
-            <a:r>
-              <a:rPr spc="90" dirty="0"/>
-              <a:t>/</a:t>
-            </a:r>
-            <a:r>
-              <a:rPr spc="10" dirty="0"/>
-              <a:t> </a:t>
-            </a:r>
-            <a:r>
-              <a:rPr spc="-25" dirty="0"/>
-              <a:t>47</a:t>
-            </a:r>
-          </a:p>
-        </p:txBody>
-      </p:sp>
-    </p:spTree>
-  </p:cSld>
-  <p:clrMapOvr>
-    <a:masterClrMapping/>
-  </p:clrMapOvr>
-  <p:transition>
-    <p:cut/>
-  </p:transition>
-</p:sld>
-</file>
-
-<file path=ppt/slides/slide30.xml><?xml version="1.0" encoding="utf-8"?>
+<file path=ppt/slides/slide31.xml><?xml version="1.0" encoding="utf-8"?>
 <p:sld xmlns:a="http://schemas.openxmlformats.org/drawingml/2006/main" xmlns:r="http://schemas.openxmlformats.org/officeDocument/2006/relationships" xmlns:p="http://schemas.openxmlformats.org/presentationml/2006/main">
   <p:cSld>
     <p:spTree>
@@ -35201,7 +35282,7 @@
             </a:pPr>
             <a:fld id="{81D60167-4931-47E6-BA6A-407CBD079E47}" type="slidenum">
               <a:rPr spc="-30" dirty="0"/>
-              <a:t>30</a:t>
+              <a:t>31</a:t>
             </a:fld>
             <a:r>
               <a:rPr spc="-55" dirty="0"/>
@@ -35238,7 +35319,7 @@
 </p:sld>
 </file>
 
-<file path=ppt/slides/slide31.xml><?xml version="1.0" encoding="utf-8"?>
+<file path=ppt/slides/slide32.xml><?xml version="1.0" encoding="utf-8"?>
 <p:sld xmlns:a="http://schemas.openxmlformats.org/drawingml/2006/main" xmlns:r="http://schemas.openxmlformats.org/officeDocument/2006/relationships" xmlns:p="http://schemas.openxmlformats.org/presentationml/2006/main">
   <p:cSld>
     <p:spTree>
@@ -35744,7 +35825,7 @@
             </a:pPr>
             <a:fld id="{81D60167-4931-47E6-BA6A-407CBD079E47}" type="slidenum">
               <a:rPr spc="-30" dirty="0"/>
-              <a:t>31</a:t>
+              <a:t>32</a:t>
             </a:fld>
             <a:r>
               <a:rPr spc="-55" dirty="0"/>
@@ -35781,7 +35862,7 @@
 </p:sld>
 </file>
 
-<file path=ppt/slides/slide32.xml><?xml version="1.0" encoding="utf-8"?>
+<file path=ppt/slides/slide33.xml><?xml version="1.0" encoding="utf-8"?>
 <p:sld xmlns:a="http://schemas.openxmlformats.org/drawingml/2006/main" xmlns:r="http://schemas.openxmlformats.org/officeDocument/2006/relationships" xmlns:p="http://schemas.openxmlformats.org/presentationml/2006/main">
   <p:cSld>
     <p:spTree>
@@ -36277,7 +36358,7 @@
             </a:pPr>
             <a:fld id="{81D60167-4931-47E6-BA6A-407CBD079E47}" type="slidenum">
               <a:rPr spc="-30" dirty="0"/>
-              <a:t>32</a:t>
+              <a:t>33</a:t>
             </a:fld>
             <a:r>
               <a:rPr spc="-55" dirty="0"/>
@@ -36314,7 +36395,7 @@
 </p:sld>
 </file>
 
-<file path=ppt/slides/slide33.xml><?xml version="1.0" encoding="utf-8"?>
+<file path=ppt/slides/slide34.xml><?xml version="1.0" encoding="utf-8"?>
 <p:sld xmlns:a="http://schemas.openxmlformats.org/drawingml/2006/main" xmlns:r="http://schemas.openxmlformats.org/officeDocument/2006/relationships" xmlns:p="http://schemas.openxmlformats.org/presentationml/2006/main">
   <p:cSld>
     <p:spTree>
@@ -36790,7 +36871,7 @@
             </a:pPr>
             <a:fld id="{81D60167-4931-47E6-BA6A-407CBD079E47}" type="slidenum">
               <a:rPr spc="-30" dirty="0"/>
-              <a:t>33</a:t>
+              <a:t>34</a:t>
             </a:fld>
             <a:r>
               <a:rPr spc="-55" dirty="0"/>
@@ -36827,7 +36908,7 @@
 </p:sld>
 </file>
 
-<file path=ppt/slides/slide34.xml><?xml version="1.0" encoding="utf-8"?>
+<file path=ppt/slides/slide35.xml><?xml version="1.0" encoding="utf-8"?>
 <p:sld xmlns:a="http://schemas.openxmlformats.org/drawingml/2006/main" xmlns:r="http://schemas.openxmlformats.org/officeDocument/2006/relationships" xmlns:p="http://schemas.openxmlformats.org/presentationml/2006/main">
   <p:cSld>
     <p:spTree>
@@ -39897,7 +39978,7 @@
             </a:pPr>
             <a:fld id="{81D60167-4931-47E6-BA6A-407CBD079E47}" type="slidenum">
               <a:rPr spc="-30" dirty="0"/>
-              <a:t>34</a:t>
+              <a:t>35</a:t>
             </a:fld>
             <a:r>
               <a:rPr spc="-55" dirty="0"/>
@@ -39934,7 +40015,7 @@
 </p:sld>
 </file>
 
-<file path=ppt/slides/slide35.xml><?xml version="1.0" encoding="utf-8"?>
+<file path=ppt/slides/slide36.xml><?xml version="1.0" encoding="utf-8"?>
 <p:sld xmlns:a="http://schemas.openxmlformats.org/drawingml/2006/main" xmlns:r="http://schemas.openxmlformats.org/officeDocument/2006/relationships" xmlns:p="http://schemas.openxmlformats.org/presentationml/2006/main">
   <p:cSld>
     <p:spTree>
@@ -41206,7 +41287,7 @@
             </a:pPr>
             <a:fld id="{81D60167-4931-47E6-BA6A-407CBD079E47}" type="slidenum">
               <a:rPr spc="-30" dirty="0"/>
-              <a:t>35</a:t>
+              <a:t>36</a:t>
             </a:fld>
             <a:r>
               <a:rPr spc="-55" dirty="0"/>
@@ -41243,7 +41324,7 @@
 </p:sld>
 </file>
 
-<file path=ppt/slides/slide36.xml><?xml version="1.0" encoding="utf-8"?>
+<file path=ppt/slides/slide37.xml><?xml version="1.0" encoding="utf-8"?>
 <p:sld xmlns:a="http://schemas.openxmlformats.org/drawingml/2006/main" xmlns:r="http://schemas.openxmlformats.org/officeDocument/2006/relationships" xmlns:p="http://schemas.openxmlformats.org/presentationml/2006/main">
   <p:cSld>
     <p:spTree>
@@ -42144,7 +42225,7 @@
             </a:pPr>
             <a:fld id="{81D60167-4931-47E6-BA6A-407CBD079E47}" type="slidenum">
               <a:rPr spc="-30" dirty="0"/>
-              <a:t>36</a:t>
+              <a:t>37</a:t>
             </a:fld>
             <a:r>
               <a:rPr spc="-55" dirty="0"/>
@@ -42181,7 +42262,7 @@
 </p:sld>
 </file>
 
-<file path=ppt/slides/slide37.xml><?xml version="1.0" encoding="utf-8"?>
+<file path=ppt/slides/slide38.xml><?xml version="1.0" encoding="utf-8"?>
 <p:sld xmlns:a="http://schemas.openxmlformats.org/drawingml/2006/main" xmlns:r="http://schemas.openxmlformats.org/officeDocument/2006/relationships" xmlns:p="http://schemas.openxmlformats.org/presentationml/2006/main" showMasterSp="0">
   <p:cSld>
     <p:spTree>
@@ -43080,7 +43161,7 @@
             </a:pPr>
             <a:fld id="{81D60167-4931-47E6-BA6A-407CBD079E47}" type="slidenum">
               <a:rPr dirty="0"/>
-              <a:t>37</a:t>
+              <a:t>38</a:t>
             </a:fld>
             <a:r>
               <a:rPr spc="10" dirty="0"/>
@@ -43112,7 +43193,7 @@
 </p:sld>
 </file>
 
-<file path=ppt/slides/slide38.xml><?xml version="1.0" encoding="utf-8"?>
+<file path=ppt/slides/slide39.xml><?xml version="1.0" encoding="utf-8"?>
 <p:sld xmlns:a="http://schemas.openxmlformats.org/drawingml/2006/main" xmlns:r="http://schemas.openxmlformats.org/officeDocument/2006/relationships" xmlns:p="http://schemas.openxmlformats.org/presentationml/2006/main">
   <p:cSld>
     <p:spTree>
@@ -44087,7 +44168,7 @@
             </a:pPr>
             <a:fld id="{81D60167-4931-47E6-BA6A-407CBD079E47}" type="slidenum">
               <a:rPr dirty="0"/>
-              <a:t>38</a:t>
+              <a:t>39</a:t>
             </a:fld>
             <a:r>
               <a:rPr spc="10" dirty="0"/>
@@ -44488,7 +44569,579 @@
 </p:sld>
 </file>
 
-<file path=ppt/slides/slide39.xml><?xml version="1.0" encoding="utf-8"?>
+<file path=ppt/slides/slide4.xml><?xml version="1.0" encoding="utf-8"?>
+<p:sld xmlns:a="http://schemas.openxmlformats.org/drawingml/2006/main" xmlns:r="http://schemas.openxmlformats.org/officeDocument/2006/relationships" xmlns:p="http://schemas.openxmlformats.org/presentationml/2006/main">
+  <p:cSld>
+    <p:spTree>
+      <p:nvGrpSpPr>
+        <p:cNvPr id="1" name=""/>
+        <p:cNvGrpSpPr/>
+        <p:nvPr/>
+      </p:nvGrpSpPr>
+      <p:grpSpPr>
+        <a:xfrm>
+          <a:off x="0" y="0"/>
+          <a:ext cx="0" cy="0"/>
+          <a:chOff x="0" y="0"/>
+          <a:chExt cx="0" cy="0"/>
+        </a:xfrm>
+      </p:grpSpPr>
+      <p:sp>
+        <p:nvSpPr>
+          <p:cNvPr id="2" name="object 2"/>
+          <p:cNvSpPr txBox="1"/>
+          <p:nvPr/>
+        </p:nvSpPr>
+        <p:spPr>
+          <a:xfrm>
+            <a:off x="95300" y="57337"/>
+            <a:ext cx="1662430" cy="244475"/>
+          </a:xfrm>
+          <a:prstGeom prst="rect">
+            <a:avLst/>
+          </a:prstGeom>
+        </p:spPr>
+        <p:txBody>
+          <a:bodyPr vert="horz" wrap="square" lIns="0" tIns="17145" rIns="0" bIns="0" rtlCol="0">
+            <a:spAutoFit/>
+          </a:bodyPr>
+          <a:lstStyle/>
+          <a:p>
+            <a:pPr marL="12700">
+              <a:lnSpc>
+                <a:spcPct val="100000"/>
+              </a:lnSpc>
+              <a:spcBef>
+                <a:spcPts val="135"/>
+              </a:spcBef>
+            </a:pPr>
+            <a:r>
+              <a:rPr sz="1400" spc="-130" dirty="0">
+                <a:solidFill>
+                  <a:srgbClr val="FFFFFF"/>
+                </a:solidFill>
+                <a:latin typeface="Arial Black"/>
+                <a:cs typeface="Arial Black"/>
+              </a:rPr>
+              <a:t>Problem</a:t>
+            </a:r>
+            <a:r>
+              <a:rPr sz="1400" spc="50" dirty="0">
+                <a:solidFill>
+                  <a:srgbClr val="FFFFFF"/>
+                </a:solidFill>
+                <a:latin typeface="Arial Black"/>
+                <a:cs typeface="Arial Black"/>
+              </a:rPr>
+              <a:t> </a:t>
+            </a:r>
+            <a:r>
+              <a:rPr sz="1400" spc="-120" dirty="0">
+                <a:solidFill>
+                  <a:srgbClr val="FFFFFF"/>
+                </a:solidFill>
+                <a:latin typeface="Arial Black"/>
+                <a:cs typeface="Arial Black"/>
+              </a:rPr>
+              <a:t>Statement</a:t>
+            </a:r>
+            <a:endParaRPr sz="1400">
+              <a:latin typeface="Arial Black"/>
+              <a:cs typeface="Arial Black"/>
+            </a:endParaRPr>
+          </a:p>
+        </p:txBody>
+      </p:sp>
+      <p:sp>
+        <p:nvSpPr>
+          <p:cNvPr id="3" name="object 3"/>
+          <p:cNvSpPr txBox="1"/>
+          <p:nvPr/>
+        </p:nvSpPr>
+        <p:spPr>
+          <a:xfrm>
+            <a:off x="2030209" y="1519171"/>
+            <a:ext cx="1699895" cy="207645"/>
+          </a:xfrm>
+          <a:prstGeom prst="rect">
+            <a:avLst/>
+          </a:prstGeom>
+        </p:spPr>
+        <p:txBody>
+          <a:bodyPr vert="horz" wrap="square" lIns="0" tIns="12065" rIns="0" bIns="0" rtlCol="0">
+            <a:spAutoFit/>
+          </a:bodyPr>
+          <a:lstStyle/>
+          <a:p>
+            <a:pPr marL="12700">
+              <a:lnSpc>
+                <a:spcPct val="100000"/>
+              </a:lnSpc>
+              <a:spcBef>
+                <a:spcPts val="95"/>
+              </a:spcBef>
+            </a:pPr>
+            <a:r>
+              <a:rPr sz="1200" i="1" dirty="0">
+                <a:solidFill>
+                  <a:srgbClr val="ACACB5"/>
+                </a:solidFill>
+                <a:latin typeface="Calibri"/>
+                <a:cs typeface="Calibri"/>
+              </a:rPr>
+              <a:t>[</a:t>
+            </a:r>
+            <a:r>
+              <a:rPr sz="1200" i="1" spc="75" dirty="0">
+                <a:solidFill>
+                  <a:srgbClr val="ACACB5"/>
+                </a:solidFill>
+                <a:latin typeface="Calibri"/>
+                <a:cs typeface="Calibri"/>
+              </a:rPr>
+              <a:t> </a:t>
+            </a:r>
+            <a:r>
+              <a:rPr sz="1200" i="1" dirty="0">
+                <a:solidFill>
+                  <a:srgbClr val="ACACB5"/>
+                </a:solidFill>
+                <a:latin typeface="Calibri"/>
+                <a:cs typeface="Calibri"/>
+              </a:rPr>
+              <a:t>Fill</a:t>
+            </a:r>
+            <a:r>
+              <a:rPr sz="1200" i="1" spc="85" dirty="0">
+                <a:solidFill>
+                  <a:srgbClr val="ACACB5"/>
+                </a:solidFill>
+                <a:latin typeface="Calibri"/>
+                <a:cs typeface="Calibri"/>
+              </a:rPr>
+              <a:t> </a:t>
+            </a:r>
+            <a:r>
+              <a:rPr sz="1200" i="1" dirty="0">
+                <a:solidFill>
+                  <a:srgbClr val="ACACB5"/>
+                </a:solidFill>
+                <a:latin typeface="Calibri"/>
+                <a:cs typeface="Calibri"/>
+              </a:rPr>
+              <a:t>in</a:t>
+            </a:r>
+            <a:r>
+              <a:rPr sz="1200" i="1" spc="80" dirty="0">
+                <a:solidFill>
+                  <a:srgbClr val="ACACB5"/>
+                </a:solidFill>
+                <a:latin typeface="Calibri"/>
+                <a:cs typeface="Calibri"/>
+              </a:rPr>
+              <a:t> </a:t>
+            </a:r>
+            <a:r>
+              <a:rPr sz="1200" i="1" dirty="0">
+                <a:solidFill>
+                  <a:srgbClr val="ACACB5"/>
+                </a:solidFill>
+                <a:latin typeface="Calibri"/>
+                <a:cs typeface="Calibri"/>
+              </a:rPr>
+              <a:t>your</a:t>
+            </a:r>
+            <a:r>
+              <a:rPr sz="1200" i="1" spc="75" dirty="0">
+                <a:solidFill>
+                  <a:srgbClr val="ACACB5"/>
+                </a:solidFill>
+                <a:latin typeface="Calibri"/>
+                <a:cs typeface="Calibri"/>
+              </a:rPr>
+              <a:t> </a:t>
+            </a:r>
+            <a:r>
+              <a:rPr sz="1200" i="1" dirty="0">
+                <a:solidFill>
+                  <a:srgbClr val="ACACB5"/>
+                </a:solidFill>
+                <a:latin typeface="Calibri"/>
+                <a:cs typeface="Calibri"/>
+              </a:rPr>
+              <a:t>content</a:t>
+            </a:r>
+            <a:r>
+              <a:rPr sz="1200" i="1" spc="80" dirty="0">
+                <a:solidFill>
+                  <a:srgbClr val="ACACB5"/>
+                </a:solidFill>
+                <a:latin typeface="Calibri"/>
+                <a:cs typeface="Calibri"/>
+              </a:rPr>
+              <a:t> </a:t>
+            </a:r>
+            <a:r>
+              <a:rPr sz="1200" i="1" spc="-10" dirty="0">
+                <a:solidFill>
+                  <a:srgbClr val="ACACB5"/>
+                </a:solidFill>
+                <a:latin typeface="Calibri"/>
+                <a:cs typeface="Calibri"/>
+              </a:rPr>
+              <a:t>here</a:t>
+            </a:r>
+            <a:r>
+              <a:rPr sz="1200" i="1" spc="80" dirty="0">
+                <a:solidFill>
+                  <a:srgbClr val="ACACB5"/>
+                </a:solidFill>
+                <a:latin typeface="Calibri"/>
+                <a:cs typeface="Calibri"/>
+              </a:rPr>
+              <a:t> </a:t>
+            </a:r>
+            <a:r>
+              <a:rPr sz="1200" i="1" spc="-50" dirty="0">
+                <a:solidFill>
+                  <a:srgbClr val="ACACB5"/>
+                </a:solidFill>
+                <a:latin typeface="Calibri"/>
+                <a:cs typeface="Calibri"/>
+              </a:rPr>
+              <a:t>]</a:t>
+            </a:r>
+            <a:endParaRPr sz="1200">
+              <a:latin typeface="Calibri"/>
+              <a:cs typeface="Calibri"/>
+            </a:endParaRPr>
+          </a:p>
+        </p:txBody>
+      </p:sp>
+      <p:grpSp>
+        <p:nvGrpSpPr>
+          <p:cNvPr id="4" name="object 4"/>
+          <p:cNvGrpSpPr/>
+          <p:nvPr/>
+        </p:nvGrpSpPr>
+        <p:grpSpPr>
+          <a:xfrm>
+            <a:off x="0" y="3125279"/>
+            <a:ext cx="5760085" cy="114935"/>
+            <a:chOff x="0" y="3125279"/>
+            <a:chExt cx="5760085" cy="114935"/>
+          </a:xfrm>
+        </p:grpSpPr>
+        <p:sp>
+          <p:nvSpPr>
+            <p:cNvPr id="5" name="object 5"/>
+            <p:cNvSpPr/>
+            <p:nvPr/>
+          </p:nvSpPr>
+          <p:spPr>
+            <a:xfrm>
+              <a:off x="0" y="3125279"/>
+              <a:ext cx="2016125" cy="114935"/>
+            </a:xfrm>
+            <a:custGeom>
+              <a:avLst/>
+              <a:gdLst/>
+              <a:ahLst/>
+              <a:cxnLst/>
+              <a:rect l="l" t="t" r="r" b="b"/>
+              <a:pathLst>
+                <a:path w="2016125" h="114935">
+                  <a:moveTo>
+                    <a:pt x="2016036" y="0"/>
+                  </a:moveTo>
+                  <a:lnTo>
+                    <a:pt x="0" y="0"/>
+                  </a:lnTo>
+                  <a:lnTo>
+                    <a:pt x="0" y="114719"/>
+                  </a:lnTo>
+                  <a:lnTo>
+                    <a:pt x="2016036" y="114719"/>
+                  </a:lnTo>
+                  <a:lnTo>
+                    <a:pt x="2016036" y="0"/>
+                  </a:lnTo>
+                  <a:close/>
+                </a:path>
+              </a:pathLst>
+            </a:custGeom>
+            <a:solidFill>
+              <a:srgbClr val="B41313"/>
+            </a:solidFill>
+          </p:spPr>
+          <p:txBody>
+            <a:bodyPr wrap="square" lIns="0" tIns="0" rIns="0" bIns="0" rtlCol="0"/>
+            <a:lstStyle/>
+            <a:p>
+              <a:endParaRPr/>
+            </a:p>
+          </p:txBody>
+        </p:sp>
+        <p:sp>
+          <p:nvSpPr>
+            <p:cNvPr id="6" name="object 6"/>
+            <p:cNvSpPr/>
+            <p:nvPr/>
+          </p:nvSpPr>
+          <p:spPr>
+            <a:xfrm>
+              <a:off x="2016036" y="3125279"/>
+              <a:ext cx="2592070" cy="114935"/>
+            </a:xfrm>
+            <a:custGeom>
+              <a:avLst/>
+              <a:gdLst/>
+              <a:ahLst/>
+              <a:cxnLst/>
+              <a:rect l="l" t="t" r="r" b="b"/>
+              <a:pathLst>
+                <a:path w="2592070" h="114935">
+                  <a:moveTo>
+                    <a:pt x="2591981" y="0"/>
+                  </a:moveTo>
+                  <a:lnTo>
+                    <a:pt x="0" y="0"/>
+                  </a:lnTo>
+                  <a:lnTo>
+                    <a:pt x="0" y="114719"/>
+                  </a:lnTo>
+                  <a:lnTo>
+                    <a:pt x="2591981" y="114719"/>
+                  </a:lnTo>
+                  <a:lnTo>
+                    <a:pt x="2591981" y="0"/>
+                  </a:lnTo>
+                  <a:close/>
+                </a:path>
+              </a:pathLst>
+            </a:custGeom>
+            <a:solidFill>
+              <a:srgbClr val="37374C"/>
+            </a:solidFill>
+          </p:spPr>
+          <p:txBody>
+            <a:bodyPr wrap="square" lIns="0" tIns="0" rIns="0" bIns="0" rtlCol="0"/>
+            <a:lstStyle/>
+            <a:p>
+              <a:endParaRPr/>
+            </a:p>
+          </p:txBody>
+        </p:sp>
+        <p:sp>
+          <p:nvSpPr>
+            <p:cNvPr id="7" name="object 7"/>
+            <p:cNvSpPr/>
+            <p:nvPr/>
+          </p:nvSpPr>
+          <p:spPr>
+            <a:xfrm>
+              <a:off x="4608017" y="3125279"/>
+              <a:ext cx="1152525" cy="114935"/>
+            </a:xfrm>
+            <a:custGeom>
+              <a:avLst/>
+              <a:gdLst/>
+              <a:ahLst/>
+              <a:cxnLst/>
+              <a:rect l="l" t="t" r="r" b="b"/>
+              <a:pathLst>
+                <a:path w="1152525" h="114935">
+                  <a:moveTo>
+                    <a:pt x="1151978" y="0"/>
+                  </a:moveTo>
+                  <a:lnTo>
+                    <a:pt x="0" y="0"/>
+                  </a:lnTo>
+                  <a:lnTo>
+                    <a:pt x="0" y="114719"/>
+                  </a:lnTo>
+                  <a:lnTo>
+                    <a:pt x="1151978" y="114719"/>
+                  </a:lnTo>
+                  <a:lnTo>
+                    <a:pt x="1151978" y="0"/>
+                  </a:lnTo>
+                  <a:close/>
+                </a:path>
+              </a:pathLst>
+            </a:custGeom>
+            <a:solidFill>
+              <a:srgbClr val="13132C"/>
+            </a:solidFill>
+          </p:spPr>
+          <p:txBody>
+            <a:bodyPr wrap="square" lIns="0" tIns="0" rIns="0" bIns="0" rtlCol="0"/>
+            <a:lstStyle/>
+            <a:p>
+              <a:endParaRPr/>
+            </a:p>
+          </p:txBody>
+        </p:sp>
+      </p:grpSp>
+      <p:sp>
+        <p:nvSpPr>
+          <p:cNvPr id="8" name="object 8"/>
+          <p:cNvSpPr txBox="1">
+            <a:spLocks noGrp="1"/>
+          </p:cNvSpPr>
+          <p:nvPr>
+            <p:ph type="ftr" sz="quarter" idx="5"/>
+          </p:nvPr>
+        </p:nvSpPr>
+        <p:spPr>
+          <a:prstGeom prst="rect">
+            <a:avLst/>
+          </a:prstGeom>
+        </p:spPr>
+        <p:txBody>
+          <a:bodyPr vert="horz" wrap="square" lIns="0" tIns="24130" rIns="0" bIns="0" rtlCol="0">
+            <a:spAutoFit/>
+          </a:bodyPr>
+          <a:lstStyle/>
+          <a:p>
+            <a:pPr marL="12700">
+              <a:lnSpc>
+                <a:spcPct val="100000"/>
+              </a:lnSpc>
+              <a:spcBef>
+                <a:spcPts val="190"/>
+              </a:spcBef>
+            </a:pPr>
+            <a:r>
+              <a:rPr dirty="0"/>
+              <a:t>ITI </a:t>
+            </a:r>
+            <a:r>
+              <a:rPr spc="-10" dirty="0"/>
+              <a:t>Intake</a:t>
+            </a:r>
+            <a:r>
+              <a:rPr spc="5" dirty="0"/>
+              <a:t> </a:t>
+            </a:r>
+            <a:r>
+              <a:rPr spc="-25" dirty="0"/>
+              <a:t>46</a:t>
+            </a:r>
+          </a:p>
+        </p:txBody>
+      </p:sp>
+      <p:sp>
+        <p:nvSpPr>
+          <p:cNvPr id="9" name="object 9"/>
+          <p:cNvSpPr txBox="1"/>
+          <p:nvPr/>
+        </p:nvSpPr>
+        <p:spPr>
+          <a:xfrm>
+            <a:off x="3100044" y="3105948"/>
+            <a:ext cx="424180" cy="137160"/>
+          </a:xfrm>
+          <a:prstGeom prst="rect">
+            <a:avLst/>
+          </a:prstGeom>
+        </p:spPr>
+        <p:txBody>
+          <a:bodyPr vert="horz" wrap="square" lIns="0" tIns="24130" rIns="0" bIns="0" rtlCol="0">
+            <a:spAutoFit/>
+          </a:bodyPr>
+          <a:lstStyle/>
+          <a:p>
+            <a:pPr marL="12700">
+              <a:lnSpc>
+                <a:spcPct val="100000"/>
+              </a:lnSpc>
+              <a:spcBef>
+                <a:spcPts val="190"/>
+              </a:spcBef>
+            </a:pPr>
+            <a:r>
+              <a:rPr sz="600" spc="-10" dirty="0">
+                <a:solidFill>
+                  <a:srgbClr val="FFFFFF"/>
+                </a:solidFill>
+                <a:latin typeface="Tahoma"/>
+                <a:cs typeface="Tahoma"/>
+                <a:hlinkClick r:id="rId2" action="ppaction://hlinksldjump"/>
+              </a:rPr>
+              <a:t>RANPilotAI</a:t>
+            </a:r>
+            <a:endParaRPr sz="600" dirty="0">
+              <a:latin typeface="Tahoma"/>
+              <a:cs typeface="Tahoma"/>
+            </a:endParaRPr>
+          </a:p>
+        </p:txBody>
+      </p:sp>
+      <p:sp>
+        <p:nvSpPr>
+          <p:cNvPr id="10" name="object 10"/>
+          <p:cNvSpPr txBox="1">
+            <a:spLocks noGrp="1"/>
+          </p:cNvSpPr>
+          <p:nvPr>
+            <p:ph type="sldNum" sz="quarter" idx="7"/>
+          </p:nvPr>
+        </p:nvSpPr>
+        <p:spPr>
+          <a:prstGeom prst="rect">
+            <a:avLst/>
+          </a:prstGeom>
+        </p:spPr>
+        <p:txBody>
+          <a:bodyPr vert="horz" wrap="square" lIns="0" tIns="24130" rIns="0" bIns="0" rtlCol="0">
+            <a:spAutoFit/>
+          </a:bodyPr>
+          <a:lstStyle/>
+          <a:p>
+            <a:pPr marL="12700">
+              <a:lnSpc>
+                <a:spcPct val="100000"/>
+              </a:lnSpc>
+              <a:spcBef>
+                <a:spcPts val="190"/>
+              </a:spcBef>
+            </a:pPr>
+            <a:fld id="{81D60167-4931-47E6-BA6A-407CBD079E47}" type="slidenum">
+              <a:rPr dirty="0"/>
+              <a:t>4</a:t>
+            </a:fld>
+            <a:r>
+              <a:rPr spc="10" dirty="0"/>
+              <a:t> </a:t>
+            </a:r>
+            <a:r>
+              <a:rPr spc="90" dirty="0"/>
+              <a:t>/</a:t>
+            </a:r>
+            <a:r>
+              <a:rPr spc="10" dirty="0"/>
+              <a:t> </a:t>
+            </a:r>
+            <a:r>
+              <a:rPr spc="-25" dirty="0"/>
+              <a:t>47</a:t>
+            </a:r>
+          </a:p>
+        </p:txBody>
+      </p:sp>
+    </p:spTree>
+  </p:cSld>
+  <p:clrMapOvr>
+    <a:masterClrMapping/>
+  </p:clrMapOvr>
+  <p:transition>
+    <p:cut/>
+  </p:transition>
+</p:sld>
+</file>
+
+<file path=ppt/slides/slide40.xml><?xml version="1.0" encoding="utf-8"?>
 <p:sld xmlns:a="http://schemas.openxmlformats.org/drawingml/2006/main" xmlns:r="http://schemas.openxmlformats.org/officeDocument/2006/relationships" xmlns:p="http://schemas.openxmlformats.org/presentationml/2006/main">
   <p:cSld>
     <p:spTree>
@@ -44904,7 +45557,7 @@
             </a:pPr>
             <a:fld id="{81D60167-4931-47E6-BA6A-407CBD079E47}" type="slidenum">
               <a:rPr dirty="0"/>
-              <a:t>39</a:t>
+              <a:t>40</a:t>
             </a:fld>
             <a:r>
               <a:rPr spc="10" dirty="0"/>
@@ -44936,579 +45589,7 @@
 </p:sld>
 </file>
 
-<file path=ppt/slides/slide4.xml><?xml version="1.0" encoding="utf-8"?>
-<p:sld xmlns:a="http://schemas.openxmlformats.org/drawingml/2006/main" xmlns:r="http://schemas.openxmlformats.org/officeDocument/2006/relationships" xmlns:p="http://schemas.openxmlformats.org/presentationml/2006/main">
-  <p:cSld>
-    <p:spTree>
-      <p:nvGrpSpPr>
-        <p:cNvPr id="1" name=""/>
-        <p:cNvGrpSpPr/>
-        <p:nvPr/>
-      </p:nvGrpSpPr>
-      <p:grpSpPr>
-        <a:xfrm>
-          <a:off x="0" y="0"/>
-          <a:ext cx="0" cy="0"/>
-          <a:chOff x="0" y="0"/>
-          <a:chExt cx="0" cy="0"/>
-        </a:xfrm>
-      </p:grpSpPr>
-      <p:sp>
-        <p:nvSpPr>
-          <p:cNvPr id="2" name="object 2"/>
-          <p:cNvSpPr txBox="1"/>
-          <p:nvPr/>
-        </p:nvSpPr>
-        <p:spPr>
-          <a:xfrm>
-            <a:off x="95300" y="57337"/>
-            <a:ext cx="1662430" cy="244475"/>
-          </a:xfrm>
-          <a:prstGeom prst="rect">
-            <a:avLst/>
-          </a:prstGeom>
-        </p:spPr>
-        <p:txBody>
-          <a:bodyPr vert="horz" wrap="square" lIns="0" tIns="17145" rIns="0" bIns="0" rtlCol="0">
-            <a:spAutoFit/>
-          </a:bodyPr>
-          <a:lstStyle/>
-          <a:p>
-            <a:pPr marL="12700">
-              <a:lnSpc>
-                <a:spcPct val="100000"/>
-              </a:lnSpc>
-              <a:spcBef>
-                <a:spcPts val="135"/>
-              </a:spcBef>
-            </a:pPr>
-            <a:r>
-              <a:rPr sz="1400" spc="-130" dirty="0">
-                <a:solidFill>
-                  <a:srgbClr val="FFFFFF"/>
-                </a:solidFill>
-                <a:latin typeface="Arial Black"/>
-                <a:cs typeface="Arial Black"/>
-              </a:rPr>
-              <a:t>Problem</a:t>
-            </a:r>
-            <a:r>
-              <a:rPr sz="1400" spc="50" dirty="0">
-                <a:solidFill>
-                  <a:srgbClr val="FFFFFF"/>
-                </a:solidFill>
-                <a:latin typeface="Arial Black"/>
-                <a:cs typeface="Arial Black"/>
-              </a:rPr>
-              <a:t> </a:t>
-            </a:r>
-            <a:r>
-              <a:rPr sz="1400" spc="-120" dirty="0">
-                <a:solidFill>
-                  <a:srgbClr val="FFFFFF"/>
-                </a:solidFill>
-                <a:latin typeface="Arial Black"/>
-                <a:cs typeface="Arial Black"/>
-              </a:rPr>
-              <a:t>Statement</a:t>
-            </a:r>
-            <a:endParaRPr sz="1400">
-              <a:latin typeface="Arial Black"/>
-              <a:cs typeface="Arial Black"/>
-            </a:endParaRPr>
-          </a:p>
-        </p:txBody>
-      </p:sp>
-      <p:sp>
-        <p:nvSpPr>
-          <p:cNvPr id="3" name="object 3"/>
-          <p:cNvSpPr txBox="1"/>
-          <p:nvPr/>
-        </p:nvSpPr>
-        <p:spPr>
-          <a:xfrm>
-            <a:off x="2030209" y="1519171"/>
-            <a:ext cx="1699895" cy="207645"/>
-          </a:xfrm>
-          <a:prstGeom prst="rect">
-            <a:avLst/>
-          </a:prstGeom>
-        </p:spPr>
-        <p:txBody>
-          <a:bodyPr vert="horz" wrap="square" lIns="0" tIns="12065" rIns="0" bIns="0" rtlCol="0">
-            <a:spAutoFit/>
-          </a:bodyPr>
-          <a:lstStyle/>
-          <a:p>
-            <a:pPr marL="12700">
-              <a:lnSpc>
-                <a:spcPct val="100000"/>
-              </a:lnSpc>
-              <a:spcBef>
-                <a:spcPts val="95"/>
-              </a:spcBef>
-            </a:pPr>
-            <a:r>
-              <a:rPr sz="1200" i="1" dirty="0">
-                <a:solidFill>
-                  <a:srgbClr val="ACACB5"/>
-                </a:solidFill>
-                <a:latin typeface="Calibri"/>
-                <a:cs typeface="Calibri"/>
-              </a:rPr>
-              <a:t>[</a:t>
-            </a:r>
-            <a:r>
-              <a:rPr sz="1200" i="1" spc="75" dirty="0">
-                <a:solidFill>
-                  <a:srgbClr val="ACACB5"/>
-                </a:solidFill>
-                <a:latin typeface="Calibri"/>
-                <a:cs typeface="Calibri"/>
-              </a:rPr>
-              <a:t> </a:t>
-            </a:r>
-            <a:r>
-              <a:rPr sz="1200" i="1" dirty="0">
-                <a:solidFill>
-                  <a:srgbClr val="ACACB5"/>
-                </a:solidFill>
-                <a:latin typeface="Calibri"/>
-                <a:cs typeface="Calibri"/>
-              </a:rPr>
-              <a:t>Fill</a:t>
-            </a:r>
-            <a:r>
-              <a:rPr sz="1200" i="1" spc="85" dirty="0">
-                <a:solidFill>
-                  <a:srgbClr val="ACACB5"/>
-                </a:solidFill>
-                <a:latin typeface="Calibri"/>
-                <a:cs typeface="Calibri"/>
-              </a:rPr>
-              <a:t> </a:t>
-            </a:r>
-            <a:r>
-              <a:rPr sz="1200" i="1" dirty="0">
-                <a:solidFill>
-                  <a:srgbClr val="ACACB5"/>
-                </a:solidFill>
-                <a:latin typeface="Calibri"/>
-                <a:cs typeface="Calibri"/>
-              </a:rPr>
-              <a:t>in</a:t>
-            </a:r>
-            <a:r>
-              <a:rPr sz="1200" i="1" spc="80" dirty="0">
-                <a:solidFill>
-                  <a:srgbClr val="ACACB5"/>
-                </a:solidFill>
-                <a:latin typeface="Calibri"/>
-                <a:cs typeface="Calibri"/>
-              </a:rPr>
-              <a:t> </a:t>
-            </a:r>
-            <a:r>
-              <a:rPr sz="1200" i="1" dirty="0">
-                <a:solidFill>
-                  <a:srgbClr val="ACACB5"/>
-                </a:solidFill>
-                <a:latin typeface="Calibri"/>
-                <a:cs typeface="Calibri"/>
-              </a:rPr>
-              <a:t>your</a:t>
-            </a:r>
-            <a:r>
-              <a:rPr sz="1200" i="1" spc="75" dirty="0">
-                <a:solidFill>
-                  <a:srgbClr val="ACACB5"/>
-                </a:solidFill>
-                <a:latin typeface="Calibri"/>
-                <a:cs typeface="Calibri"/>
-              </a:rPr>
-              <a:t> </a:t>
-            </a:r>
-            <a:r>
-              <a:rPr sz="1200" i="1" dirty="0">
-                <a:solidFill>
-                  <a:srgbClr val="ACACB5"/>
-                </a:solidFill>
-                <a:latin typeface="Calibri"/>
-                <a:cs typeface="Calibri"/>
-              </a:rPr>
-              <a:t>content</a:t>
-            </a:r>
-            <a:r>
-              <a:rPr sz="1200" i="1" spc="80" dirty="0">
-                <a:solidFill>
-                  <a:srgbClr val="ACACB5"/>
-                </a:solidFill>
-                <a:latin typeface="Calibri"/>
-                <a:cs typeface="Calibri"/>
-              </a:rPr>
-              <a:t> </a:t>
-            </a:r>
-            <a:r>
-              <a:rPr sz="1200" i="1" spc="-10" dirty="0">
-                <a:solidFill>
-                  <a:srgbClr val="ACACB5"/>
-                </a:solidFill>
-                <a:latin typeface="Calibri"/>
-                <a:cs typeface="Calibri"/>
-              </a:rPr>
-              <a:t>here</a:t>
-            </a:r>
-            <a:r>
-              <a:rPr sz="1200" i="1" spc="80" dirty="0">
-                <a:solidFill>
-                  <a:srgbClr val="ACACB5"/>
-                </a:solidFill>
-                <a:latin typeface="Calibri"/>
-                <a:cs typeface="Calibri"/>
-              </a:rPr>
-              <a:t> </a:t>
-            </a:r>
-            <a:r>
-              <a:rPr sz="1200" i="1" spc="-50" dirty="0">
-                <a:solidFill>
-                  <a:srgbClr val="ACACB5"/>
-                </a:solidFill>
-                <a:latin typeface="Calibri"/>
-                <a:cs typeface="Calibri"/>
-              </a:rPr>
-              <a:t>]</a:t>
-            </a:r>
-            <a:endParaRPr sz="1200">
-              <a:latin typeface="Calibri"/>
-              <a:cs typeface="Calibri"/>
-            </a:endParaRPr>
-          </a:p>
-        </p:txBody>
-      </p:sp>
-      <p:grpSp>
-        <p:nvGrpSpPr>
-          <p:cNvPr id="4" name="object 4"/>
-          <p:cNvGrpSpPr/>
-          <p:nvPr/>
-        </p:nvGrpSpPr>
-        <p:grpSpPr>
-          <a:xfrm>
-            <a:off x="0" y="3125279"/>
-            <a:ext cx="5760085" cy="114935"/>
-            <a:chOff x="0" y="3125279"/>
-            <a:chExt cx="5760085" cy="114935"/>
-          </a:xfrm>
-        </p:grpSpPr>
-        <p:sp>
-          <p:nvSpPr>
-            <p:cNvPr id="5" name="object 5"/>
-            <p:cNvSpPr/>
-            <p:nvPr/>
-          </p:nvSpPr>
-          <p:spPr>
-            <a:xfrm>
-              <a:off x="0" y="3125279"/>
-              <a:ext cx="2016125" cy="114935"/>
-            </a:xfrm>
-            <a:custGeom>
-              <a:avLst/>
-              <a:gdLst/>
-              <a:ahLst/>
-              <a:cxnLst/>
-              <a:rect l="l" t="t" r="r" b="b"/>
-              <a:pathLst>
-                <a:path w="2016125" h="114935">
-                  <a:moveTo>
-                    <a:pt x="2016036" y="0"/>
-                  </a:moveTo>
-                  <a:lnTo>
-                    <a:pt x="0" y="0"/>
-                  </a:lnTo>
-                  <a:lnTo>
-                    <a:pt x="0" y="114719"/>
-                  </a:lnTo>
-                  <a:lnTo>
-                    <a:pt x="2016036" y="114719"/>
-                  </a:lnTo>
-                  <a:lnTo>
-                    <a:pt x="2016036" y="0"/>
-                  </a:lnTo>
-                  <a:close/>
-                </a:path>
-              </a:pathLst>
-            </a:custGeom>
-            <a:solidFill>
-              <a:srgbClr val="B41313"/>
-            </a:solidFill>
-          </p:spPr>
-          <p:txBody>
-            <a:bodyPr wrap="square" lIns="0" tIns="0" rIns="0" bIns="0" rtlCol="0"/>
-            <a:lstStyle/>
-            <a:p>
-              <a:endParaRPr/>
-            </a:p>
-          </p:txBody>
-        </p:sp>
-        <p:sp>
-          <p:nvSpPr>
-            <p:cNvPr id="6" name="object 6"/>
-            <p:cNvSpPr/>
-            <p:nvPr/>
-          </p:nvSpPr>
-          <p:spPr>
-            <a:xfrm>
-              <a:off x="2016036" y="3125279"/>
-              <a:ext cx="2592070" cy="114935"/>
-            </a:xfrm>
-            <a:custGeom>
-              <a:avLst/>
-              <a:gdLst/>
-              <a:ahLst/>
-              <a:cxnLst/>
-              <a:rect l="l" t="t" r="r" b="b"/>
-              <a:pathLst>
-                <a:path w="2592070" h="114935">
-                  <a:moveTo>
-                    <a:pt x="2591981" y="0"/>
-                  </a:moveTo>
-                  <a:lnTo>
-                    <a:pt x="0" y="0"/>
-                  </a:lnTo>
-                  <a:lnTo>
-                    <a:pt x="0" y="114719"/>
-                  </a:lnTo>
-                  <a:lnTo>
-                    <a:pt x="2591981" y="114719"/>
-                  </a:lnTo>
-                  <a:lnTo>
-                    <a:pt x="2591981" y="0"/>
-                  </a:lnTo>
-                  <a:close/>
-                </a:path>
-              </a:pathLst>
-            </a:custGeom>
-            <a:solidFill>
-              <a:srgbClr val="37374C"/>
-            </a:solidFill>
-          </p:spPr>
-          <p:txBody>
-            <a:bodyPr wrap="square" lIns="0" tIns="0" rIns="0" bIns="0" rtlCol="0"/>
-            <a:lstStyle/>
-            <a:p>
-              <a:endParaRPr/>
-            </a:p>
-          </p:txBody>
-        </p:sp>
-        <p:sp>
-          <p:nvSpPr>
-            <p:cNvPr id="7" name="object 7"/>
-            <p:cNvSpPr/>
-            <p:nvPr/>
-          </p:nvSpPr>
-          <p:spPr>
-            <a:xfrm>
-              <a:off x="4608017" y="3125279"/>
-              <a:ext cx="1152525" cy="114935"/>
-            </a:xfrm>
-            <a:custGeom>
-              <a:avLst/>
-              <a:gdLst/>
-              <a:ahLst/>
-              <a:cxnLst/>
-              <a:rect l="l" t="t" r="r" b="b"/>
-              <a:pathLst>
-                <a:path w="1152525" h="114935">
-                  <a:moveTo>
-                    <a:pt x="1151978" y="0"/>
-                  </a:moveTo>
-                  <a:lnTo>
-                    <a:pt x="0" y="0"/>
-                  </a:lnTo>
-                  <a:lnTo>
-                    <a:pt x="0" y="114719"/>
-                  </a:lnTo>
-                  <a:lnTo>
-                    <a:pt x="1151978" y="114719"/>
-                  </a:lnTo>
-                  <a:lnTo>
-                    <a:pt x="1151978" y="0"/>
-                  </a:lnTo>
-                  <a:close/>
-                </a:path>
-              </a:pathLst>
-            </a:custGeom>
-            <a:solidFill>
-              <a:srgbClr val="13132C"/>
-            </a:solidFill>
-          </p:spPr>
-          <p:txBody>
-            <a:bodyPr wrap="square" lIns="0" tIns="0" rIns="0" bIns="0" rtlCol="0"/>
-            <a:lstStyle/>
-            <a:p>
-              <a:endParaRPr/>
-            </a:p>
-          </p:txBody>
-        </p:sp>
-      </p:grpSp>
-      <p:sp>
-        <p:nvSpPr>
-          <p:cNvPr id="8" name="object 8"/>
-          <p:cNvSpPr txBox="1">
-            <a:spLocks noGrp="1"/>
-          </p:cNvSpPr>
-          <p:nvPr>
-            <p:ph type="ftr" sz="quarter" idx="5"/>
-          </p:nvPr>
-        </p:nvSpPr>
-        <p:spPr>
-          <a:prstGeom prst="rect">
-            <a:avLst/>
-          </a:prstGeom>
-        </p:spPr>
-        <p:txBody>
-          <a:bodyPr vert="horz" wrap="square" lIns="0" tIns="24130" rIns="0" bIns="0" rtlCol="0">
-            <a:spAutoFit/>
-          </a:bodyPr>
-          <a:lstStyle/>
-          <a:p>
-            <a:pPr marL="12700">
-              <a:lnSpc>
-                <a:spcPct val="100000"/>
-              </a:lnSpc>
-              <a:spcBef>
-                <a:spcPts val="190"/>
-              </a:spcBef>
-            </a:pPr>
-            <a:r>
-              <a:rPr dirty="0"/>
-              <a:t>ITI </a:t>
-            </a:r>
-            <a:r>
-              <a:rPr spc="-10" dirty="0"/>
-              <a:t>Intake</a:t>
-            </a:r>
-            <a:r>
-              <a:rPr spc="5" dirty="0"/>
-              <a:t> </a:t>
-            </a:r>
-            <a:r>
-              <a:rPr spc="-25" dirty="0"/>
-              <a:t>46</a:t>
-            </a:r>
-          </a:p>
-        </p:txBody>
-      </p:sp>
-      <p:sp>
-        <p:nvSpPr>
-          <p:cNvPr id="9" name="object 9"/>
-          <p:cNvSpPr txBox="1"/>
-          <p:nvPr/>
-        </p:nvSpPr>
-        <p:spPr>
-          <a:xfrm>
-            <a:off x="3100044" y="3105948"/>
-            <a:ext cx="424180" cy="137160"/>
-          </a:xfrm>
-          <a:prstGeom prst="rect">
-            <a:avLst/>
-          </a:prstGeom>
-        </p:spPr>
-        <p:txBody>
-          <a:bodyPr vert="horz" wrap="square" lIns="0" tIns="24130" rIns="0" bIns="0" rtlCol="0">
-            <a:spAutoFit/>
-          </a:bodyPr>
-          <a:lstStyle/>
-          <a:p>
-            <a:pPr marL="12700">
-              <a:lnSpc>
-                <a:spcPct val="100000"/>
-              </a:lnSpc>
-              <a:spcBef>
-                <a:spcPts val="190"/>
-              </a:spcBef>
-            </a:pPr>
-            <a:r>
-              <a:rPr sz="600" spc="-10" dirty="0">
-                <a:solidFill>
-                  <a:srgbClr val="FFFFFF"/>
-                </a:solidFill>
-                <a:latin typeface="Tahoma"/>
-                <a:cs typeface="Tahoma"/>
-                <a:hlinkClick r:id="rId2" action="ppaction://hlinksldjump"/>
-              </a:rPr>
-              <a:t>RANPilotAI</a:t>
-            </a:r>
-            <a:endParaRPr sz="600" dirty="0">
-              <a:latin typeface="Tahoma"/>
-              <a:cs typeface="Tahoma"/>
-            </a:endParaRPr>
-          </a:p>
-        </p:txBody>
-      </p:sp>
-      <p:sp>
-        <p:nvSpPr>
-          <p:cNvPr id="10" name="object 10"/>
-          <p:cNvSpPr txBox="1">
-            <a:spLocks noGrp="1"/>
-          </p:cNvSpPr>
-          <p:nvPr>
-            <p:ph type="sldNum" sz="quarter" idx="7"/>
-          </p:nvPr>
-        </p:nvSpPr>
-        <p:spPr>
-          <a:prstGeom prst="rect">
-            <a:avLst/>
-          </a:prstGeom>
-        </p:spPr>
-        <p:txBody>
-          <a:bodyPr vert="horz" wrap="square" lIns="0" tIns="24130" rIns="0" bIns="0" rtlCol="0">
-            <a:spAutoFit/>
-          </a:bodyPr>
-          <a:lstStyle/>
-          <a:p>
-            <a:pPr marL="12700">
-              <a:lnSpc>
-                <a:spcPct val="100000"/>
-              </a:lnSpc>
-              <a:spcBef>
-                <a:spcPts val="190"/>
-              </a:spcBef>
-            </a:pPr>
-            <a:fld id="{81D60167-4931-47E6-BA6A-407CBD079E47}" type="slidenum">
-              <a:rPr dirty="0"/>
-              <a:t>4</a:t>
-            </a:fld>
-            <a:r>
-              <a:rPr spc="10" dirty="0"/>
-              <a:t> </a:t>
-            </a:r>
-            <a:r>
-              <a:rPr spc="90" dirty="0"/>
-              <a:t>/</a:t>
-            </a:r>
-            <a:r>
-              <a:rPr spc="10" dirty="0"/>
-              <a:t> </a:t>
-            </a:r>
-            <a:r>
-              <a:rPr spc="-25" dirty="0"/>
-              <a:t>47</a:t>
-            </a:r>
-          </a:p>
-        </p:txBody>
-      </p:sp>
-    </p:spTree>
-  </p:cSld>
-  <p:clrMapOvr>
-    <a:masterClrMapping/>
-  </p:clrMapOvr>
-  <p:transition>
-    <p:cut/>
-  </p:transition>
-</p:sld>
-</file>
-
-<file path=ppt/slides/slide40.xml><?xml version="1.0" encoding="utf-8"?>
+<file path=ppt/slides/slide41.xml><?xml version="1.0" encoding="utf-8"?>
 <p:sld xmlns:a="http://schemas.openxmlformats.org/drawingml/2006/main" xmlns:r="http://schemas.openxmlformats.org/officeDocument/2006/relationships" xmlns:p="http://schemas.openxmlformats.org/presentationml/2006/main" show="0">
   <p:cSld>
     <p:spTree>
@@ -45884,7 +45965,7 @@
             </a:pPr>
             <a:fld id="{81D60167-4931-47E6-BA6A-407CBD079E47}" type="slidenum">
               <a:rPr dirty="0"/>
-              <a:t>40</a:t>
+              <a:t>41</a:t>
             </a:fld>
             <a:r>
               <a:rPr spc="10" dirty="0"/>
@@ -46335,7 +46416,7 @@
 </p:sld>
 </file>
 
-<file path=ppt/slides/slide41.xml><?xml version="1.0" encoding="utf-8"?>
+<file path=ppt/slides/slide42.xml><?xml version="1.0" encoding="utf-8"?>
 <p:sld xmlns:a="http://schemas.openxmlformats.org/drawingml/2006/main" xmlns:r="http://schemas.openxmlformats.org/officeDocument/2006/relationships" xmlns:p="http://schemas.openxmlformats.org/presentationml/2006/main">
   <p:cSld>
     <p:spTree>
@@ -46791,7 +46872,7 @@
             </a:pPr>
             <a:fld id="{81D60167-4931-47E6-BA6A-407CBD079E47}" type="slidenum">
               <a:rPr dirty="0"/>
-              <a:t>41</a:t>
+              <a:t>42</a:t>
             </a:fld>
             <a:r>
               <a:rPr spc="10" dirty="0"/>
@@ -46856,7 +46937,7 @@
 </p:sld>
 </file>
 
-<file path=ppt/slides/slide42.xml><?xml version="1.0" encoding="utf-8"?>
+<file path=ppt/slides/slide43.xml><?xml version="1.0" encoding="utf-8"?>
 <p:sld xmlns:a="http://schemas.openxmlformats.org/drawingml/2006/main" xmlns:r="http://schemas.openxmlformats.org/officeDocument/2006/relationships" xmlns:p="http://schemas.openxmlformats.org/presentationml/2006/main">
   <p:cSld>
     <p:spTree>
@@ -47331,7 +47412,7 @@
             </a:pPr>
             <a:fld id="{81D60167-4931-47E6-BA6A-407CBD079E47}" type="slidenum">
               <a:rPr dirty="0"/>
-              <a:t>42</a:t>
+              <a:t>43</a:t>
             </a:fld>
             <a:r>
               <a:rPr spc="10" dirty="0"/>
@@ -47363,7 +47444,7 @@
 </p:sld>
 </file>
 
-<file path=ppt/slides/slide43.xml><?xml version="1.0" encoding="utf-8"?>
+<file path=ppt/slides/slide44.xml><?xml version="1.0" encoding="utf-8"?>
 <p:sld xmlns:a="http://schemas.openxmlformats.org/drawingml/2006/main" xmlns:r="http://schemas.openxmlformats.org/officeDocument/2006/relationships" xmlns:p="http://schemas.openxmlformats.org/presentationml/2006/main">
   <p:cSld>
     <p:spTree>
@@ -47847,7 +47928,7 @@
             </a:pPr>
             <a:fld id="{81D60167-4931-47E6-BA6A-407CBD079E47}" type="slidenum">
               <a:rPr dirty="0"/>
-              <a:t>43</a:t>
+              <a:t>44</a:t>
             </a:fld>
             <a:r>
               <a:rPr spc="10" dirty="0"/>
@@ -47927,7 +48008,7 @@
 </p:sld>
 </file>
 
-<file path=ppt/slides/slide44.xml><?xml version="1.0" encoding="utf-8"?>
+<file path=ppt/slides/slide45.xml><?xml version="1.0" encoding="utf-8"?>
 <p:sld xmlns:a="http://schemas.openxmlformats.org/drawingml/2006/main" xmlns:r="http://schemas.openxmlformats.org/officeDocument/2006/relationships" xmlns:p="http://schemas.openxmlformats.org/presentationml/2006/main">
   <p:cSld>
     <p:spTree>
@@ -48281,7 +48362,7 @@
             </a:pPr>
             <a:fld id="{81D60167-4931-47E6-BA6A-407CBD079E47}" type="slidenum">
               <a:rPr dirty="0"/>
-              <a:t>44</a:t>
+              <a:t>45</a:t>
             </a:fld>
             <a:r>
               <a:rPr spc="10" dirty="0"/>
@@ -48336,7 +48417,7 @@
 </p:sld>
 </file>
 
-<file path=ppt/slides/slide45.xml><?xml version="1.0" encoding="utf-8"?>
+<file path=ppt/slides/slide46.xml><?xml version="1.0" encoding="utf-8"?>
 <p:sld xmlns:a="http://schemas.openxmlformats.org/drawingml/2006/main" xmlns:r="http://schemas.openxmlformats.org/officeDocument/2006/relationships" xmlns:p="http://schemas.openxmlformats.org/presentationml/2006/main">
   <p:cSld>
     <p:spTree>
@@ -48693,7 +48774,7 @@
             </a:pPr>
             <a:fld id="{81D60167-4931-47E6-BA6A-407CBD079E47}" type="slidenum">
               <a:rPr dirty="0"/>
-              <a:t>45</a:t>
+              <a:t>46</a:t>
             </a:fld>
             <a:r>
               <a:rPr spc="10" dirty="0"/>
@@ -48752,7 +48833,7 @@
 </p:sld>
 </file>
 
-<file path=ppt/slides/slide46.xml><?xml version="1.0" encoding="utf-8"?>
+<file path=ppt/slides/slide47.xml><?xml version="1.0" encoding="utf-8"?>
 <p:sld xmlns:a="http://schemas.openxmlformats.org/drawingml/2006/main" xmlns:r="http://schemas.openxmlformats.org/officeDocument/2006/relationships" xmlns:p="http://schemas.openxmlformats.org/presentationml/2006/main" showMasterSp="0">
   <p:cSld>
     <p:spTree>
@@ -49699,7 +49780,7 @@
             </a:pPr>
             <a:fld id="{81D60167-4931-47E6-BA6A-407CBD079E47}" type="slidenum">
               <a:rPr dirty="0"/>
-              <a:t>46</a:t>
+              <a:t>47</a:t>
             </a:fld>
             <a:r>
               <a:rPr spc="10" dirty="0"/>
@@ -49731,7 +49812,7 @@
 </p:sld>
 </file>
 
-<file path=ppt/slides/slide47.xml><?xml version="1.0" encoding="utf-8"?>
+<file path=ppt/slides/slide48.xml><?xml version="1.0" encoding="utf-8"?>
 <p:sld xmlns:a="http://schemas.openxmlformats.org/drawingml/2006/main" xmlns:r="http://schemas.openxmlformats.org/officeDocument/2006/relationships" xmlns:p="http://schemas.openxmlformats.org/presentationml/2006/main">
   <p:cSld>
     <p:spTree>
@@ -50331,7 +50412,7 @@
             </a:pPr>
             <a:fld id="{81D60167-4931-47E6-BA6A-407CBD079E47}" type="slidenum">
               <a:rPr dirty="0"/>
-              <a:t>47</a:t>
+              <a:t>48</a:t>
             </a:fld>
             <a:r>
               <a:rPr spc="10" dirty="0"/>
@@ -50363,7 +50444,7 @@
 </p:sld>
 </file>
 
-<file path=ppt/slides/slide48.xml><?xml version="1.0" encoding="utf-8"?>
+<file path=ppt/slides/slide49.xml><?xml version="1.0" encoding="utf-8"?>
 <p:sld xmlns:a="http://schemas.openxmlformats.org/drawingml/2006/main" xmlns:r="http://schemas.openxmlformats.org/officeDocument/2006/relationships" xmlns:p="http://schemas.openxmlformats.org/presentationml/2006/main">
   <p:cSld>
     <p:spTree>
@@ -50478,608 +50559,6 @@
                 <a:cs typeface="Arial Black"/>
               </a:rPr>
               <a:t>Testing</a:t>
-            </a:r>
-            <a:endParaRPr sz="1400">
-              <a:latin typeface="Arial Black"/>
-              <a:cs typeface="Arial Black"/>
-            </a:endParaRPr>
-          </a:p>
-        </p:txBody>
-      </p:sp>
-      <p:sp>
-        <p:nvSpPr>
-          <p:cNvPr id="3" name="object 3"/>
-          <p:cNvSpPr txBox="1"/>
-          <p:nvPr/>
-        </p:nvSpPr>
-        <p:spPr>
-          <a:xfrm>
-            <a:off x="2030209" y="1519171"/>
-            <a:ext cx="1699895" cy="207645"/>
-          </a:xfrm>
-          <a:prstGeom prst="rect">
-            <a:avLst/>
-          </a:prstGeom>
-        </p:spPr>
-        <p:txBody>
-          <a:bodyPr vert="horz" wrap="square" lIns="0" tIns="12065" rIns="0" bIns="0" rtlCol="0">
-            <a:spAutoFit/>
-          </a:bodyPr>
-          <a:lstStyle/>
-          <a:p>
-            <a:pPr marL="12700">
-              <a:lnSpc>
-                <a:spcPct val="100000"/>
-              </a:lnSpc>
-              <a:spcBef>
-                <a:spcPts val="95"/>
-              </a:spcBef>
-            </a:pPr>
-            <a:r>
-              <a:rPr sz="1200" i="1" dirty="0">
-                <a:solidFill>
-                  <a:srgbClr val="ACACB5"/>
-                </a:solidFill>
-                <a:latin typeface="Calibri"/>
-                <a:cs typeface="Calibri"/>
-              </a:rPr>
-              <a:t>[</a:t>
-            </a:r>
-            <a:r>
-              <a:rPr sz="1200" i="1" spc="75" dirty="0">
-                <a:solidFill>
-                  <a:srgbClr val="ACACB5"/>
-                </a:solidFill>
-                <a:latin typeface="Calibri"/>
-                <a:cs typeface="Calibri"/>
-              </a:rPr>
-              <a:t> </a:t>
-            </a:r>
-            <a:r>
-              <a:rPr sz="1200" i="1" dirty="0">
-                <a:solidFill>
-                  <a:srgbClr val="ACACB5"/>
-                </a:solidFill>
-                <a:latin typeface="Calibri"/>
-                <a:cs typeface="Calibri"/>
-              </a:rPr>
-              <a:t>Fill</a:t>
-            </a:r>
-            <a:r>
-              <a:rPr sz="1200" i="1" spc="85" dirty="0">
-                <a:solidFill>
-                  <a:srgbClr val="ACACB5"/>
-                </a:solidFill>
-                <a:latin typeface="Calibri"/>
-                <a:cs typeface="Calibri"/>
-              </a:rPr>
-              <a:t> </a:t>
-            </a:r>
-            <a:r>
-              <a:rPr sz="1200" i="1" dirty="0">
-                <a:solidFill>
-                  <a:srgbClr val="ACACB5"/>
-                </a:solidFill>
-                <a:latin typeface="Calibri"/>
-                <a:cs typeface="Calibri"/>
-              </a:rPr>
-              <a:t>in</a:t>
-            </a:r>
-            <a:r>
-              <a:rPr sz="1200" i="1" spc="80" dirty="0">
-                <a:solidFill>
-                  <a:srgbClr val="ACACB5"/>
-                </a:solidFill>
-                <a:latin typeface="Calibri"/>
-                <a:cs typeface="Calibri"/>
-              </a:rPr>
-              <a:t> </a:t>
-            </a:r>
-            <a:r>
-              <a:rPr sz="1200" i="1" dirty="0">
-                <a:solidFill>
-                  <a:srgbClr val="ACACB5"/>
-                </a:solidFill>
-                <a:latin typeface="Calibri"/>
-                <a:cs typeface="Calibri"/>
-              </a:rPr>
-              <a:t>your</a:t>
-            </a:r>
-            <a:r>
-              <a:rPr sz="1200" i="1" spc="75" dirty="0">
-                <a:solidFill>
-                  <a:srgbClr val="ACACB5"/>
-                </a:solidFill>
-                <a:latin typeface="Calibri"/>
-                <a:cs typeface="Calibri"/>
-              </a:rPr>
-              <a:t> </a:t>
-            </a:r>
-            <a:r>
-              <a:rPr sz="1200" i="1" dirty="0">
-                <a:solidFill>
-                  <a:srgbClr val="ACACB5"/>
-                </a:solidFill>
-                <a:latin typeface="Calibri"/>
-                <a:cs typeface="Calibri"/>
-              </a:rPr>
-              <a:t>content</a:t>
-            </a:r>
-            <a:r>
-              <a:rPr sz="1200" i="1" spc="80" dirty="0">
-                <a:solidFill>
-                  <a:srgbClr val="ACACB5"/>
-                </a:solidFill>
-                <a:latin typeface="Calibri"/>
-                <a:cs typeface="Calibri"/>
-              </a:rPr>
-              <a:t> </a:t>
-            </a:r>
-            <a:r>
-              <a:rPr sz="1200" i="1" spc="-10" dirty="0">
-                <a:solidFill>
-                  <a:srgbClr val="ACACB5"/>
-                </a:solidFill>
-                <a:latin typeface="Calibri"/>
-                <a:cs typeface="Calibri"/>
-              </a:rPr>
-              <a:t>here</a:t>
-            </a:r>
-            <a:r>
-              <a:rPr sz="1200" i="1" spc="80" dirty="0">
-                <a:solidFill>
-                  <a:srgbClr val="ACACB5"/>
-                </a:solidFill>
-                <a:latin typeface="Calibri"/>
-                <a:cs typeface="Calibri"/>
-              </a:rPr>
-              <a:t> </a:t>
-            </a:r>
-            <a:r>
-              <a:rPr sz="1200" i="1" spc="-50" dirty="0">
-                <a:solidFill>
-                  <a:srgbClr val="ACACB5"/>
-                </a:solidFill>
-                <a:latin typeface="Calibri"/>
-                <a:cs typeface="Calibri"/>
-              </a:rPr>
-              <a:t>]</a:t>
-            </a:r>
-            <a:endParaRPr sz="1200">
-              <a:latin typeface="Calibri"/>
-              <a:cs typeface="Calibri"/>
-            </a:endParaRPr>
-          </a:p>
-        </p:txBody>
-      </p:sp>
-      <p:grpSp>
-        <p:nvGrpSpPr>
-          <p:cNvPr id="4" name="object 4"/>
-          <p:cNvGrpSpPr/>
-          <p:nvPr/>
-        </p:nvGrpSpPr>
-        <p:grpSpPr>
-          <a:xfrm>
-            <a:off x="0" y="3125279"/>
-            <a:ext cx="5760085" cy="114935"/>
-            <a:chOff x="0" y="3125279"/>
-            <a:chExt cx="5760085" cy="114935"/>
-          </a:xfrm>
-        </p:grpSpPr>
-        <p:sp>
-          <p:nvSpPr>
-            <p:cNvPr id="5" name="object 5"/>
-            <p:cNvSpPr/>
-            <p:nvPr/>
-          </p:nvSpPr>
-          <p:spPr>
-            <a:xfrm>
-              <a:off x="0" y="3125279"/>
-              <a:ext cx="2016125" cy="114935"/>
-            </a:xfrm>
-            <a:custGeom>
-              <a:avLst/>
-              <a:gdLst/>
-              <a:ahLst/>
-              <a:cxnLst/>
-              <a:rect l="l" t="t" r="r" b="b"/>
-              <a:pathLst>
-                <a:path w="2016125" h="114935">
-                  <a:moveTo>
-                    <a:pt x="2016036" y="0"/>
-                  </a:moveTo>
-                  <a:lnTo>
-                    <a:pt x="0" y="0"/>
-                  </a:lnTo>
-                  <a:lnTo>
-                    <a:pt x="0" y="114719"/>
-                  </a:lnTo>
-                  <a:lnTo>
-                    <a:pt x="2016036" y="114719"/>
-                  </a:lnTo>
-                  <a:lnTo>
-                    <a:pt x="2016036" y="0"/>
-                  </a:lnTo>
-                  <a:close/>
-                </a:path>
-              </a:pathLst>
-            </a:custGeom>
-            <a:solidFill>
-              <a:srgbClr val="B41313"/>
-            </a:solidFill>
-          </p:spPr>
-          <p:txBody>
-            <a:bodyPr wrap="square" lIns="0" tIns="0" rIns="0" bIns="0" rtlCol="0"/>
-            <a:lstStyle/>
-            <a:p>
-              <a:endParaRPr/>
-            </a:p>
-          </p:txBody>
-        </p:sp>
-        <p:sp>
-          <p:nvSpPr>
-            <p:cNvPr id="6" name="object 6"/>
-            <p:cNvSpPr/>
-            <p:nvPr/>
-          </p:nvSpPr>
-          <p:spPr>
-            <a:xfrm>
-              <a:off x="2016036" y="3125279"/>
-              <a:ext cx="2592070" cy="114935"/>
-            </a:xfrm>
-            <a:custGeom>
-              <a:avLst/>
-              <a:gdLst/>
-              <a:ahLst/>
-              <a:cxnLst/>
-              <a:rect l="l" t="t" r="r" b="b"/>
-              <a:pathLst>
-                <a:path w="2592070" h="114935">
-                  <a:moveTo>
-                    <a:pt x="2591981" y="0"/>
-                  </a:moveTo>
-                  <a:lnTo>
-                    <a:pt x="0" y="0"/>
-                  </a:lnTo>
-                  <a:lnTo>
-                    <a:pt x="0" y="114719"/>
-                  </a:lnTo>
-                  <a:lnTo>
-                    <a:pt x="2591981" y="114719"/>
-                  </a:lnTo>
-                  <a:lnTo>
-                    <a:pt x="2591981" y="0"/>
-                  </a:lnTo>
-                  <a:close/>
-                </a:path>
-              </a:pathLst>
-            </a:custGeom>
-            <a:solidFill>
-              <a:srgbClr val="37374C"/>
-            </a:solidFill>
-          </p:spPr>
-          <p:txBody>
-            <a:bodyPr wrap="square" lIns="0" tIns="0" rIns="0" bIns="0" rtlCol="0"/>
-            <a:lstStyle/>
-            <a:p>
-              <a:endParaRPr/>
-            </a:p>
-          </p:txBody>
-        </p:sp>
-        <p:sp>
-          <p:nvSpPr>
-            <p:cNvPr id="7" name="object 7"/>
-            <p:cNvSpPr/>
-            <p:nvPr/>
-          </p:nvSpPr>
-          <p:spPr>
-            <a:xfrm>
-              <a:off x="4608017" y="3125279"/>
-              <a:ext cx="1152525" cy="114935"/>
-            </a:xfrm>
-            <a:custGeom>
-              <a:avLst/>
-              <a:gdLst/>
-              <a:ahLst/>
-              <a:cxnLst/>
-              <a:rect l="l" t="t" r="r" b="b"/>
-              <a:pathLst>
-                <a:path w="1152525" h="114935">
-                  <a:moveTo>
-                    <a:pt x="1151978" y="0"/>
-                  </a:moveTo>
-                  <a:lnTo>
-                    <a:pt x="0" y="0"/>
-                  </a:lnTo>
-                  <a:lnTo>
-                    <a:pt x="0" y="114719"/>
-                  </a:lnTo>
-                  <a:lnTo>
-                    <a:pt x="1151978" y="114719"/>
-                  </a:lnTo>
-                  <a:lnTo>
-                    <a:pt x="1151978" y="0"/>
-                  </a:lnTo>
-                  <a:close/>
-                </a:path>
-              </a:pathLst>
-            </a:custGeom>
-            <a:solidFill>
-              <a:srgbClr val="13132C"/>
-            </a:solidFill>
-          </p:spPr>
-          <p:txBody>
-            <a:bodyPr wrap="square" lIns="0" tIns="0" rIns="0" bIns="0" rtlCol="0"/>
-            <a:lstStyle/>
-            <a:p>
-              <a:endParaRPr/>
-            </a:p>
-          </p:txBody>
-        </p:sp>
-      </p:grpSp>
-      <p:sp>
-        <p:nvSpPr>
-          <p:cNvPr id="8" name="object 8"/>
-          <p:cNvSpPr txBox="1">
-            <a:spLocks noGrp="1"/>
-          </p:cNvSpPr>
-          <p:nvPr>
-            <p:ph type="ftr" sz="quarter" idx="5"/>
-          </p:nvPr>
-        </p:nvSpPr>
-        <p:spPr>
-          <a:prstGeom prst="rect">
-            <a:avLst/>
-          </a:prstGeom>
-        </p:spPr>
-        <p:txBody>
-          <a:bodyPr vert="horz" wrap="square" lIns="0" tIns="24130" rIns="0" bIns="0" rtlCol="0">
-            <a:spAutoFit/>
-          </a:bodyPr>
-          <a:lstStyle/>
-          <a:p>
-            <a:pPr marL="12700">
-              <a:lnSpc>
-                <a:spcPct val="100000"/>
-              </a:lnSpc>
-              <a:spcBef>
-                <a:spcPts val="190"/>
-              </a:spcBef>
-            </a:pPr>
-            <a:r>
-              <a:rPr dirty="0"/>
-              <a:t>ITI </a:t>
-            </a:r>
-            <a:r>
-              <a:rPr spc="-10" dirty="0"/>
-              <a:t>Intake</a:t>
-            </a:r>
-            <a:r>
-              <a:rPr spc="5" dirty="0"/>
-              <a:t> </a:t>
-            </a:r>
-            <a:r>
-              <a:rPr spc="-25" dirty="0"/>
-              <a:t>46</a:t>
-            </a:r>
-          </a:p>
-        </p:txBody>
-      </p:sp>
-      <p:sp>
-        <p:nvSpPr>
-          <p:cNvPr id="9" name="object 9"/>
-          <p:cNvSpPr txBox="1"/>
-          <p:nvPr/>
-        </p:nvSpPr>
-        <p:spPr>
-          <a:xfrm>
-            <a:off x="3100044" y="3105948"/>
-            <a:ext cx="424180" cy="137160"/>
-          </a:xfrm>
-          <a:prstGeom prst="rect">
-            <a:avLst/>
-          </a:prstGeom>
-        </p:spPr>
-        <p:txBody>
-          <a:bodyPr vert="horz" wrap="square" lIns="0" tIns="24130" rIns="0" bIns="0" rtlCol="0">
-            <a:spAutoFit/>
-          </a:bodyPr>
-          <a:lstStyle/>
-          <a:p>
-            <a:pPr marL="12700">
-              <a:lnSpc>
-                <a:spcPct val="100000"/>
-              </a:lnSpc>
-              <a:spcBef>
-                <a:spcPts val="190"/>
-              </a:spcBef>
-            </a:pPr>
-            <a:r>
-              <a:rPr sz="600" spc="-10" dirty="0">
-                <a:solidFill>
-                  <a:srgbClr val="FFFFFF"/>
-                </a:solidFill>
-                <a:latin typeface="Tahoma"/>
-                <a:cs typeface="Tahoma"/>
-                <a:hlinkClick r:id="rId2" action="ppaction://hlinksldjump"/>
-              </a:rPr>
-              <a:t>RANPilotAI</a:t>
-            </a:r>
-            <a:endParaRPr sz="600" dirty="0">
-              <a:latin typeface="Tahoma"/>
-              <a:cs typeface="Tahoma"/>
-            </a:endParaRPr>
-          </a:p>
-        </p:txBody>
-      </p:sp>
-      <p:sp>
-        <p:nvSpPr>
-          <p:cNvPr id="10" name="object 10"/>
-          <p:cNvSpPr txBox="1">
-            <a:spLocks noGrp="1"/>
-          </p:cNvSpPr>
-          <p:nvPr>
-            <p:ph type="sldNum" sz="quarter" idx="7"/>
-          </p:nvPr>
-        </p:nvSpPr>
-        <p:spPr>
-          <a:prstGeom prst="rect">
-            <a:avLst/>
-          </a:prstGeom>
-        </p:spPr>
-        <p:txBody>
-          <a:bodyPr vert="horz" wrap="square" lIns="0" tIns="24130" rIns="0" bIns="0" rtlCol="0">
-            <a:spAutoFit/>
-          </a:bodyPr>
-          <a:lstStyle/>
-          <a:p>
-            <a:pPr marL="12700">
-              <a:lnSpc>
-                <a:spcPct val="100000"/>
-              </a:lnSpc>
-              <a:spcBef>
-                <a:spcPts val="190"/>
-              </a:spcBef>
-            </a:pPr>
-            <a:fld id="{81D60167-4931-47E6-BA6A-407CBD079E47}" type="slidenum">
-              <a:rPr dirty="0"/>
-              <a:t>48</a:t>
-            </a:fld>
-            <a:r>
-              <a:rPr spc="10" dirty="0"/>
-              <a:t> </a:t>
-            </a:r>
-            <a:r>
-              <a:rPr spc="90" dirty="0"/>
-              <a:t>/</a:t>
-            </a:r>
-            <a:r>
-              <a:rPr spc="10" dirty="0"/>
-              <a:t> </a:t>
-            </a:r>
-            <a:r>
-              <a:rPr spc="-25" dirty="0"/>
-              <a:t>47</a:t>
-            </a:r>
-          </a:p>
-        </p:txBody>
-      </p:sp>
-    </p:spTree>
-  </p:cSld>
-  <p:clrMapOvr>
-    <a:masterClrMapping/>
-  </p:clrMapOvr>
-  <p:transition>
-    <p:cut/>
-  </p:transition>
-</p:sld>
-</file>
-
-<file path=ppt/slides/slide49.xml><?xml version="1.0" encoding="utf-8"?>
-<p:sld xmlns:a="http://schemas.openxmlformats.org/drawingml/2006/main" xmlns:r="http://schemas.openxmlformats.org/officeDocument/2006/relationships" xmlns:p="http://schemas.openxmlformats.org/presentationml/2006/main">
-  <p:cSld>
-    <p:spTree>
-      <p:nvGrpSpPr>
-        <p:cNvPr id="1" name=""/>
-        <p:cNvGrpSpPr/>
-        <p:nvPr/>
-      </p:nvGrpSpPr>
-      <p:grpSpPr>
-        <a:xfrm>
-          <a:off x="0" y="0"/>
-          <a:ext cx="0" cy="0"/>
-          <a:chOff x="0" y="0"/>
-          <a:chExt cx="0" cy="0"/>
-        </a:xfrm>
-      </p:grpSpPr>
-      <p:sp>
-        <p:nvSpPr>
-          <p:cNvPr id="2" name="object 2"/>
-          <p:cNvSpPr txBox="1"/>
-          <p:nvPr/>
-        </p:nvSpPr>
-        <p:spPr>
-          <a:xfrm>
-            <a:off x="95300" y="57337"/>
-            <a:ext cx="2580005" cy="244475"/>
-          </a:xfrm>
-          <a:prstGeom prst="rect">
-            <a:avLst/>
-          </a:prstGeom>
-        </p:spPr>
-        <p:txBody>
-          <a:bodyPr vert="horz" wrap="square" lIns="0" tIns="17145" rIns="0" bIns="0" rtlCol="0">
-            <a:spAutoFit/>
-          </a:bodyPr>
-          <a:lstStyle/>
-          <a:p>
-            <a:pPr marL="12700">
-              <a:lnSpc>
-                <a:spcPct val="100000"/>
-              </a:lnSpc>
-              <a:spcBef>
-                <a:spcPts val="135"/>
-              </a:spcBef>
-            </a:pPr>
-            <a:r>
-              <a:rPr sz="1400" spc="-130" dirty="0">
-                <a:solidFill>
-                  <a:srgbClr val="FFFFFF"/>
-                </a:solidFill>
-                <a:latin typeface="Arial Black"/>
-                <a:cs typeface="Arial Black"/>
-              </a:rPr>
-              <a:t>Real-</a:t>
-            </a:r>
-            <a:r>
-              <a:rPr sz="1400" spc="-155" dirty="0">
-                <a:solidFill>
-                  <a:srgbClr val="FFFFFF"/>
-                </a:solidFill>
-                <a:latin typeface="Arial Black"/>
-                <a:cs typeface="Arial Black"/>
-              </a:rPr>
-              <a:t>Case</a:t>
-            </a:r>
-            <a:r>
-              <a:rPr sz="1400" spc="60" dirty="0">
-                <a:solidFill>
-                  <a:srgbClr val="FFFFFF"/>
-                </a:solidFill>
-                <a:latin typeface="Arial Black"/>
-                <a:cs typeface="Arial Black"/>
-              </a:rPr>
-              <a:t> </a:t>
-            </a:r>
-            <a:r>
-              <a:rPr sz="1400" spc="-125" dirty="0">
-                <a:solidFill>
-                  <a:srgbClr val="FFFFFF"/>
-                </a:solidFill>
-                <a:latin typeface="Arial Black"/>
-                <a:cs typeface="Arial Black"/>
-              </a:rPr>
-              <a:t>Dataset</a:t>
-            </a:r>
-            <a:r>
-              <a:rPr sz="1400" spc="60" dirty="0">
-                <a:solidFill>
-                  <a:srgbClr val="FFFFFF"/>
-                </a:solidFill>
-                <a:latin typeface="Arial Black"/>
-                <a:cs typeface="Arial Black"/>
-              </a:rPr>
-              <a:t> </a:t>
-            </a:r>
-            <a:r>
-              <a:rPr sz="1400" spc="-120" dirty="0">
-                <a:solidFill>
-                  <a:srgbClr val="FFFFFF"/>
-                </a:solidFill>
-                <a:latin typeface="Arial Black"/>
-                <a:cs typeface="Arial Black"/>
-              </a:rPr>
-              <a:t>Description</a:t>
             </a:r>
             <a:endParaRPr sz="1400">
               <a:latin typeface="Arial Black"/>
@@ -52188,6 +51667,608 @@
       </p:grpSpPr>
       <p:sp>
         <p:nvSpPr>
+          <p:cNvPr id="2" name="object 2"/>
+          <p:cNvSpPr txBox="1"/>
+          <p:nvPr/>
+        </p:nvSpPr>
+        <p:spPr>
+          <a:xfrm>
+            <a:off x="95300" y="57337"/>
+            <a:ext cx="2580005" cy="244475"/>
+          </a:xfrm>
+          <a:prstGeom prst="rect">
+            <a:avLst/>
+          </a:prstGeom>
+        </p:spPr>
+        <p:txBody>
+          <a:bodyPr vert="horz" wrap="square" lIns="0" tIns="17145" rIns="0" bIns="0" rtlCol="0">
+            <a:spAutoFit/>
+          </a:bodyPr>
+          <a:lstStyle/>
+          <a:p>
+            <a:pPr marL="12700">
+              <a:lnSpc>
+                <a:spcPct val="100000"/>
+              </a:lnSpc>
+              <a:spcBef>
+                <a:spcPts val="135"/>
+              </a:spcBef>
+            </a:pPr>
+            <a:r>
+              <a:rPr sz="1400" spc="-130" dirty="0">
+                <a:solidFill>
+                  <a:srgbClr val="FFFFFF"/>
+                </a:solidFill>
+                <a:latin typeface="Arial Black"/>
+                <a:cs typeface="Arial Black"/>
+              </a:rPr>
+              <a:t>Real-</a:t>
+            </a:r>
+            <a:r>
+              <a:rPr sz="1400" spc="-155" dirty="0">
+                <a:solidFill>
+                  <a:srgbClr val="FFFFFF"/>
+                </a:solidFill>
+                <a:latin typeface="Arial Black"/>
+                <a:cs typeface="Arial Black"/>
+              </a:rPr>
+              <a:t>Case</a:t>
+            </a:r>
+            <a:r>
+              <a:rPr sz="1400" spc="60" dirty="0">
+                <a:solidFill>
+                  <a:srgbClr val="FFFFFF"/>
+                </a:solidFill>
+                <a:latin typeface="Arial Black"/>
+                <a:cs typeface="Arial Black"/>
+              </a:rPr>
+              <a:t> </a:t>
+            </a:r>
+            <a:r>
+              <a:rPr sz="1400" spc="-125" dirty="0">
+                <a:solidFill>
+                  <a:srgbClr val="FFFFFF"/>
+                </a:solidFill>
+                <a:latin typeface="Arial Black"/>
+                <a:cs typeface="Arial Black"/>
+              </a:rPr>
+              <a:t>Dataset</a:t>
+            </a:r>
+            <a:r>
+              <a:rPr sz="1400" spc="60" dirty="0">
+                <a:solidFill>
+                  <a:srgbClr val="FFFFFF"/>
+                </a:solidFill>
+                <a:latin typeface="Arial Black"/>
+                <a:cs typeface="Arial Black"/>
+              </a:rPr>
+              <a:t> </a:t>
+            </a:r>
+            <a:r>
+              <a:rPr sz="1400" spc="-120" dirty="0">
+                <a:solidFill>
+                  <a:srgbClr val="FFFFFF"/>
+                </a:solidFill>
+                <a:latin typeface="Arial Black"/>
+                <a:cs typeface="Arial Black"/>
+              </a:rPr>
+              <a:t>Description</a:t>
+            </a:r>
+            <a:endParaRPr sz="1400">
+              <a:latin typeface="Arial Black"/>
+              <a:cs typeface="Arial Black"/>
+            </a:endParaRPr>
+          </a:p>
+        </p:txBody>
+      </p:sp>
+      <p:sp>
+        <p:nvSpPr>
+          <p:cNvPr id="3" name="object 3"/>
+          <p:cNvSpPr txBox="1"/>
+          <p:nvPr/>
+        </p:nvSpPr>
+        <p:spPr>
+          <a:xfrm>
+            <a:off x="2030209" y="1519171"/>
+            <a:ext cx="1699895" cy="207645"/>
+          </a:xfrm>
+          <a:prstGeom prst="rect">
+            <a:avLst/>
+          </a:prstGeom>
+        </p:spPr>
+        <p:txBody>
+          <a:bodyPr vert="horz" wrap="square" lIns="0" tIns="12065" rIns="0" bIns="0" rtlCol="0">
+            <a:spAutoFit/>
+          </a:bodyPr>
+          <a:lstStyle/>
+          <a:p>
+            <a:pPr marL="12700">
+              <a:lnSpc>
+                <a:spcPct val="100000"/>
+              </a:lnSpc>
+              <a:spcBef>
+                <a:spcPts val="95"/>
+              </a:spcBef>
+            </a:pPr>
+            <a:r>
+              <a:rPr sz="1200" i="1" dirty="0">
+                <a:solidFill>
+                  <a:srgbClr val="ACACB5"/>
+                </a:solidFill>
+                <a:latin typeface="Calibri"/>
+                <a:cs typeface="Calibri"/>
+              </a:rPr>
+              <a:t>[</a:t>
+            </a:r>
+            <a:r>
+              <a:rPr sz="1200" i="1" spc="75" dirty="0">
+                <a:solidFill>
+                  <a:srgbClr val="ACACB5"/>
+                </a:solidFill>
+                <a:latin typeface="Calibri"/>
+                <a:cs typeface="Calibri"/>
+              </a:rPr>
+              <a:t> </a:t>
+            </a:r>
+            <a:r>
+              <a:rPr sz="1200" i="1" dirty="0">
+                <a:solidFill>
+                  <a:srgbClr val="ACACB5"/>
+                </a:solidFill>
+                <a:latin typeface="Calibri"/>
+                <a:cs typeface="Calibri"/>
+              </a:rPr>
+              <a:t>Fill</a:t>
+            </a:r>
+            <a:r>
+              <a:rPr sz="1200" i="1" spc="85" dirty="0">
+                <a:solidFill>
+                  <a:srgbClr val="ACACB5"/>
+                </a:solidFill>
+                <a:latin typeface="Calibri"/>
+                <a:cs typeface="Calibri"/>
+              </a:rPr>
+              <a:t> </a:t>
+            </a:r>
+            <a:r>
+              <a:rPr sz="1200" i="1" dirty="0">
+                <a:solidFill>
+                  <a:srgbClr val="ACACB5"/>
+                </a:solidFill>
+                <a:latin typeface="Calibri"/>
+                <a:cs typeface="Calibri"/>
+              </a:rPr>
+              <a:t>in</a:t>
+            </a:r>
+            <a:r>
+              <a:rPr sz="1200" i="1" spc="80" dirty="0">
+                <a:solidFill>
+                  <a:srgbClr val="ACACB5"/>
+                </a:solidFill>
+                <a:latin typeface="Calibri"/>
+                <a:cs typeface="Calibri"/>
+              </a:rPr>
+              <a:t> </a:t>
+            </a:r>
+            <a:r>
+              <a:rPr sz="1200" i="1" dirty="0">
+                <a:solidFill>
+                  <a:srgbClr val="ACACB5"/>
+                </a:solidFill>
+                <a:latin typeface="Calibri"/>
+                <a:cs typeface="Calibri"/>
+              </a:rPr>
+              <a:t>your</a:t>
+            </a:r>
+            <a:r>
+              <a:rPr sz="1200" i="1" spc="75" dirty="0">
+                <a:solidFill>
+                  <a:srgbClr val="ACACB5"/>
+                </a:solidFill>
+                <a:latin typeface="Calibri"/>
+                <a:cs typeface="Calibri"/>
+              </a:rPr>
+              <a:t> </a:t>
+            </a:r>
+            <a:r>
+              <a:rPr sz="1200" i="1" dirty="0">
+                <a:solidFill>
+                  <a:srgbClr val="ACACB5"/>
+                </a:solidFill>
+                <a:latin typeface="Calibri"/>
+                <a:cs typeface="Calibri"/>
+              </a:rPr>
+              <a:t>content</a:t>
+            </a:r>
+            <a:r>
+              <a:rPr sz="1200" i="1" spc="80" dirty="0">
+                <a:solidFill>
+                  <a:srgbClr val="ACACB5"/>
+                </a:solidFill>
+                <a:latin typeface="Calibri"/>
+                <a:cs typeface="Calibri"/>
+              </a:rPr>
+              <a:t> </a:t>
+            </a:r>
+            <a:r>
+              <a:rPr sz="1200" i="1" spc="-10" dirty="0">
+                <a:solidFill>
+                  <a:srgbClr val="ACACB5"/>
+                </a:solidFill>
+                <a:latin typeface="Calibri"/>
+                <a:cs typeface="Calibri"/>
+              </a:rPr>
+              <a:t>here</a:t>
+            </a:r>
+            <a:r>
+              <a:rPr sz="1200" i="1" spc="80" dirty="0">
+                <a:solidFill>
+                  <a:srgbClr val="ACACB5"/>
+                </a:solidFill>
+                <a:latin typeface="Calibri"/>
+                <a:cs typeface="Calibri"/>
+              </a:rPr>
+              <a:t> </a:t>
+            </a:r>
+            <a:r>
+              <a:rPr sz="1200" i="1" spc="-50" dirty="0">
+                <a:solidFill>
+                  <a:srgbClr val="ACACB5"/>
+                </a:solidFill>
+                <a:latin typeface="Calibri"/>
+                <a:cs typeface="Calibri"/>
+              </a:rPr>
+              <a:t>]</a:t>
+            </a:r>
+            <a:endParaRPr sz="1200">
+              <a:latin typeface="Calibri"/>
+              <a:cs typeface="Calibri"/>
+            </a:endParaRPr>
+          </a:p>
+        </p:txBody>
+      </p:sp>
+      <p:grpSp>
+        <p:nvGrpSpPr>
+          <p:cNvPr id="4" name="object 4"/>
+          <p:cNvGrpSpPr/>
+          <p:nvPr/>
+        </p:nvGrpSpPr>
+        <p:grpSpPr>
+          <a:xfrm>
+            <a:off x="0" y="3125279"/>
+            <a:ext cx="5760085" cy="114935"/>
+            <a:chOff x="0" y="3125279"/>
+            <a:chExt cx="5760085" cy="114935"/>
+          </a:xfrm>
+        </p:grpSpPr>
+        <p:sp>
+          <p:nvSpPr>
+            <p:cNvPr id="5" name="object 5"/>
+            <p:cNvSpPr/>
+            <p:nvPr/>
+          </p:nvSpPr>
+          <p:spPr>
+            <a:xfrm>
+              <a:off x="0" y="3125279"/>
+              <a:ext cx="2016125" cy="114935"/>
+            </a:xfrm>
+            <a:custGeom>
+              <a:avLst/>
+              <a:gdLst/>
+              <a:ahLst/>
+              <a:cxnLst/>
+              <a:rect l="l" t="t" r="r" b="b"/>
+              <a:pathLst>
+                <a:path w="2016125" h="114935">
+                  <a:moveTo>
+                    <a:pt x="2016036" y="0"/>
+                  </a:moveTo>
+                  <a:lnTo>
+                    <a:pt x="0" y="0"/>
+                  </a:lnTo>
+                  <a:lnTo>
+                    <a:pt x="0" y="114719"/>
+                  </a:lnTo>
+                  <a:lnTo>
+                    <a:pt x="2016036" y="114719"/>
+                  </a:lnTo>
+                  <a:lnTo>
+                    <a:pt x="2016036" y="0"/>
+                  </a:lnTo>
+                  <a:close/>
+                </a:path>
+              </a:pathLst>
+            </a:custGeom>
+            <a:solidFill>
+              <a:srgbClr val="B41313"/>
+            </a:solidFill>
+          </p:spPr>
+          <p:txBody>
+            <a:bodyPr wrap="square" lIns="0" tIns="0" rIns="0" bIns="0" rtlCol="0"/>
+            <a:lstStyle/>
+            <a:p>
+              <a:endParaRPr/>
+            </a:p>
+          </p:txBody>
+        </p:sp>
+        <p:sp>
+          <p:nvSpPr>
+            <p:cNvPr id="6" name="object 6"/>
+            <p:cNvSpPr/>
+            <p:nvPr/>
+          </p:nvSpPr>
+          <p:spPr>
+            <a:xfrm>
+              <a:off x="2016036" y="3125279"/>
+              <a:ext cx="2592070" cy="114935"/>
+            </a:xfrm>
+            <a:custGeom>
+              <a:avLst/>
+              <a:gdLst/>
+              <a:ahLst/>
+              <a:cxnLst/>
+              <a:rect l="l" t="t" r="r" b="b"/>
+              <a:pathLst>
+                <a:path w="2592070" h="114935">
+                  <a:moveTo>
+                    <a:pt x="2591981" y="0"/>
+                  </a:moveTo>
+                  <a:lnTo>
+                    <a:pt x="0" y="0"/>
+                  </a:lnTo>
+                  <a:lnTo>
+                    <a:pt x="0" y="114719"/>
+                  </a:lnTo>
+                  <a:lnTo>
+                    <a:pt x="2591981" y="114719"/>
+                  </a:lnTo>
+                  <a:lnTo>
+                    <a:pt x="2591981" y="0"/>
+                  </a:lnTo>
+                  <a:close/>
+                </a:path>
+              </a:pathLst>
+            </a:custGeom>
+            <a:solidFill>
+              <a:srgbClr val="37374C"/>
+            </a:solidFill>
+          </p:spPr>
+          <p:txBody>
+            <a:bodyPr wrap="square" lIns="0" tIns="0" rIns="0" bIns="0" rtlCol="0"/>
+            <a:lstStyle/>
+            <a:p>
+              <a:endParaRPr/>
+            </a:p>
+          </p:txBody>
+        </p:sp>
+        <p:sp>
+          <p:nvSpPr>
+            <p:cNvPr id="7" name="object 7"/>
+            <p:cNvSpPr/>
+            <p:nvPr/>
+          </p:nvSpPr>
+          <p:spPr>
+            <a:xfrm>
+              <a:off x="4608017" y="3125279"/>
+              <a:ext cx="1152525" cy="114935"/>
+            </a:xfrm>
+            <a:custGeom>
+              <a:avLst/>
+              <a:gdLst/>
+              <a:ahLst/>
+              <a:cxnLst/>
+              <a:rect l="l" t="t" r="r" b="b"/>
+              <a:pathLst>
+                <a:path w="1152525" h="114935">
+                  <a:moveTo>
+                    <a:pt x="1151978" y="0"/>
+                  </a:moveTo>
+                  <a:lnTo>
+                    <a:pt x="0" y="0"/>
+                  </a:lnTo>
+                  <a:lnTo>
+                    <a:pt x="0" y="114719"/>
+                  </a:lnTo>
+                  <a:lnTo>
+                    <a:pt x="1151978" y="114719"/>
+                  </a:lnTo>
+                  <a:lnTo>
+                    <a:pt x="1151978" y="0"/>
+                  </a:lnTo>
+                  <a:close/>
+                </a:path>
+              </a:pathLst>
+            </a:custGeom>
+            <a:solidFill>
+              <a:srgbClr val="13132C"/>
+            </a:solidFill>
+          </p:spPr>
+          <p:txBody>
+            <a:bodyPr wrap="square" lIns="0" tIns="0" rIns="0" bIns="0" rtlCol="0"/>
+            <a:lstStyle/>
+            <a:p>
+              <a:endParaRPr/>
+            </a:p>
+          </p:txBody>
+        </p:sp>
+      </p:grpSp>
+      <p:sp>
+        <p:nvSpPr>
+          <p:cNvPr id="8" name="object 8"/>
+          <p:cNvSpPr txBox="1">
+            <a:spLocks noGrp="1"/>
+          </p:cNvSpPr>
+          <p:nvPr>
+            <p:ph type="ftr" sz="quarter" idx="5"/>
+          </p:nvPr>
+        </p:nvSpPr>
+        <p:spPr>
+          <a:prstGeom prst="rect">
+            <a:avLst/>
+          </a:prstGeom>
+        </p:spPr>
+        <p:txBody>
+          <a:bodyPr vert="horz" wrap="square" lIns="0" tIns="24130" rIns="0" bIns="0" rtlCol="0">
+            <a:spAutoFit/>
+          </a:bodyPr>
+          <a:lstStyle/>
+          <a:p>
+            <a:pPr marL="12700">
+              <a:lnSpc>
+                <a:spcPct val="100000"/>
+              </a:lnSpc>
+              <a:spcBef>
+                <a:spcPts val="190"/>
+              </a:spcBef>
+            </a:pPr>
+            <a:r>
+              <a:rPr dirty="0"/>
+              <a:t>ITI </a:t>
+            </a:r>
+            <a:r>
+              <a:rPr spc="-10" dirty="0"/>
+              <a:t>Intake</a:t>
+            </a:r>
+            <a:r>
+              <a:rPr spc="5" dirty="0"/>
+              <a:t> </a:t>
+            </a:r>
+            <a:r>
+              <a:rPr spc="-25" dirty="0"/>
+              <a:t>46</a:t>
+            </a:r>
+          </a:p>
+        </p:txBody>
+      </p:sp>
+      <p:sp>
+        <p:nvSpPr>
+          <p:cNvPr id="9" name="object 9"/>
+          <p:cNvSpPr txBox="1"/>
+          <p:nvPr/>
+        </p:nvSpPr>
+        <p:spPr>
+          <a:xfrm>
+            <a:off x="3100044" y="3105948"/>
+            <a:ext cx="424180" cy="137160"/>
+          </a:xfrm>
+          <a:prstGeom prst="rect">
+            <a:avLst/>
+          </a:prstGeom>
+        </p:spPr>
+        <p:txBody>
+          <a:bodyPr vert="horz" wrap="square" lIns="0" tIns="24130" rIns="0" bIns="0" rtlCol="0">
+            <a:spAutoFit/>
+          </a:bodyPr>
+          <a:lstStyle/>
+          <a:p>
+            <a:pPr marL="12700">
+              <a:lnSpc>
+                <a:spcPct val="100000"/>
+              </a:lnSpc>
+              <a:spcBef>
+                <a:spcPts val="190"/>
+              </a:spcBef>
+            </a:pPr>
+            <a:r>
+              <a:rPr sz="600" spc="-10" dirty="0">
+                <a:solidFill>
+                  <a:srgbClr val="FFFFFF"/>
+                </a:solidFill>
+                <a:latin typeface="Tahoma"/>
+                <a:cs typeface="Tahoma"/>
+                <a:hlinkClick r:id="rId2" action="ppaction://hlinksldjump"/>
+              </a:rPr>
+              <a:t>RANPilotAI</a:t>
+            </a:r>
+            <a:endParaRPr sz="600" dirty="0">
+              <a:latin typeface="Tahoma"/>
+              <a:cs typeface="Tahoma"/>
+            </a:endParaRPr>
+          </a:p>
+        </p:txBody>
+      </p:sp>
+      <p:sp>
+        <p:nvSpPr>
+          <p:cNvPr id="10" name="object 10"/>
+          <p:cNvSpPr txBox="1">
+            <a:spLocks noGrp="1"/>
+          </p:cNvSpPr>
+          <p:nvPr>
+            <p:ph type="sldNum" sz="quarter" idx="7"/>
+          </p:nvPr>
+        </p:nvSpPr>
+        <p:spPr>
+          <a:prstGeom prst="rect">
+            <a:avLst/>
+          </a:prstGeom>
+        </p:spPr>
+        <p:txBody>
+          <a:bodyPr vert="horz" wrap="square" lIns="0" tIns="24130" rIns="0" bIns="0" rtlCol="0">
+            <a:spAutoFit/>
+          </a:bodyPr>
+          <a:lstStyle/>
+          <a:p>
+            <a:pPr marL="12700">
+              <a:lnSpc>
+                <a:spcPct val="100000"/>
+              </a:lnSpc>
+              <a:spcBef>
+                <a:spcPts val="190"/>
+              </a:spcBef>
+            </a:pPr>
+            <a:fld id="{81D60167-4931-47E6-BA6A-407CBD079E47}" type="slidenum">
+              <a:rPr dirty="0"/>
+              <a:t>50</a:t>
+            </a:fld>
+            <a:r>
+              <a:rPr spc="10" dirty="0"/>
+              <a:t> </a:t>
+            </a:r>
+            <a:r>
+              <a:rPr spc="90" dirty="0"/>
+              <a:t>/</a:t>
+            </a:r>
+            <a:r>
+              <a:rPr spc="10" dirty="0"/>
+              <a:t> </a:t>
+            </a:r>
+            <a:r>
+              <a:rPr spc="-25" dirty="0"/>
+              <a:t>47</a:t>
+            </a:r>
+          </a:p>
+        </p:txBody>
+      </p:sp>
+    </p:spTree>
+  </p:cSld>
+  <p:clrMapOvr>
+    <a:masterClrMapping/>
+  </p:clrMapOvr>
+  <p:transition>
+    <p:cut/>
+  </p:transition>
+</p:sld>
+</file>
+
+<file path=ppt/slides/slide51.xml><?xml version="1.0" encoding="utf-8"?>
+<p:sld xmlns:a="http://schemas.openxmlformats.org/drawingml/2006/main" xmlns:r="http://schemas.openxmlformats.org/officeDocument/2006/relationships" xmlns:p="http://schemas.openxmlformats.org/presentationml/2006/main">
+  <p:cSld>
+    <p:spTree>
+      <p:nvGrpSpPr>
+        <p:cNvPr id="1" name=""/>
+        <p:cNvGrpSpPr/>
+        <p:nvPr/>
+      </p:nvGrpSpPr>
+      <p:grpSpPr>
+        <a:xfrm>
+          <a:off x="0" y="0"/>
+          <a:ext cx="0" cy="0"/>
+          <a:chOff x="0" y="0"/>
+          <a:chExt cx="0" cy="0"/>
+        </a:xfrm>
+      </p:grpSpPr>
+      <p:sp>
+        <p:nvSpPr>
           <p:cNvPr id="2" name="object 2" descr="$PPTXTitle"/>
           <p:cNvSpPr txBox="1">
             <a:spLocks noGrp="1"/>
@@ -52858,7 +52939,7 @@
             </a:pPr>
             <a:fld id="{81D60167-4931-47E6-BA6A-407CBD079E47}" type="slidenum">
               <a:rPr dirty="0"/>
-              <a:t>50</a:t>
+              <a:t>51</a:t>
             </a:fld>
             <a:r>
               <a:rPr spc="10" dirty="0"/>
@@ -52890,7 +52971,7 @@
 </p:sld>
 </file>
 
-<file path=ppt/slides/slide51.xml><?xml version="1.0" encoding="utf-8"?>
+<file path=ppt/slides/slide52.xml><?xml version="1.0" encoding="utf-8"?>
 <p:sld xmlns:a="http://schemas.openxmlformats.org/drawingml/2006/main" xmlns:r="http://schemas.openxmlformats.org/officeDocument/2006/relationships" xmlns:p="http://schemas.openxmlformats.org/presentationml/2006/main">
   <p:cSld>
     <p:spTree>
@@ -53575,7 +53656,7 @@
             </a:pPr>
             <a:fld id="{81D60167-4931-47E6-BA6A-407CBD079E47}" type="slidenum">
               <a:rPr dirty="0"/>
-              <a:t>51</a:t>
+              <a:t>52</a:t>
             </a:fld>
             <a:r>
               <a:rPr spc="10" dirty="0"/>
@@ -53607,7 +53688,7 @@
 </p:sld>
 </file>
 
-<file path=ppt/slides/slide52.xml><?xml version="1.0" encoding="utf-8"?>
+<file path=ppt/slides/slide53.xml><?xml version="1.0" encoding="utf-8"?>
 <p:sld xmlns:a="http://schemas.openxmlformats.org/drawingml/2006/main" xmlns:r="http://schemas.openxmlformats.org/officeDocument/2006/relationships" xmlns:p="http://schemas.openxmlformats.org/presentationml/2006/main">
   <p:cSld>
     <p:spTree>
@@ -54505,7 +54586,7 @@
             </a:pPr>
             <a:fld id="{81D60167-4931-47E6-BA6A-407CBD079E47}" type="slidenum">
               <a:rPr dirty="0"/>
-              <a:t>52</a:t>
+              <a:t>53</a:t>
             </a:fld>
             <a:r>
               <a:rPr spc="10" dirty="0"/>
@@ -54537,7 +54618,7 @@
 </p:sld>
 </file>
 
-<file path=ppt/slides/slide53.xml><?xml version="1.0" encoding="utf-8"?>
+<file path=ppt/slides/slide54.xml><?xml version="1.0" encoding="utf-8"?>
 <p:sld xmlns:a="http://schemas.openxmlformats.org/drawingml/2006/main" xmlns:r="http://schemas.openxmlformats.org/officeDocument/2006/relationships" xmlns:p="http://schemas.openxmlformats.org/presentationml/2006/main">
   <p:cSld>
     <p:spTree>
@@ -55226,7 +55307,7 @@
             </a:pPr>
             <a:fld id="{81D60167-4931-47E6-BA6A-407CBD079E47}" type="slidenum">
               <a:rPr dirty="0"/>
-              <a:t>53</a:t>
+              <a:t>54</a:t>
             </a:fld>
             <a:r>
               <a:rPr spc="10" dirty="0"/>
@@ -55258,7 +55339,7 @@
 </p:sld>
 </file>
 
-<file path=ppt/slides/slide54.xml><?xml version="1.0" encoding="utf-8"?>
+<file path=ppt/slides/slide55.xml><?xml version="1.0" encoding="utf-8"?>
 <p:sld xmlns:a="http://schemas.openxmlformats.org/drawingml/2006/main" xmlns:r="http://schemas.openxmlformats.org/officeDocument/2006/relationships" xmlns:p="http://schemas.openxmlformats.org/presentationml/2006/main">
   <p:cSld>
     <p:spTree>
@@ -55778,7 +55859,7 @@
             </a:pPr>
             <a:fld id="{81D60167-4931-47E6-BA6A-407CBD079E47}" type="slidenum">
               <a:rPr dirty="0"/>
-              <a:t>54</a:t>
+              <a:t>55</a:t>
             </a:fld>
             <a:r>
               <a:rPr spc="10" dirty="0"/>
@@ -55810,7 +55891,7 @@
 </p:sld>
 </file>
 
-<file path=ppt/slides/slide55.xml><?xml version="1.0" encoding="utf-8"?>
+<file path=ppt/slides/slide56.xml><?xml version="1.0" encoding="utf-8"?>
 <p:sld xmlns:a="http://schemas.openxmlformats.org/drawingml/2006/main" xmlns:r="http://schemas.openxmlformats.org/officeDocument/2006/relationships" xmlns:p="http://schemas.openxmlformats.org/presentationml/2006/main">
   <p:cSld>
     <p:spTree>
@@ -56350,7 +56431,7 @@
             </a:pPr>
             <a:fld id="{81D60167-4931-47E6-BA6A-407CBD079E47}" type="slidenum">
               <a:rPr dirty="0"/>
-              <a:t>55</a:t>
+              <a:t>56</a:t>
             </a:fld>
             <a:r>
               <a:rPr spc="10" dirty="0"/>
@@ -56382,7 +56463,7 @@
 </p:sld>
 </file>
 
-<file path=ppt/slides/slide56.xml><?xml version="1.0" encoding="utf-8"?>
+<file path=ppt/slides/slide57.xml><?xml version="1.0" encoding="utf-8"?>
 <p:sld xmlns:a="http://schemas.openxmlformats.org/drawingml/2006/main" xmlns:r="http://schemas.openxmlformats.org/officeDocument/2006/relationships" xmlns:p="http://schemas.openxmlformats.org/presentationml/2006/main" showMasterSp="0">
   <p:cSld>
     <p:spTree>
